--- a/nordic-apis-2026/img/solution-composability.pptx
+++ b/nordic-apis-2026/img/solution-composability.pptx
@@ -5,7 +5,14 @@
     <p:sldMasterId id="2147483648" r:id="rId4"/>
   </p:sldMasterIdLst>
   <p:sldIdLst>
-    <p:sldId id="260" r:id="rId5"/>
+    <p:sldId id="263" r:id="rId5"/>
+    <p:sldId id="265" r:id="rId6"/>
+    <p:sldId id="267" r:id="rId7"/>
+    <p:sldId id="266" r:id="rId8"/>
+    <p:sldId id="272" r:id="rId9"/>
+    <p:sldId id="274" r:id="rId10"/>
+    <p:sldId id="277" r:id="rId11"/>
+    <p:sldId id="268" r:id="rId12"/>
   </p:sldIdLst>
   <p:sldSz cx="12192000" cy="6858000"/>
   <p:notesSz cx="6858000" cy="9144000"/>
@@ -110,14 +117,6 @@
     </p:ext>
   </p:extLst>
 </p:presentation>
-</file>
-
-<file path=ppt/revisionInfo.xml><?xml version="1.0" encoding="utf-8"?>
-<p1510:revInfo xmlns:a="http://schemas.openxmlformats.org/drawingml/2006/main" xmlns:r="http://schemas.openxmlformats.org/officeDocument/2006/relationships" xmlns:p1510="http://schemas.microsoft.com/office/powerpoint/2015/10/main">
-  <p1510:revLst>
-    <p1510:client id="{9C27275A-5004-4488-BB2B-8541C3EB84DB}" v="6" dt="2018-08-08T09:05:58.341"/>
-  </p1510:revLst>
-</p1510:revInfo>
 </file>
 
 <file path=ppt/slideLayouts/slideLayout1.xml><?xml version="1.0" encoding="utf-8"?>
@@ -3322,6 +3321,3626 @@
   <p:cSld>
     <p:spTree>
       <p:nvGrpSpPr>
+        <p:cNvPr id="1" name="">
+          <a:extLst>
+            <a:ext uri="{FF2B5EF4-FFF2-40B4-BE49-F238E27FC236}">
+              <a16:creationId xmlns:a16="http://schemas.microsoft.com/office/drawing/2014/main" id="{6F12504A-523F-7446-B002-1BDD4814AD2F}"/>
+            </a:ext>
+          </a:extLst>
+        </p:cNvPr>
+        <p:cNvGrpSpPr/>
+        <p:nvPr/>
+      </p:nvGrpSpPr>
+      <p:grpSpPr>
+        <a:xfrm>
+          <a:off x="0" y="0"/>
+          <a:ext cx="0" cy="0"/>
+          <a:chOff x="0" y="0"/>
+          <a:chExt cx="0" cy="0"/>
+        </a:xfrm>
+      </p:grpSpPr>
+      <p:sp>
+        <p:nvSpPr>
+          <p:cNvPr id="13" name="Rectangle 12">
+            <a:extLst>
+              <a:ext uri="{FF2B5EF4-FFF2-40B4-BE49-F238E27FC236}">
+                <a16:creationId xmlns:a16="http://schemas.microsoft.com/office/drawing/2014/main" id="{2AA087FB-4457-F629-2B15-77D4C44241F4}"/>
+              </a:ext>
+            </a:extLst>
+          </p:cNvPr>
+          <p:cNvSpPr/>
+          <p:nvPr/>
+        </p:nvSpPr>
+        <p:spPr>
+          <a:xfrm>
+            <a:off x="3162391" y="1663549"/>
+            <a:ext cx="4908176" cy="3530899"/>
+          </a:xfrm>
+          <a:prstGeom prst="rect">
+            <a:avLst/>
+          </a:prstGeom>
+          <a:ln w="50800">
+            <a:solidFill>
+              <a:schemeClr val="tx2"/>
+            </a:solidFill>
+          </a:ln>
+        </p:spPr>
+        <p:style>
+          <a:lnRef idx="2">
+            <a:schemeClr val="accent1">
+              <a:shade val="15000"/>
+            </a:schemeClr>
+          </a:lnRef>
+          <a:fillRef idx="1">
+            <a:schemeClr val="accent1"/>
+          </a:fillRef>
+          <a:effectRef idx="0">
+            <a:schemeClr val="accent1"/>
+          </a:effectRef>
+          <a:fontRef idx="minor">
+            <a:schemeClr val="lt1"/>
+          </a:fontRef>
+        </p:style>
+        <p:txBody>
+          <a:bodyPr rtlCol="0" anchor="ctr"/>
+          <a:lstStyle/>
+          <a:p>
+            <a:pPr algn="ctr"/>
+            <a:r>
+              <a:rPr lang="en-CH" dirty="0">
+                <a:latin typeface="Sora" pitchFamily="2" charset="0"/>
+                <a:cs typeface="Sora" pitchFamily="2" charset="0"/>
+              </a:rPr>
+              <a:t>Deterministic</a:t>
+            </a:r>
+          </a:p>
+        </p:txBody>
+      </p:sp>
+      <p:sp>
+        <p:nvSpPr>
+          <p:cNvPr id="6" name="Rectangle 5">
+            <a:extLst>
+              <a:ext uri="{FF2B5EF4-FFF2-40B4-BE49-F238E27FC236}">
+                <a16:creationId xmlns:a16="http://schemas.microsoft.com/office/drawing/2014/main" id="{E916450C-6E99-3FC2-AC41-0F99BF7FA6A0}"/>
+              </a:ext>
+            </a:extLst>
+          </p:cNvPr>
+          <p:cNvSpPr/>
+          <p:nvPr/>
+        </p:nvSpPr>
+        <p:spPr>
+          <a:xfrm>
+            <a:off x="8753138" y="1663549"/>
+            <a:ext cx="1398488" cy="3530899"/>
+          </a:xfrm>
+          <a:prstGeom prst="rect">
+            <a:avLst/>
+          </a:prstGeom>
+          <a:solidFill>
+            <a:schemeClr val="accent1">
+              <a:lumMod val="40000"/>
+              <a:lumOff val="60000"/>
+            </a:schemeClr>
+          </a:solidFill>
+          <a:ln w="50800">
+            <a:solidFill>
+              <a:schemeClr val="tx2"/>
+            </a:solidFill>
+          </a:ln>
+        </p:spPr>
+        <p:style>
+          <a:lnRef idx="2">
+            <a:schemeClr val="accent1">
+              <a:shade val="15000"/>
+            </a:schemeClr>
+          </a:lnRef>
+          <a:fillRef idx="1">
+            <a:schemeClr val="accent1"/>
+          </a:fillRef>
+          <a:effectRef idx="0">
+            <a:schemeClr val="accent1"/>
+          </a:effectRef>
+          <a:fontRef idx="minor">
+            <a:schemeClr val="lt1"/>
+          </a:fontRef>
+        </p:style>
+        <p:txBody>
+          <a:bodyPr rtlCol="0" anchor="ctr"/>
+          <a:lstStyle/>
+          <a:p>
+            <a:pPr algn="ctr"/>
+            <a:r>
+              <a:rPr lang="en-CH" dirty="0">
+                <a:solidFill>
+                  <a:schemeClr val="accent2"/>
+                </a:solidFill>
+                <a:latin typeface="Sora" pitchFamily="2" charset="0"/>
+                <a:cs typeface="Sora" pitchFamily="2" charset="0"/>
+              </a:rPr>
+              <a:t>      APIs</a:t>
+            </a:r>
+          </a:p>
+          <a:p>
+            <a:pPr algn="ctr"/>
+            <a:r>
+              <a:rPr lang="en-CH" dirty="0">
+                <a:solidFill>
+                  <a:schemeClr val="accent2"/>
+                </a:solidFill>
+                <a:latin typeface="Sora" pitchFamily="2" charset="0"/>
+                <a:cs typeface="Sora" pitchFamily="2" charset="0"/>
+              </a:rPr>
+              <a:t>     &amp;</a:t>
+            </a:r>
+            <a:br>
+              <a:rPr lang="en-CH" dirty="0">
+                <a:solidFill>
+                  <a:schemeClr val="accent2"/>
+                </a:solidFill>
+                <a:latin typeface="Sora" pitchFamily="2" charset="0"/>
+                <a:cs typeface="Sora" pitchFamily="2" charset="0"/>
+              </a:rPr>
+            </a:br>
+            <a:r>
+              <a:rPr lang="en-CH" dirty="0">
+                <a:solidFill>
+                  <a:schemeClr val="accent2"/>
+                </a:solidFill>
+                <a:latin typeface="Sora" pitchFamily="2" charset="0"/>
+                <a:cs typeface="Sora" pitchFamily="2" charset="0"/>
+              </a:rPr>
+              <a:t>     Data</a:t>
+            </a:r>
+          </a:p>
+        </p:txBody>
+      </p:sp>
+      <p:cxnSp>
+        <p:nvCxnSpPr>
+          <p:cNvPr id="9" name="Straight Connector 8">
+            <a:extLst>
+              <a:ext uri="{FF2B5EF4-FFF2-40B4-BE49-F238E27FC236}">
+                <a16:creationId xmlns:a16="http://schemas.microsoft.com/office/drawing/2014/main" id="{DE809A90-E749-4163-5DCB-7730AB214F3B}"/>
+              </a:ext>
+            </a:extLst>
+          </p:cNvPr>
+          <p:cNvCxnSpPr>
+            <a:cxnSpLocks/>
+          </p:cNvCxnSpPr>
+          <p:nvPr/>
+        </p:nvCxnSpPr>
+        <p:spPr>
+          <a:xfrm>
+            <a:off x="8419652" y="1245196"/>
+            <a:ext cx="0" cy="4682268"/>
+          </a:xfrm>
+          <a:prstGeom prst="line">
+            <a:avLst/>
+          </a:prstGeom>
+          <a:ln w="254000">
+            <a:solidFill>
+              <a:schemeClr val="tx2"/>
+            </a:solidFill>
+          </a:ln>
+        </p:spPr>
+        <p:style>
+          <a:lnRef idx="1">
+            <a:schemeClr val="accent1"/>
+          </a:lnRef>
+          <a:fillRef idx="0">
+            <a:schemeClr val="accent1"/>
+          </a:fillRef>
+          <a:effectRef idx="0">
+            <a:schemeClr val="accent1"/>
+          </a:effectRef>
+          <a:fontRef idx="minor">
+            <a:schemeClr val="tx1"/>
+          </a:fontRef>
+        </p:style>
+      </p:cxnSp>
+      <p:sp>
+        <p:nvSpPr>
+          <p:cNvPr id="10" name="TextBox 9">
+            <a:extLst>
+              <a:ext uri="{FF2B5EF4-FFF2-40B4-BE49-F238E27FC236}">
+                <a16:creationId xmlns:a16="http://schemas.microsoft.com/office/drawing/2014/main" id="{FB4722E6-C437-7E80-F8DD-2F7C81433F84}"/>
+              </a:ext>
+            </a:extLst>
+          </p:cNvPr>
+          <p:cNvSpPr txBox="1"/>
+          <p:nvPr/>
+        </p:nvSpPr>
+        <p:spPr>
+          <a:xfrm>
+            <a:off x="5027530" y="5428134"/>
+            <a:ext cx="1192955" cy="369332"/>
+          </a:xfrm>
+          <a:prstGeom prst="rect">
+            <a:avLst/>
+          </a:prstGeom>
+          <a:noFill/>
+        </p:spPr>
+        <p:txBody>
+          <a:bodyPr wrap="none" rtlCol="0">
+            <a:spAutoFit/>
+          </a:bodyPr>
+          <a:lstStyle/>
+          <a:p>
+            <a:r>
+              <a:rPr lang="en-CH" dirty="0">
+                <a:latin typeface="Sora" pitchFamily="2" charset="0"/>
+                <a:cs typeface="Sora" pitchFamily="2" charset="0"/>
+              </a:rPr>
+              <a:t>Solution</a:t>
+            </a:r>
+          </a:p>
+        </p:txBody>
+      </p:sp>
+      <p:sp>
+        <p:nvSpPr>
+          <p:cNvPr id="11" name="TextBox 10">
+            <a:extLst>
+              <a:ext uri="{FF2B5EF4-FFF2-40B4-BE49-F238E27FC236}">
+                <a16:creationId xmlns:a16="http://schemas.microsoft.com/office/drawing/2014/main" id="{E790596F-421A-B97B-E226-6722FFA754B2}"/>
+              </a:ext>
+            </a:extLst>
+          </p:cNvPr>
+          <p:cNvSpPr txBox="1"/>
+          <p:nvPr/>
+        </p:nvSpPr>
+        <p:spPr>
+          <a:xfrm>
+            <a:off x="8709483" y="5428134"/>
+            <a:ext cx="1540806" cy="369332"/>
+          </a:xfrm>
+          <a:prstGeom prst="rect">
+            <a:avLst/>
+          </a:prstGeom>
+          <a:noFill/>
+        </p:spPr>
+        <p:txBody>
+          <a:bodyPr wrap="none" rtlCol="0">
+            <a:spAutoFit/>
+          </a:bodyPr>
+          <a:lstStyle/>
+          <a:p>
+            <a:r>
+              <a:rPr lang="en-CH" dirty="0">
+                <a:latin typeface="Sora" pitchFamily="2" charset="0"/>
+                <a:cs typeface="Sora" pitchFamily="2" charset="0"/>
+              </a:rPr>
+              <a:t>Foundation</a:t>
+            </a:r>
+          </a:p>
+        </p:txBody>
+      </p:sp>
+      <p:sp>
+        <p:nvSpPr>
+          <p:cNvPr id="2" name="Right Arrow 1">
+            <a:extLst>
+              <a:ext uri="{FF2B5EF4-FFF2-40B4-BE49-F238E27FC236}">
+                <a16:creationId xmlns:a16="http://schemas.microsoft.com/office/drawing/2014/main" id="{5AABFBDB-ED54-ABBA-875D-B5BF4CFD7553}"/>
+              </a:ext>
+            </a:extLst>
+          </p:cNvPr>
+          <p:cNvSpPr/>
+          <p:nvPr/>
+        </p:nvSpPr>
+        <p:spPr>
+          <a:xfrm>
+            <a:off x="1369100" y="2695096"/>
+            <a:ext cx="1394906" cy="563878"/>
+          </a:xfrm>
+          <a:prstGeom prst="rightArrow">
+            <a:avLst/>
+          </a:prstGeom>
+          <a:solidFill>
+            <a:schemeClr val="accent1">
+              <a:lumMod val="40000"/>
+              <a:lumOff val="60000"/>
+            </a:schemeClr>
+          </a:solidFill>
+          <a:ln w="25400">
+            <a:solidFill>
+              <a:schemeClr val="tx2"/>
+            </a:solidFill>
+          </a:ln>
+        </p:spPr>
+        <p:style>
+          <a:lnRef idx="2">
+            <a:schemeClr val="accent1">
+              <a:shade val="15000"/>
+            </a:schemeClr>
+          </a:lnRef>
+          <a:fillRef idx="1">
+            <a:schemeClr val="accent1"/>
+          </a:fillRef>
+          <a:effectRef idx="0">
+            <a:schemeClr val="accent1"/>
+          </a:effectRef>
+          <a:fontRef idx="minor">
+            <a:schemeClr val="lt1"/>
+          </a:fontRef>
+        </p:style>
+        <p:txBody>
+          <a:bodyPr rtlCol="0" anchor="ctr"/>
+          <a:lstStyle/>
+          <a:p>
+            <a:pPr algn="ctr"/>
+            <a:r>
+              <a:rPr lang="en-CH" sz="1400" dirty="0">
+                <a:solidFill>
+                  <a:schemeClr val="accent2"/>
+                </a:solidFill>
+                <a:latin typeface="Sora" pitchFamily="2" charset="0"/>
+                <a:cs typeface="Sora" pitchFamily="2" charset="0"/>
+              </a:rPr>
+              <a:t>Input</a:t>
+            </a:r>
+            <a:endParaRPr lang="en-CH" dirty="0">
+              <a:solidFill>
+                <a:schemeClr val="accent2"/>
+              </a:solidFill>
+              <a:latin typeface="Sora" pitchFamily="2" charset="0"/>
+              <a:cs typeface="Sora" pitchFamily="2" charset="0"/>
+            </a:endParaRPr>
+          </a:p>
+        </p:txBody>
+      </p:sp>
+      <p:sp>
+        <p:nvSpPr>
+          <p:cNvPr id="3" name="TextBox 2">
+            <a:extLst>
+              <a:ext uri="{FF2B5EF4-FFF2-40B4-BE49-F238E27FC236}">
+                <a16:creationId xmlns:a16="http://schemas.microsoft.com/office/drawing/2014/main" id="{1991A3D7-E58A-AB08-8E8C-0E8519846FBA}"/>
+              </a:ext>
+            </a:extLst>
+          </p:cNvPr>
+          <p:cNvSpPr txBox="1"/>
+          <p:nvPr/>
+        </p:nvSpPr>
+        <p:spPr>
+          <a:xfrm>
+            <a:off x="1303140" y="3267269"/>
+            <a:ext cx="1534394" cy="369332"/>
+          </a:xfrm>
+          <a:prstGeom prst="rect">
+            <a:avLst/>
+          </a:prstGeom>
+          <a:noFill/>
+        </p:spPr>
+        <p:txBody>
+          <a:bodyPr wrap="none" rtlCol="0">
+            <a:spAutoFit/>
+          </a:bodyPr>
+          <a:lstStyle/>
+          <a:p>
+            <a:r>
+              <a:rPr lang="en-CH" dirty="0">
+                <a:latin typeface="Sora" pitchFamily="2" charset="0"/>
+                <a:cs typeface="Sora" pitchFamily="2" charset="0"/>
+              </a:rPr>
+              <a:t>Consumers</a:t>
+            </a:r>
+          </a:p>
+        </p:txBody>
+      </p:sp>
+      <p:sp>
+        <p:nvSpPr>
+          <p:cNvPr id="8" name="Right Arrow 7">
+            <a:extLst>
+              <a:ext uri="{FF2B5EF4-FFF2-40B4-BE49-F238E27FC236}">
+                <a16:creationId xmlns:a16="http://schemas.microsoft.com/office/drawing/2014/main" id="{02A72DE6-D0AA-D6BC-7EAD-B39EB48104A0}"/>
+              </a:ext>
+            </a:extLst>
+          </p:cNvPr>
+          <p:cNvSpPr/>
+          <p:nvPr/>
+        </p:nvSpPr>
+        <p:spPr>
+          <a:xfrm>
+            <a:off x="1343113" y="3645649"/>
+            <a:ext cx="1394906" cy="563878"/>
+          </a:xfrm>
+          <a:prstGeom prst="leftArrow">
+            <a:avLst/>
+          </a:prstGeom>
+          <a:solidFill>
+            <a:schemeClr val="accent1">
+              <a:lumMod val="40000"/>
+              <a:lumOff val="60000"/>
+            </a:schemeClr>
+          </a:solidFill>
+          <a:ln w="25400">
+            <a:solidFill>
+              <a:schemeClr val="tx2"/>
+            </a:solidFill>
+          </a:ln>
+        </p:spPr>
+        <p:style>
+          <a:lnRef idx="2">
+            <a:schemeClr val="accent1">
+              <a:shade val="15000"/>
+            </a:schemeClr>
+          </a:lnRef>
+          <a:fillRef idx="1">
+            <a:schemeClr val="accent1"/>
+          </a:fillRef>
+          <a:effectRef idx="0">
+            <a:schemeClr val="accent1"/>
+          </a:effectRef>
+          <a:fontRef idx="minor">
+            <a:schemeClr val="lt1"/>
+          </a:fontRef>
+        </p:style>
+        <p:txBody>
+          <a:bodyPr rtlCol="0" anchor="ctr"/>
+          <a:lstStyle/>
+          <a:p>
+            <a:pPr algn="ctr"/>
+            <a:r>
+              <a:rPr lang="en-CH" sz="1400" dirty="0">
+                <a:solidFill>
+                  <a:schemeClr val="accent2"/>
+                </a:solidFill>
+                <a:latin typeface="Sora" pitchFamily="2" charset="0"/>
+                <a:cs typeface="Sora" pitchFamily="2" charset="0"/>
+              </a:rPr>
+              <a:t>Output</a:t>
+            </a:r>
+            <a:endParaRPr lang="en-CH" dirty="0">
+              <a:solidFill>
+                <a:schemeClr val="accent2"/>
+              </a:solidFill>
+              <a:latin typeface="Sora" pitchFamily="2" charset="0"/>
+              <a:cs typeface="Sora" pitchFamily="2" charset="0"/>
+            </a:endParaRPr>
+          </a:p>
+        </p:txBody>
+      </p:sp>
+      <p:sp>
+        <p:nvSpPr>
+          <p:cNvPr id="4" name="Left-right Arrow 3">
+            <a:extLst>
+              <a:ext uri="{FF2B5EF4-FFF2-40B4-BE49-F238E27FC236}">
+                <a16:creationId xmlns:a16="http://schemas.microsoft.com/office/drawing/2014/main" id="{B1C05076-2592-5AD9-6B13-BD5E8F876393}"/>
+              </a:ext>
+            </a:extLst>
+          </p:cNvPr>
+          <p:cNvSpPr/>
+          <p:nvPr/>
+        </p:nvSpPr>
+        <p:spPr>
+          <a:xfrm>
+            <a:off x="7667233" y="2773200"/>
+            <a:ext cx="1475338" cy="572173"/>
+          </a:xfrm>
+          <a:prstGeom prst="leftRightArrow">
+            <a:avLst/>
+          </a:prstGeom>
+          <a:solidFill>
+            <a:schemeClr val="accent1">
+              <a:lumMod val="40000"/>
+              <a:lumOff val="60000"/>
+            </a:schemeClr>
+          </a:solidFill>
+          <a:ln w="25400">
+            <a:solidFill>
+              <a:schemeClr val="accent2"/>
+            </a:solidFill>
+          </a:ln>
+        </p:spPr>
+        <p:style>
+          <a:lnRef idx="2">
+            <a:schemeClr val="accent1">
+              <a:shade val="15000"/>
+            </a:schemeClr>
+          </a:lnRef>
+          <a:fillRef idx="1">
+            <a:schemeClr val="accent1"/>
+          </a:fillRef>
+          <a:effectRef idx="0">
+            <a:schemeClr val="accent1"/>
+          </a:effectRef>
+          <a:fontRef idx="minor">
+            <a:schemeClr val="lt1"/>
+          </a:fontRef>
+        </p:style>
+        <p:txBody>
+          <a:bodyPr rtlCol="0" anchor="ctr"/>
+          <a:lstStyle/>
+          <a:p>
+            <a:pPr algn="ctr"/>
+            <a:endParaRPr lang="en-CH"/>
+          </a:p>
+        </p:txBody>
+      </p:sp>
+      <p:sp>
+        <p:nvSpPr>
+          <p:cNvPr id="12" name="Left-right Arrow 11">
+            <a:extLst>
+              <a:ext uri="{FF2B5EF4-FFF2-40B4-BE49-F238E27FC236}">
+                <a16:creationId xmlns:a16="http://schemas.microsoft.com/office/drawing/2014/main" id="{AF398FEC-549A-0896-365C-9128B3019C40}"/>
+              </a:ext>
+            </a:extLst>
+          </p:cNvPr>
+          <p:cNvSpPr/>
+          <p:nvPr/>
+        </p:nvSpPr>
+        <p:spPr>
+          <a:xfrm>
+            <a:off x="7672812" y="3603536"/>
+            <a:ext cx="1475339" cy="572173"/>
+          </a:xfrm>
+          <a:prstGeom prst="leftRightArrow">
+            <a:avLst/>
+          </a:prstGeom>
+          <a:solidFill>
+            <a:schemeClr val="accent1">
+              <a:lumMod val="40000"/>
+              <a:lumOff val="60000"/>
+            </a:schemeClr>
+          </a:solidFill>
+          <a:ln w="25400">
+            <a:solidFill>
+              <a:schemeClr val="accent2"/>
+            </a:solidFill>
+          </a:ln>
+        </p:spPr>
+        <p:style>
+          <a:lnRef idx="2">
+            <a:schemeClr val="accent1">
+              <a:shade val="15000"/>
+            </a:schemeClr>
+          </a:lnRef>
+          <a:fillRef idx="1">
+            <a:schemeClr val="accent1"/>
+          </a:fillRef>
+          <a:effectRef idx="0">
+            <a:schemeClr val="accent1"/>
+          </a:effectRef>
+          <a:fontRef idx="minor">
+            <a:schemeClr val="lt1"/>
+          </a:fontRef>
+        </p:style>
+        <p:txBody>
+          <a:bodyPr rtlCol="0" anchor="ctr"/>
+          <a:lstStyle/>
+          <a:p>
+            <a:pPr algn="ctr"/>
+            <a:endParaRPr lang="en-CH"/>
+          </a:p>
+        </p:txBody>
+      </p:sp>
+      <p:sp>
+        <p:nvSpPr>
+          <p:cNvPr id="15" name="Left-right Arrow 14">
+            <a:extLst>
+              <a:ext uri="{FF2B5EF4-FFF2-40B4-BE49-F238E27FC236}">
+                <a16:creationId xmlns:a16="http://schemas.microsoft.com/office/drawing/2014/main" id="{FFB9222E-0B30-A44B-9D27-0B412462B9D3}"/>
+              </a:ext>
+            </a:extLst>
+          </p:cNvPr>
+          <p:cNvSpPr/>
+          <p:nvPr/>
+        </p:nvSpPr>
+        <p:spPr>
+          <a:xfrm>
+            <a:off x="7667233" y="1920454"/>
+            <a:ext cx="1475338" cy="572173"/>
+          </a:xfrm>
+          <a:prstGeom prst="leftRightArrow">
+            <a:avLst/>
+          </a:prstGeom>
+          <a:solidFill>
+            <a:schemeClr val="accent1">
+              <a:lumMod val="40000"/>
+              <a:lumOff val="60000"/>
+            </a:schemeClr>
+          </a:solidFill>
+          <a:ln w="25400">
+            <a:solidFill>
+              <a:schemeClr val="accent2"/>
+            </a:solidFill>
+          </a:ln>
+        </p:spPr>
+        <p:style>
+          <a:lnRef idx="2">
+            <a:schemeClr val="accent1">
+              <a:shade val="15000"/>
+            </a:schemeClr>
+          </a:lnRef>
+          <a:fillRef idx="1">
+            <a:schemeClr val="accent1"/>
+          </a:fillRef>
+          <a:effectRef idx="0">
+            <a:schemeClr val="accent1"/>
+          </a:effectRef>
+          <a:fontRef idx="minor">
+            <a:schemeClr val="lt1"/>
+          </a:fontRef>
+        </p:style>
+        <p:txBody>
+          <a:bodyPr rtlCol="0" anchor="ctr"/>
+          <a:lstStyle/>
+          <a:p>
+            <a:pPr algn="ctr"/>
+            <a:endParaRPr lang="en-CH"/>
+          </a:p>
+        </p:txBody>
+      </p:sp>
+      <p:pic>
+        <p:nvPicPr>
+          <p:cNvPr id="16" name="Picture 15">
+            <a:extLst>
+              <a:ext uri="{FF2B5EF4-FFF2-40B4-BE49-F238E27FC236}">
+                <a16:creationId xmlns:a16="http://schemas.microsoft.com/office/drawing/2014/main" id="{4609F88D-A8D3-E936-C52F-FB9E2FD54CB7}"/>
+              </a:ext>
+            </a:extLst>
+          </p:cNvPr>
+          <p:cNvPicPr>
+            <a:picLocks noChangeAspect="1"/>
+          </p:cNvPicPr>
+          <p:nvPr/>
+        </p:nvPicPr>
+        <p:blipFill>
+          <a:blip r:embed="rId2"/>
+          <a:stretch>
+            <a:fillRect/>
+          </a:stretch>
+        </p:blipFill>
+        <p:spPr>
+          <a:xfrm>
+            <a:off x="7967197" y="1889748"/>
+            <a:ext cx="875405" cy="625289"/>
+          </a:xfrm>
+          <a:prstGeom prst="rect">
+            <a:avLst/>
+          </a:prstGeom>
+        </p:spPr>
+      </p:pic>
+      <p:sp>
+        <p:nvSpPr>
+          <p:cNvPr id="17" name="Left-right Arrow 16">
+            <a:extLst>
+              <a:ext uri="{FF2B5EF4-FFF2-40B4-BE49-F238E27FC236}">
+                <a16:creationId xmlns:a16="http://schemas.microsoft.com/office/drawing/2014/main" id="{2EC531EF-E5E0-D424-54FF-EC0C68225FF4}"/>
+              </a:ext>
+            </a:extLst>
+          </p:cNvPr>
+          <p:cNvSpPr/>
+          <p:nvPr/>
+        </p:nvSpPr>
+        <p:spPr>
+          <a:xfrm>
+            <a:off x="7667232" y="4365374"/>
+            <a:ext cx="1475339" cy="572173"/>
+          </a:xfrm>
+          <a:prstGeom prst="leftRightArrow">
+            <a:avLst/>
+          </a:prstGeom>
+          <a:solidFill>
+            <a:schemeClr val="accent1">
+              <a:lumMod val="40000"/>
+              <a:lumOff val="60000"/>
+            </a:schemeClr>
+          </a:solidFill>
+          <a:ln w="25400">
+            <a:solidFill>
+              <a:schemeClr val="accent2"/>
+            </a:solidFill>
+          </a:ln>
+        </p:spPr>
+        <p:style>
+          <a:lnRef idx="2">
+            <a:schemeClr val="accent1">
+              <a:shade val="15000"/>
+            </a:schemeClr>
+          </a:lnRef>
+          <a:fillRef idx="1">
+            <a:schemeClr val="accent1"/>
+          </a:fillRef>
+          <a:effectRef idx="0">
+            <a:schemeClr val="accent1"/>
+          </a:effectRef>
+          <a:fontRef idx="minor">
+            <a:schemeClr val="lt1"/>
+          </a:fontRef>
+        </p:style>
+        <p:txBody>
+          <a:bodyPr rtlCol="0" anchor="ctr"/>
+          <a:lstStyle/>
+          <a:p>
+            <a:pPr algn="ctr"/>
+            <a:endParaRPr lang="en-CH"/>
+          </a:p>
+        </p:txBody>
+      </p:sp>
+      <p:pic>
+        <p:nvPicPr>
+          <p:cNvPr id="19" name="Picture 18">
+            <a:extLst>
+              <a:ext uri="{FF2B5EF4-FFF2-40B4-BE49-F238E27FC236}">
+                <a16:creationId xmlns:a16="http://schemas.microsoft.com/office/drawing/2014/main" id="{EA77B7DA-BEF1-6387-CB9D-FED065C43BC5}"/>
+              </a:ext>
+            </a:extLst>
+          </p:cNvPr>
+          <p:cNvPicPr>
+            <a:picLocks noChangeAspect="1"/>
+          </p:cNvPicPr>
+          <p:nvPr/>
+        </p:nvPicPr>
+        <p:blipFill>
+          <a:blip r:embed="rId3"/>
+          <a:stretch>
+            <a:fillRect/>
+          </a:stretch>
+        </p:blipFill>
+        <p:spPr>
+          <a:xfrm>
+            <a:off x="8048989" y="2989099"/>
+            <a:ext cx="698570" cy="154491"/>
+          </a:xfrm>
+          <a:prstGeom prst="rect">
+            <a:avLst/>
+          </a:prstGeom>
+        </p:spPr>
+      </p:pic>
+      <p:pic>
+        <p:nvPicPr>
+          <p:cNvPr id="20" name="Picture 19">
+            <a:extLst>
+              <a:ext uri="{FF2B5EF4-FFF2-40B4-BE49-F238E27FC236}">
+                <a16:creationId xmlns:a16="http://schemas.microsoft.com/office/drawing/2014/main" id="{45732279-1427-B5F8-1555-754EDE487058}"/>
+              </a:ext>
+            </a:extLst>
+          </p:cNvPr>
+          <p:cNvPicPr>
+            <a:picLocks noChangeAspect="1"/>
+          </p:cNvPicPr>
+          <p:nvPr/>
+        </p:nvPicPr>
+        <p:blipFill>
+          <a:blip r:embed="rId4"/>
+          <a:stretch>
+            <a:fillRect/>
+          </a:stretch>
+        </p:blipFill>
+        <p:spPr>
+          <a:xfrm>
+            <a:off x="8157012" y="4410198"/>
+            <a:ext cx="482523" cy="482523"/>
+          </a:xfrm>
+          <a:prstGeom prst="rect">
+            <a:avLst/>
+          </a:prstGeom>
+        </p:spPr>
+      </p:pic>
+      <p:pic>
+        <p:nvPicPr>
+          <p:cNvPr id="21" name="Picture 20">
+            <a:extLst>
+              <a:ext uri="{FF2B5EF4-FFF2-40B4-BE49-F238E27FC236}">
+                <a16:creationId xmlns:a16="http://schemas.microsoft.com/office/drawing/2014/main" id="{05059CAF-9901-0D39-591B-DBF8EFCB8DD7}"/>
+              </a:ext>
+            </a:extLst>
+          </p:cNvPr>
+          <p:cNvPicPr>
+            <a:picLocks noChangeAspect="1"/>
+          </p:cNvPicPr>
+          <p:nvPr/>
+        </p:nvPicPr>
+        <p:blipFill>
+          <a:blip r:embed="rId5"/>
+          <a:stretch>
+            <a:fillRect/>
+          </a:stretch>
+        </p:blipFill>
+        <p:spPr>
+          <a:xfrm>
+            <a:off x="8008801" y="3788731"/>
+            <a:ext cx="738758" cy="201847"/>
+          </a:xfrm>
+          <a:prstGeom prst="rect">
+            <a:avLst/>
+          </a:prstGeom>
+        </p:spPr>
+      </p:pic>
+    </p:spTree>
+    <p:extLst>
+      <p:ext uri="{BB962C8B-B14F-4D97-AF65-F5344CB8AC3E}">
+        <p14:creationId xmlns:p14="http://schemas.microsoft.com/office/powerpoint/2010/main" val="1251631669"/>
+      </p:ext>
+    </p:extLst>
+  </p:cSld>
+  <p:clrMapOvr>
+    <a:masterClrMapping/>
+  </p:clrMapOvr>
+</p:sld>
+</file>
+
+<file path=ppt/slides/slide2.xml><?xml version="1.0" encoding="utf-8"?>
+<p:sld xmlns:a="http://schemas.openxmlformats.org/drawingml/2006/main" xmlns:r="http://schemas.openxmlformats.org/officeDocument/2006/relationships" xmlns:p="http://schemas.openxmlformats.org/presentationml/2006/main">
+  <p:cSld>
+    <p:spTree>
+      <p:nvGrpSpPr>
+        <p:cNvPr id="1" name="">
+          <a:extLst>
+            <a:ext uri="{FF2B5EF4-FFF2-40B4-BE49-F238E27FC236}">
+              <a16:creationId xmlns:a16="http://schemas.microsoft.com/office/drawing/2014/main" id="{67FB5362-6B59-F467-BEE7-811055F2264E}"/>
+            </a:ext>
+          </a:extLst>
+        </p:cNvPr>
+        <p:cNvGrpSpPr/>
+        <p:nvPr/>
+      </p:nvGrpSpPr>
+      <p:grpSpPr>
+        <a:xfrm>
+          <a:off x="0" y="0"/>
+          <a:ext cx="0" cy="0"/>
+          <a:chOff x="0" y="0"/>
+          <a:chExt cx="0" cy="0"/>
+        </a:xfrm>
+      </p:grpSpPr>
+      <p:sp>
+        <p:nvSpPr>
+          <p:cNvPr id="5" name="Freeform 4">
+            <a:extLst>
+              <a:ext uri="{FF2B5EF4-FFF2-40B4-BE49-F238E27FC236}">
+                <a16:creationId xmlns:a16="http://schemas.microsoft.com/office/drawing/2014/main" id="{9B54347B-EB52-2E06-0828-1D6FF9175DD1}"/>
+              </a:ext>
+            </a:extLst>
+          </p:cNvPr>
+          <p:cNvSpPr/>
+          <p:nvPr/>
+        </p:nvSpPr>
+        <p:spPr>
+          <a:xfrm>
+            <a:off x="3152666" y="1651352"/>
+            <a:ext cx="4925429" cy="3543097"/>
+          </a:xfrm>
+          <a:custGeom>
+            <a:avLst/>
+            <a:gdLst>
+              <a:gd name="csX0" fmla="*/ 17253 w 4925429"/>
+              <a:gd name="csY0" fmla="*/ 2226429 h 2226429"/>
+              <a:gd name="csX1" fmla="*/ 4925429 w 4925429"/>
+              <a:gd name="csY1" fmla="*/ 2226429 h 2226429"/>
+              <a:gd name="csX2" fmla="*/ 4925429 w 4925429"/>
+              <a:gd name="csY2" fmla="*/ 7665 h 2226429"/>
+              <a:gd name="csX3" fmla="*/ 3365979 w 4925429"/>
+              <a:gd name="csY3" fmla="*/ 7665 h 2226429"/>
+              <a:gd name="csX4" fmla="*/ 3400485 w 4925429"/>
+              <a:gd name="csY4" fmla="*/ 593742 h 2226429"/>
+              <a:gd name="csX5" fmla="*/ 1553601 w 4925429"/>
+              <a:gd name="csY5" fmla="*/ 572059 h 2226429"/>
+              <a:gd name="csX6" fmla="*/ 1570855 w 4925429"/>
+              <a:gd name="csY6" fmla="*/ 10843 h 2226429"/>
+              <a:gd name="csX7" fmla="*/ 0 w 4925429"/>
+              <a:gd name="csY7" fmla="*/ 0 h 2226429"/>
+              <a:gd name="csX8" fmla="*/ 17253 w 4925429"/>
+              <a:gd name="csY8" fmla="*/ 2226429 h 2226429"/>
+            </a:gdLst>
+            <a:ahLst/>
+            <a:cxnLst>
+              <a:cxn ang="0">
+                <a:pos x="csX0" y="csY0"/>
+              </a:cxn>
+              <a:cxn ang="0">
+                <a:pos x="csX1" y="csY1"/>
+              </a:cxn>
+              <a:cxn ang="0">
+                <a:pos x="csX2" y="csY2"/>
+              </a:cxn>
+              <a:cxn ang="0">
+                <a:pos x="csX3" y="csY3"/>
+              </a:cxn>
+              <a:cxn ang="0">
+                <a:pos x="csX4" y="csY4"/>
+              </a:cxn>
+              <a:cxn ang="0">
+                <a:pos x="csX5" y="csY5"/>
+              </a:cxn>
+              <a:cxn ang="0">
+                <a:pos x="csX6" y="csY6"/>
+              </a:cxn>
+              <a:cxn ang="0">
+                <a:pos x="csX7" y="csY7"/>
+              </a:cxn>
+              <a:cxn ang="0">
+                <a:pos x="csX8" y="csY8"/>
+              </a:cxn>
+            </a:cxnLst>
+            <a:rect l="l" t="t" r="r" b="b"/>
+            <a:pathLst>
+              <a:path w="4925429" h="3543097">
+                <a:moveTo>
+                  <a:pt x="0" y="3543097"/>
+                </a:moveTo>
+                <a:lnTo>
+                  <a:pt x="4925429" y="3543097"/>
+                </a:lnTo>
+                <a:lnTo>
+                  <a:pt x="4925429" y="0"/>
+                </a:lnTo>
+                <a:lnTo>
+                  <a:pt x="3383343" y="0"/>
+                </a:lnTo>
+                <a:lnTo>
+                  <a:pt x="3383343" y="815286"/>
+                </a:lnTo>
+                <a:lnTo>
+                  <a:pt x="1552582" y="815286"/>
+                </a:lnTo>
+                <a:lnTo>
+                  <a:pt x="1552582" y="0"/>
+                </a:lnTo>
+                <a:lnTo>
+                  <a:pt x="0" y="0"/>
+                </a:lnTo>
+                <a:close/>
+              </a:path>
+            </a:pathLst>
+          </a:custGeom>
+          <a:solidFill>
+            <a:schemeClr val="accent1"/>
+          </a:solidFill>
+          <a:ln w="50800">
+            <a:solidFill>
+              <a:schemeClr val="tx2"/>
+            </a:solidFill>
+          </a:ln>
+        </p:spPr>
+        <p:style>
+          <a:lnRef idx="2">
+            <a:schemeClr val="accent1">
+              <a:shade val="15000"/>
+            </a:schemeClr>
+          </a:lnRef>
+          <a:fillRef idx="1">
+            <a:schemeClr val="accent1"/>
+          </a:fillRef>
+          <a:effectRef idx="0">
+            <a:schemeClr val="accent1"/>
+          </a:effectRef>
+          <a:fontRef idx="minor">
+            <a:schemeClr val="lt1"/>
+          </a:fontRef>
+        </p:style>
+        <p:txBody>
+          <a:bodyPr rtlCol="0" anchor="ctr"/>
+          <a:lstStyle/>
+          <a:p>
+            <a:pPr algn="ctr"/>
+            <a:br>
+              <a:rPr lang="en-CH" dirty="0"/>
+            </a:br>
+            <a:br>
+              <a:rPr lang="en-CH" dirty="0"/>
+            </a:br>
+            <a:br>
+              <a:rPr lang="en-CH" dirty="0"/>
+            </a:br>
+            <a:r>
+              <a:rPr lang="en-CH" dirty="0">
+                <a:latin typeface="Sora" pitchFamily="2" charset="0"/>
+                <a:cs typeface="Sora" pitchFamily="2" charset="0"/>
+              </a:rPr>
+              <a:t>Deterministic</a:t>
+            </a:r>
+          </a:p>
+        </p:txBody>
+      </p:sp>
+      <p:sp>
+        <p:nvSpPr>
+          <p:cNvPr id="6" name="Rectangle 5">
+            <a:extLst>
+              <a:ext uri="{FF2B5EF4-FFF2-40B4-BE49-F238E27FC236}">
+                <a16:creationId xmlns:a16="http://schemas.microsoft.com/office/drawing/2014/main" id="{F8B4A658-F6AD-23CA-2E61-FDFEE9BDE2B2}"/>
+              </a:ext>
+            </a:extLst>
+          </p:cNvPr>
+          <p:cNvSpPr/>
+          <p:nvPr/>
+        </p:nvSpPr>
+        <p:spPr>
+          <a:xfrm>
+            <a:off x="8753138" y="1663549"/>
+            <a:ext cx="1398488" cy="3530899"/>
+          </a:xfrm>
+          <a:prstGeom prst="rect">
+            <a:avLst/>
+          </a:prstGeom>
+          <a:solidFill>
+            <a:schemeClr val="accent1">
+              <a:lumMod val="40000"/>
+              <a:lumOff val="60000"/>
+            </a:schemeClr>
+          </a:solidFill>
+          <a:ln w="50800">
+            <a:solidFill>
+              <a:schemeClr val="tx2"/>
+            </a:solidFill>
+          </a:ln>
+        </p:spPr>
+        <p:style>
+          <a:lnRef idx="2">
+            <a:schemeClr val="accent1">
+              <a:shade val="15000"/>
+            </a:schemeClr>
+          </a:lnRef>
+          <a:fillRef idx="1">
+            <a:schemeClr val="accent1"/>
+          </a:fillRef>
+          <a:effectRef idx="0">
+            <a:schemeClr val="accent1"/>
+          </a:effectRef>
+          <a:fontRef idx="minor">
+            <a:schemeClr val="lt1"/>
+          </a:fontRef>
+        </p:style>
+        <p:txBody>
+          <a:bodyPr rtlCol="0" anchor="ctr"/>
+          <a:lstStyle/>
+          <a:p>
+            <a:pPr algn="ctr"/>
+            <a:r>
+              <a:rPr lang="en-CH" dirty="0">
+                <a:solidFill>
+                  <a:schemeClr val="accent2"/>
+                </a:solidFill>
+                <a:latin typeface="Sora" pitchFamily="2" charset="0"/>
+                <a:cs typeface="Sora" pitchFamily="2" charset="0"/>
+              </a:rPr>
+              <a:t>      APIs</a:t>
+            </a:r>
+          </a:p>
+          <a:p>
+            <a:pPr algn="ctr"/>
+            <a:r>
+              <a:rPr lang="en-CH" dirty="0">
+                <a:solidFill>
+                  <a:schemeClr val="accent2"/>
+                </a:solidFill>
+                <a:latin typeface="Sora" pitchFamily="2" charset="0"/>
+                <a:cs typeface="Sora" pitchFamily="2" charset="0"/>
+              </a:rPr>
+              <a:t>     &amp;</a:t>
+            </a:r>
+            <a:br>
+              <a:rPr lang="en-CH" dirty="0">
+                <a:solidFill>
+                  <a:schemeClr val="accent2"/>
+                </a:solidFill>
+                <a:latin typeface="Sora" pitchFamily="2" charset="0"/>
+                <a:cs typeface="Sora" pitchFamily="2" charset="0"/>
+              </a:rPr>
+            </a:br>
+            <a:r>
+              <a:rPr lang="en-CH" dirty="0">
+                <a:solidFill>
+                  <a:schemeClr val="accent2"/>
+                </a:solidFill>
+                <a:latin typeface="Sora" pitchFamily="2" charset="0"/>
+                <a:cs typeface="Sora" pitchFamily="2" charset="0"/>
+              </a:rPr>
+              <a:t>     Data</a:t>
+            </a:r>
+          </a:p>
+        </p:txBody>
+      </p:sp>
+      <p:cxnSp>
+        <p:nvCxnSpPr>
+          <p:cNvPr id="9" name="Straight Connector 8">
+            <a:extLst>
+              <a:ext uri="{FF2B5EF4-FFF2-40B4-BE49-F238E27FC236}">
+                <a16:creationId xmlns:a16="http://schemas.microsoft.com/office/drawing/2014/main" id="{91EAC0A7-2A69-13A6-2FBD-7DCBFD349BCA}"/>
+              </a:ext>
+            </a:extLst>
+          </p:cNvPr>
+          <p:cNvCxnSpPr>
+            <a:cxnSpLocks/>
+          </p:cNvCxnSpPr>
+          <p:nvPr/>
+        </p:nvCxnSpPr>
+        <p:spPr>
+          <a:xfrm>
+            <a:off x="8419652" y="1245196"/>
+            <a:ext cx="0" cy="4682268"/>
+          </a:xfrm>
+          <a:prstGeom prst="line">
+            <a:avLst/>
+          </a:prstGeom>
+          <a:ln w="254000">
+            <a:solidFill>
+              <a:schemeClr val="tx2"/>
+            </a:solidFill>
+          </a:ln>
+        </p:spPr>
+        <p:style>
+          <a:lnRef idx="1">
+            <a:schemeClr val="accent1"/>
+          </a:lnRef>
+          <a:fillRef idx="0">
+            <a:schemeClr val="accent1"/>
+          </a:fillRef>
+          <a:effectRef idx="0">
+            <a:schemeClr val="accent1"/>
+          </a:effectRef>
+          <a:fontRef idx="minor">
+            <a:schemeClr val="tx1"/>
+          </a:fontRef>
+        </p:style>
+      </p:cxnSp>
+      <p:sp>
+        <p:nvSpPr>
+          <p:cNvPr id="10" name="TextBox 9">
+            <a:extLst>
+              <a:ext uri="{FF2B5EF4-FFF2-40B4-BE49-F238E27FC236}">
+                <a16:creationId xmlns:a16="http://schemas.microsoft.com/office/drawing/2014/main" id="{FFFAA701-AB6E-D8FB-C375-3A8482072E96}"/>
+              </a:ext>
+            </a:extLst>
+          </p:cNvPr>
+          <p:cNvSpPr txBox="1"/>
+          <p:nvPr/>
+        </p:nvSpPr>
+        <p:spPr>
+          <a:xfrm>
+            <a:off x="5027530" y="5428134"/>
+            <a:ext cx="1192955" cy="369332"/>
+          </a:xfrm>
+          <a:prstGeom prst="rect">
+            <a:avLst/>
+          </a:prstGeom>
+          <a:noFill/>
+        </p:spPr>
+        <p:txBody>
+          <a:bodyPr wrap="none" rtlCol="0">
+            <a:spAutoFit/>
+          </a:bodyPr>
+          <a:lstStyle/>
+          <a:p>
+            <a:r>
+              <a:rPr lang="en-CH" dirty="0">
+                <a:latin typeface="Sora" pitchFamily="2" charset="0"/>
+                <a:cs typeface="Sora" pitchFamily="2" charset="0"/>
+              </a:rPr>
+              <a:t>Solution</a:t>
+            </a:r>
+          </a:p>
+        </p:txBody>
+      </p:sp>
+      <p:sp>
+        <p:nvSpPr>
+          <p:cNvPr id="11" name="TextBox 10">
+            <a:extLst>
+              <a:ext uri="{FF2B5EF4-FFF2-40B4-BE49-F238E27FC236}">
+                <a16:creationId xmlns:a16="http://schemas.microsoft.com/office/drawing/2014/main" id="{298A4ACB-9204-1C79-E738-06BB7D57EDC2}"/>
+              </a:ext>
+            </a:extLst>
+          </p:cNvPr>
+          <p:cNvSpPr txBox="1"/>
+          <p:nvPr/>
+        </p:nvSpPr>
+        <p:spPr>
+          <a:xfrm>
+            <a:off x="8709483" y="5428134"/>
+            <a:ext cx="1540806" cy="369332"/>
+          </a:xfrm>
+          <a:prstGeom prst="rect">
+            <a:avLst/>
+          </a:prstGeom>
+          <a:noFill/>
+        </p:spPr>
+        <p:txBody>
+          <a:bodyPr wrap="none" rtlCol="0">
+            <a:spAutoFit/>
+          </a:bodyPr>
+          <a:lstStyle/>
+          <a:p>
+            <a:r>
+              <a:rPr lang="en-CH" dirty="0">
+                <a:latin typeface="Sora" pitchFamily="2" charset="0"/>
+                <a:cs typeface="Sora" pitchFamily="2" charset="0"/>
+              </a:rPr>
+              <a:t>Foundation</a:t>
+            </a:r>
+          </a:p>
+        </p:txBody>
+      </p:sp>
+      <p:sp>
+        <p:nvSpPr>
+          <p:cNvPr id="2" name="Right Arrow 1">
+            <a:extLst>
+              <a:ext uri="{FF2B5EF4-FFF2-40B4-BE49-F238E27FC236}">
+                <a16:creationId xmlns:a16="http://schemas.microsoft.com/office/drawing/2014/main" id="{78A5B168-F109-40E1-5027-727657CA7D78}"/>
+              </a:ext>
+            </a:extLst>
+          </p:cNvPr>
+          <p:cNvSpPr/>
+          <p:nvPr/>
+        </p:nvSpPr>
+        <p:spPr>
+          <a:xfrm>
+            <a:off x="1369100" y="2695096"/>
+            <a:ext cx="1394906" cy="563878"/>
+          </a:xfrm>
+          <a:prstGeom prst="rightArrow">
+            <a:avLst/>
+          </a:prstGeom>
+          <a:solidFill>
+            <a:schemeClr val="accent1">
+              <a:lumMod val="40000"/>
+              <a:lumOff val="60000"/>
+            </a:schemeClr>
+          </a:solidFill>
+          <a:ln w="25400">
+            <a:solidFill>
+              <a:schemeClr val="tx2"/>
+            </a:solidFill>
+          </a:ln>
+        </p:spPr>
+        <p:style>
+          <a:lnRef idx="2">
+            <a:schemeClr val="accent1">
+              <a:shade val="15000"/>
+            </a:schemeClr>
+          </a:lnRef>
+          <a:fillRef idx="1">
+            <a:schemeClr val="accent1"/>
+          </a:fillRef>
+          <a:effectRef idx="0">
+            <a:schemeClr val="accent1"/>
+          </a:effectRef>
+          <a:fontRef idx="minor">
+            <a:schemeClr val="lt1"/>
+          </a:fontRef>
+        </p:style>
+        <p:txBody>
+          <a:bodyPr rtlCol="0" anchor="ctr"/>
+          <a:lstStyle/>
+          <a:p>
+            <a:pPr algn="ctr"/>
+            <a:r>
+              <a:rPr lang="en-CH" sz="1400" dirty="0">
+                <a:solidFill>
+                  <a:schemeClr val="accent2"/>
+                </a:solidFill>
+                <a:latin typeface="Sora" pitchFamily="2" charset="0"/>
+                <a:cs typeface="Sora" pitchFamily="2" charset="0"/>
+              </a:rPr>
+              <a:t>Input</a:t>
+            </a:r>
+            <a:endParaRPr lang="en-CH" dirty="0">
+              <a:solidFill>
+                <a:schemeClr val="accent2"/>
+              </a:solidFill>
+              <a:latin typeface="Sora" pitchFamily="2" charset="0"/>
+              <a:cs typeface="Sora" pitchFamily="2" charset="0"/>
+            </a:endParaRPr>
+          </a:p>
+        </p:txBody>
+      </p:sp>
+      <p:sp>
+        <p:nvSpPr>
+          <p:cNvPr id="3" name="TextBox 2">
+            <a:extLst>
+              <a:ext uri="{FF2B5EF4-FFF2-40B4-BE49-F238E27FC236}">
+                <a16:creationId xmlns:a16="http://schemas.microsoft.com/office/drawing/2014/main" id="{6D2FA226-55A8-D2A4-7704-FCD9B6BD7C2B}"/>
+              </a:ext>
+            </a:extLst>
+          </p:cNvPr>
+          <p:cNvSpPr txBox="1"/>
+          <p:nvPr/>
+        </p:nvSpPr>
+        <p:spPr>
+          <a:xfrm>
+            <a:off x="1303140" y="3267269"/>
+            <a:ext cx="1534394" cy="369332"/>
+          </a:xfrm>
+          <a:prstGeom prst="rect">
+            <a:avLst/>
+          </a:prstGeom>
+          <a:noFill/>
+        </p:spPr>
+        <p:txBody>
+          <a:bodyPr wrap="none" rtlCol="0">
+            <a:spAutoFit/>
+          </a:bodyPr>
+          <a:lstStyle/>
+          <a:p>
+            <a:r>
+              <a:rPr lang="en-CH" dirty="0">
+                <a:latin typeface="Sora" pitchFamily="2" charset="0"/>
+                <a:cs typeface="Sora" pitchFamily="2" charset="0"/>
+              </a:rPr>
+              <a:t>Consumers</a:t>
+            </a:r>
+          </a:p>
+        </p:txBody>
+      </p:sp>
+      <p:sp>
+        <p:nvSpPr>
+          <p:cNvPr id="8" name="Right Arrow 7">
+            <a:extLst>
+              <a:ext uri="{FF2B5EF4-FFF2-40B4-BE49-F238E27FC236}">
+                <a16:creationId xmlns:a16="http://schemas.microsoft.com/office/drawing/2014/main" id="{B44688B0-C24F-FB39-D8B4-C7CEB19BF331}"/>
+              </a:ext>
+            </a:extLst>
+          </p:cNvPr>
+          <p:cNvSpPr/>
+          <p:nvPr/>
+        </p:nvSpPr>
+        <p:spPr>
+          <a:xfrm>
+            <a:off x="1343113" y="3645649"/>
+            <a:ext cx="1394906" cy="563878"/>
+          </a:xfrm>
+          <a:prstGeom prst="leftArrow">
+            <a:avLst/>
+          </a:prstGeom>
+          <a:solidFill>
+            <a:schemeClr val="accent1">
+              <a:lumMod val="40000"/>
+              <a:lumOff val="60000"/>
+            </a:schemeClr>
+          </a:solidFill>
+          <a:ln w="25400">
+            <a:solidFill>
+              <a:schemeClr val="tx2"/>
+            </a:solidFill>
+          </a:ln>
+        </p:spPr>
+        <p:style>
+          <a:lnRef idx="2">
+            <a:schemeClr val="accent1">
+              <a:shade val="15000"/>
+            </a:schemeClr>
+          </a:lnRef>
+          <a:fillRef idx="1">
+            <a:schemeClr val="accent1"/>
+          </a:fillRef>
+          <a:effectRef idx="0">
+            <a:schemeClr val="accent1"/>
+          </a:effectRef>
+          <a:fontRef idx="minor">
+            <a:schemeClr val="lt1"/>
+          </a:fontRef>
+        </p:style>
+        <p:txBody>
+          <a:bodyPr rtlCol="0" anchor="ctr"/>
+          <a:lstStyle/>
+          <a:p>
+            <a:pPr algn="ctr"/>
+            <a:r>
+              <a:rPr lang="en-CH" sz="1400" dirty="0">
+                <a:solidFill>
+                  <a:schemeClr val="accent2"/>
+                </a:solidFill>
+                <a:latin typeface="Sora" pitchFamily="2" charset="0"/>
+                <a:cs typeface="Sora" pitchFamily="2" charset="0"/>
+              </a:rPr>
+              <a:t>Output</a:t>
+            </a:r>
+            <a:endParaRPr lang="en-CH" dirty="0">
+              <a:solidFill>
+                <a:schemeClr val="accent2"/>
+              </a:solidFill>
+              <a:latin typeface="Sora" pitchFamily="2" charset="0"/>
+              <a:cs typeface="Sora" pitchFamily="2" charset="0"/>
+            </a:endParaRPr>
+          </a:p>
+        </p:txBody>
+      </p:sp>
+      <p:sp>
+        <p:nvSpPr>
+          <p:cNvPr id="4" name="Left-right Arrow 3">
+            <a:extLst>
+              <a:ext uri="{FF2B5EF4-FFF2-40B4-BE49-F238E27FC236}">
+                <a16:creationId xmlns:a16="http://schemas.microsoft.com/office/drawing/2014/main" id="{45FFA460-0679-FECE-03C2-223B62F0D295}"/>
+              </a:ext>
+            </a:extLst>
+          </p:cNvPr>
+          <p:cNvSpPr/>
+          <p:nvPr/>
+        </p:nvSpPr>
+        <p:spPr>
+          <a:xfrm>
+            <a:off x="7667233" y="2773200"/>
+            <a:ext cx="1475338" cy="572173"/>
+          </a:xfrm>
+          <a:prstGeom prst="leftRightArrow">
+            <a:avLst/>
+          </a:prstGeom>
+          <a:solidFill>
+            <a:schemeClr val="accent1">
+              <a:lumMod val="40000"/>
+              <a:lumOff val="60000"/>
+            </a:schemeClr>
+          </a:solidFill>
+          <a:ln w="25400">
+            <a:solidFill>
+              <a:schemeClr val="accent2"/>
+            </a:solidFill>
+          </a:ln>
+        </p:spPr>
+        <p:style>
+          <a:lnRef idx="2">
+            <a:schemeClr val="accent1">
+              <a:shade val="15000"/>
+            </a:schemeClr>
+          </a:lnRef>
+          <a:fillRef idx="1">
+            <a:schemeClr val="accent1"/>
+          </a:fillRef>
+          <a:effectRef idx="0">
+            <a:schemeClr val="accent1"/>
+          </a:effectRef>
+          <a:fontRef idx="minor">
+            <a:schemeClr val="lt1"/>
+          </a:fontRef>
+        </p:style>
+        <p:txBody>
+          <a:bodyPr rtlCol="0" anchor="ctr"/>
+          <a:lstStyle/>
+          <a:p>
+            <a:pPr algn="ctr"/>
+            <a:endParaRPr lang="en-CH"/>
+          </a:p>
+        </p:txBody>
+      </p:sp>
+      <p:sp>
+        <p:nvSpPr>
+          <p:cNvPr id="12" name="Left-right Arrow 11">
+            <a:extLst>
+              <a:ext uri="{FF2B5EF4-FFF2-40B4-BE49-F238E27FC236}">
+                <a16:creationId xmlns:a16="http://schemas.microsoft.com/office/drawing/2014/main" id="{17B528EB-69BF-7D51-CF1F-97B99988BE53}"/>
+              </a:ext>
+            </a:extLst>
+          </p:cNvPr>
+          <p:cNvSpPr/>
+          <p:nvPr/>
+        </p:nvSpPr>
+        <p:spPr>
+          <a:xfrm>
+            <a:off x="7672812" y="3603536"/>
+            <a:ext cx="1475339" cy="572173"/>
+          </a:xfrm>
+          <a:prstGeom prst="leftRightArrow">
+            <a:avLst/>
+          </a:prstGeom>
+          <a:solidFill>
+            <a:schemeClr val="accent1">
+              <a:lumMod val="40000"/>
+              <a:lumOff val="60000"/>
+            </a:schemeClr>
+          </a:solidFill>
+          <a:ln w="25400">
+            <a:solidFill>
+              <a:schemeClr val="accent2"/>
+            </a:solidFill>
+          </a:ln>
+        </p:spPr>
+        <p:style>
+          <a:lnRef idx="2">
+            <a:schemeClr val="accent1">
+              <a:shade val="15000"/>
+            </a:schemeClr>
+          </a:lnRef>
+          <a:fillRef idx="1">
+            <a:schemeClr val="accent1"/>
+          </a:fillRef>
+          <a:effectRef idx="0">
+            <a:schemeClr val="accent1"/>
+          </a:effectRef>
+          <a:fontRef idx="minor">
+            <a:schemeClr val="lt1"/>
+          </a:fontRef>
+        </p:style>
+        <p:txBody>
+          <a:bodyPr rtlCol="0" anchor="ctr"/>
+          <a:lstStyle/>
+          <a:p>
+            <a:pPr algn="ctr"/>
+            <a:endParaRPr lang="en-CH"/>
+          </a:p>
+        </p:txBody>
+      </p:sp>
+      <p:sp>
+        <p:nvSpPr>
+          <p:cNvPr id="15" name="Left-right Arrow 14">
+            <a:extLst>
+              <a:ext uri="{FF2B5EF4-FFF2-40B4-BE49-F238E27FC236}">
+                <a16:creationId xmlns:a16="http://schemas.microsoft.com/office/drawing/2014/main" id="{1FFF133E-C701-FFEF-681A-ADF0CBE32D55}"/>
+              </a:ext>
+            </a:extLst>
+          </p:cNvPr>
+          <p:cNvSpPr/>
+          <p:nvPr/>
+        </p:nvSpPr>
+        <p:spPr>
+          <a:xfrm>
+            <a:off x="7667233" y="1920454"/>
+            <a:ext cx="1475338" cy="572173"/>
+          </a:xfrm>
+          <a:prstGeom prst="leftRightArrow">
+            <a:avLst/>
+          </a:prstGeom>
+          <a:solidFill>
+            <a:schemeClr val="accent1">
+              <a:lumMod val="40000"/>
+              <a:lumOff val="60000"/>
+            </a:schemeClr>
+          </a:solidFill>
+          <a:ln w="25400">
+            <a:solidFill>
+              <a:schemeClr val="accent2"/>
+            </a:solidFill>
+          </a:ln>
+        </p:spPr>
+        <p:style>
+          <a:lnRef idx="2">
+            <a:schemeClr val="accent1">
+              <a:shade val="15000"/>
+            </a:schemeClr>
+          </a:lnRef>
+          <a:fillRef idx="1">
+            <a:schemeClr val="accent1"/>
+          </a:fillRef>
+          <a:effectRef idx="0">
+            <a:schemeClr val="accent1"/>
+          </a:effectRef>
+          <a:fontRef idx="minor">
+            <a:schemeClr val="lt1"/>
+          </a:fontRef>
+        </p:style>
+        <p:txBody>
+          <a:bodyPr rtlCol="0" anchor="ctr"/>
+          <a:lstStyle/>
+          <a:p>
+            <a:pPr algn="ctr"/>
+            <a:endParaRPr lang="en-CH"/>
+          </a:p>
+        </p:txBody>
+      </p:sp>
+      <p:pic>
+        <p:nvPicPr>
+          <p:cNvPr id="16" name="Picture 15">
+            <a:extLst>
+              <a:ext uri="{FF2B5EF4-FFF2-40B4-BE49-F238E27FC236}">
+                <a16:creationId xmlns:a16="http://schemas.microsoft.com/office/drawing/2014/main" id="{91E4FE04-B7EB-188A-3F80-87D238A54E49}"/>
+              </a:ext>
+            </a:extLst>
+          </p:cNvPr>
+          <p:cNvPicPr>
+            <a:picLocks noChangeAspect="1"/>
+          </p:cNvPicPr>
+          <p:nvPr/>
+        </p:nvPicPr>
+        <p:blipFill>
+          <a:blip r:embed="rId2"/>
+          <a:stretch>
+            <a:fillRect/>
+          </a:stretch>
+        </p:blipFill>
+        <p:spPr>
+          <a:xfrm>
+            <a:off x="7967197" y="1889748"/>
+            <a:ext cx="875405" cy="625289"/>
+          </a:xfrm>
+          <a:prstGeom prst="rect">
+            <a:avLst/>
+          </a:prstGeom>
+        </p:spPr>
+      </p:pic>
+      <p:sp>
+        <p:nvSpPr>
+          <p:cNvPr id="17" name="Left-right Arrow 16">
+            <a:extLst>
+              <a:ext uri="{FF2B5EF4-FFF2-40B4-BE49-F238E27FC236}">
+                <a16:creationId xmlns:a16="http://schemas.microsoft.com/office/drawing/2014/main" id="{A9C2C79F-AD09-AB92-E6E2-36BD92A90F8E}"/>
+              </a:ext>
+            </a:extLst>
+          </p:cNvPr>
+          <p:cNvSpPr/>
+          <p:nvPr/>
+        </p:nvSpPr>
+        <p:spPr>
+          <a:xfrm>
+            <a:off x="7667232" y="4365374"/>
+            <a:ext cx="1475339" cy="572173"/>
+          </a:xfrm>
+          <a:prstGeom prst="leftRightArrow">
+            <a:avLst/>
+          </a:prstGeom>
+          <a:solidFill>
+            <a:schemeClr val="accent1">
+              <a:lumMod val="40000"/>
+              <a:lumOff val="60000"/>
+            </a:schemeClr>
+          </a:solidFill>
+          <a:ln w="25400">
+            <a:solidFill>
+              <a:schemeClr val="accent2"/>
+            </a:solidFill>
+          </a:ln>
+        </p:spPr>
+        <p:style>
+          <a:lnRef idx="2">
+            <a:schemeClr val="accent1">
+              <a:shade val="15000"/>
+            </a:schemeClr>
+          </a:lnRef>
+          <a:fillRef idx="1">
+            <a:schemeClr val="accent1"/>
+          </a:fillRef>
+          <a:effectRef idx="0">
+            <a:schemeClr val="accent1"/>
+          </a:effectRef>
+          <a:fontRef idx="minor">
+            <a:schemeClr val="lt1"/>
+          </a:fontRef>
+        </p:style>
+        <p:txBody>
+          <a:bodyPr rtlCol="0" anchor="ctr"/>
+          <a:lstStyle/>
+          <a:p>
+            <a:pPr algn="ctr"/>
+            <a:endParaRPr lang="en-CH"/>
+          </a:p>
+        </p:txBody>
+      </p:sp>
+      <p:pic>
+        <p:nvPicPr>
+          <p:cNvPr id="19" name="Picture 18">
+            <a:extLst>
+              <a:ext uri="{FF2B5EF4-FFF2-40B4-BE49-F238E27FC236}">
+                <a16:creationId xmlns:a16="http://schemas.microsoft.com/office/drawing/2014/main" id="{741569B3-6497-158E-574C-156C2B44C96E}"/>
+              </a:ext>
+            </a:extLst>
+          </p:cNvPr>
+          <p:cNvPicPr>
+            <a:picLocks noChangeAspect="1"/>
+          </p:cNvPicPr>
+          <p:nvPr/>
+        </p:nvPicPr>
+        <p:blipFill>
+          <a:blip r:embed="rId3"/>
+          <a:stretch>
+            <a:fillRect/>
+          </a:stretch>
+        </p:blipFill>
+        <p:spPr>
+          <a:xfrm>
+            <a:off x="8048989" y="2989099"/>
+            <a:ext cx="698570" cy="154491"/>
+          </a:xfrm>
+          <a:prstGeom prst="rect">
+            <a:avLst/>
+          </a:prstGeom>
+        </p:spPr>
+      </p:pic>
+      <p:pic>
+        <p:nvPicPr>
+          <p:cNvPr id="20" name="Picture 19">
+            <a:extLst>
+              <a:ext uri="{FF2B5EF4-FFF2-40B4-BE49-F238E27FC236}">
+                <a16:creationId xmlns:a16="http://schemas.microsoft.com/office/drawing/2014/main" id="{ECCF0E62-3372-C183-1AAD-509B23EAEA01}"/>
+              </a:ext>
+            </a:extLst>
+          </p:cNvPr>
+          <p:cNvPicPr>
+            <a:picLocks noChangeAspect="1"/>
+          </p:cNvPicPr>
+          <p:nvPr/>
+        </p:nvPicPr>
+        <p:blipFill>
+          <a:blip r:embed="rId4"/>
+          <a:stretch>
+            <a:fillRect/>
+          </a:stretch>
+        </p:blipFill>
+        <p:spPr>
+          <a:xfrm>
+            <a:off x="8157012" y="4410198"/>
+            <a:ext cx="482523" cy="482523"/>
+          </a:xfrm>
+          <a:prstGeom prst="rect">
+            <a:avLst/>
+          </a:prstGeom>
+        </p:spPr>
+      </p:pic>
+      <p:pic>
+        <p:nvPicPr>
+          <p:cNvPr id="21" name="Picture 20">
+            <a:extLst>
+              <a:ext uri="{FF2B5EF4-FFF2-40B4-BE49-F238E27FC236}">
+                <a16:creationId xmlns:a16="http://schemas.microsoft.com/office/drawing/2014/main" id="{BBD825C0-3829-F268-AC45-4460AA65DCF8}"/>
+              </a:ext>
+            </a:extLst>
+          </p:cNvPr>
+          <p:cNvPicPr>
+            <a:picLocks noChangeAspect="1"/>
+          </p:cNvPicPr>
+          <p:nvPr/>
+        </p:nvPicPr>
+        <p:blipFill>
+          <a:blip r:embed="rId5"/>
+          <a:stretch>
+            <a:fillRect/>
+          </a:stretch>
+        </p:blipFill>
+        <p:spPr>
+          <a:xfrm>
+            <a:off x="8008801" y="3788731"/>
+            <a:ext cx="738758" cy="201847"/>
+          </a:xfrm>
+          <a:prstGeom prst="rect">
+            <a:avLst/>
+          </a:prstGeom>
+        </p:spPr>
+      </p:pic>
+      <p:sp>
+        <p:nvSpPr>
+          <p:cNvPr id="13" name="Rectangle 12">
+            <a:extLst>
+              <a:ext uri="{FF2B5EF4-FFF2-40B4-BE49-F238E27FC236}">
+                <a16:creationId xmlns:a16="http://schemas.microsoft.com/office/drawing/2014/main" id="{03125EB8-539D-4710-47D3-F6FBAEF8AFCF}"/>
+              </a:ext>
+            </a:extLst>
+          </p:cNvPr>
+          <p:cNvSpPr/>
+          <p:nvPr/>
+        </p:nvSpPr>
+        <p:spPr>
+          <a:xfrm>
+            <a:off x="4864994" y="1639012"/>
+            <a:ext cx="1493214" cy="1323439"/>
+          </a:xfrm>
+          <a:prstGeom prst="rect">
+            <a:avLst/>
+          </a:prstGeom>
+          <a:solidFill>
+            <a:srgbClr val="637E3C"/>
+          </a:solidFill>
+          <a:ln w="50800">
+            <a:solidFill>
+              <a:schemeClr val="accent1"/>
+            </a:solidFill>
+          </a:ln>
+        </p:spPr>
+        <p:style>
+          <a:lnRef idx="2">
+            <a:schemeClr val="accent1">
+              <a:shade val="15000"/>
+            </a:schemeClr>
+          </a:lnRef>
+          <a:fillRef idx="1">
+            <a:schemeClr val="accent1"/>
+          </a:fillRef>
+          <a:effectRef idx="0">
+            <a:schemeClr val="accent1"/>
+          </a:effectRef>
+          <a:fontRef idx="minor">
+            <a:schemeClr val="lt1"/>
+          </a:fontRef>
+        </p:style>
+        <p:txBody>
+          <a:bodyPr rtlCol="0" anchor="ctr"/>
+          <a:lstStyle/>
+          <a:p>
+            <a:r>
+              <a:rPr lang="en-CH" dirty="0">
+                <a:latin typeface="Sora" pitchFamily="2" charset="0"/>
+                <a:cs typeface="Sora" pitchFamily="2" charset="0"/>
+              </a:rPr>
+              <a:t>      ML</a:t>
+            </a:r>
+          </a:p>
+        </p:txBody>
+      </p:sp>
+      <p:sp>
+        <p:nvSpPr>
+          <p:cNvPr id="18" name="TextBox 17">
+            <a:extLst>
+              <a:ext uri="{FF2B5EF4-FFF2-40B4-BE49-F238E27FC236}">
+                <a16:creationId xmlns:a16="http://schemas.microsoft.com/office/drawing/2014/main" id="{66AEC872-BFB0-C2E0-DFB9-A92AFAD2B924}"/>
+              </a:ext>
+            </a:extLst>
+          </p:cNvPr>
+          <p:cNvSpPr txBox="1"/>
+          <p:nvPr/>
+        </p:nvSpPr>
+        <p:spPr>
+          <a:xfrm>
+            <a:off x="5573048" y="2060254"/>
+            <a:ext cx="1210588" cy="1569660"/>
+          </a:xfrm>
+          <a:prstGeom prst="rect">
+            <a:avLst/>
+          </a:prstGeom>
+          <a:noFill/>
+        </p:spPr>
+        <p:txBody>
+          <a:bodyPr wrap="square" rtlCol="0">
+            <a:spAutoFit/>
+          </a:bodyPr>
+          <a:lstStyle/>
+          <a:p>
+            <a:r>
+              <a:rPr lang="en-CH" sz="9600" dirty="0"/>
+              <a:t>💰</a:t>
+            </a:r>
+          </a:p>
+        </p:txBody>
+      </p:sp>
+    </p:spTree>
+    <p:extLst>
+      <p:ext uri="{BB962C8B-B14F-4D97-AF65-F5344CB8AC3E}">
+        <p14:creationId xmlns:p14="http://schemas.microsoft.com/office/powerpoint/2010/main" val="3199978812"/>
+      </p:ext>
+    </p:extLst>
+  </p:cSld>
+  <p:clrMapOvr>
+    <a:masterClrMapping/>
+  </p:clrMapOvr>
+</p:sld>
+</file>
+
+<file path=ppt/slides/slide3.xml><?xml version="1.0" encoding="utf-8"?>
+<p:sld xmlns:a="http://schemas.openxmlformats.org/drawingml/2006/main" xmlns:r="http://schemas.openxmlformats.org/officeDocument/2006/relationships" xmlns:p="http://schemas.openxmlformats.org/presentationml/2006/main">
+  <p:cSld>
+    <p:spTree>
+      <p:nvGrpSpPr>
+        <p:cNvPr id="1" name="">
+          <a:extLst>
+            <a:ext uri="{FF2B5EF4-FFF2-40B4-BE49-F238E27FC236}">
+              <a16:creationId xmlns:a16="http://schemas.microsoft.com/office/drawing/2014/main" id="{768F35EE-E54C-AAA8-8B7F-B6D12A81FB69}"/>
+            </a:ext>
+          </a:extLst>
+        </p:cNvPr>
+        <p:cNvGrpSpPr/>
+        <p:nvPr/>
+      </p:nvGrpSpPr>
+      <p:grpSpPr>
+        <a:xfrm>
+          <a:off x="0" y="0"/>
+          <a:ext cx="0" cy="0"/>
+          <a:chOff x="0" y="0"/>
+          <a:chExt cx="0" cy="0"/>
+        </a:xfrm>
+      </p:grpSpPr>
+      <p:sp>
+        <p:nvSpPr>
+          <p:cNvPr id="6" name="Rectangle 5">
+            <a:extLst>
+              <a:ext uri="{FF2B5EF4-FFF2-40B4-BE49-F238E27FC236}">
+                <a16:creationId xmlns:a16="http://schemas.microsoft.com/office/drawing/2014/main" id="{53A16ED5-7CDF-931B-84A6-901EA9A95A67}"/>
+              </a:ext>
+            </a:extLst>
+          </p:cNvPr>
+          <p:cNvSpPr/>
+          <p:nvPr/>
+        </p:nvSpPr>
+        <p:spPr>
+          <a:xfrm>
+            <a:off x="8753138" y="1663549"/>
+            <a:ext cx="1398488" cy="3530899"/>
+          </a:xfrm>
+          <a:prstGeom prst="rect">
+            <a:avLst/>
+          </a:prstGeom>
+          <a:solidFill>
+            <a:schemeClr val="accent1">
+              <a:lumMod val="40000"/>
+              <a:lumOff val="60000"/>
+            </a:schemeClr>
+          </a:solidFill>
+          <a:ln w="50800">
+            <a:solidFill>
+              <a:schemeClr val="tx2"/>
+            </a:solidFill>
+          </a:ln>
+        </p:spPr>
+        <p:style>
+          <a:lnRef idx="2">
+            <a:schemeClr val="accent1">
+              <a:shade val="15000"/>
+            </a:schemeClr>
+          </a:lnRef>
+          <a:fillRef idx="1">
+            <a:schemeClr val="accent1"/>
+          </a:fillRef>
+          <a:effectRef idx="0">
+            <a:schemeClr val="accent1"/>
+          </a:effectRef>
+          <a:fontRef idx="minor">
+            <a:schemeClr val="lt1"/>
+          </a:fontRef>
+        </p:style>
+        <p:txBody>
+          <a:bodyPr rtlCol="0" anchor="ctr"/>
+          <a:lstStyle/>
+          <a:p>
+            <a:pPr algn="ctr"/>
+            <a:r>
+              <a:rPr lang="en-CH" dirty="0">
+                <a:solidFill>
+                  <a:schemeClr val="accent2"/>
+                </a:solidFill>
+                <a:latin typeface="Sora" pitchFamily="2" charset="0"/>
+                <a:cs typeface="Sora" pitchFamily="2" charset="0"/>
+              </a:rPr>
+              <a:t>      APIs</a:t>
+            </a:r>
+          </a:p>
+          <a:p>
+            <a:pPr algn="ctr"/>
+            <a:r>
+              <a:rPr lang="en-CH" dirty="0">
+                <a:solidFill>
+                  <a:schemeClr val="accent2"/>
+                </a:solidFill>
+                <a:latin typeface="Sora" pitchFamily="2" charset="0"/>
+                <a:cs typeface="Sora" pitchFamily="2" charset="0"/>
+              </a:rPr>
+              <a:t>     &amp;</a:t>
+            </a:r>
+            <a:br>
+              <a:rPr lang="en-CH" dirty="0">
+                <a:solidFill>
+                  <a:schemeClr val="accent2"/>
+                </a:solidFill>
+                <a:latin typeface="Sora" pitchFamily="2" charset="0"/>
+                <a:cs typeface="Sora" pitchFamily="2" charset="0"/>
+              </a:rPr>
+            </a:br>
+            <a:r>
+              <a:rPr lang="en-CH" dirty="0">
+                <a:solidFill>
+                  <a:schemeClr val="accent2"/>
+                </a:solidFill>
+                <a:latin typeface="Sora" pitchFamily="2" charset="0"/>
+                <a:cs typeface="Sora" pitchFamily="2" charset="0"/>
+              </a:rPr>
+              <a:t>     Data</a:t>
+            </a:r>
+          </a:p>
+        </p:txBody>
+      </p:sp>
+      <p:cxnSp>
+        <p:nvCxnSpPr>
+          <p:cNvPr id="9" name="Straight Connector 8">
+            <a:extLst>
+              <a:ext uri="{FF2B5EF4-FFF2-40B4-BE49-F238E27FC236}">
+                <a16:creationId xmlns:a16="http://schemas.microsoft.com/office/drawing/2014/main" id="{873A6D68-5C8B-4597-4FDE-CAEAA6C551ED}"/>
+              </a:ext>
+            </a:extLst>
+          </p:cNvPr>
+          <p:cNvCxnSpPr>
+            <a:cxnSpLocks/>
+          </p:cNvCxnSpPr>
+          <p:nvPr/>
+        </p:nvCxnSpPr>
+        <p:spPr>
+          <a:xfrm>
+            <a:off x="8419652" y="1245196"/>
+            <a:ext cx="0" cy="4682268"/>
+          </a:xfrm>
+          <a:prstGeom prst="line">
+            <a:avLst/>
+          </a:prstGeom>
+          <a:ln w="254000">
+            <a:solidFill>
+              <a:schemeClr val="tx2"/>
+            </a:solidFill>
+          </a:ln>
+        </p:spPr>
+        <p:style>
+          <a:lnRef idx="1">
+            <a:schemeClr val="accent1"/>
+          </a:lnRef>
+          <a:fillRef idx="0">
+            <a:schemeClr val="accent1"/>
+          </a:fillRef>
+          <a:effectRef idx="0">
+            <a:schemeClr val="accent1"/>
+          </a:effectRef>
+          <a:fontRef idx="minor">
+            <a:schemeClr val="tx1"/>
+          </a:fontRef>
+        </p:style>
+      </p:cxnSp>
+      <p:sp>
+        <p:nvSpPr>
+          <p:cNvPr id="10" name="TextBox 9">
+            <a:extLst>
+              <a:ext uri="{FF2B5EF4-FFF2-40B4-BE49-F238E27FC236}">
+                <a16:creationId xmlns:a16="http://schemas.microsoft.com/office/drawing/2014/main" id="{A1857027-5646-F204-B321-B8ACFBED423D}"/>
+              </a:ext>
+            </a:extLst>
+          </p:cNvPr>
+          <p:cNvSpPr txBox="1"/>
+          <p:nvPr/>
+        </p:nvSpPr>
+        <p:spPr>
+          <a:xfrm>
+            <a:off x="5027530" y="5428134"/>
+            <a:ext cx="1192955" cy="369332"/>
+          </a:xfrm>
+          <a:prstGeom prst="rect">
+            <a:avLst/>
+          </a:prstGeom>
+          <a:noFill/>
+        </p:spPr>
+        <p:txBody>
+          <a:bodyPr wrap="none" rtlCol="0">
+            <a:spAutoFit/>
+          </a:bodyPr>
+          <a:lstStyle/>
+          <a:p>
+            <a:r>
+              <a:rPr lang="en-CH" dirty="0">
+                <a:latin typeface="Sora" pitchFamily="2" charset="0"/>
+                <a:cs typeface="Sora" pitchFamily="2" charset="0"/>
+              </a:rPr>
+              <a:t>Solution</a:t>
+            </a:r>
+          </a:p>
+        </p:txBody>
+      </p:sp>
+      <p:sp>
+        <p:nvSpPr>
+          <p:cNvPr id="11" name="TextBox 10">
+            <a:extLst>
+              <a:ext uri="{FF2B5EF4-FFF2-40B4-BE49-F238E27FC236}">
+                <a16:creationId xmlns:a16="http://schemas.microsoft.com/office/drawing/2014/main" id="{1D07B9E7-CFD1-0232-46A2-6B501DEB1F11}"/>
+              </a:ext>
+            </a:extLst>
+          </p:cNvPr>
+          <p:cNvSpPr txBox="1"/>
+          <p:nvPr/>
+        </p:nvSpPr>
+        <p:spPr>
+          <a:xfrm>
+            <a:off x="8709483" y="5428134"/>
+            <a:ext cx="1540806" cy="369332"/>
+          </a:xfrm>
+          <a:prstGeom prst="rect">
+            <a:avLst/>
+          </a:prstGeom>
+          <a:noFill/>
+        </p:spPr>
+        <p:txBody>
+          <a:bodyPr wrap="none" rtlCol="0">
+            <a:spAutoFit/>
+          </a:bodyPr>
+          <a:lstStyle/>
+          <a:p>
+            <a:r>
+              <a:rPr lang="en-CH" dirty="0">
+                <a:latin typeface="Sora" pitchFamily="2" charset="0"/>
+                <a:cs typeface="Sora" pitchFamily="2" charset="0"/>
+              </a:rPr>
+              <a:t>Foundation</a:t>
+            </a:r>
+          </a:p>
+        </p:txBody>
+      </p:sp>
+      <p:sp>
+        <p:nvSpPr>
+          <p:cNvPr id="2" name="Right Arrow 1">
+            <a:extLst>
+              <a:ext uri="{FF2B5EF4-FFF2-40B4-BE49-F238E27FC236}">
+                <a16:creationId xmlns:a16="http://schemas.microsoft.com/office/drawing/2014/main" id="{84B6C3DD-1DF7-8BCA-D8F9-E059E7D63DA8}"/>
+              </a:ext>
+            </a:extLst>
+          </p:cNvPr>
+          <p:cNvSpPr/>
+          <p:nvPr/>
+        </p:nvSpPr>
+        <p:spPr>
+          <a:xfrm>
+            <a:off x="1369100" y="2695096"/>
+            <a:ext cx="1394906" cy="563878"/>
+          </a:xfrm>
+          <a:prstGeom prst="rightArrow">
+            <a:avLst/>
+          </a:prstGeom>
+          <a:solidFill>
+            <a:schemeClr val="accent1">
+              <a:lumMod val="40000"/>
+              <a:lumOff val="60000"/>
+            </a:schemeClr>
+          </a:solidFill>
+          <a:ln w="25400">
+            <a:solidFill>
+              <a:schemeClr val="tx2"/>
+            </a:solidFill>
+          </a:ln>
+        </p:spPr>
+        <p:style>
+          <a:lnRef idx="2">
+            <a:schemeClr val="accent1">
+              <a:shade val="15000"/>
+            </a:schemeClr>
+          </a:lnRef>
+          <a:fillRef idx="1">
+            <a:schemeClr val="accent1"/>
+          </a:fillRef>
+          <a:effectRef idx="0">
+            <a:schemeClr val="accent1"/>
+          </a:effectRef>
+          <a:fontRef idx="minor">
+            <a:schemeClr val="lt1"/>
+          </a:fontRef>
+        </p:style>
+        <p:txBody>
+          <a:bodyPr rtlCol="0" anchor="ctr"/>
+          <a:lstStyle/>
+          <a:p>
+            <a:pPr algn="ctr"/>
+            <a:r>
+              <a:rPr lang="en-CH" sz="1400" dirty="0">
+                <a:solidFill>
+                  <a:schemeClr val="accent2"/>
+                </a:solidFill>
+                <a:latin typeface="Sora" pitchFamily="2" charset="0"/>
+                <a:cs typeface="Sora" pitchFamily="2" charset="0"/>
+              </a:rPr>
+              <a:t>Input</a:t>
+            </a:r>
+            <a:endParaRPr lang="en-CH" dirty="0">
+              <a:solidFill>
+                <a:schemeClr val="accent2"/>
+              </a:solidFill>
+              <a:latin typeface="Sora" pitchFamily="2" charset="0"/>
+              <a:cs typeface="Sora" pitchFamily="2" charset="0"/>
+            </a:endParaRPr>
+          </a:p>
+        </p:txBody>
+      </p:sp>
+      <p:sp>
+        <p:nvSpPr>
+          <p:cNvPr id="3" name="TextBox 2">
+            <a:extLst>
+              <a:ext uri="{FF2B5EF4-FFF2-40B4-BE49-F238E27FC236}">
+                <a16:creationId xmlns:a16="http://schemas.microsoft.com/office/drawing/2014/main" id="{2797C4B9-3CBA-E018-DAC4-1B51AD38A56C}"/>
+              </a:ext>
+            </a:extLst>
+          </p:cNvPr>
+          <p:cNvSpPr txBox="1"/>
+          <p:nvPr/>
+        </p:nvSpPr>
+        <p:spPr>
+          <a:xfrm>
+            <a:off x="1303140" y="3267269"/>
+            <a:ext cx="1534394" cy="369332"/>
+          </a:xfrm>
+          <a:prstGeom prst="rect">
+            <a:avLst/>
+          </a:prstGeom>
+          <a:noFill/>
+        </p:spPr>
+        <p:txBody>
+          <a:bodyPr wrap="none" rtlCol="0">
+            <a:spAutoFit/>
+          </a:bodyPr>
+          <a:lstStyle/>
+          <a:p>
+            <a:r>
+              <a:rPr lang="en-CH" dirty="0">
+                <a:latin typeface="Sora" pitchFamily="2" charset="0"/>
+                <a:cs typeface="Sora" pitchFamily="2" charset="0"/>
+              </a:rPr>
+              <a:t>Consumers</a:t>
+            </a:r>
+          </a:p>
+        </p:txBody>
+      </p:sp>
+      <p:sp>
+        <p:nvSpPr>
+          <p:cNvPr id="8" name="Right Arrow 7">
+            <a:extLst>
+              <a:ext uri="{FF2B5EF4-FFF2-40B4-BE49-F238E27FC236}">
+                <a16:creationId xmlns:a16="http://schemas.microsoft.com/office/drawing/2014/main" id="{1DD7F2EF-89A0-AE6F-CFCF-55273A22DF28}"/>
+              </a:ext>
+            </a:extLst>
+          </p:cNvPr>
+          <p:cNvSpPr/>
+          <p:nvPr/>
+        </p:nvSpPr>
+        <p:spPr>
+          <a:xfrm>
+            <a:off x="1343113" y="3645649"/>
+            <a:ext cx="1394906" cy="563878"/>
+          </a:xfrm>
+          <a:prstGeom prst="leftArrow">
+            <a:avLst/>
+          </a:prstGeom>
+          <a:solidFill>
+            <a:schemeClr val="accent1">
+              <a:lumMod val="40000"/>
+              <a:lumOff val="60000"/>
+            </a:schemeClr>
+          </a:solidFill>
+          <a:ln w="25400">
+            <a:solidFill>
+              <a:schemeClr val="tx2"/>
+            </a:solidFill>
+          </a:ln>
+        </p:spPr>
+        <p:style>
+          <a:lnRef idx="2">
+            <a:schemeClr val="accent1">
+              <a:shade val="15000"/>
+            </a:schemeClr>
+          </a:lnRef>
+          <a:fillRef idx="1">
+            <a:schemeClr val="accent1"/>
+          </a:fillRef>
+          <a:effectRef idx="0">
+            <a:schemeClr val="accent1"/>
+          </a:effectRef>
+          <a:fontRef idx="minor">
+            <a:schemeClr val="lt1"/>
+          </a:fontRef>
+        </p:style>
+        <p:txBody>
+          <a:bodyPr rtlCol="0" anchor="ctr"/>
+          <a:lstStyle/>
+          <a:p>
+            <a:pPr algn="ctr"/>
+            <a:r>
+              <a:rPr lang="en-CH" sz="1400" dirty="0">
+                <a:solidFill>
+                  <a:schemeClr val="accent2"/>
+                </a:solidFill>
+                <a:latin typeface="Sora" pitchFamily="2" charset="0"/>
+                <a:cs typeface="Sora" pitchFamily="2" charset="0"/>
+              </a:rPr>
+              <a:t>Output</a:t>
+            </a:r>
+            <a:endParaRPr lang="en-CH" dirty="0">
+              <a:solidFill>
+                <a:schemeClr val="accent2"/>
+              </a:solidFill>
+              <a:latin typeface="Sora" pitchFamily="2" charset="0"/>
+              <a:cs typeface="Sora" pitchFamily="2" charset="0"/>
+            </a:endParaRPr>
+          </a:p>
+        </p:txBody>
+      </p:sp>
+      <p:sp>
+        <p:nvSpPr>
+          <p:cNvPr id="4" name="Left-right Arrow 3">
+            <a:extLst>
+              <a:ext uri="{FF2B5EF4-FFF2-40B4-BE49-F238E27FC236}">
+                <a16:creationId xmlns:a16="http://schemas.microsoft.com/office/drawing/2014/main" id="{F74D880D-C645-A7D3-E192-A70FCE760E3D}"/>
+              </a:ext>
+            </a:extLst>
+          </p:cNvPr>
+          <p:cNvSpPr/>
+          <p:nvPr/>
+        </p:nvSpPr>
+        <p:spPr>
+          <a:xfrm>
+            <a:off x="7667233" y="2773200"/>
+            <a:ext cx="1475338" cy="572173"/>
+          </a:xfrm>
+          <a:prstGeom prst="leftRightArrow">
+            <a:avLst/>
+          </a:prstGeom>
+          <a:solidFill>
+            <a:schemeClr val="accent1">
+              <a:lumMod val="40000"/>
+              <a:lumOff val="60000"/>
+            </a:schemeClr>
+          </a:solidFill>
+          <a:ln w="25400">
+            <a:solidFill>
+              <a:schemeClr val="accent2"/>
+            </a:solidFill>
+          </a:ln>
+        </p:spPr>
+        <p:style>
+          <a:lnRef idx="2">
+            <a:schemeClr val="accent1">
+              <a:shade val="15000"/>
+            </a:schemeClr>
+          </a:lnRef>
+          <a:fillRef idx="1">
+            <a:schemeClr val="accent1"/>
+          </a:fillRef>
+          <a:effectRef idx="0">
+            <a:schemeClr val="accent1"/>
+          </a:effectRef>
+          <a:fontRef idx="minor">
+            <a:schemeClr val="lt1"/>
+          </a:fontRef>
+        </p:style>
+        <p:txBody>
+          <a:bodyPr rtlCol="0" anchor="ctr"/>
+          <a:lstStyle/>
+          <a:p>
+            <a:pPr algn="ctr"/>
+            <a:endParaRPr lang="en-CH"/>
+          </a:p>
+        </p:txBody>
+      </p:sp>
+      <p:sp>
+        <p:nvSpPr>
+          <p:cNvPr id="12" name="Left-right Arrow 11">
+            <a:extLst>
+              <a:ext uri="{FF2B5EF4-FFF2-40B4-BE49-F238E27FC236}">
+                <a16:creationId xmlns:a16="http://schemas.microsoft.com/office/drawing/2014/main" id="{31C8DB79-D240-8FE1-6F69-F81EA04068CC}"/>
+              </a:ext>
+            </a:extLst>
+          </p:cNvPr>
+          <p:cNvSpPr/>
+          <p:nvPr/>
+        </p:nvSpPr>
+        <p:spPr>
+          <a:xfrm>
+            <a:off x="7672812" y="3603536"/>
+            <a:ext cx="1475339" cy="572173"/>
+          </a:xfrm>
+          <a:prstGeom prst="leftRightArrow">
+            <a:avLst/>
+          </a:prstGeom>
+          <a:solidFill>
+            <a:schemeClr val="accent1">
+              <a:lumMod val="40000"/>
+              <a:lumOff val="60000"/>
+            </a:schemeClr>
+          </a:solidFill>
+          <a:ln w="25400">
+            <a:solidFill>
+              <a:schemeClr val="accent2"/>
+            </a:solidFill>
+          </a:ln>
+        </p:spPr>
+        <p:style>
+          <a:lnRef idx="2">
+            <a:schemeClr val="accent1">
+              <a:shade val="15000"/>
+            </a:schemeClr>
+          </a:lnRef>
+          <a:fillRef idx="1">
+            <a:schemeClr val="accent1"/>
+          </a:fillRef>
+          <a:effectRef idx="0">
+            <a:schemeClr val="accent1"/>
+          </a:effectRef>
+          <a:fontRef idx="minor">
+            <a:schemeClr val="lt1"/>
+          </a:fontRef>
+        </p:style>
+        <p:txBody>
+          <a:bodyPr rtlCol="0" anchor="ctr"/>
+          <a:lstStyle/>
+          <a:p>
+            <a:pPr algn="ctr"/>
+            <a:endParaRPr lang="en-CH"/>
+          </a:p>
+        </p:txBody>
+      </p:sp>
+      <p:sp>
+        <p:nvSpPr>
+          <p:cNvPr id="15" name="Left-right Arrow 14">
+            <a:extLst>
+              <a:ext uri="{FF2B5EF4-FFF2-40B4-BE49-F238E27FC236}">
+                <a16:creationId xmlns:a16="http://schemas.microsoft.com/office/drawing/2014/main" id="{A7F1BB8F-2B11-063D-1C6D-FE1F37DBE0AE}"/>
+              </a:ext>
+            </a:extLst>
+          </p:cNvPr>
+          <p:cNvSpPr/>
+          <p:nvPr/>
+        </p:nvSpPr>
+        <p:spPr>
+          <a:xfrm>
+            <a:off x="7667233" y="1920454"/>
+            <a:ext cx="1475338" cy="572173"/>
+          </a:xfrm>
+          <a:prstGeom prst="leftRightArrow">
+            <a:avLst/>
+          </a:prstGeom>
+          <a:solidFill>
+            <a:schemeClr val="accent1">
+              <a:lumMod val="40000"/>
+              <a:lumOff val="60000"/>
+            </a:schemeClr>
+          </a:solidFill>
+          <a:ln w="25400">
+            <a:solidFill>
+              <a:schemeClr val="accent2"/>
+            </a:solidFill>
+          </a:ln>
+        </p:spPr>
+        <p:style>
+          <a:lnRef idx="2">
+            <a:schemeClr val="accent1">
+              <a:shade val="15000"/>
+            </a:schemeClr>
+          </a:lnRef>
+          <a:fillRef idx="1">
+            <a:schemeClr val="accent1"/>
+          </a:fillRef>
+          <a:effectRef idx="0">
+            <a:schemeClr val="accent1"/>
+          </a:effectRef>
+          <a:fontRef idx="minor">
+            <a:schemeClr val="lt1"/>
+          </a:fontRef>
+        </p:style>
+        <p:txBody>
+          <a:bodyPr rtlCol="0" anchor="ctr"/>
+          <a:lstStyle/>
+          <a:p>
+            <a:pPr algn="ctr"/>
+            <a:endParaRPr lang="en-CH"/>
+          </a:p>
+        </p:txBody>
+      </p:sp>
+      <p:pic>
+        <p:nvPicPr>
+          <p:cNvPr id="16" name="Picture 15">
+            <a:extLst>
+              <a:ext uri="{FF2B5EF4-FFF2-40B4-BE49-F238E27FC236}">
+                <a16:creationId xmlns:a16="http://schemas.microsoft.com/office/drawing/2014/main" id="{14B5DA73-6716-B91B-DAF0-BD5CAEF6FFEB}"/>
+              </a:ext>
+            </a:extLst>
+          </p:cNvPr>
+          <p:cNvPicPr>
+            <a:picLocks noChangeAspect="1"/>
+          </p:cNvPicPr>
+          <p:nvPr/>
+        </p:nvPicPr>
+        <p:blipFill>
+          <a:blip r:embed="rId2"/>
+          <a:stretch>
+            <a:fillRect/>
+          </a:stretch>
+        </p:blipFill>
+        <p:spPr>
+          <a:xfrm>
+            <a:off x="7967197" y="1889748"/>
+            <a:ext cx="875405" cy="625289"/>
+          </a:xfrm>
+          <a:prstGeom prst="rect">
+            <a:avLst/>
+          </a:prstGeom>
+        </p:spPr>
+      </p:pic>
+      <p:sp>
+        <p:nvSpPr>
+          <p:cNvPr id="17" name="Left-right Arrow 16">
+            <a:extLst>
+              <a:ext uri="{FF2B5EF4-FFF2-40B4-BE49-F238E27FC236}">
+                <a16:creationId xmlns:a16="http://schemas.microsoft.com/office/drawing/2014/main" id="{F6326789-7A30-2C01-6CC6-ABC189397337}"/>
+              </a:ext>
+            </a:extLst>
+          </p:cNvPr>
+          <p:cNvSpPr/>
+          <p:nvPr/>
+        </p:nvSpPr>
+        <p:spPr>
+          <a:xfrm>
+            <a:off x="7667232" y="4365374"/>
+            <a:ext cx="1475339" cy="572173"/>
+          </a:xfrm>
+          <a:prstGeom prst="leftRightArrow">
+            <a:avLst/>
+          </a:prstGeom>
+          <a:solidFill>
+            <a:schemeClr val="accent1">
+              <a:lumMod val="40000"/>
+              <a:lumOff val="60000"/>
+            </a:schemeClr>
+          </a:solidFill>
+          <a:ln w="25400">
+            <a:solidFill>
+              <a:schemeClr val="accent2"/>
+            </a:solidFill>
+          </a:ln>
+        </p:spPr>
+        <p:style>
+          <a:lnRef idx="2">
+            <a:schemeClr val="accent1">
+              <a:shade val="15000"/>
+            </a:schemeClr>
+          </a:lnRef>
+          <a:fillRef idx="1">
+            <a:schemeClr val="accent1"/>
+          </a:fillRef>
+          <a:effectRef idx="0">
+            <a:schemeClr val="accent1"/>
+          </a:effectRef>
+          <a:fontRef idx="minor">
+            <a:schemeClr val="lt1"/>
+          </a:fontRef>
+        </p:style>
+        <p:txBody>
+          <a:bodyPr rtlCol="0" anchor="ctr"/>
+          <a:lstStyle/>
+          <a:p>
+            <a:pPr algn="ctr"/>
+            <a:endParaRPr lang="en-CH"/>
+          </a:p>
+        </p:txBody>
+      </p:sp>
+      <p:pic>
+        <p:nvPicPr>
+          <p:cNvPr id="19" name="Picture 18">
+            <a:extLst>
+              <a:ext uri="{FF2B5EF4-FFF2-40B4-BE49-F238E27FC236}">
+                <a16:creationId xmlns:a16="http://schemas.microsoft.com/office/drawing/2014/main" id="{B1B33115-6333-27AD-C844-8962F2532315}"/>
+              </a:ext>
+            </a:extLst>
+          </p:cNvPr>
+          <p:cNvPicPr>
+            <a:picLocks noChangeAspect="1"/>
+          </p:cNvPicPr>
+          <p:nvPr/>
+        </p:nvPicPr>
+        <p:blipFill>
+          <a:blip r:embed="rId3"/>
+          <a:stretch>
+            <a:fillRect/>
+          </a:stretch>
+        </p:blipFill>
+        <p:spPr>
+          <a:xfrm>
+            <a:off x="8048989" y="2989099"/>
+            <a:ext cx="698570" cy="154491"/>
+          </a:xfrm>
+          <a:prstGeom prst="rect">
+            <a:avLst/>
+          </a:prstGeom>
+        </p:spPr>
+      </p:pic>
+      <p:pic>
+        <p:nvPicPr>
+          <p:cNvPr id="20" name="Picture 19">
+            <a:extLst>
+              <a:ext uri="{FF2B5EF4-FFF2-40B4-BE49-F238E27FC236}">
+                <a16:creationId xmlns:a16="http://schemas.microsoft.com/office/drawing/2014/main" id="{0A012B76-2D46-A05C-34DC-13EF6125A221}"/>
+              </a:ext>
+            </a:extLst>
+          </p:cNvPr>
+          <p:cNvPicPr>
+            <a:picLocks noChangeAspect="1"/>
+          </p:cNvPicPr>
+          <p:nvPr/>
+        </p:nvPicPr>
+        <p:blipFill>
+          <a:blip r:embed="rId4"/>
+          <a:stretch>
+            <a:fillRect/>
+          </a:stretch>
+        </p:blipFill>
+        <p:spPr>
+          <a:xfrm>
+            <a:off x="8157012" y="4410198"/>
+            <a:ext cx="482523" cy="482523"/>
+          </a:xfrm>
+          <a:prstGeom prst="rect">
+            <a:avLst/>
+          </a:prstGeom>
+        </p:spPr>
+      </p:pic>
+      <p:pic>
+        <p:nvPicPr>
+          <p:cNvPr id="21" name="Picture 20">
+            <a:extLst>
+              <a:ext uri="{FF2B5EF4-FFF2-40B4-BE49-F238E27FC236}">
+                <a16:creationId xmlns:a16="http://schemas.microsoft.com/office/drawing/2014/main" id="{007C9757-4A3E-E1FF-5A56-E4D6B152DDE6}"/>
+              </a:ext>
+            </a:extLst>
+          </p:cNvPr>
+          <p:cNvPicPr>
+            <a:picLocks noChangeAspect="1"/>
+          </p:cNvPicPr>
+          <p:nvPr/>
+        </p:nvPicPr>
+        <p:blipFill>
+          <a:blip r:embed="rId5"/>
+          <a:stretch>
+            <a:fillRect/>
+          </a:stretch>
+        </p:blipFill>
+        <p:spPr>
+          <a:xfrm>
+            <a:off x="8008801" y="3788731"/>
+            <a:ext cx="738758" cy="201847"/>
+          </a:xfrm>
+          <a:prstGeom prst="rect">
+            <a:avLst/>
+          </a:prstGeom>
+        </p:spPr>
+      </p:pic>
+      <p:sp>
+        <p:nvSpPr>
+          <p:cNvPr id="5" name="Rectangle 4">
+            <a:extLst>
+              <a:ext uri="{FF2B5EF4-FFF2-40B4-BE49-F238E27FC236}">
+                <a16:creationId xmlns:a16="http://schemas.microsoft.com/office/drawing/2014/main" id="{583DB8BD-88B9-6779-9A6E-E35AAED799E0}"/>
+              </a:ext>
+            </a:extLst>
+          </p:cNvPr>
+          <p:cNvSpPr/>
+          <p:nvPr/>
+        </p:nvSpPr>
+        <p:spPr>
+          <a:xfrm>
+            <a:off x="3169920" y="1663548"/>
+            <a:ext cx="4098925" cy="3530899"/>
+          </a:xfrm>
+          <a:prstGeom prst="rect">
+            <a:avLst/>
+          </a:prstGeom>
+          <a:solidFill>
+            <a:schemeClr val="tx2"/>
+          </a:solidFill>
+          <a:ln w="50800">
+            <a:solidFill>
+              <a:schemeClr val="accent1"/>
+            </a:solidFill>
+          </a:ln>
+        </p:spPr>
+        <p:style>
+          <a:lnRef idx="2">
+            <a:schemeClr val="accent1">
+              <a:shade val="15000"/>
+            </a:schemeClr>
+          </a:lnRef>
+          <a:fillRef idx="1">
+            <a:schemeClr val="accent1"/>
+          </a:fillRef>
+          <a:effectRef idx="0">
+            <a:schemeClr val="accent1"/>
+          </a:effectRef>
+          <a:fontRef idx="minor">
+            <a:schemeClr val="lt1"/>
+          </a:fontRef>
+        </p:style>
+        <p:txBody>
+          <a:bodyPr rtlCol="0" anchor="ctr"/>
+          <a:lstStyle/>
+          <a:p>
+            <a:pPr algn="ctr"/>
+            <a:r>
+              <a:rPr lang="en-CH" dirty="0">
+                <a:latin typeface="Sora" pitchFamily="2" charset="0"/>
+                <a:cs typeface="Sora" pitchFamily="2" charset="0"/>
+              </a:rPr>
+              <a:t>GenAI</a:t>
+            </a:r>
+          </a:p>
+        </p:txBody>
+      </p:sp>
+    </p:spTree>
+    <p:extLst>
+      <p:ext uri="{BB962C8B-B14F-4D97-AF65-F5344CB8AC3E}">
+        <p14:creationId xmlns:p14="http://schemas.microsoft.com/office/powerpoint/2010/main" val="1129169966"/>
+      </p:ext>
+    </p:extLst>
+  </p:cSld>
+  <p:clrMapOvr>
+    <a:masterClrMapping/>
+  </p:clrMapOvr>
+</p:sld>
+</file>
+
+<file path=ppt/slides/slide4.xml><?xml version="1.0" encoding="utf-8"?>
+<p:sld xmlns:a="http://schemas.openxmlformats.org/drawingml/2006/main" xmlns:r="http://schemas.openxmlformats.org/officeDocument/2006/relationships" xmlns:p="http://schemas.openxmlformats.org/presentationml/2006/main">
+  <p:cSld>
+    <p:spTree>
+      <p:nvGrpSpPr>
+        <p:cNvPr id="1" name="">
+          <a:extLst>
+            <a:ext uri="{FF2B5EF4-FFF2-40B4-BE49-F238E27FC236}">
+              <a16:creationId xmlns:a16="http://schemas.microsoft.com/office/drawing/2014/main" id="{8CA463E3-B3F4-57F1-B9FC-9DB8D03FD2B1}"/>
+            </a:ext>
+          </a:extLst>
+        </p:cNvPr>
+        <p:cNvGrpSpPr/>
+        <p:nvPr/>
+      </p:nvGrpSpPr>
+      <p:grpSpPr>
+        <a:xfrm>
+          <a:off x="0" y="0"/>
+          <a:ext cx="0" cy="0"/>
+          <a:chOff x="0" y="0"/>
+          <a:chExt cx="0" cy="0"/>
+        </a:xfrm>
+      </p:grpSpPr>
+      <p:sp>
+        <p:nvSpPr>
+          <p:cNvPr id="6" name="Rectangle 5">
+            <a:extLst>
+              <a:ext uri="{FF2B5EF4-FFF2-40B4-BE49-F238E27FC236}">
+                <a16:creationId xmlns:a16="http://schemas.microsoft.com/office/drawing/2014/main" id="{6FB168B6-B986-5EA0-5616-D54797B09648}"/>
+              </a:ext>
+            </a:extLst>
+          </p:cNvPr>
+          <p:cNvSpPr/>
+          <p:nvPr/>
+        </p:nvSpPr>
+        <p:spPr>
+          <a:xfrm>
+            <a:off x="8753138" y="1663549"/>
+            <a:ext cx="1398488" cy="3530899"/>
+          </a:xfrm>
+          <a:prstGeom prst="rect">
+            <a:avLst/>
+          </a:prstGeom>
+          <a:solidFill>
+            <a:schemeClr val="accent1">
+              <a:lumMod val="40000"/>
+              <a:lumOff val="60000"/>
+            </a:schemeClr>
+          </a:solidFill>
+          <a:ln w="50800">
+            <a:solidFill>
+              <a:schemeClr val="tx2"/>
+            </a:solidFill>
+          </a:ln>
+        </p:spPr>
+        <p:style>
+          <a:lnRef idx="2">
+            <a:schemeClr val="accent1">
+              <a:shade val="15000"/>
+            </a:schemeClr>
+          </a:lnRef>
+          <a:fillRef idx="1">
+            <a:schemeClr val="accent1"/>
+          </a:fillRef>
+          <a:effectRef idx="0">
+            <a:schemeClr val="accent1"/>
+          </a:effectRef>
+          <a:fontRef idx="minor">
+            <a:schemeClr val="lt1"/>
+          </a:fontRef>
+        </p:style>
+        <p:txBody>
+          <a:bodyPr rtlCol="0" anchor="ctr"/>
+          <a:lstStyle/>
+          <a:p>
+            <a:pPr algn="ctr"/>
+            <a:r>
+              <a:rPr lang="en-CH" dirty="0">
+                <a:solidFill>
+                  <a:schemeClr val="accent2"/>
+                </a:solidFill>
+                <a:latin typeface="Sora" pitchFamily="2" charset="0"/>
+                <a:cs typeface="Sora" pitchFamily="2" charset="0"/>
+              </a:rPr>
+              <a:t>      APIs</a:t>
+            </a:r>
+          </a:p>
+          <a:p>
+            <a:pPr algn="ctr"/>
+            <a:r>
+              <a:rPr lang="en-CH" dirty="0">
+                <a:solidFill>
+                  <a:schemeClr val="accent2"/>
+                </a:solidFill>
+                <a:latin typeface="Sora" pitchFamily="2" charset="0"/>
+                <a:cs typeface="Sora" pitchFamily="2" charset="0"/>
+              </a:rPr>
+              <a:t>     &amp;</a:t>
+            </a:r>
+            <a:br>
+              <a:rPr lang="en-CH" dirty="0">
+                <a:solidFill>
+                  <a:schemeClr val="accent2"/>
+                </a:solidFill>
+                <a:latin typeface="Sora" pitchFamily="2" charset="0"/>
+                <a:cs typeface="Sora" pitchFamily="2" charset="0"/>
+              </a:rPr>
+            </a:br>
+            <a:r>
+              <a:rPr lang="en-CH" dirty="0">
+                <a:solidFill>
+                  <a:schemeClr val="accent2"/>
+                </a:solidFill>
+                <a:latin typeface="Sora" pitchFamily="2" charset="0"/>
+                <a:cs typeface="Sora" pitchFamily="2" charset="0"/>
+              </a:rPr>
+              <a:t>     Data</a:t>
+            </a:r>
+          </a:p>
+        </p:txBody>
+      </p:sp>
+      <p:cxnSp>
+        <p:nvCxnSpPr>
+          <p:cNvPr id="9" name="Straight Connector 8">
+            <a:extLst>
+              <a:ext uri="{FF2B5EF4-FFF2-40B4-BE49-F238E27FC236}">
+                <a16:creationId xmlns:a16="http://schemas.microsoft.com/office/drawing/2014/main" id="{CC70D749-0F8F-D4F8-A68D-275A79A8A47D}"/>
+              </a:ext>
+            </a:extLst>
+          </p:cNvPr>
+          <p:cNvCxnSpPr>
+            <a:cxnSpLocks/>
+          </p:cNvCxnSpPr>
+          <p:nvPr/>
+        </p:nvCxnSpPr>
+        <p:spPr>
+          <a:xfrm>
+            <a:off x="8419652" y="1245196"/>
+            <a:ext cx="0" cy="4682268"/>
+          </a:xfrm>
+          <a:prstGeom prst="line">
+            <a:avLst/>
+          </a:prstGeom>
+          <a:ln w="254000">
+            <a:solidFill>
+              <a:schemeClr val="tx2"/>
+            </a:solidFill>
+          </a:ln>
+        </p:spPr>
+        <p:style>
+          <a:lnRef idx="1">
+            <a:schemeClr val="accent1"/>
+          </a:lnRef>
+          <a:fillRef idx="0">
+            <a:schemeClr val="accent1"/>
+          </a:fillRef>
+          <a:effectRef idx="0">
+            <a:schemeClr val="accent1"/>
+          </a:effectRef>
+          <a:fontRef idx="minor">
+            <a:schemeClr val="tx1"/>
+          </a:fontRef>
+        </p:style>
+      </p:cxnSp>
+      <p:sp>
+        <p:nvSpPr>
+          <p:cNvPr id="10" name="TextBox 9">
+            <a:extLst>
+              <a:ext uri="{FF2B5EF4-FFF2-40B4-BE49-F238E27FC236}">
+                <a16:creationId xmlns:a16="http://schemas.microsoft.com/office/drawing/2014/main" id="{73050C58-B983-57DA-037C-D801F9102676}"/>
+              </a:ext>
+            </a:extLst>
+          </p:cNvPr>
+          <p:cNvSpPr txBox="1"/>
+          <p:nvPr/>
+        </p:nvSpPr>
+        <p:spPr>
+          <a:xfrm>
+            <a:off x="5027530" y="5428134"/>
+            <a:ext cx="1192955" cy="369332"/>
+          </a:xfrm>
+          <a:prstGeom prst="rect">
+            <a:avLst/>
+          </a:prstGeom>
+          <a:noFill/>
+        </p:spPr>
+        <p:txBody>
+          <a:bodyPr wrap="none" rtlCol="0">
+            <a:spAutoFit/>
+          </a:bodyPr>
+          <a:lstStyle/>
+          <a:p>
+            <a:r>
+              <a:rPr lang="en-CH" dirty="0">
+                <a:latin typeface="Sora" pitchFamily="2" charset="0"/>
+                <a:cs typeface="Sora" pitchFamily="2" charset="0"/>
+              </a:rPr>
+              <a:t>Solution</a:t>
+            </a:r>
+          </a:p>
+        </p:txBody>
+      </p:sp>
+      <p:sp>
+        <p:nvSpPr>
+          <p:cNvPr id="11" name="TextBox 10">
+            <a:extLst>
+              <a:ext uri="{FF2B5EF4-FFF2-40B4-BE49-F238E27FC236}">
+                <a16:creationId xmlns:a16="http://schemas.microsoft.com/office/drawing/2014/main" id="{84EF08C2-7ABC-08CF-BB49-6A93DB2B6410}"/>
+              </a:ext>
+            </a:extLst>
+          </p:cNvPr>
+          <p:cNvSpPr txBox="1"/>
+          <p:nvPr/>
+        </p:nvSpPr>
+        <p:spPr>
+          <a:xfrm>
+            <a:off x="8709483" y="5428134"/>
+            <a:ext cx="1540806" cy="369332"/>
+          </a:xfrm>
+          <a:prstGeom prst="rect">
+            <a:avLst/>
+          </a:prstGeom>
+          <a:noFill/>
+        </p:spPr>
+        <p:txBody>
+          <a:bodyPr wrap="none" rtlCol="0">
+            <a:spAutoFit/>
+          </a:bodyPr>
+          <a:lstStyle/>
+          <a:p>
+            <a:r>
+              <a:rPr lang="en-CH" dirty="0">
+                <a:latin typeface="Sora" pitchFamily="2" charset="0"/>
+                <a:cs typeface="Sora" pitchFamily="2" charset="0"/>
+              </a:rPr>
+              <a:t>Foundation</a:t>
+            </a:r>
+          </a:p>
+        </p:txBody>
+      </p:sp>
+      <p:sp>
+        <p:nvSpPr>
+          <p:cNvPr id="2" name="Right Arrow 1">
+            <a:extLst>
+              <a:ext uri="{FF2B5EF4-FFF2-40B4-BE49-F238E27FC236}">
+                <a16:creationId xmlns:a16="http://schemas.microsoft.com/office/drawing/2014/main" id="{091B144D-84AB-21B0-FD35-822697AAEC16}"/>
+              </a:ext>
+            </a:extLst>
+          </p:cNvPr>
+          <p:cNvSpPr/>
+          <p:nvPr/>
+        </p:nvSpPr>
+        <p:spPr>
+          <a:xfrm>
+            <a:off x="1369100" y="2695096"/>
+            <a:ext cx="1394906" cy="563878"/>
+          </a:xfrm>
+          <a:prstGeom prst="rightArrow">
+            <a:avLst/>
+          </a:prstGeom>
+          <a:solidFill>
+            <a:schemeClr val="accent1">
+              <a:lumMod val="40000"/>
+              <a:lumOff val="60000"/>
+            </a:schemeClr>
+          </a:solidFill>
+          <a:ln w="25400">
+            <a:solidFill>
+              <a:schemeClr val="tx2"/>
+            </a:solidFill>
+          </a:ln>
+        </p:spPr>
+        <p:style>
+          <a:lnRef idx="2">
+            <a:schemeClr val="accent1">
+              <a:shade val="15000"/>
+            </a:schemeClr>
+          </a:lnRef>
+          <a:fillRef idx="1">
+            <a:schemeClr val="accent1"/>
+          </a:fillRef>
+          <a:effectRef idx="0">
+            <a:schemeClr val="accent1"/>
+          </a:effectRef>
+          <a:fontRef idx="minor">
+            <a:schemeClr val="lt1"/>
+          </a:fontRef>
+        </p:style>
+        <p:txBody>
+          <a:bodyPr rtlCol="0" anchor="ctr"/>
+          <a:lstStyle/>
+          <a:p>
+            <a:pPr algn="ctr"/>
+            <a:r>
+              <a:rPr lang="en-CH" sz="1400" dirty="0">
+                <a:solidFill>
+                  <a:schemeClr val="accent2"/>
+                </a:solidFill>
+                <a:latin typeface="Sora" pitchFamily="2" charset="0"/>
+                <a:cs typeface="Sora" pitchFamily="2" charset="0"/>
+              </a:rPr>
+              <a:t>Input</a:t>
+            </a:r>
+            <a:endParaRPr lang="en-CH" dirty="0">
+              <a:solidFill>
+                <a:schemeClr val="accent2"/>
+              </a:solidFill>
+              <a:latin typeface="Sora" pitchFamily="2" charset="0"/>
+              <a:cs typeface="Sora" pitchFamily="2" charset="0"/>
+            </a:endParaRPr>
+          </a:p>
+        </p:txBody>
+      </p:sp>
+      <p:sp>
+        <p:nvSpPr>
+          <p:cNvPr id="3" name="TextBox 2">
+            <a:extLst>
+              <a:ext uri="{FF2B5EF4-FFF2-40B4-BE49-F238E27FC236}">
+                <a16:creationId xmlns:a16="http://schemas.microsoft.com/office/drawing/2014/main" id="{34C6740D-28FE-042B-A3DA-F5A0D55F5447}"/>
+              </a:ext>
+            </a:extLst>
+          </p:cNvPr>
+          <p:cNvSpPr txBox="1"/>
+          <p:nvPr/>
+        </p:nvSpPr>
+        <p:spPr>
+          <a:xfrm>
+            <a:off x="1303140" y="3267269"/>
+            <a:ext cx="1534394" cy="369332"/>
+          </a:xfrm>
+          <a:prstGeom prst="rect">
+            <a:avLst/>
+          </a:prstGeom>
+          <a:noFill/>
+        </p:spPr>
+        <p:txBody>
+          <a:bodyPr wrap="none" rtlCol="0">
+            <a:spAutoFit/>
+          </a:bodyPr>
+          <a:lstStyle/>
+          <a:p>
+            <a:r>
+              <a:rPr lang="en-CH" dirty="0">
+                <a:latin typeface="Sora" pitchFamily="2" charset="0"/>
+                <a:cs typeface="Sora" pitchFamily="2" charset="0"/>
+              </a:rPr>
+              <a:t>Consumers</a:t>
+            </a:r>
+          </a:p>
+        </p:txBody>
+      </p:sp>
+      <p:sp>
+        <p:nvSpPr>
+          <p:cNvPr id="8" name="Right Arrow 7">
+            <a:extLst>
+              <a:ext uri="{FF2B5EF4-FFF2-40B4-BE49-F238E27FC236}">
+                <a16:creationId xmlns:a16="http://schemas.microsoft.com/office/drawing/2014/main" id="{DFA28002-E8B7-F944-B695-BA8F83F30E4F}"/>
+              </a:ext>
+            </a:extLst>
+          </p:cNvPr>
+          <p:cNvSpPr/>
+          <p:nvPr/>
+        </p:nvSpPr>
+        <p:spPr>
+          <a:xfrm>
+            <a:off x="1343113" y="3645649"/>
+            <a:ext cx="1394906" cy="563878"/>
+          </a:xfrm>
+          <a:prstGeom prst="leftArrow">
+            <a:avLst/>
+          </a:prstGeom>
+          <a:solidFill>
+            <a:schemeClr val="accent1">
+              <a:lumMod val="40000"/>
+              <a:lumOff val="60000"/>
+            </a:schemeClr>
+          </a:solidFill>
+          <a:ln w="25400">
+            <a:solidFill>
+              <a:schemeClr val="tx2"/>
+            </a:solidFill>
+          </a:ln>
+        </p:spPr>
+        <p:style>
+          <a:lnRef idx="2">
+            <a:schemeClr val="accent1">
+              <a:shade val="15000"/>
+            </a:schemeClr>
+          </a:lnRef>
+          <a:fillRef idx="1">
+            <a:schemeClr val="accent1"/>
+          </a:fillRef>
+          <a:effectRef idx="0">
+            <a:schemeClr val="accent1"/>
+          </a:effectRef>
+          <a:fontRef idx="minor">
+            <a:schemeClr val="lt1"/>
+          </a:fontRef>
+        </p:style>
+        <p:txBody>
+          <a:bodyPr rtlCol="0" anchor="ctr"/>
+          <a:lstStyle/>
+          <a:p>
+            <a:pPr algn="ctr"/>
+            <a:r>
+              <a:rPr lang="en-CH" sz="1400" dirty="0">
+                <a:solidFill>
+                  <a:schemeClr val="accent2"/>
+                </a:solidFill>
+                <a:latin typeface="Sora" pitchFamily="2" charset="0"/>
+                <a:cs typeface="Sora" pitchFamily="2" charset="0"/>
+              </a:rPr>
+              <a:t>Output</a:t>
+            </a:r>
+            <a:endParaRPr lang="en-CH" dirty="0">
+              <a:solidFill>
+                <a:schemeClr val="accent2"/>
+              </a:solidFill>
+              <a:latin typeface="Sora" pitchFamily="2" charset="0"/>
+              <a:cs typeface="Sora" pitchFamily="2" charset="0"/>
+            </a:endParaRPr>
+          </a:p>
+        </p:txBody>
+      </p:sp>
+      <p:sp>
+        <p:nvSpPr>
+          <p:cNvPr id="4" name="Left-right Arrow 3">
+            <a:extLst>
+              <a:ext uri="{FF2B5EF4-FFF2-40B4-BE49-F238E27FC236}">
+                <a16:creationId xmlns:a16="http://schemas.microsoft.com/office/drawing/2014/main" id="{CD764DF1-94A8-2DCD-FDA1-1D8D417AE408}"/>
+              </a:ext>
+            </a:extLst>
+          </p:cNvPr>
+          <p:cNvSpPr/>
+          <p:nvPr/>
+        </p:nvSpPr>
+        <p:spPr>
+          <a:xfrm>
+            <a:off x="7667233" y="2773200"/>
+            <a:ext cx="1475338" cy="572173"/>
+          </a:xfrm>
+          <a:prstGeom prst="leftRightArrow">
+            <a:avLst/>
+          </a:prstGeom>
+          <a:solidFill>
+            <a:schemeClr val="accent1">
+              <a:lumMod val="40000"/>
+              <a:lumOff val="60000"/>
+            </a:schemeClr>
+          </a:solidFill>
+          <a:ln w="25400">
+            <a:solidFill>
+              <a:schemeClr val="accent2"/>
+            </a:solidFill>
+          </a:ln>
+        </p:spPr>
+        <p:style>
+          <a:lnRef idx="2">
+            <a:schemeClr val="accent1">
+              <a:shade val="15000"/>
+            </a:schemeClr>
+          </a:lnRef>
+          <a:fillRef idx="1">
+            <a:schemeClr val="accent1"/>
+          </a:fillRef>
+          <a:effectRef idx="0">
+            <a:schemeClr val="accent1"/>
+          </a:effectRef>
+          <a:fontRef idx="minor">
+            <a:schemeClr val="lt1"/>
+          </a:fontRef>
+        </p:style>
+        <p:txBody>
+          <a:bodyPr rtlCol="0" anchor="ctr"/>
+          <a:lstStyle/>
+          <a:p>
+            <a:pPr algn="ctr"/>
+            <a:endParaRPr lang="en-CH"/>
+          </a:p>
+        </p:txBody>
+      </p:sp>
+      <p:sp>
+        <p:nvSpPr>
+          <p:cNvPr id="12" name="Left-right Arrow 11">
+            <a:extLst>
+              <a:ext uri="{FF2B5EF4-FFF2-40B4-BE49-F238E27FC236}">
+                <a16:creationId xmlns:a16="http://schemas.microsoft.com/office/drawing/2014/main" id="{F755AE3A-D893-23FA-F48E-BE8E5446B3C2}"/>
+              </a:ext>
+            </a:extLst>
+          </p:cNvPr>
+          <p:cNvSpPr/>
+          <p:nvPr/>
+        </p:nvSpPr>
+        <p:spPr>
+          <a:xfrm>
+            <a:off x="7672812" y="3603536"/>
+            <a:ext cx="1475339" cy="572173"/>
+          </a:xfrm>
+          <a:prstGeom prst="leftRightArrow">
+            <a:avLst/>
+          </a:prstGeom>
+          <a:solidFill>
+            <a:schemeClr val="accent1">
+              <a:lumMod val="40000"/>
+              <a:lumOff val="60000"/>
+            </a:schemeClr>
+          </a:solidFill>
+          <a:ln w="25400">
+            <a:solidFill>
+              <a:schemeClr val="accent2"/>
+            </a:solidFill>
+          </a:ln>
+        </p:spPr>
+        <p:style>
+          <a:lnRef idx="2">
+            <a:schemeClr val="accent1">
+              <a:shade val="15000"/>
+            </a:schemeClr>
+          </a:lnRef>
+          <a:fillRef idx="1">
+            <a:schemeClr val="accent1"/>
+          </a:fillRef>
+          <a:effectRef idx="0">
+            <a:schemeClr val="accent1"/>
+          </a:effectRef>
+          <a:fontRef idx="minor">
+            <a:schemeClr val="lt1"/>
+          </a:fontRef>
+        </p:style>
+        <p:txBody>
+          <a:bodyPr rtlCol="0" anchor="ctr"/>
+          <a:lstStyle/>
+          <a:p>
+            <a:pPr algn="ctr"/>
+            <a:endParaRPr lang="en-CH"/>
+          </a:p>
+        </p:txBody>
+      </p:sp>
+      <p:sp>
+        <p:nvSpPr>
+          <p:cNvPr id="15" name="Left-right Arrow 14">
+            <a:extLst>
+              <a:ext uri="{FF2B5EF4-FFF2-40B4-BE49-F238E27FC236}">
+                <a16:creationId xmlns:a16="http://schemas.microsoft.com/office/drawing/2014/main" id="{30E25469-AB71-68F1-A6B1-5EEFD32B9388}"/>
+              </a:ext>
+            </a:extLst>
+          </p:cNvPr>
+          <p:cNvSpPr/>
+          <p:nvPr/>
+        </p:nvSpPr>
+        <p:spPr>
+          <a:xfrm>
+            <a:off x="7667233" y="1920454"/>
+            <a:ext cx="1475338" cy="572173"/>
+          </a:xfrm>
+          <a:prstGeom prst="leftRightArrow">
+            <a:avLst/>
+          </a:prstGeom>
+          <a:solidFill>
+            <a:schemeClr val="accent1">
+              <a:lumMod val="40000"/>
+              <a:lumOff val="60000"/>
+            </a:schemeClr>
+          </a:solidFill>
+          <a:ln w="25400">
+            <a:solidFill>
+              <a:schemeClr val="accent2"/>
+            </a:solidFill>
+          </a:ln>
+        </p:spPr>
+        <p:style>
+          <a:lnRef idx="2">
+            <a:schemeClr val="accent1">
+              <a:shade val="15000"/>
+            </a:schemeClr>
+          </a:lnRef>
+          <a:fillRef idx="1">
+            <a:schemeClr val="accent1"/>
+          </a:fillRef>
+          <a:effectRef idx="0">
+            <a:schemeClr val="accent1"/>
+          </a:effectRef>
+          <a:fontRef idx="minor">
+            <a:schemeClr val="lt1"/>
+          </a:fontRef>
+        </p:style>
+        <p:txBody>
+          <a:bodyPr rtlCol="0" anchor="ctr"/>
+          <a:lstStyle/>
+          <a:p>
+            <a:pPr algn="ctr"/>
+            <a:endParaRPr lang="en-CH"/>
+          </a:p>
+        </p:txBody>
+      </p:sp>
+      <p:pic>
+        <p:nvPicPr>
+          <p:cNvPr id="16" name="Picture 15">
+            <a:extLst>
+              <a:ext uri="{FF2B5EF4-FFF2-40B4-BE49-F238E27FC236}">
+                <a16:creationId xmlns:a16="http://schemas.microsoft.com/office/drawing/2014/main" id="{9BFBDF35-AE5A-7DC3-FAB0-E1FED103F167}"/>
+              </a:ext>
+            </a:extLst>
+          </p:cNvPr>
+          <p:cNvPicPr>
+            <a:picLocks noChangeAspect="1"/>
+          </p:cNvPicPr>
+          <p:nvPr/>
+        </p:nvPicPr>
+        <p:blipFill>
+          <a:blip r:embed="rId2"/>
+          <a:stretch>
+            <a:fillRect/>
+          </a:stretch>
+        </p:blipFill>
+        <p:spPr>
+          <a:xfrm>
+            <a:off x="7967197" y="1889748"/>
+            <a:ext cx="875405" cy="625289"/>
+          </a:xfrm>
+          <a:prstGeom prst="rect">
+            <a:avLst/>
+          </a:prstGeom>
+        </p:spPr>
+      </p:pic>
+      <p:sp>
+        <p:nvSpPr>
+          <p:cNvPr id="17" name="Left-right Arrow 16">
+            <a:extLst>
+              <a:ext uri="{FF2B5EF4-FFF2-40B4-BE49-F238E27FC236}">
+                <a16:creationId xmlns:a16="http://schemas.microsoft.com/office/drawing/2014/main" id="{DB17D0BD-8A4E-A76E-B69F-43BA904B147E}"/>
+              </a:ext>
+            </a:extLst>
+          </p:cNvPr>
+          <p:cNvSpPr/>
+          <p:nvPr/>
+        </p:nvSpPr>
+        <p:spPr>
+          <a:xfrm>
+            <a:off x="7667232" y="4365374"/>
+            <a:ext cx="1475339" cy="572173"/>
+          </a:xfrm>
+          <a:prstGeom prst="leftRightArrow">
+            <a:avLst/>
+          </a:prstGeom>
+          <a:solidFill>
+            <a:schemeClr val="accent1">
+              <a:lumMod val="40000"/>
+              <a:lumOff val="60000"/>
+            </a:schemeClr>
+          </a:solidFill>
+          <a:ln w="25400">
+            <a:solidFill>
+              <a:schemeClr val="accent2"/>
+            </a:solidFill>
+          </a:ln>
+        </p:spPr>
+        <p:style>
+          <a:lnRef idx="2">
+            <a:schemeClr val="accent1">
+              <a:shade val="15000"/>
+            </a:schemeClr>
+          </a:lnRef>
+          <a:fillRef idx="1">
+            <a:schemeClr val="accent1"/>
+          </a:fillRef>
+          <a:effectRef idx="0">
+            <a:schemeClr val="accent1"/>
+          </a:effectRef>
+          <a:fontRef idx="minor">
+            <a:schemeClr val="lt1"/>
+          </a:fontRef>
+        </p:style>
+        <p:txBody>
+          <a:bodyPr rtlCol="0" anchor="ctr"/>
+          <a:lstStyle/>
+          <a:p>
+            <a:pPr algn="ctr"/>
+            <a:endParaRPr lang="en-CH"/>
+          </a:p>
+        </p:txBody>
+      </p:sp>
+      <p:pic>
+        <p:nvPicPr>
+          <p:cNvPr id="19" name="Picture 18">
+            <a:extLst>
+              <a:ext uri="{FF2B5EF4-FFF2-40B4-BE49-F238E27FC236}">
+                <a16:creationId xmlns:a16="http://schemas.microsoft.com/office/drawing/2014/main" id="{B98B3228-43B4-7EDE-028C-F74352F29405}"/>
+              </a:ext>
+            </a:extLst>
+          </p:cNvPr>
+          <p:cNvPicPr>
+            <a:picLocks noChangeAspect="1"/>
+          </p:cNvPicPr>
+          <p:nvPr/>
+        </p:nvPicPr>
+        <p:blipFill>
+          <a:blip r:embed="rId3"/>
+          <a:stretch>
+            <a:fillRect/>
+          </a:stretch>
+        </p:blipFill>
+        <p:spPr>
+          <a:xfrm>
+            <a:off x="8048989" y="2989099"/>
+            <a:ext cx="698570" cy="154491"/>
+          </a:xfrm>
+          <a:prstGeom prst="rect">
+            <a:avLst/>
+          </a:prstGeom>
+        </p:spPr>
+      </p:pic>
+      <p:pic>
+        <p:nvPicPr>
+          <p:cNvPr id="20" name="Picture 19">
+            <a:extLst>
+              <a:ext uri="{FF2B5EF4-FFF2-40B4-BE49-F238E27FC236}">
+                <a16:creationId xmlns:a16="http://schemas.microsoft.com/office/drawing/2014/main" id="{F4DFAA33-78AB-5509-4D03-F3A981FEEA21}"/>
+              </a:ext>
+            </a:extLst>
+          </p:cNvPr>
+          <p:cNvPicPr>
+            <a:picLocks noChangeAspect="1"/>
+          </p:cNvPicPr>
+          <p:nvPr/>
+        </p:nvPicPr>
+        <p:blipFill>
+          <a:blip r:embed="rId4"/>
+          <a:stretch>
+            <a:fillRect/>
+          </a:stretch>
+        </p:blipFill>
+        <p:spPr>
+          <a:xfrm>
+            <a:off x="8157012" y="4410198"/>
+            <a:ext cx="482523" cy="482523"/>
+          </a:xfrm>
+          <a:prstGeom prst="rect">
+            <a:avLst/>
+          </a:prstGeom>
+        </p:spPr>
+      </p:pic>
+      <p:pic>
+        <p:nvPicPr>
+          <p:cNvPr id="21" name="Picture 20">
+            <a:extLst>
+              <a:ext uri="{FF2B5EF4-FFF2-40B4-BE49-F238E27FC236}">
+                <a16:creationId xmlns:a16="http://schemas.microsoft.com/office/drawing/2014/main" id="{B012CA82-8EA8-FACA-5316-BB70BE56C141}"/>
+              </a:ext>
+            </a:extLst>
+          </p:cNvPr>
+          <p:cNvPicPr>
+            <a:picLocks noChangeAspect="1"/>
+          </p:cNvPicPr>
+          <p:nvPr/>
+        </p:nvPicPr>
+        <p:blipFill>
+          <a:blip r:embed="rId5"/>
+          <a:stretch>
+            <a:fillRect/>
+          </a:stretch>
+        </p:blipFill>
+        <p:spPr>
+          <a:xfrm>
+            <a:off x="8008801" y="3788731"/>
+            <a:ext cx="738758" cy="201847"/>
+          </a:xfrm>
+          <a:prstGeom prst="rect">
+            <a:avLst/>
+          </a:prstGeom>
+        </p:spPr>
+      </p:pic>
+      <p:sp>
+        <p:nvSpPr>
+          <p:cNvPr id="5" name="Rectangle 4">
+            <a:extLst>
+              <a:ext uri="{FF2B5EF4-FFF2-40B4-BE49-F238E27FC236}">
+                <a16:creationId xmlns:a16="http://schemas.microsoft.com/office/drawing/2014/main" id="{8D07CDB2-0DB5-8C13-1512-04D16A03593E}"/>
+              </a:ext>
+            </a:extLst>
+          </p:cNvPr>
+          <p:cNvSpPr/>
+          <p:nvPr/>
+        </p:nvSpPr>
+        <p:spPr>
+          <a:xfrm>
+            <a:off x="3169920" y="1663548"/>
+            <a:ext cx="4098925" cy="3530899"/>
+          </a:xfrm>
+          <a:prstGeom prst="rect">
+            <a:avLst/>
+          </a:prstGeom>
+          <a:solidFill>
+            <a:schemeClr val="tx2"/>
+          </a:solidFill>
+          <a:ln w="50800">
+            <a:solidFill>
+              <a:schemeClr val="accent1"/>
+            </a:solidFill>
+          </a:ln>
+        </p:spPr>
+        <p:style>
+          <a:lnRef idx="2">
+            <a:schemeClr val="accent1">
+              <a:shade val="15000"/>
+            </a:schemeClr>
+          </a:lnRef>
+          <a:fillRef idx="1">
+            <a:schemeClr val="accent1"/>
+          </a:fillRef>
+          <a:effectRef idx="0">
+            <a:schemeClr val="accent1"/>
+          </a:effectRef>
+          <a:fontRef idx="minor">
+            <a:schemeClr val="lt1"/>
+          </a:fontRef>
+        </p:style>
+        <p:txBody>
+          <a:bodyPr rtlCol="0" anchor="ctr"/>
+          <a:lstStyle/>
+          <a:p>
+            <a:pPr algn="ctr"/>
+            <a:r>
+              <a:rPr lang="en-CH" dirty="0">
+                <a:latin typeface="Sora" pitchFamily="2" charset="0"/>
+                <a:cs typeface="Sora" pitchFamily="2" charset="0"/>
+              </a:rPr>
+              <a:t>GenAI</a:t>
+            </a:r>
+          </a:p>
+        </p:txBody>
+      </p:sp>
+      <p:sp>
+        <p:nvSpPr>
+          <p:cNvPr id="14" name="Rectangle 13">
+            <a:extLst>
+              <a:ext uri="{FF2B5EF4-FFF2-40B4-BE49-F238E27FC236}">
+                <a16:creationId xmlns:a16="http://schemas.microsoft.com/office/drawing/2014/main" id="{1765D0F7-9297-834D-A971-826963D94850}"/>
+              </a:ext>
+            </a:extLst>
+          </p:cNvPr>
+          <p:cNvSpPr/>
+          <p:nvPr/>
+        </p:nvSpPr>
+        <p:spPr>
+          <a:xfrm>
+            <a:off x="3382913" y="1889748"/>
+            <a:ext cx="2135887" cy="527633"/>
+          </a:xfrm>
+          <a:prstGeom prst="rect">
+            <a:avLst/>
+          </a:prstGeom>
+          <a:solidFill>
+            <a:srgbClr val="637E3C"/>
+          </a:solidFill>
+          <a:ln w="50800">
+            <a:solidFill>
+              <a:schemeClr val="accent1"/>
+            </a:solidFill>
+          </a:ln>
+        </p:spPr>
+        <p:style>
+          <a:lnRef idx="2">
+            <a:schemeClr val="accent1">
+              <a:shade val="15000"/>
+            </a:schemeClr>
+          </a:lnRef>
+          <a:fillRef idx="1">
+            <a:schemeClr val="accent1"/>
+          </a:fillRef>
+          <a:effectRef idx="0">
+            <a:schemeClr val="accent1"/>
+          </a:effectRef>
+          <a:fontRef idx="minor">
+            <a:schemeClr val="lt1"/>
+          </a:fontRef>
+        </p:style>
+        <p:txBody>
+          <a:bodyPr rtlCol="0" anchor="ctr"/>
+          <a:lstStyle/>
+          <a:p>
+            <a:pPr algn="ctr"/>
+            <a:r>
+              <a:rPr lang="en-CH" dirty="0">
+                <a:latin typeface="Sora" pitchFamily="2" charset="0"/>
+                <a:cs typeface="Sora" pitchFamily="2" charset="0"/>
+              </a:rPr>
+              <a:t>Prompts</a:t>
+            </a:r>
+          </a:p>
+        </p:txBody>
+      </p:sp>
+    </p:spTree>
+    <p:extLst>
+      <p:ext uri="{BB962C8B-B14F-4D97-AF65-F5344CB8AC3E}">
+        <p14:creationId xmlns:p14="http://schemas.microsoft.com/office/powerpoint/2010/main" val="4195933011"/>
+      </p:ext>
+    </p:extLst>
+  </p:cSld>
+  <p:clrMapOvr>
+    <a:masterClrMapping/>
+  </p:clrMapOvr>
+</p:sld>
+</file>
+
+<file path=ppt/slides/slide5.xml><?xml version="1.0" encoding="utf-8"?>
+<p:sld xmlns:a="http://schemas.openxmlformats.org/drawingml/2006/main" xmlns:r="http://schemas.openxmlformats.org/officeDocument/2006/relationships" xmlns:p="http://schemas.openxmlformats.org/presentationml/2006/main">
+  <p:cSld>
+    <p:spTree>
+      <p:nvGrpSpPr>
         <p:cNvPr id="1" name=""/>
         <p:cNvGrpSpPr/>
         <p:nvPr/>
@@ -3348,8 +6967,8 @@
         </p:nvSpPr>
         <p:spPr>
           <a:xfrm>
-            <a:off x="2130014" y="1663549"/>
-            <a:ext cx="1053803" cy="2392084"/>
+            <a:off x="3169920" y="1663549"/>
+            <a:ext cx="3252971" cy="2392084"/>
           </a:xfrm>
           <a:prstGeom prst="rect">
             <a:avLst/>
@@ -3408,7 +7027,7 @@
         </p:nvSpPr>
         <p:spPr>
           <a:xfrm>
-            <a:off x="7713232" y="1663549"/>
+            <a:off x="8753138" y="1663549"/>
             <a:ext cx="1398488" cy="3530899"/>
           </a:xfrm>
           <a:prstGeom prst="rect">
@@ -3455,18 +7074,8 @@
                 <a:latin typeface="Sora" pitchFamily="2" charset="0"/>
                 <a:cs typeface="Sora" pitchFamily="2" charset="0"/>
               </a:rPr>
-              <a:t>APIs</a:t>
-            </a:r>
-          </a:p>
-          <a:p>
-            <a:pPr algn="ctr"/>
-            <a:endParaRPr lang="en-CH" dirty="0">
-              <a:solidFill>
-                <a:schemeClr val="accent2"/>
-              </a:solidFill>
-              <a:latin typeface="Sora" pitchFamily="2" charset="0"/>
-              <a:cs typeface="Sora" pitchFamily="2" charset="0"/>
-            </a:endParaRPr>
+              <a:t>      APIs</a:t>
+            </a:r>
           </a:p>
           <a:p>
             <a:pPr algn="ctr"/>
@@ -3478,11 +7087,8 @@
                 <a:latin typeface="Sora" pitchFamily="2" charset="0"/>
                 <a:cs typeface="Sora" pitchFamily="2" charset="0"/>
               </a:rPr>
-              <a:t>&amp;</a:t>
-            </a:r>
-          </a:p>
-          <a:p>
-            <a:pPr algn="ctr"/>
+              <a:t>     &amp;</a:t>
+            </a:r>
             <a:br>
               <a:rPr lang="en-CH" dirty="0">
                 <a:solidFill>
@@ -3500,7 +7106,7 @@
                 <a:latin typeface="Sora" pitchFamily="2" charset="0"/>
                 <a:cs typeface="Sora" pitchFamily="2" charset="0"/>
               </a:rPr>
-              <a:t>Data</a:t>
+              <a:t>     Data</a:t>
             </a:r>
           </a:p>
         </p:txBody>
@@ -3519,7 +7125,3174 @@
         </p:nvSpPr>
         <p:spPr>
           <a:xfrm>
-            <a:off x="2130014" y="1663550"/>
+            <a:off x="3169920" y="1663549"/>
+            <a:ext cx="4908176" cy="3530900"/>
+          </a:xfrm>
+          <a:custGeom>
+            <a:avLst/>
+            <a:gdLst>
+              <a:gd name="csX0" fmla="*/ 0 w 4908176"/>
+              <a:gd name="csY0" fmla="*/ 2222942 h 2222942"/>
+              <a:gd name="csX1" fmla="*/ 4908176 w 4908176"/>
+              <a:gd name="csY1" fmla="*/ 2222942 h 2222942"/>
+              <a:gd name="csX2" fmla="*/ 4908176 w 4908176"/>
+              <a:gd name="csY2" fmla="*/ 4178 h 2222942"/>
+              <a:gd name="csX3" fmla="*/ 3348726 w 4908176"/>
+              <a:gd name="csY3" fmla="*/ 4178 h 2222942"/>
+              <a:gd name="csX4" fmla="*/ 2315793 w 4908176"/>
+              <a:gd name="csY4" fmla="*/ 0 h 2222942"/>
+              <a:gd name="csX5" fmla="*/ 2312726 w 4908176"/>
+              <a:gd name="csY5" fmla="*/ 893815 h 2222942"/>
+              <a:gd name="csX6" fmla="*/ 2312726 w 4908176"/>
+              <a:gd name="csY6" fmla="*/ 1568520 h 2222942"/>
+              <a:gd name="csX7" fmla="*/ 0 w 4908176"/>
+              <a:gd name="csY7" fmla="*/ 1568520 h 2222942"/>
+              <a:gd name="csX8" fmla="*/ 0 w 4908176"/>
+              <a:gd name="csY8" fmla="*/ 2222942 h 2222942"/>
+            </a:gdLst>
+            <a:ahLst/>
+            <a:cxnLst>
+              <a:cxn ang="0">
+                <a:pos x="csX0" y="csY0"/>
+              </a:cxn>
+              <a:cxn ang="0">
+                <a:pos x="csX1" y="csY1"/>
+              </a:cxn>
+              <a:cxn ang="0">
+                <a:pos x="csX2" y="csY2"/>
+              </a:cxn>
+              <a:cxn ang="0">
+                <a:pos x="csX3" y="csY3"/>
+              </a:cxn>
+              <a:cxn ang="0">
+                <a:pos x="csX4" y="csY4"/>
+              </a:cxn>
+              <a:cxn ang="0">
+                <a:pos x="csX5" y="csY5"/>
+              </a:cxn>
+              <a:cxn ang="0">
+                <a:pos x="csX6" y="csY6"/>
+              </a:cxn>
+              <a:cxn ang="0">
+                <a:pos x="csX7" y="csY7"/>
+              </a:cxn>
+              <a:cxn ang="0">
+                <a:pos x="csX8" y="csY8"/>
+              </a:cxn>
+            </a:cxnLst>
+            <a:rect l="l" t="t" r="r" b="b"/>
+            <a:pathLst>
+              <a:path w="4908176" h="3530900">
+                <a:moveTo>
+                  <a:pt x="0" y="3530900"/>
+                </a:moveTo>
+                <a:lnTo>
+                  <a:pt x="4908176" y="3530900"/>
+                </a:lnTo>
+                <a:lnTo>
+                  <a:pt x="4908176" y="0"/>
+                </a:lnTo>
+                <a:lnTo>
+                  <a:pt x="3379971" y="0"/>
+                </a:lnTo>
+                <a:lnTo>
+                  <a:pt x="3379971" y="2519084"/>
+                </a:lnTo>
+                <a:lnTo>
+                  <a:pt x="0" y="2519084"/>
+                </a:lnTo>
+                <a:close/>
+              </a:path>
+            </a:pathLst>
+          </a:custGeom>
+          <a:solidFill>
+            <a:schemeClr val="accent1"/>
+          </a:solidFill>
+          <a:ln w="50800">
+            <a:solidFill>
+              <a:schemeClr val="tx2"/>
+            </a:solidFill>
+          </a:ln>
+        </p:spPr>
+        <p:style>
+          <a:lnRef idx="2">
+            <a:schemeClr val="accent1">
+              <a:shade val="15000"/>
+            </a:schemeClr>
+          </a:lnRef>
+          <a:fillRef idx="1">
+            <a:schemeClr val="accent1"/>
+          </a:fillRef>
+          <a:effectRef idx="0">
+            <a:schemeClr val="accent1"/>
+          </a:effectRef>
+          <a:fontRef idx="minor">
+            <a:schemeClr val="lt1"/>
+          </a:fontRef>
+        </p:style>
+        <p:txBody>
+          <a:bodyPr rtlCol="0" anchor="ctr"/>
+          <a:lstStyle/>
+          <a:p>
+            <a:pPr algn="ctr"/>
+            <a:br>
+              <a:rPr lang="en-CH" dirty="0"/>
+            </a:br>
+            <a:br>
+              <a:rPr lang="en-CH" dirty="0"/>
+            </a:br>
+            <a:br>
+              <a:rPr lang="en-CH" dirty="0"/>
+            </a:br>
+            <a:br>
+              <a:rPr lang="en-CH" dirty="0"/>
+            </a:br>
+            <a:br>
+              <a:rPr lang="en-CH" dirty="0"/>
+            </a:br>
+            <a:endParaRPr lang="en-CH" dirty="0"/>
+          </a:p>
+          <a:p>
+            <a:pPr algn="ctr"/>
+            <a:endParaRPr lang="en-CH" dirty="0">
+              <a:latin typeface="Sora" pitchFamily="2" charset="0"/>
+              <a:cs typeface="Sora" pitchFamily="2" charset="0"/>
+            </a:endParaRPr>
+          </a:p>
+          <a:p>
+            <a:pPr algn="ctr"/>
+            <a:endParaRPr lang="en-CH" dirty="0">
+              <a:latin typeface="Sora" pitchFamily="2" charset="0"/>
+              <a:cs typeface="Sora" pitchFamily="2" charset="0"/>
+            </a:endParaRPr>
+          </a:p>
+          <a:p>
+            <a:pPr algn="ctr"/>
+            <a:endParaRPr lang="en-CH" dirty="0">
+              <a:latin typeface="Sora" pitchFamily="2" charset="0"/>
+              <a:cs typeface="Sora" pitchFamily="2" charset="0"/>
+            </a:endParaRPr>
+          </a:p>
+          <a:p>
+            <a:pPr algn="ctr"/>
+            <a:endParaRPr lang="en-CH" dirty="0">
+              <a:latin typeface="Sora" pitchFamily="2" charset="0"/>
+              <a:cs typeface="Sora" pitchFamily="2" charset="0"/>
+            </a:endParaRPr>
+          </a:p>
+          <a:p>
+            <a:pPr algn="ctr"/>
+            <a:r>
+              <a:rPr lang="en-CH" dirty="0">
+                <a:latin typeface="Sora" pitchFamily="2" charset="0"/>
+                <a:cs typeface="Sora" pitchFamily="2" charset="0"/>
+              </a:rPr>
+              <a:t>Deterministic</a:t>
+            </a:r>
+          </a:p>
+        </p:txBody>
+      </p:sp>
+      <p:cxnSp>
+        <p:nvCxnSpPr>
+          <p:cNvPr id="9" name="Straight Connector 8">
+            <a:extLst>
+              <a:ext uri="{FF2B5EF4-FFF2-40B4-BE49-F238E27FC236}">
+                <a16:creationId xmlns:a16="http://schemas.microsoft.com/office/drawing/2014/main" id="{8888C7D1-B3A9-1099-6C25-0BD32B84F0F0}"/>
+              </a:ext>
+            </a:extLst>
+          </p:cNvPr>
+          <p:cNvCxnSpPr>
+            <a:cxnSpLocks/>
+          </p:cNvCxnSpPr>
+          <p:nvPr/>
+        </p:nvCxnSpPr>
+        <p:spPr>
+          <a:xfrm>
+            <a:off x="8419652" y="1245196"/>
+            <a:ext cx="0" cy="4682268"/>
+          </a:xfrm>
+          <a:prstGeom prst="line">
+            <a:avLst/>
+          </a:prstGeom>
+          <a:ln w="254000">
+            <a:solidFill>
+              <a:schemeClr val="tx2"/>
+            </a:solidFill>
+          </a:ln>
+        </p:spPr>
+        <p:style>
+          <a:lnRef idx="1">
+            <a:schemeClr val="accent1"/>
+          </a:lnRef>
+          <a:fillRef idx="0">
+            <a:schemeClr val="accent1"/>
+          </a:fillRef>
+          <a:effectRef idx="0">
+            <a:schemeClr val="accent1"/>
+          </a:effectRef>
+          <a:fontRef idx="minor">
+            <a:schemeClr val="tx1"/>
+          </a:fontRef>
+        </p:style>
+      </p:cxnSp>
+      <p:sp>
+        <p:nvSpPr>
+          <p:cNvPr id="10" name="TextBox 9">
+            <a:extLst>
+              <a:ext uri="{FF2B5EF4-FFF2-40B4-BE49-F238E27FC236}">
+                <a16:creationId xmlns:a16="http://schemas.microsoft.com/office/drawing/2014/main" id="{47A62D65-2885-43E9-B5FE-0471D9A3E0B7}"/>
+              </a:ext>
+            </a:extLst>
+          </p:cNvPr>
+          <p:cNvSpPr txBox="1"/>
+          <p:nvPr/>
+        </p:nvSpPr>
+        <p:spPr>
+          <a:xfrm>
+            <a:off x="5027530" y="5428134"/>
+            <a:ext cx="1192955" cy="369332"/>
+          </a:xfrm>
+          <a:prstGeom prst="rect">
+            <a:avLst/>
+          </a:prstGeom>
+          <a:noFill/>
+        </p:spPr>
+        <p:txBody>
+          <a:bodyPr wrap="none" rtlCol="0">
+            <a:spAutoFit/>
+          </a:bodyPr>
+          <a:lstStyle/>
+          <a:p>
+            <a:r>
+              <a:rPr lang="en-CH" dirty="0">
+                <a:latin typeface="Sora" pitchFamily="2" charset="0"/>
+                <a:cs typeface="Sora" pitchFamily="2" charset="0"/>
+              </a:rPr>
+              <a:t>Solution</a:t>
+            </a:r>
+          </a:p>
+        </p:txBody>
+      </p:sp>
+      <p:sp>
+        <p:nvSpPr>
+          <p:cNvPr id="11" name="TextBox 10">
+            <a:extLst>
+              <a:ext uri="{FF2B5EF4-FFF2-40B4-BE49-F238E27FC236}">
+                <a16:creationId xmlns:a16="http://schemas.microsoft.com/office/drawing/2014/main" id="{A07EBE18-2738-7524-8444-64A9242E593A}"/>
+              </a:ext>
+            </a:extLst>
+          </p:cNvPr>
+          <p:cNvSpPr txBox="1"/>
+          <p:nvPr/>
+        </p:nvSpPr>
+        <p:spPr>
+          <a:xfrm>
+            <a:off x="8709483" y="5428134"/>
+            <a:ext cx="1540806" cy="369332"/>
+          </a:xfrm>
+          <a:prstGeom prst="rect">
+            <a:avLst/>
+          </a:prstGeom>
+          <a:noFill/>
+        </p:spPr>
+        <p:txBody>
+          <a:bodyPr wrap="none" rtlCol="0">
+            <a:spAutoFit/>
+          </a:bodyPr>
+          <a:lstStyle/>
+          <a:p>
+            <a:r>
+              <a:rPr lang="en-CH" dirty="0">
+                <a:latin typeface="Sora" pitchFamily="2" charset="0"/>
+                <a:cs typeface="Sora" pitchFamily="2" charset="0"/>
+              </a:rPr>
+              <a:t>Foundation</a:t>
+            </a:r>
+          </a:p>
+        </p:txBody>
+      </p:sp>
+      <p:sp>
+        <p:nvSpPr>
+          <p:cNvPr id="2" name="Right Arrow 1">
+            <a:extLst>
+              <a:ext uri="{FF2B5EF4-FFF2-40B4-BE49-F238E27FC236}">
+                <a16:creationId xmlns:a16="http://schemas.microsoft.com/office/drawing/2014/main" id="{817701AA-53FA-4E9F-CB8C-82CE3572CDB1}"/>
+              </a:ext>
+            </a:extLst>
+          </p:cNvPr>
+          <p:cNvSpPr/>
+          <p:nvPr/>
+        </p:nvSpPr>
+        <p:spPr>
+          <a:xfrm>
+            <a:off x="1369100" y="2695096"/>
+            <a:ext cx="1394906" cy="563878"/>
+          </a:xfrm>
+          <a:prstGeom prst="rightArrow">
+            <a:avLst/>
+          </a:prstGeom>
+          <a:solidFill>
+            <a:schemeClr val="accent1">
+              <a:lumMod val="40000"/>
+              <a:lumOff val="60000"/>
+            </a:schemeClr>
+          </a:solidFill>
+          <a:ln w="25400">
+            <a:solidFill>
+              <a:schemeClr val="tx2"/>
+            </a:solidFill>
+          </a:ln>
+        </p:spPr>
+        <p:style>
+          <a:lnRef idx="2">
+            <a:schemeClr val="accent1">
+              <a:shade val="15000"/>
+            </a:schemeClr>
+          </a:lnRef>
+          <a:fillRef idx="1">
+            <a:schemeClr val="accent1"/>
+          </a:fillRef>
+          <a:effectRef idx="0">
+            <a:schemeClr val="accent1"/>
+          </a:effectRef>
+          <a:fontRef idx="minor">
+            <a:schemeClr val="lt1"/>
+          </a:fontRef>
+        </p:style>
+        <p:txBody>
+          <a:bodyPr rtlCol="0" anchor="ctr"/>
+          <a:lstStyle/>
+          <a:p>
+            <a:pPr algn="ctr"/>
+            <a:r>
+              <a:rPr lang="en-CH" sz="1400" dirty="0">
+                <a:solidFill>
+                  <a:schemeClr val="accent2"/>
+                </a:solidFill>
+                <a:latin typeface="Sora" pitchFamily="2" charset="0"/>
+                <a:cs typeface="Sora" pitchFamily="2" charset="0"/>
+              </a:rPr>
+              <a:t>Input</a:t>
+            </a:r>
+            <a:endParaRPr lang="en-CH" dirty="0">
+              <a:solidFill>
+                <a:schemeClr val="accent2"/>
+              </a:solidFill>
+              <a:latin typeface="Sora" pitchFamily="2" charset="0"/>
+              <a:cs typeface="Sora" pitchFamily="2" charset="0"/>
+            </a:endParaRPr>
+          </a:p>
+        </p:txBody>
+      </p:sp>
+      <p:sp>
+        <p:nvSpPr>
+          <p:cNvPr id="3" name="TextBox 2">
+            <a:extLst>
+              <a:ext uri="{FF2B5EF4-FFF2-40B4-BE49-F238E27FC236}">
+                <a16:creationId xmlns:a16="http://schemas.microsoft.com/office/drawing/2014/main" id="{C7649E55-C73D-63A6-7AE8-320F7F3ABF8F}"/>
+              </a:ext>
+            </a:extLst>
+          </p:cNvPr>
+          <p:cNvSpPr txBox="1"/>
+          <p:nvPr/>
+        </p:nvSpPr>
+        <p:spPr>
+          <a:xfrm>
+            <a:off x="1303140" y="3267269"/>
+            <a:ext cx="1534394" cy="369332"/>
+          </a:xfrm>
+          <a:prstGeom prst="rect">
+            <a:avLst/>
+          </a:prstGeom>
+          <a:noFill/>
+        </p:spPr>
+        <p:txBody>
+          <a:bodyPr wrap="none" rtlCol="0">
+            <a:spAutoFit/>
+          </a:bodyPr>
+          <a:lstStyle/>
+          <a:p>
+            <a:r>
+              <a:rPr lang="en-CH" dirty="0">
+                <a:latin typeface="Sora" pitchFamily="2" charset="0"/>
+                <a:cs typeface="Sora" pitchFamily="2" charset="0"/>
+              </a:rPr>
+              <a:t>Consumers</a:t>
+            </a:r>
+          </a:p>
+        </p:txBody>
+      </p:sp>
+      <p:sp>
+        <p:nvSpPr>
+          <p:cNvPr id="8" name="Right Arrow 7">
+            <a:extLst>
+              <a:ext uri="{FF2B5EF4-FFF2-40B4-BE49-F238E27FC236}">
+                <a16:creationId xmlns:a16="http://schemas.microsoft.com/office/drawing/2014/main" id="{78E7CA08-658A-6CAC-7FB2-8A1AFC5974A8}"/>
+              </a:ext>
+            </a:extLst>
+          </p:cNvPr>
+          <p:cNvSpPr/>
+          <p:nvPr/>
+        </p:nvSpPr>
+        <p:spPr>
+          <a:xfrm>
+            <a:off x="1343113" y="3645649"/>
+            <a:ext cx="1394906" cy="563878"/>
+          </a:xfrm>
+          <a:prstGeom prst="leftArrow">
+            <a:avLst/>
+          </a:prstGeom>
+          <a:solidFill>
+            <a:schemeClr val="accent1">
+              <a:lumMod val="40000"/>
+              <a:lumOff val="60000"/>
+            </a:schemeClr>
+          </a:solidFill>
+          <a:ln w="25400">
+            <a:solidFill>
+              <a:schemeClr val="tx2"/>
+            </a:solidFill>
+          </a:ln>
+        </p:spPr>
+        <p:style>
+          <a:lnRef idx="2">
+            <a:schemeClr val="accent1">
+              <a:shade val="15000"/>
+            </a:schemeClr>
+          </a:lnRef>
+          <a:fillRef idx="1">
+            <a:schemeClr val="accent1"/>
+          </a:fillRef>
+          <a:effectRef idx="0">
+            <a:schemeClr val="accent1"/>
+          </a:effectRef>
+          <a:fontRef idx="minor">
+            <a:schemeClr val="lt1"/>
+          </a:fontRef>
+        </p:style>
+        <p:txBody>
+          <a:bodyPr rtlCol="0" anchor="ctr"/>
+          <a:lstStyle/>
+          <a:p>
+            <a:pPr algn="ctr"/>
+            <a:r>
+              <a:rPr lang="en-CH" sz="1400" dirty="0">
+                <a:solidFill>
+                  <a:schemeClr val="accent2"/>
+                </a:solidFill>
+                <a:latin typeface="Sora" pitchFamily="2" charset="0"/>
+                <a:cs typeface="Sora" pitchFamily="2" charset="0"/>
+              </a:rPr>
+              <a:t>Output</a:t>
+            </a:r>
+            <a:endParaRPr lang="en-CH" dirty="0">
+              <a:solidFill>
+                <a:schemeClr val="accent2"/>
+              </a:solidFill>
+              <a:latin typeface="Sora" pitchFamily="2" charset="0"/>
+              <a:cs typeface="Sora" pitchFamily="2" charset="0"/>
+            </a:endParaRPr>
+          </a:p>
+        </p:txBody>
+      </p:sp>
+      <p:sp>
+        <p:nvSpPr>
+          <p:cNvPr id="4" name="Left-right Arrow 3">
+            <a:extLst>
+              <a:ext uri="{FF2B5EF4-FFF2-40B4-BE49-F238E27FC236}">
+                <a16:creationId xmlns:a16="http://schemas.microsoft.com/office/drawing/2014/main" id="{CA5F44A0-0904-4F8C-7EB7-6D73106A7F21}"/>
+              </a:ext>
+            </a:extLst>
+          </p:cNvPr>
+          <p:cNvSpPr/>
+          <p:nvPr/>
+        </p:nvSpPr>
+        <p:spPr>
+          <a:xfrm>
+            <a:off x="7667233" y="2773200"/>
+            <a:ext cx="1475338" cy="572173"/>
+          </a:xfrm>
+          <a:prstGeom prst="leftRightArrow">
+            <a:avLst/>
+          </a:prstGeom>
+          <a:solidFill>
+            <a:schemeClr val="accent1">
+              <a:lumMod val="40000"/>
+              <a:lumOff val="60000"/>
+            </a:schemeClr>
+          </a:solidFill>
+          <a:ln w="25400">
+            <a:solidFill>
+              <a:schemeClr val="accent2"/>
+            </a:solidFill>
+          </a:ln>
+        </p:spPr>
+        <p:style>
+          <a:lnRef idx="2">
+            <a:schemeClr val="accent1">
+              <a:shade val="15000"/>
+            </a:schemeClr>
+          </a:lnRef>
+          <a:fillRef idx="1">
+            <a:schemeClr val="accent1"/>
+          </a:fillRef>
+          <a:effectRef idx="0">
+            <a:schemeClr val="accent1"/>
+          </a:effectRef>
+          <a:fontRef idx="minor">
+            <a:schemeClr val="lt1"/>
+          </a:fontRef>
+        </p:style>
+        <p:txBody>
+          <a:bodyPr rtlCol="0" anchor="ctr"/>
+          <a:lstStyle/>
+          <a:p>
+            <a:pPr algn="ctr"/>
+            <a:endParaRPr lang="en-CH"/>
+          </a:p>
+        </p:txBody>
+      </p:sp>
+      <p:sp>
+        <p:nvSpPr>
+          <p:cNvPr id="12" name="Left-right Arrow 11">
+            <a:extLst>
+              <a:ext uri="{FF2B5EF4-FFF2-40B4-BE49-F238E27FC236}">
+                <a16:creationId xmlns:a16="http://schemas.microsoft.com/office/drawing/2014/main" id="{731D59B0-E530-A602-CD14-66512CA0CE7E}"/>
+              </a:ext>
+            </a:extLst>
+          </p:cNvPr>
+          <p:cNvSpPr/>
+          <p:nvPr/>
+        </p:nvSpPr>
+        <p:spPr>
+          <a:xfrm>
+            <a:off x="7672812" y="3603536"/>
+            <a:ext cx="1475339" cy="572173"/>
+          </a:xfrm>
+          <a:prstGeom prst="leftRightArrow">
+            <a:avLst/>
+          </a:prstGeom>
+          <a:solidFill>
+            <a:schemeClr val="accent1">
+              <a:lumMod val="40000"/>
+              <a:lumOff val="60000"/>
+            </a:schemeClr>
+          </a:solidFill>
+          <a:ln w="25400">
+            <a:solidFill>
+              <a:schemeClr val="accent2"/>
+            </a:solidFill>
+          </a:ln>
+        </p:spPr>
+        <p:style>
+          <a:lnRef idx="2">
+            <a:schemeClr val="accent1">
+              <a:shade val="15000"/>
+            </a:schemeClr>
+          </a:lnRef>
+          <a:fillRef idx="1">
+            <a:schemeClr val="accent1"/>
+          </a:fillRef>
+          <a:effectRef idx="0">
+            <a:schemeClr val="accent1"/>
+          </a:effectRef>
+          <a:fontRef idx="minor">
+            <a:schemeClr val="lt1"/>
+          </a:fontRef>
+        </p:style>
+        <p:txBody>
+          <a:bodyPr rtlCol="0" anchor="ctr"/>
+          <a:lstStyle/>
+          <a:p>
+            <a:pPr algn="ctr"/>
+            <a:endParaRPr lang="en-CH"/>
+          </a:p>
+        </p:txBody>
+      </p:sp>
+      <p:sp>
+        <p:nvSpPr>
+          <p:cNvPr id="15" name="Left-right Arrow 14">
+            <a:extLst>
+              <a:ext uri="{FF2B5EF4-FFF2-40B4-BE49-F238E27FC236}">
+                <a16:creationId xmlns:a16="http://schemas.microsoft.com/office/drawing/2014/main" id="{D4297A0C-BB42-5E9D-E23E-3DC9EE0AA045}"/>
+              </a:ext>
+            </a:extLst>
+          </p:cNvPr>
+          <p:cNvSpPr/>
+          <p:nvPr/>
+        </p:nvSpPr>
+        <p:spPr>
+          <a:xfrm>
+            <a:off x="7667233" y="1920454"/>
+            <a:ext cx="1475338" cy="572173"/>
+          </a:xfrm>
+          <a:prstGeom prst="leftRightArrow">
+            <a:avLst/>
+          </a:prstGeom>
+          <a:solidFill>
+            <a:schemeClr val="accent1">
+              <a:lumMod val="40000"/>
+              <a:lumOff val="60000"/>
+            </a:schemeClr>
+          </a:solidFill>
+          <a:ln w="25400">
+            <a:solidFill>
+              <a:schemeClr val="accent2"/>
+            </a:solidFill>
+          </a:ln>
+        </p:spPr>
+        <p:style>
+          <a:lnRef idx="2">
+            <a:schemeClr val="accent1">
+              <a:shade val="15000"/>
+            </a:schemeClr>
+          </a:lnRef>
+          <a:fillRef idx="1">
+            <a:schemeClr val="accent1"/>
+          </a:fillRef>
+          <a:effectRef idx="0">
+            <a:schemeClr val="accent1"/>
+          </a:effectRef>
+          <a:fontRef idx="minor">
+            <a:schemeClr val="lt1"/>
+          </a:fontRef>
+        </p:style>
+        <p:txBody>
+          <a:bodyPr rtlCol="0" anchor="ctr"/>
+          <a:lstStyle/>
+          <a:p>
+            <a:pPr algn="ctr"/>
+            <a:endParaRPr lang="en-CH"/>
+          </a:p>
+        </p:txBody>
+      </p:sp>
+      <p:pic>
+        <p:nvPicPr>
+          <p:cNvPr id="16" name="Picture 15">
+            <a:extLst>
+              <a:ext uri="{FF2B5EF4-FFF2-40B4-BE49-F238E27FC236}">
+                <a16:creationId xmlns:a16="http://schemas.microsoft.com/office/drawing/2014/main" id="{197B0DCA-FCBE-73FD-A340-1ABB42F0E98B}"/>
+              </a:ext>
+            </a:extLst>
+          </p:cNvPr>
+          <p:cNvPicPr>
+            <a:picLocks noChangeAspect="1"/>
+          </p:cNvPicPr>
+          <p:nvPr/>
+        </p:nvPicPr>
+        <p:blipFill>
+          <a:blip r:embed="rId2"/>
+          <a:stretch>
+            <a:fillRect/>
+          </a:stretch>
+        </p:blipFill>
+        <p:spPr>
+          <a:xfrm>
+            <a:off x="7967197" y="1889748"/>
+            <a:ext cx="875405" cy="625289"/>
+          </a:xfrm>
+          <a:prstGeom prst="rect">
+            <a:avLst/>
+          </a:prstGeom>
+        </p:spPr>
+      </p:pic>
+      <p:sp>
+        <p:nvSpPr>
+          <p:cNvPr id="17" name="Left-right Arrow 16">
+            <a:extLst>
+              <a:ext uri="{FF2B5EF4-FFF2-40B4-BE49-F238E27FC236}">
+                <a16:creationId xmlns:a16="http://schemas.microsoft.com/office/drawing/2014/main" id="{3ABF72DE-AFEA-3FAC-1914-B5B3C800DE58}"/>
+              </a:ext>
+            </a:extLst>
+          </p:cNvPr>
+          <p:cNvSpPr/>
+          <p:nvPr/>
+        </p:nvSpPr>
+        <p:spPr>
+          <a:xfrm>
+            <a:off x="7667232" y="4365374"/>
+            <a:ext cx="1475339" cy="572173"/>
+          </a:xfrm>
+          <a:prstGeom prst="leftRightArrow">
+            <a:avLst/>
+          </a:prstGeom>
+          <a:solidFill>
+            <a:schemeClr val="accent1">
+              <a:lumMod val="40000"/>
+              <a:lumOff val="60000"/>
+            </a:schemeClr>
+          </a:solidFill>
+          <a:ln w="25400">
+            <a:solidFill>
+              <a:schemeClr val="accent2"/>
+            </a:solidFill>
+          </a:ln>
+        </p:spPr>
+        <p:style>
+          <a:lnRef idx="2">
+            <a:schemeClr val="accent1">
+              <a:shade val="15000"/>
+            </a:schemeClr>
+          </a:lnRef>
+          <a:fillRef idx="1">
+            <a:schemeClr val="accent1"/>
+          </a:fillRef>
+          <a:effectRef idx="0">
+            <a:schemeClr val="accent1"/>
+          </a:effectRef>
+          <a:fontRef idx="minor">
+            <a:schemeClr val="lt1"/>
+          </a:fontRef>
+        </p:style>
+        <p:txBody>
+          <a:bodyPr rtlCol="0" anchor="ctr"/>
+          <a:lstStyle/>
+          <a:p>
+            <a:pPr algn="ctr"/>
+            <a:endParaRPr lang="en-CH"/>
+          </a:p>
+        </p:txBody>
+      </p:sp>
+      <p:pic>
+        <p:nvPicPr>
+          <p:cNvPr id="19" name="Picture 18">
+            <a:extLst>
+              <a:ext uri="{FF2B5EF4-FFF2-40B4-BE49-F238E27FC236}">
+                <a16:creationId xmlns:a16="http://schemas.microsoft.com/office/drawing/2014/main" id="{78B98FEC-1CD8-CC58-B1BD-DDA63D312178}"/>
+              </a:ext>
+            </a:extLst>
+          </p:cNvPr>
+          <p:cNvPicPr>
+            <a:picLocks noChangeAspect="1"/>
+          </p:cNvPicPr>
+          <p:nvPr/>
+        </p:nvPicPr>
+        <p:blipFill>
+          <a:blip r:embed="rId3"/>
+          <a:stretch>
+            <a:fillRect/>
+          </a:stretch>
+        </p:blipFill>
+        <p:spPr>
+          <a:xfrm>
+            <a:off x="8048989" y="2989099"/>
+            <a:ext cx="698570" cy="154491"/>
+          </a:xfrm>
+          <a:prstGeom prst="rect">
+            <a:avLst/>
+          </a:prstGeom>
+        </p:spPr>
+      </p:pic>
+      <p:pic>
+        <p:nvPicPr>
+          <p:cNvPr id="20" name="Picture 19">
+            <a:extLst>
+              <a:ext uri="{FF2B5EF4-FFF2-40B4-BE49-F238E27FC236}">
+                <a16:creationId xmlns:a16="http://schemas.microsoft.com/office/drawing/2014/main" id="{EBB0962E-7F1D-5E6A-E70D-1EA0B4872569}"/>
+              </a:ext>
+            </a:extLst>
+          </p:cNvPr>
+          <p:cNvPicPr>
+            <a:picLocks noChangeAspect="1"/>
+          </p:cNvPicPr>
+          <p:nvPr/>
+        </p:nvPicPr>
+        <p:blipFill>
+          <a:blip r:embed="rId4"/>
+          <a:stretch>
+            <a:fillRect/>
+          </a:stretch>
+        </p:blipFill>
+        <p:spPr>
+          <a:xfrm>
+            <a:off x="8157012" y="4410198"/>
+            <a:ext cx="482523" cy="482523"/>
+          </a:xfrm>
+          <a:prstGeom prst="rect">
+            <a:avLst/>
+          </a:prstGeom>
+        </p:spPr>
+      </p:pic>
+      <p:pic>
+        <p:nvPicPr>
+          <p:cNvPr id="21" name="Picture 20">
+            <a:extLst>
+              <a:ext uri="{FF2B5EF4-FFF2-40B4-BE49-F238E27FC236}">
+                <a16:creationId xmlns:a16="http://schemas.microsoft.com/office/drawing/2014/main" id="{C661E29F-2024-0A1D-E4EC-3BA4CBA64BE1}"/>
+              </a:ext>
+            </a:extLst>
+          </p:cNvPr>
+          <p:cNvPicPr>
+            <a:picLocks noChangeAspect="1"/>
+          </p:cNvPicPr>
+          <p:nvPr/>
+        </p:nvPicPr>
+        <p:blipFill>
+          <a:blip r:embed="rId5"/>
+          <a:stretch>
+            <a:fillRect/>
+          </a:stretch>
+        </p:blipFill>
+        <p:spPr>
+          <a:xfrm>
+            <a:off x="8008801" y="3788731"/>
+            <a:ext cx="738758" cy="201847"/>
+          </a:xfrm>
+          <a:prstGeom prst="rect">
+            <a:avLst/>
+          </a:prstGeom>
+        </p:spPr>
+      </p:pic>
+      <p:sp>
+        <p:nvSpPr>
+          <p:cNvPr id="22" name="Left-right Arrow 21">
+            <a:extLst>
+              <a:ext uri="{FF2B5EF4-FFF2-40B4-BE49-F238E27FC236}">
+                <a16:creationId xmlns:a16="http://schemas.microsoft.com/office/drawing/2014/main" id="{1731C8E1-593A-D549-EC72-CEB3B3A4AD0E}"/>
+              </a:ext>
+            </a:extLst>
+          </p:cNvPr>
+          <p:cNvSpPr/>
+          <p:nvPr/>
+        </p:nvSpPr>
+        <p:spPr>
+          <a:xfrm>
+            <a:off x="5735031" y="1889748"/>
+            <a:ext cx="1475338" cy="572173"/>
+          </a:xfrm>
+          <a:prstGeom prst="leftRightArrow">
+            <a:avLst/>
+          </a:prstGeom>
+          <a:solidFill>
+            <a:schemeClr val="accent1">
+              <a:lumMod val="40000"/>
+              <a:lumOff val="60000"/>
+            </a:schemeClr>
+          </a:solidFill>
+          <a:ln w="25400">
+            <a:solidFill>
+              <a:schemeClr val="accent2"/>
+            </a:solidFill>
+          </a:ln>
+        </p:spPr>
+        <p:style>
+          <a:lnRef idx="2">
+            <a:schemeClr val="accent1">
+              <a:shade val="15000"/>
+            </a:schemeClr>
+          </a:lnRef>
+          <a:fillRef idx="1">
+            <a:schemeClr val="accent1"/>
+          </a:fillRef>
+          <a:effectRef idx="0">
+            <a:schemeClr val="accent1"/>
+          </a:effectRef>
+          <a:fontRef idx="minor">
+            <a:schemeClr val="lt1"/>
+          </a:fontRef>
+        </p:style>
+        <p:txBody>
+          <a:bodyPr rtlCol="0" anchor="ctr"/>
+          <a:lstStyle/>
+          <a:p>
+            <a:pPr algn="ctr"/>
+            <a:r>
+              <a:rPr lang="en-CH" sz="900" dirty="0">
+                <a:solidFill>
+                  <a:schemeClr val="accent2"/>
+                </a:solidFill>
+                <a:latin typeface="Sora" pitchFamily="2" charset="0"/>
+                <a:cs typeface="Sora" pitchFamily="2" charset="0"/>
+              </a:rPr>
+              <a:t>Function Calling</a:t>
+            </a:r>
+          </a:p>
+        </p:txBody>
+      </p:sp>
+    </p:spTree>
+    <p:extLst>
+      <p:ext uri="{BB962C8B-B14F-4D97-AF65-F5344CB8AC3E}">
+        <p14:creationId xmlns:p14="http://schemas.microsoft.com/office/powerpoint/2010/main" val="2795878677"/>
+      </p:ext>
+    </p:extLst>
+  </p:cSld>
+  <p:clrMapOvr>
+    <a:masterClrMapping/>
+  </p:clrMapOvr>
+</p:sld>
+</file>
+
+<file path=ppt/slides/slide6.xml><?xml version="1.0" encoding="utf-8"?>
+<p:sld xmlns:a="http://schemas.openxmlformats.org/drawingml/2006/main" xmlns:r="http://schemas.openxmlformats.org/officeDocument/2006/relationships" xmlns:p="http://schemas.openxmlformats.org/presentationml/2006/main">
+  <p:cSld>
+    <p:spTree>
+      <p:nvGrpSpPr>
+        <p:cNvPr id="1" name="">
+          <a:extLst>
+            <a:ext uri="{FF2B5EF4-FFF2-40B4-BE49-F238E27FC236}">
+              <a16:creationId xmlns:a16="http://schemas.microsoft.com/office/drawing/2014/main" id="{76DC0C7B-3D4C-4A81-88B2-21A67D18B0D1}"/>
+            </a:ext>
+          </a:extLst>
+        </p:cNvPr>
+        <p:cNvGrpSpPr/>
+        <p:nvPr/>
+      </p:nvGrpSpPr>
+      <p:grpSpPr>
+        <a:xfrm>
+          <a:off x="0" y="0"/>
+          <a:ext cx="0" cy="0"/>
+          <a:chOff x="0" y="0"/>
+          <a:chExt cx="0" cy="0"/>
+        </a:xfrm>
+      </p:grpSpPr>
+      <p:sp>
+        <p:nvSpPr>
+          <p:cNvPr id="5" name="Rectangle 4">
+            <a:extLst>
+              <a:ext uri="{FF2B5EF4-FFF2-40B4-BE49-F238E27FC236}">
+                <a16:creationId xmlns:a16="http://schemas.microsoft.com/office/drawing/2014/main" id="{FCD42EBA-3A36-C077-A178-30ECC2553D5E}"/>
+              </a:ext>
+            </a:extLst>
+          </p:cNvPr>
+          <p:cNvSpPr/>
+          <p:nvPr/>
+        </p:nvSpPr>
+        <p:spPr>
+          <a:xfrm>
+            <a:off x="3169920" y="1663549"/>
+            <a:ext cx="3252971" cy="2392084"/>
+          </a:xfrm>
+          <a:prstGeom prst="rect">
+            <a:avLst/>
+          </a:prstGeom>
+          <a:solidFill>
+            <a:schemeClr val="tx2"/>
+          </a:solidFill>
+          <a:ln w="50800">
+            <a:solidFill>
+              <a:schemeClr val="accent1"/>
+            </a:solidFill>
+          </a:ln>
+        </p:spPr>
+        <p:style>
+          <a:lnRef idx="2">
+            <a:schemeClr val="accent1">
+              <a:shade val="15000"/>
+            </a:schemeClr>
+          </a:lnRef>
+          <a:fillRef idx="1">
+            <a:schemeClr val="accent1"/>
+          </a:fillRef>
+          <a:effectRef idx="0">
+            <a:schemeClr val="accent1"/>
+          </a:effectRef>
+          <a:fontRef idx="minor">
+            <a:schemeClr val="lt1"/>
+          </a:fontRef>
+        </p:style>
+        <p:txBody>
+          <a:bodyPr rtlCol="0" anchor="ctr"/>
+          <a:lstStyle/>
+          <a:p>
+            <a:pPr algn="ctr"/>
+            <a:r>
+              <a:rPr lang="en-CH" dirty="0">
+                <a:latin typeface="Sora" pitchFamily="2" charset="0"/>
+                <a:cs typeface="Sora" pitchFamily="2" charset="0"/>
+              </a:rPr>
+              <a:t>GenAI</a:t>
+            </a:r>
+          </a:p>
+        </p:txBody>
+      </p:sp>
+      <p:sp>
+        <p:nvSpPr>
+          <p:cNvPr id="6" name="Rectangle 5">
+            <a:extLst>
+              <a:ext uri="{FF2B5EF4-FFF2-40B4-BE49-F238E27FC236}">
+                <a16:creationId xmlns:a16="http://schemas.microsoft.com/office/drawing/2014/main" id="{5866FDE8-6D6C-959F-E621-9FEBD5ADA6BA}"/>
+              </a:ext>
+            </a:extLst>
+          </p:cNvPr>
+          <p:cNvSpPr/>
+          <p:nvPr/>
+        </p:nvSpPr>
+        <p:spPr>
+          <a:xfrm>
+            <a:off x="8753138" y="1663549"/>
+            <a:ext cx="1398488" cy="3530899"/>
+          </a:xfrm>
+          <a:prstGeom prst="rect">
+            <a:avLst/>
+          </a:prstGeom>
+          <a:solidFill>
+            <a:schemeClr val="accent1">
+              <a:lumMod val="40000"/>
+              <a:lumOff val="60000"/>
+            </a:schemeClr>
+          </a:solidFill>
+          <a:ln w="50800">
+            <a:solidFill>
+              <a:schemeClr val="tx2"/>
+            </a:solidFill>
+          </a:ln>
+        </p:spPr>
+        <p:style>
+          <a:lnRef idx="2">
+            <a:schemeClr val="accent1">
+              <a:shade val="15000"/>
+            </a:schemeClr>
+          </a:lnRef>
+          <a:fillRef idx="1">
+            <a:schemeClr val="accent1"/>
+          </a:fillRef>
+          <a:effectRef idx="0">
+            <a:schemeClr val="accent1"/>
+          </a:effectRef>
+          <a:fontRef idx="minor">
+            <a:schemeClr val="lt1"/>
+          </a:fontRef>
+        </p:style>
+        <p:txBody>
+          <a:bodyPr rtlCol="0" anchor="ctr"/>
+          <a:lstStyle/>
+          <a:p>
+            <a:pPr algn="ctr"/>
+            <a:r>
+              <a:rPr lang="en-CH" dirty="0">
+                <a:solidFill>
+                  <a:schemeClr val="accent2"/>
+                </a:solidFill>
+                <a:latin typeface="Sora" pitchFamily="2" charset="0"/>
+                <a:cs typeface="Sora" pitchFamily="2" charset="0"/>
+              </a:rPr>
+              <a:t>      APIs</a:t>
+            </a:r>
+          </a:p>
+          <a:p>
+            <a:pPr algn="ctr"/>
+            <a:r>
+              <a:rPr lang="en-CH" dirty="0">
+                <a:solidFill>
+                  <a:schemeClr val="accent2"/>
+                </a:solidFill>
+                <a:latin typeface="Sora" pitchFamily="2" charset="0"/>
+                <a:cs typeface="Sora" pitchFamily="2" charset="0"/>
+              </a:rPr>
+              <a:t>     &amp;</a:t>
+            </a:r>
+            <a:br>
+              <a:rPr lang="en-CH" dirty="0">
+                <a:solidFill>
+                  <a:schemeClr val="accent2"/>
+                </a:solidFill>
+                <a:latin typeface="Sora" pitchFamily="2" charset="0"/>
+                <a:cs typeface="Sora" pitchFamily="2" charset="0"/>
+              </a:rPr>
+            </a:br>
+            <a:r>
+              <a:rPr lang="en-CH" dirty="0">
+                <a:solidFill>
+                  <a:schemeClr val="accent2"/>
+                </a:solidFill>
+                <a:latin typeface="Sora" pitchFamily="2" charset="0"/>
+                <a:cs typeface="Sora" pitchFamily="2" charset="0"/>
+              </a:rPr>
+              <a:t>     Data</a:t>
+            </a:r>
+          </a:p>
+        </p:txBody>
+      </p:sp>
+      <p:sp>
+        <p:nvSpPr>
+          <p:cNvPr id="7" name="Freeform 6">
+            <a:extLst>
+              <a:ext uri="{FF2B5EF4-FFF2-40B4-BE49-F238E27FC236}">
+                <a16:creationId xmlns:a16="http://schemas.microsoft.com/office/drawing/2014/main" id="{3C1CE304-FE95-1502-A2C6-BCD998125FC6}"/>
+              </a:ext>
+            </a:extLst>
+          </p:cNvPr>
+          <p:cNvSpPr/>
+          <p:nvPr/>
+        </p:nvSpPr>
+        <p:spPr>
+          <a:xfrm>
+            <a:off x="3169920" y="2694450"/>
+            <a:ext cx="4908176" cy="2499999"/>
+          </a:xfrm>
+          <a:custGeom>
+            <a:avLst/>
+            <a:gdLst>
+              <a:gd name="csX0" fmla="*/ 0 w 4908176"/>
+              <a:gd name="csY0" fmla="*/ 2699627 h 2699627"/>
+              <a:gd name="csX1" fmla="*/ 4908176 w 4908176"/>
+              <a:gd name="csY1" fmla="*/ 2699627 h 2699627"/>
+              <a:gd name="csX2" fmla="*/ 4908176 w 4908176"/>
+              <a:gd name="csY2" fmla="*/ 0 h 2699627"/>
+              <a:gd name="csX3" fmla="*/ 3407681 w 4908176"/>
+              <a:gd name="csY3" fmla="*/ 13854 h 2699627"/>
+              <a:gd name="csX4" fmla="*/ 3379971 w 4908176"/>
+              <a:gd name="csY4" fmla="*/ 1687811 h 2699627"/>
+              <a:gd name="csX5" fmla="*/ 0 w 4908176"/>
+              <a:gd name="csY5" fmla="*/ 1687811 h 2699627"/>
+              <a:gd name="csX6" fmla="*/ 0 w 4908176"/>
+              <a:gd name="csY6" fmla="*/ 2699627 h 2699627"/>
+            </a:gdLst>
+            <a:ahLst/>
+            <a:cxnLst>
+              <a:cxn ang="0">
+                <a:pos x="csX0" y="csY0"/>
+              </a:cxn>
+              <a:cxn ang="0">
+                <a:pos x="csX1" y="csY1"/>
+              </a:cxn>
+              <a:cxn ang="0">
+                <a:pos x="csX2" y="csY2"/>
+              </a:cxn>
+              <a:cxn ang="0">
+                <a:pos x="csX3" y="csY3"/>
+              </a:cxn>
+              <a:cxn ang="0">
+                <a:pos x="csX4" y="csY4"/>
+              </a:cxn>
+              <a:cxn ang="0">
+                <a:pos x="csX5" y="csY5"/>
+              </a:cxn>
+              <a:cxn ang="0">
+                <a:pos x="csX6" y="csY6"/>
+              </a:cxn>
+            </a:cxnLst>
+            <a:rect l="l" t="t" r="r" b="b"/>
+            <a:pathLst>
+              <a:path w="4908176" h="2499999">
+                <a:moveTo>
+                  <a:pt x="0" y="2499999"/>
+                </a:moveTo>
+                <a:lnTo>
+                  <a:pt x="4908176" y="2499999"/>
+                </a:lnTo>
+                <a:lnTo>
+                  <a:pt x="4908176" y="0"/>
+                </a:lnTo>
+                <a:lnTo>
+                  <a:pt x="3379971" y="0"/>
+                </a:lnTo>
+                <a:lnTo>
+                  <a:pt x="3379971" y="1488183"/>
+                </a:lnTo>
+                <a:lnTo>
+                  <a:pt x="0" y="1488183"/>
+                </a:lnTo>
+                <a:close/>
+              </a:path>
+            </a:pathLst>
+          </a:custGeom>
+          <a:solidFill>
+            <a:schemeClr val="accent1"/>
+          </a:solidFill>
+          <a:ln w="50800">
+            <a:solidFill>
+              <a:schemeClr val="tx2"/>
+            </a:solidFill>
+          </a:ln>
+        </p:spPr>
+        <p:style>
+          <a:lnRef idx="2">
+            <a:schemeClr val="accent1">
+              <a:shade val="15000"/>
+            </a:schemeClr>
+          </a:lnRef>
+          <a:fillRef idx="1">
+            <a:schemeClr val="accent1"/>
+          </a:fillRef>
+          <a:effectRef idx="0">
+            <a:schemeClr val="accent1"/>
+          </a:effectRef>
+          <a:fontRef idx="minor">
+            <a:schemeClr val="lt1"/>
+          </a:fontRef>
+        </p:style>
+        <p:txBody>
+          <a:bodyPr rtlCol="0" anchor="ctr"/>
+          <a:lstStyle/>
+          <a:p>
+            <a:pPr algn="ctr"/>
+            <a:br>
+              <a:rPr lang="en-CH" dirty="0"/>
+            </a:br>
+            <a:br>
+              <a:rPr lang="en-CH" dirty="0"/>
+            </a:br>
+            <a:br>
+              <a:rPr lang="en-CH" dirty="0"/>
+            </a:br>
+            <a:br>
+              <a:rPr lang="en-CH" dirty="0"/>
+            </a:br>
+            <a:br>
+              <a:rPr lang="en-CH" dirty="0"/>
+            </a:br>
+            <a:endParaRPr lang="en-CH" dirty="0"/>
+          </a:p>
+          <a:p>
+            <a:pPr algn="ctr"/>
+            <a:r>
+              <a:rPr lang="en-CH" dirty="0">
+                <a:latin typeface="Sora" pitchFamily="2" charset="0"/>
+                <a:cs typeface="Sora" pitchFamily="2" charset="0"/>
+              </a:rPr>
+              <a:t>Deterministic</a:t>
+            </a:r>
+          </a:p>
+        </p:txBody>
+      </p:sp>
+      <p:cxnSp>
+        <p:nvCxnSpPr>
+          <p:cNvPr id="9" name="Straight Connector 8">
+            <a:extLst>
+              <a:ext uri="{FF2B5EF4-FFF2-40B4-BE49-F238E27FC236}">
+                <a16:creationId xmlns:a16="http://schemas.microsoft.com/office/drawing/2014/main" id="{5CC1ABF8-3F65-093E-B197-103EDF570F7F}"/>
+              </a:ext>
+            </a:extLst>
+          </p:cNvPr>
+          <p:cNvCxnSpPr>
+            <a:cxnSpLocks/>
+          </p:cNvCxnSpPr>
+          <p:nvPr/>
+        </p:nvCxnSpPr>
+        <p:spPr>
+          <a:xfrm>
+            <a:off x="8419652" y="1245196"/>
+            <a:ext cx="0" cy="4682268"/>
+          </a:xfrm>
+          <a:prstGeom prst="line">
+            <a:avLst/>
+          </a:prstGeom>
+          <a:ln w="254000">
+            <a:solidFill>
+              <a:schemeClr val="tx2"/>
+            </a:solidFill>
+          </a:ln>
+        </p:spPr>
+        <p:style>
+          <a:lnRef idx="1">
+            <a:schemeClr val="accent1"/>
+          </a:lnRef>
+          <a:fillRef idx="0">
+            <a:schemeClr val="accent1"/>
+          </a:fillRef>
+          <a:effectRef idx="0">
+            <a:schemeClr val="accent1"/>
+          </a:effectRef>
+          <a:fontRef idx="minor">
+            <a:schemeClr val="tx1"/>
+          </a:fontRef>
+        </p:style>
+      </p:cxnSp>
+      <p:sp>
+        <p:nvSpPr>
+          <p:cNvPr id="10" name="TextBox 9">
+            <a:extLst>
+              <a:ext uri="{FF2B5EF4-FFF2-40B4-BE49-F238E27FC236}">
+                <a16:creationId xmlns:a16="http://schemas.microsoft.com/office/drawing/2014/main" id="{47403FA8-B9DE-E875-CC73-2B20822F1190}"/>
+              </a:ext>
+            </a:extLst>
+          </p:cNvPr>
+          <p:cNvSpPr txBox="1"/>
+          <p:nvPr/>
+        </p:nvSpPr>
+        <p:spPr>
+          <a:xfrm>
+            <a:off x="5027530" y="5428134"/>
+            <a:ext cx="1192955" cy="369332"/>
+          </a:xfrm>
+          <a:prstGeom prst="rect">
+            <a:avLst/>
+          </a:prstGeom>
+          <a:noFill/>
+        </p:spPr>
+        <p:txBody>
+          <a:bodyPr wrap="none" rtlCol="0">
+            <a:spAutoFit/>
+          </a:bodyPr>
+          <a:lstStyle/>
+          <a:p>
+            <a:r>
+              <a:rPr lang="en-CH" dirty="0">
+                <a:latin typeface="Sora" pitchFamily="2" charset="0"/>
+                <a:cs typeface="Sora" pitchFamily="2" charset="0"/>
+              </a:rPr>
+              <a:t>Solution</a:t>
+            </a:r>
+          </a:p>
+        </p:txBody>
+      </p:sp>
+      <p:sp>
+        <p:nvSpPr>
+          <p:cNvPr id="11" name="TextBox 10">
+            <a:extLst>
+              <a:ext uri="{FF2B5EF4-FFF2-40B4-BE49-F238E27FC236}">
+                <a16:creationId xmlns:a16="http://schemas.microsoft.com/office/drawing/2014/main" id="{536E6235-A8D4-B8D1-8D9E-B5C7A10A43D7}"/>
+              </a:ext>
+            </a:extLst>
+          </p:cNvPr>
+          <p:cNvSpPr txBox="1"/>
+          <p:nvPr/>
+        </p:nvSpPr>
+        <p:spPr>
+          <a:xfrm>
+            <a:off x="8709483" y="5428134"/>
+            <a:ext cx="1540806" cy="369332"/>
+          </a:xfrm>
+          <a:prstGeom prst="rect">
+            <a:avLst/>
+          </a:prstGeom>
+          <a:noFill/>
+        </p:spPr>
+        <p:txBody>
+          <a:bodyPr wrap="none" rtlCol="0">
+            <a:spAutoFit/>
+          </a:bodyPr>
+          <a:lstStyle/>
+          <a:p>
+            <a:r>
+              <a:rPr lang="en-CH" dirty="0">
+                <a:latin typeface="Sora" pitchFamily="2" charset="0"/>
+                <a:cs typeface="Sora" pitchFamily="2" charset="0"/>
+              </a:rPr>
+              <a:t>Foundation</a:t>
+            </a:r>
+          </a:p>
+        </p:txBody>
+      </p:sp>
+      <p:sp>
+        <p:nvSpPr>
+          <p:cNvPr id="2" name="Right Arrow 1">
+            <a:extLst>
+              <a:ext uri="{FF2B5EF4-FFF2-40B4-BE49-F238E27FC236}">
+                <a16:creationId xmlns:a16="http://schemas.microsoft.com/office/drawing/2014/main" id="{B8ED3412-7C0A-F0B3-C996-3914712AB6A1}"/>
+              </a:ext>
+            </a:extLst>
+          </p:cNvPr>
+          <p:cNvSpPr/>
+          <p:nvPr/>
+        </p:nvSpPr>
+        <p:spPr>
+          <a:xfrm>
+            <a:off x="1369100" y="2695096"/>
+            <a:ext cx="1394906" cy="563878"/>
+          </a:xfrm>
+          <a:prstGeom prst="rightArrow">
+            <a:avLst/>
+          </a:prstGeom>
+          <a:solidFill>
+            <a:schemeClr val="accent1">
+              <a:lumMod val="40000"/>
+              <a:lumOff val="60000"/>
+            </a:schemeClr>
+          </a:solidFill>
+          <a:ln w="25400">
+            <a:solidFill>
+              <a:schemeClr val="tx2"/>
+            </a:solidFill>
+          </a:ln>
+        </p:spPr>
+        <p:style>
+          <a:lnRef idx="2">
+            <a:schemeClr val="accent1">
+              <a:shade val="15000"/>
+            </a:schemeClr>
+          </a:lnRef>
+          <a:fillRef idx="1">
+            <a:schemeClr val="accent1"/>
+          </a:fillRef>
+          <a:effectRef idx="0">
+            <a:schemeClr val="accent1"/>
+          </a:effectRef>
+          <a:fontRef idx="minor">
+            <a:schemeClr val="lt1"/>
+          </a:fontRef>
+        </p:style>
+        <p:txBody>
+          <a:bodyPr rtlCol="0" anchor="ctr"/>
+          <a:lstStyle/>
+          <a:p>
+            <a:pPr algn="ctr"/>
+            <a:r>
+              <a:rPr lang="en-CH" sz="1400" dirty="0">
+                <a:solidFill>
+                  <a:schemeClr val="accent2"/>
+                </a:solidFill>
+                <a:latin typeface="Sora" pitchFamily="2" charset="0"/>
+                <a:cs typeface="Sora" pitchFamily="2" charset="0"/>
+              </a:rPr>
+              <a:t>Input</a:t>
+            </a:r>
+            <a:endParaRPr lang="en-CH" dirty="0">
+              <a:solidFill>
+                <a:schemeClr val="accent2"/>
+              </a:solidFill>
+              <a:latin typeface="Sora" pitchFamily="2" charset="0"/>
+              <a:cs typeface="Sora" pitchFamily="2" charset="0"/>
+            </a:endParaRPr>
+          </a:p>
+        </p:txBody>
+      </p:sp>
+      <p:sp>
+        <p:nvSpPr>
+          <p:cNvPr id="3" name="TextBox 2">
+            <a:extLst>
+              <a:ext uri="{FF2B5EF4-FFF2-40B4-BE49-F238E27FC236}">
+                <a16:creationId xmlns:a16="http://schemas.microsoft.com/office/drawing/2014/main" id="{21A5EE44-23E2-65E1-12F1-99311E749AE2}"/>
+              </a:ext>
+            </a:extLst>
+          </p:cNvPr>
+          <p:cNvSpPr txBox="1"/>
+          <p:nvPr/>
+        </p:nvSpPr>
+        <p:spPr>
+          <a:xfrm>
+            <a:off x="1303140" y="3267269"/>
+            <a:ext cx="1534394" cy="369332"/>
+          </a:xfrm>
+          <a:prstGeom prst="rect">
+            <a:avLst/>
+          </a:prstGeom>
+          <a:noFill/>
+        </p:spPr>
+        <p:txBody>
+          <a:bodyPr wrap="none" rtlCol="0">
+            <a:spAutoFit/>
+          </a:bodyPr>
+          <a:lstStyle/>
+          <a:p>
+            <a:r>
+              <a:rPr lang="en-CH" dirty="0">
+                <a:latin typeface="Sora" pitchFamily="2" charset="0"/>
+                <a:cs typeface="Sora" pitchFamily="2" charset="0"/>
+              </a:rPr>
+              <a:t>Consumers</a:t>
+            </a:r>
+          </a:p>
+        </p:txBody>
+      </p:sp>
+      <p:sp>
+        <p:nvSpPr>
+          <p:cNvPr id="8" name="Right Arrow 7">
+            <a:extLst>
+              <a:ext uri="{FF2B5EF4-FFF2-40B4-BE49-F238E27FC236}">
+                <a16:creationId xmlns:a16="http://schemas.microsoft.com/office/drawing/2014/main" id="{23D23993-EDF2-8DE0-FB10-29A4CEEC4BD1}"/>
+              </a:ext>
+            </a:extLst>
+          </p:cNvPr>
+          <p:cNvSpPr/>
+          <p:nvPr/>
+        </p:nvSpPr>
+        <p:spPr>
+          <a:xfrm>
+            <a:off x="1343113" y="3645649"/>
+            <a:ext cx="1394906" cy="563878"/>
+          </a:xfrm>
+          <a:prstGeom prst="leftArrow">
+            <a:avLst/>
+          </a:prstGeom>
+          <a:solidFill>
+            <a:schemeClr val="accent1">
+              <a:lumMod val="40000"/>
+              <a:lumOff val="60000"/>
+            </a:schemeClr>
+          </a:solidFill>
+          <a:ln w="25400">
+            <a:solidFill>
+              <a:schemeClr val="tx2"/>
+            </a:solidFill>
+          </a:ln>
+        </p:spPr>
+        <p:style>
+          <a:lnRef idx="2">
+            <a:schemeClr val="accent1">
+              <a:shade val="15000"/>
+            </a:schemeClr>
+          </a:lnRef>
+          <a:fillRef idx="1">
+            <a:schemeClr val="accent1"/>
+          </a:fillRef>
+          <a:effectRef idx="0">
+            <a:schemeClr val="accent1"/>
+          </a:effectRef>
+          <a:fontRef idx="minor">
+            <a:schemeClr val="lt1"/>
+          </a:fontRef>
+        </p:style>
+        <p:txBody>
+          <a:bodyPr rtlCol="0" anchor="ctr"/>
+          <a:lstStyle/>
+          <a:p>
+            <a:pPr algn="ctr"/>
+            <a:r>
+              <a:rPr lang="en-CH" sz="1400" dirty="0">
+                <a:solidFill>
+                  <a:schemeClr val="accent2"/>
+                </a:solidFill>
+                <a:latin typeface="Sora" pitchFamily="2" charset="0"/>
+                <a:cs typeface="Sora" pitchFamily="2" charset="0"/>
+              </a:rPr>
+              <a:t>Output</a:t>
+            </a:r>
+            <a:endParaRPr lang="en-CH" dirty="0">
+              <a:solidFill>
+                <a:schemeClr val="accent2"/>
+              </a:solidFill>
+              <a:latin typeface="Sora" pitchFamily="2" charset="0"/>
+              <a:cs typeface="Sora" pitchFamily="2" charset="0"/>
+            </a:endParaRPr>
+          </a:p>
+        </p:txBody>
+      </p:sp>
+      <p:sp>
+        <p:nvSpPr>
+          <p:cNvPr id="4" name="Left-right Arrow 3">
+            <a:extLst>
+              <a:ext uri="{FF2B5EF4-FFF2-40B4-BE49-F238E27FC236}">
+                <a16:creationId xmlns:a16="http://schemas.microsoft.com/office/drawing/2014/main" id="{12EDB779-1935-20CA-C5B7-93757FEB7020}"/>
+              </a:ext>
+            </a:extLst>
+          </p:cNvPr>
+          <p:cNvSpPr/>
+          <p:nvPr/>
+        </p:nvSpPr>
+        <p:spPr>
+          <a:xfrm>
+            <a:off x="7667233" y="3407721"/>
+            <a:ext cx="1475338" cy="486347"/>
+          </a:xfrm>
+          <a:prstGeom prst="leftRightArrow">
+            <a:avLst/>
+          </a:prstGeom>
+          <a:solidFill>
+            <a:schemeClr val="accent1">
+              <a:lumMod val="40000"/>
+              <a:lumOff val="60000"/>
+            </a:schemeClr>
+          </a:solidFill>
+          <a:ln w="25400">
+            <a:solidFill>
+              <a:schemeClr val="accent2"/>
+            </a:solidFill>
+          </a:ln>
+        </p:spPr>
+        <p:style>
+          <a:lnRef idx="2">
+            <a:schemeClr val="accent1">
+              <a:shade val="15000"/>
+            </a:schemeClr>
+          </a:lnRef>
+          <a:fillRef idx="1">
+            <a:schemeClr val="accent1"/>
+          </a:fillRef>
+          <a:effectRef idx="0">
+            <a:schemeClr val="accent1"/>
+          </a:effectRef>
+          <a:fontRef idx="minor">
+            <a:schemeClr val="lt1"/>
+          </a:fontRef>
+        </p:style>
+        <p:txBody>
+          <a:bodyPr rtlCol="0" anchor="ctr"/>
+          <a:lstStyle/>
+          <a:p>
+            <a:pPr algn="ctr"/>
+            <a:endParaRPr lang="en-CH"/>
+          </a:p>
+        </p:txBody>
+      </p:sp>
+      <p:sp>
+        <p:nvSpPr>
+          <p:cNvPr id="12" name="Left-right Arrow 11">
+            <a:extLst>
+              <a:ext uri="{FF2B5EF4-FFF2-40B4-BE49-F238E27FC236}">
+                <a16:creationId xmlns:a16="http://schemas.microsoft.com/office/drawing/2014/main" id="{0BB11EA3-BF38-15B9-0039-AD658BFC0178}"/>
+              </a:ext>
+            </a:extLst>
+          </p:cNvPr>
+          <p:cNvSpPr/>
+          <p:nvPr/>
+        </p:nvSpPr>
+        <p:spPr>
+          <a:xfrm>
+            <a:off x="7667233" y="3994831"/>
+            <a:ext cx="1475339" cy="486347"/>
+          </a:xfrm>
+          <a:prstGeom prst="leftRightArrow">
+            <a:avLst/>
+          </a:prstGeom>
+          <a:solidFill>
+            <a:schemeClr val="accent1">
+              <a:lumMod val="40000"/>
+              <a:lumOff val="60000"/>
+            </a:schemeClr>
+          </a:solidFill>
+          <a:ln w="25400">
+            <a:solidFill>
+              <a:schemeClr val="accent2"/>
+            </a:solidFill>
+          </a:ln>
+        </p:spPr>
+        <p:style>
+          <a:lnRef idx="2">
+            <a:schemeClr val="accent1">
+              <a:shade val="15000"/>
+            </a:schemeClr>
+          </a:lnRef>
+          <a:fillRef idx="1">
+            <a:schemeClr val="accent1"/>
+          </a:fillRef>
+          <a:effectRef idx="0">
+            <a:schemeClr val="accent1"/>
+          </a:effectRef>
+          <a:fontRef idx="minor">
+            <a:schemeClr val="lt1"/>
+          </a:fontRef>
+        </p:style>
+        <p:txBody>
+          <a:bodyPr rtlCol="0" anchor="ctr"/>
+          <a:lstStyle/>
+          <a:p>
+            <a:pPr algn="ctr"/>
+            <a:endParaRPr lang="en-CH"/>
+          </a:p>
+        </p:txBody>
+      </p:sp>
+      <p:sp>
+        <p:nvSpPr>
+          <p:cNvPr id="15" name="Left-right Arrow 14">
+            <a:extLst>
+              <a:ext uri="{FF2B5EF4-FFF2-40B4-BE49-F238E27FC236}">
+                <a16:creationId xmlns:a16="http://schemas.microsoft.com/office/drawing/2014/main" id="{B3034869-7C20-0B62-C431-0915B027AB6C}"/>
+              </a:ext>
+            </a:extLst>
+          </p:cNvPr>
+          <p:cNvSpPr/>
+          <p:nvPr/>
+        </p:nvSpPr>
+        <p:spPr>
+          <a:xfrm>
+            <a:off x="7667233" y="2820612"/>
+            <a:ext cx="1475338" cy="486347"/>
+          </a:xfrm>
+          <a:prstGeom prst="leftRightArrow">
+            <a:avLst/>
+          </a:prstGeom>
+          <a:solidFill>
+            <a:schemeClr val="accent1">
+              <a:lumMod val="40000"/>
+              <a:lumOff val="60000"/>
+            </a:schemeClr>
+          </a:solidFill>
+          <a:ln w="25400">
+            <a:solidFill>
+              <a:schemeClr val="accent2"/>
+            </a:solidFill>
+          </a:ln>
+        </p:spPr>
+        <p:style>
+          <a:lnRef idx="2">
+            <a:schemeClr val="accent1">
+              <a:shade val="15000"/>
+            </a:schemeClr>
+          </a:lnRef>
+          <a:fillRef idx="1">
+            <a:schemeClr val="accent1"/>
+          </a:fillRef>
+          <a:effectRef idx="0">
+            <a:schemeClr val="accent1"/>
+          </a:effectRef>
+          <a:fontRef idx="minor">
+            <a:schemeClr val="lt1"/>
+          </a:fontRef>
+        </p:style>
+        <p:txBody>
+          <a:bodyPr rtlCol="0" anchor="ctr"/>
+          <a:lstStyle/>
+          <a:p>
+            <a:pPr algn="ctr"/>
+            <a:endParaRPr lang="en-CH"/>
+          </a:p>
+        </p:txBody>
+      </p:sp>
+      <p:pic>
+        <p:nvPicPr>
+          <p:cNvPr id="16" name="Picture 15">
+            <a:extLst>
+              <a:ext uri="{FF2B5EF4-FFF2-40B4-BE49-F238E27FC236}">
+                <a16:creationId xmlns:a16="http://schemas.microsoft.com/office/drawing/2014/main" id="{631CAFBE-9CA1-CE07-CA49-03EAA0BCFDE0}"/>
+              </a:ext>
+            </a:extLst>
+          </p:cNvPr>
+          <p:cNvPicPr>
+            <a:picLocks noChangeAspect="1"/>
+          </p:cNvPicPr>
+          <p:nvPr/>
+        </p:nvPicPr>
+        <p:blipFill>
+          <a:blip r:embed="rId2"/>
+          <a:stretch>
+            <a:fillRect/>
+          </a:stretch>
+        </p:blipFill>
+        <p:spPr>
+          <a:xfrm>
+            <a:off x="7967197" y="2746993"/>
+            <a:ext cx="875405" cy="625289"/>
+          </a:xfrm>
+          <a:prstGeom prst="rect">
+            <a:avLst/>
+          </a:prstGeom>
+        </p:spPr>
+      </p:pic>
+      <p:sp>
+        <p:nvSpPr>
+          <p:cNvPr id="17" name="Left-right Arrow 16">
+            <a:extLst>
+              <a:ext uri="{FF2B5EF4-FFF2-40B4-BE49-F238E27FC236}">
+                <a16:creationId xmlns:a16="http://schemas.microsoft.com/office/drawing/2014/main" id="{01C5E0EE-1EC4-8F56-8BCB-C1883337797D}"/>
+              </a:ext>
+            </a:extLst>
+          </p:cNvPr>
+          <p:cNvSpPr/>
+          <p:nvPr/>
+        </p:nvSpPr>
+        <p:spPr>
+          <a:xfrm>
+            <a:off x="7667233" y="4581940"/>
+            <a:ext cx="1475339" cy="486347"/>
+          </a:xfrm>
+          <a:prstGeom prst="leftRightArrow">
+            <a:avLst/>
+          </a:prstGeom>
+          <a:solidFill>
+            <a:schemeClr val="accent1">
+              <a:lumMod val="40000"/>
+              <a:lumOff val="60000"/>
+            </a:schemeClr>
+          </a:solidFill>
+          <a:ln w="25400">
+            <a:solidFill>
+              <a:schemeClr val="accent2"/>
+            </a:solidFill>
+          </a:ln>
+        </p:spPr>
+        <p:style>
+          <a:lnRef idx="2">
+            <a:schemeClr val="accent1">
+              <a:shade val="15000"/>
+            </a:schemeClr>
+          </a:lnRef>
+          <a:fillRef idx="1">
+            <a:schemeClr val="accent1"/>
+          </a:fillRef>
+          <a:effectRef idx="0">
+            <a:schemeClr val="accent1"/>
+          </a:effectRef>
+          <a:fontRef idx="minor">
+            <a:schemeClr val="lt1"/>
+          </a:fontRef>
+        </p:style>
+        <p:txBody>
+          <a:bodyPr rtlCol="0" anchor="ctr"/>
+          <a:lstStyle/>
+          <a:p>
+            <a:pPr algn="ctr"/>
+            <a:endParaRPr lang="en-CH"/>
+          </a:p>
+        </p:txBody>
+      </p:sp>
+      <p:pic>
+        <p:nvPicPr>
+          <p:cNvPr id="19" name="Picture 18">
+            <a:extLst>
+              <a:ext uri="{FF2B5EF4-FFF2-40B4-BE49-F238E27FC236}">
+                <a16:creationId xmlns:a16="http://schemas.microsoft.com/office/drawing/2014/main" id="{0A7CE27B-C196-B4DB-336A-EC7819C00010}"/>
+              </a:ext>
+            </a:extLst>
+          </p:cNvPr>
+          <p:cNvPicPr>
+            <a:picLocks noChangeAspect="1"/>
+          </p:cNvPicPr>
+          <p:nvPr/>
+        </p:nvPicPr>
+        <p:blipFill>
+          <a:blip r:embed="rId3"/>
+          <a:stretch>
+            <a:fillRect/>
+          </a:stretch>
+        </p:blipFill>
+        <p:spPr>
+          <a:xfrm>
+            <a:off x="8048989" y="3580707"/>
+            <a:ext cx="698570" cy="154491"/>
+          </a:xfrm>
+          <a:prstGeom prst="rect">
+            <a:avLst/>
+          </a:prstGeom>
+        </p:spPr>
+      </p:pic>
+      <p:pic>
+        <p:nvPicPr>
+          <p:cNvPr id="20" name="Picture 19">
+            <a:extLst>
+              <a:ext uri="{FF2B5EF4-FFF2-40B4-BE49-F238E27FC236}">
+                <a16:creationId xmlns:a16="http://schemas.microsoft.com/office/drawing/2014/main" id="{2A4D1D55-AC7B-CC9E-837A-41C9156B7B36}"/>
+              </a:ext>
+            </a:extLst>
+          </p:cNvPr>
+          <p:cNvPicPr>
+            <a:picLocks noChangeAspect="1"/>
+          </p:cNvPicPr>
+          <p:nvPr/>
+        </p:nvPicPr>
+        <p:blipFill>
+          <a:blip r:embed="rId4"/>
+          <a:stretch>
+            <a:fillRect/>
+          </a:stretch>
+        </p:blipFill>
+        <p:spPr>
+          <a:xfrm>
+            <a:off x="8157013" y="4583851"/>
+            <a:ext cx="482523" cy="482523"/>
+          </a:xfrm>
+          <a:prstGeom prst="rect">
+            <a:avLst/>
+          </a:prstGeom>
+        </p:spPr>
+      </p:pic>
+      <p:pic>
+        <p:nvPicPr>
+          <p:cNvPr id="21" name="Picture 20">
+            <a:extLst>
+              <a:ext uri="{FF2B5EF4-FFF2-40B4-BE49-F238E27FC236}">
+                <a16:creationId xmlns:a16="http://schemas.microsoft.com/office/drawing/2014/main" id="{067468A6-BFDB-0D25-5A19-C1822A91C1C8}"/>
+              </a:ext>
+            </a:extLst>
+          </p:cNvPr>
+          <p:cNvPicPr>
+            <a:picLocks noChangeAspect="1"/>
+          </p:cNvPicPr>
+          <p:nvPr/>
+        </p:nvPicPr>
+        <p:blipFill>
+          <a:blip r:embed="rId5"/>
+          <a:stretch>
+            <a:fillRect/>
+          </a:stretch>
+        </p:blipFill>
+        <p:spPr>
+          <a:xfrm>
+            <a:off x="8003222" y="4137113"/>
+            <a:ext cx="738758" cy="201847"/>
+          </a:xfrm>
+          <a:prstGeom prst="rect">
+            <a:avLst/>
+          </a:prstGeom>
+        </p:spPr>
+      </p:pic>
+      <p:sp>
+        <p:nvSpPr>
+          <p:cNvPr id="22" name="Left-right Arrow 21">
+            <a:extLst>
+              <a:ext uri="{FF2B5EF4-FFF2-40B4-BE49-F238E27FC236}">
+                <a16:creationId xmlns:a16="http://schemas.microsoft.com/office/drawing/2014/main" id="{D1A0B776-4178-644F-42F6-AA312CEB1120}"/>
+              </a:ext>
+            </a:extLst>
+          </p:cNvPr>
+          <p:cNvSpPr/>
+          <p:nvPr/>
+        </p:nvSpPr>
+        <p:spPr>
+          <a:xfrm>
+            <a:off x="5888182" y="1783283"/>
+            <a:ext cx="3385701" cy="860367"/>
+          </a:xfrm>
+          <a:prstGeom prst="leftRightArrow">
+            <a:avLst/>
+          </a:prstGeom>
+          <a:solidFill>
+            <a:schemeClr val="accent1">
+              <a:lumMod val="40000"/>
+              <a:lumOff val="60000"/>
+            </a:schemeClr>
+          </a:solidFill>
+          <a:ln w="25400">
+            <a:solidFill>
+              <a:schemeClr val="accent2"/>
+            </a:solidFill>
+          </a:ln>
+        </p:spPr>
+        <p:style>
+          <a:lnRef idx="2">
+            <a:schemeClr val="accent1">
+              <a:shade val="15000"/>
+            </a:schemeClr>
+          </a:lnRef>
+          <a:fillRef idx="1">
+            <a:schemeClr val="accent1"/>
+          </a:fillRef>
+          <a:effectRef idx="0">
+            <a:schemeClr val="accent1"/>
+          </a:effectRef>
+          <a:fontRef idx="minor">
+            <a:schemeClr val="lt1"/>
+          </a:fontRef>
+        </p:style>
+        <p:txBody>
+          <a:bodyPr rtlCol="0" anchor="ctr"/>
+          <a:lstStyle/>
+          <a:p>
+            <a:pPr algn="ctr"/>
+            <a:endParaRPr lang="en-CH" sz="900" dirty="0">
+              <a:solidFill>
+                <a:schemeClr val="accent2"/>
+              </a:solidFill>
+              <a:latin typeface="Sora" pitchFamily="2" charset="0"/>
+              <a:cs typeface="Sora" pitchFamily="2" charset="0"/>
+            </a:endParaRPr>
+          </a:p>
+        </p:txBody>
+      </p:sp>
+      <p:pic>
+        <p:nvPicPr>
+          <p:cNvPr id="13" name="Picture 12">
+            <a:extLst>
+              <a:ext uri="{FF2B5EF4-FFF2-40B4-BE49-F238E27FC236}">
+                <a16:creationId xmlns:a16="http://schemas.microsoft.com/office/drawing/2014/main" id="{413B9BF5-9256-396D-B56D-3F301B8BE01B}"/>
+              </a:ext>
+            </a:extLst>
+          </p:cNvPr>
+          <p:cNvPicPr>
+            <a:picLocks noChangeAspect="1"/>
+          </p:cNvPicPr>
+          <p:nvPr/>
+        </p:nvPicPr>
+        <p:blipFill>
+          <a:blip r:embed="rId6"/>
+          <a:stretch>
+            <a:fillRect/>
+          </a:stretch>
+        </p:blipFill>
+        <p:spPr>
+          <a:xfrm>
+            <a:off x="6269357" y="2025731"/>
+            <a:ext cx="2480992" cy="361141"/>
+          </a:xfrm>
+          <a:prstGeom prst="rect">
+            <a:avLst/>
+          </a:prstGeom>
+        </p:spPr>
+      </p:pic>
+    </p:spTree>
+    <p:extLst>
+      <p:ext uri="{BB962C8B-B14F-4D97-AF65-F5344CB8AC3E}">
+        <p14:creationId xmlns:p14="http://schemas.microsoft.com/office/powerpoint/2010/main" val="3102119355"/>
+      </p:ext>
+    </p:extLst>
+  </p:cSld>
+  <p:clrMapOvr>
+    <a:masterClrMapping/>
+  </p:clrMapOvr>
+</p:sld>
+</file>
+
+<file path=ppt/slides/slide7.xml><?xml version="1.0" encoding="utf-8"?>
+<p:sld xmlns:a="http://schemas.openxmlformats.org/drawingml/2006/main" xmlns:r="http://schemas.openxmlformats.org/officeDocument/2006/relationships" xmlns:p="http://schemas.openxmlformats.org/presentationml/2006/main">
+  <p:cSld>
+    <p:spTree>
+      <p:nvGrpSpPr>
+        <p:cNvPr id="1" name="">
+          <a:extLst>
+            <a:ext uri="{FF2B5EF4-FFF2-40B4-BE49-F238E27FC236}">
+              <a16:creationId xmlns:a16="http://schemas.microsoft.com/office/drawing/2014/main" id="{B7FE2FE1-41E4-D2A5-8B3F-3F949152326F}"/>
+            </a:ext>
+          </a:extLst>
+        </p:cNvPr>
+        <p:cNvGrpSpPr/>
+        <p:nvPr/>
+      </p:nvGrpSpPr>
+      <p:grpSpPr>
+        <a:xfrm>
+          <a:off x="0" y="0"/>
+          <a:ext cx="0" cy="0"/>
+          <a:chOff x="0" y="0"/>
+          <a:chExt cx="0" cy="0"/>
+        </a:xfrm>
+      </p:grpSpPr>
+      <p:sp>
+        <p:nvSpPr>
+          <p:cNvPr id="5" name="Rectangle 4">
+            <a:extLst>
+              <a:ext uri="{FF2B5EF4-FFF2-40B4-BE49-F238E27FC236}">
+                <a16:creationId xmlns:a16="http://schemas.microsoft.com/office/drawing/2014/main" id="{0D406A83-73B8-AA55-2F62-BCE16E2225E9}"/>
+              </a:ext>
+            </a:extLst>
+          </p:cNvPr>
+          <p:cNvSpPr/>
+          <p:nvPr/>
+        </p:nvSpPr>
+        <p:spPr>
+          <a:xfrm>
+            <a:off x="3169920" y="1663549"/>
+            <a:ext cx="3252971" cy="2392084"/>
+          </a:xfrm>
+          <a:prstGeom prst="rect">
+            <a:avLst/>
+          </a:prstGeom>
+          <a:solidFill>
+            <a:schemeClr val="tx2"/>
+          </a:solidFill>
+          <a:ln w="50800">
+            <a:solidFill>
+              <a:schemeClr val="accent1"/>
+            </a:solidFill>
+          </a:ln>
+        </p:spPr>
+        <p:style>
+          <a:lnRef idx="2">
+            <a:schemeClr val="accent1">
+              <a:shade val="15000"/>
+            </a:schemeClr>
+          </a:lnRef>
+          <a:fillRef idx="1">
+            <a:schemeClr val="accent1"/>
+          </a:fillRef>
+          <a:effectRef idx="0">
+            <a:schemeClr val="accent1"/>
+          </a:effectRef>
+          <a:fontRef idx="minor">
+            <a:schemeClr val="lt1"/>
+          </a:fontRef>
+        </p:style>
+        <p:txBody>
+          <a:bodyPr rtlCol="0" anchor="ctr"/>
+          <a:lstStyle/>
+          <a:p>
+            <a:pPr algn="ctr"/>
+            <a:r>
+              <a:rPr lang="en-CH" dirty="0">
+                <a:latin typeface="Sora" pitchFamily="2" charset="0"/>
+                <a:cs typeface="Sora" pitchFamily="2" charset="0"/>
+              </a:rPr>
+              <a:t>GenAI</a:t>
+            </a:r>
+          </a:p>
+        </p:txBody>
+      </p:sp>
+      <p:sp>
+        <p:nvSpPr>
+          <p:cNvPr id="6" name="Rectangle 5">
+            <a:extLst>
+              <a:ext uri="{FF2B5EF4-FFF2-40B4-BE49-F238E27FC236}">
+                <a16:creationId xmlns:a16="http://schemas.microsoft.com/office/drawing/2014/main" id="{5C9A77CA-14ED-1655-E48B-2F4DE6035405}"/>
+              </a:ext>
+            </a:extLst>
+          </p:cNvPr>
+          <p:cNvSpPr/>
+          <p:nvPr/>
+        </p:nvSpPr>
+        <p:spPr>
+          <a:xfrm>
+            <a:off x="8753138" y="1663549"/>
+            <a:ext cx="1398488" cy="3530899"/>
+          </a:xfrm>
+          <a:prstGeom prst="rect">
+            <a:avLst/>
+          </a:prstGeom>
+          <a:solidFill>
+            <a:schemeClr val="accent1">
+              <a:lumMod val="40000"/>
+              <a:lumOff val="60000"/>
+            </a:schemeClr>
+          </a:solidFill>
+          <a:ln w="50800">
+            <a:solidFill>
+              <a:schemeClr val="tx2"/>
+            </a:solidFill>
+          </a:ln>
+        </p:spPr>
+        <p:style>
+          <a:lnRef idx="2">
+            <a:schemeClr val="accent1">
+              <a:shade val="15000"/>
+            </a:schemeClr>
+          </a:lnRef>
+          <a:fillRef idx="1">
+            <a:schemeClr val="accent1"/>
+          </a:fillRef>
+          <a:effectRef idx="0">
+            <a:schemeClr val="accent1"/>
+          </a:effectRef>
+          <a:fontRef idx="minor">
+            <a:schemeClr val="lt1"/>
+          </a:fontRef>
+        </p:style>
+        <p:txBody>
+          <a:bodyPr rtlCol="0" anchor="ctr"/>
+          <a:lstStyle/>
+          <a:p>
+            <a:pPr algn="ctr"/>
+            <a:r>
+              <a:rPr lang="en-CH" dirty="0">
+                <a:solidFill>
+                  <a:schemeClr val="accent2"/>
+                </a:solidFill>
+                <a:latin typeface="Sora" pitchFamily="2" charset="0"/>
+                <a:cs typeface="Sora" pitchFamily="2" charset="0"/>
+              </a:rPr>
+              <a:t>      </a:t>
+            </a:r>
+          </a:p>
+          <a:p>
+            <a:pPr algn="ctr"/>
+            <a:endParaRPr lang="en-CH" dirty="0">
+              <a:solidFill>
+                <a:schemeClr val="accent2"/>
+              </a:solidFill>
+              <a:latin typeface="Sora" pitchFamily="2" charset="0"/>
+              <a:cs typeface="Sora" pitchFamily="2" charset="0"/>
+            </a:endParaRPr>
+          </a:p>
+          <a:p>
+            <a:pPr algn="ctr"/>
+            <a:endParaRPr lang="en-CH" dirty="0">
+              <a:solidFill>
+                <a:schemeClr val="accent2"/>
+              </a:solidFill>
+              <a:latin typeface="Sora" pitchFamily="2" charset="0"/>
+              <a:cs typeface="Sora" pitchFamily="2" charset="0"/>
+            </a:endParaRPr>
+          </a:p>
+          <a:p>
+            <a:pPr algn="ctr"/>
+            <a:endParaRPr lang="en-CH" dirty="0">
+              <a:solidFill>
+                <a:schemeClr val="accent2"/>
+              </a:solidFill>
+              <a:latin typeface="Sora" pitchFamily="2" charset="0"/>
+              <a:cs typeface="Sora" pitchFamily="2" charset="0"/>
+            </a:endParaRPr>
+          </a:p>
+          <a:p>
+            <a:pPr algn="ctr"/>
+            <a:endParaRPr lang="en-CH" dirty="0">
+              <a:solidFill>
+                <a:schemeClr val="accent2"/>
+              </a:solidFill>
+              <a:latin typeface="Sora" pitchFamily="2" charset="0"/>
+              <a:cs typeface="Sora" pitchFamily="2" charset="0"/>
+            </a:endParaRPr>
+          </a:p>
+          <a:p>
+            <a:pPr algn="ctr"/>
+            <a:endParaRPr lang="en-CH" dirty="0">
+              <a:solidFill>
+                <a:schemeClr val="accent2"/>
+              </a:solidFill>
+              <a:latin typeface="Sora" pitchFamily="2" charset="0"/>
+              <a:cs typeface="Sora" pitchFamily="2" charset="0"/>
+            </a:endParaRPr>
+          </a:p>
+          <a:p>
+            <a:pPr algn="ctr"/>
+            <a:endParaRPr lang="en-CH" dirty="0">
+              <a:solidFill>
+                <a:schemeClr val="accent2"/>
+              </a:solidFill>
+              <a:latin typeface="Sora" pitchFamily="2" charset="0"/>
+              <a:cs typeface="Sora" pitchFamily="2" charset="0"/>
+            </a:endParaRPr>
+          </a:p>
+          <a:p>
+            <a:pPr algn="ctr"/>
+            <a:r>
+              <a:rPr lang="en-CH" dirty="0">
+                <a:solidFill>
+                  <a:schemeClr val="accent2"/>
+                </a:solidFill>
+                <a:latin typeface="Sora" pitchFamily="2" charset="0"/>
+                <a:cs typeface="Sora" pitchFamily="2" charset="0"/>
+              </a:rPr>
+              <a:t>     APIs</a:t>
+            </a:r>
+          </a:p>
+          <a:p>
+            <a:pPr algn="ctr"/>
+            <a:r>
+              <a:rPr lang="en-CH" dirty="0">
+                <a:solidFill>
+                  <a:schemeClr val="accent2"/>
+                </a:solidFill>
+                <a:latin typeface="Sora" pitchFamily="2" charset="0"/>
+                <a:cs typeface="Sora" pitchFamily="2" charset="0"/>
+              </a:rPr>
+              <a:t>     &amp;</a:t>
+            </a:r>
+          </a:p>
+          <a:p>
+            <a:pPr algn="ctr"/>
+            <a:r>
+              <a:rPr lang="en-CH" dirty="0">
+                <a:solidFill>
+                  <a:schemeClr val="accent2"/>
+                </a:solidFill>
+                <a:latin typeface="Sora" pitchFamily="2" charset="0"/>
+                <a:cs typeface="Sora" pitchFamily="2" charset="0"/>
+              </a:rPr>
+              <a:t>     Data</a:t>
+            </a:r>
+          </a:p>
+        </p:txBody>
+      </p:sp>
+      <p:sp>
+        <p:nvSpPr>
+          <p:cNvPr id="7" name="Freeform 6">
+            <a:extLst>
+              <a:ext uri="{FF2B5EF4-FFF2-40B4-BE49-F238E27FC236}">
+                <a16:creationId xmlns:a16="http://schemas.microsoft.com/office/drawing/2014/main" id="{59753C49-6A29-71E2-484B-E3F208C193FF}"/>
+              </a:ext>
+            </a:extLst>
+          </p:cNvPr>
+          <p:cNvSpPr/>
+          <p:nvPr/>
+        </p:nvSpPr>
+        <p:spPr>
+          <a:xfrm>
+            <a:off x="3169920" y="2694450"/>
+            <a:ext cx="4908176" cy="2499999"/>
+          </a:xfrm>
+          <a:custGeom>
+            <a:avLst/>
+            <a:gdLst>
+              <a:gd name="csX0" fmla="*/ 0 w 4908176"/>
+              <a:gd name="csY0" fmla="*/ 2699627 h 2699627"/>
+              <a:gd name="csX1" fmla="*/ 4908176 w 4908176"/>
+              <a:gd name="csY1" fmla="*/ 2699627 h 2699627"/>
+              <a:gd name="csX2" fmla="*/ 4908176 w 4908176"/>
+              <a:gd name="csY2" fmla="*/ 0 h 2699627"/>
+              <a:gd name="csX3" fmla="*/ 3407681 w 4908176"/>
+              <a:gd name="csY3" fmla="*/ 13854 h 2699627"/>
+              <a:gd name="csX4" fmla="*/ 3379971 w 4908176"/>
+              <a:gd name="csY4" fmla="*/ 1687811 h 2699627"/>
+              <a:gd name="csX5" fmla="*/ 0 w 4908176"/>
+              <a:gd name="csY5" fmla="*/ 1687811 h 2699627"/>
+              <a:gd name="csX6" fmla="*/ 0 w 4908176"/>
+              <a:gd name="csY6" fmla="*/ 2699627 h 2699627"/>
+            </a:gdLst>
+            <a:ahLst/>
+            <a:cxnLst>
+              <a:cxn ang="0">
+                <a:pos x="csX0" y="csY0"/>
+              </a:cxn>
+              <a:cxn ang="0">
+                <a:pos x="csX1" y="csY1"/>
+              </a:cxn>
+              <a:cxn ang="0">
+                <a:pos x="csX2" y="csY2"/>
+              </a:cxn>
+              <a:cxn ang="0">
+                <a:pos x="csX3" y="csY3"/>
+              </a:cxn>
+              <a:cxn ang="0">
+                <a:pos x="csX4" y="csY4"/>
+              </a:cxn>
+              <a:cxn ang="0">
+                <a:pos x="csX5" y="csY5"/>
+              </a:cxn>
+              <a:cxn ang="0">
+                <a:pos x="csX6" y="csY6"/>
+              </a:cxn>
+            </a:cxnLst>
+            <a:rect l="l" t="t" r="r" b="b"/>
+            <a:pathLst>
+              <a:path w="4908176" h="2499999">
+                <a:moveTo>
+                  <a:pt x="0" y="2499999"/>
+                </a:moveTo>
+                <a:lnTo>
+                  <a:pt x="4908176" y="2499999"/>
+                </a:lnTo>
+                <a:lnTo>
+                  <a:pt x="4908176" y="0"/>
+                </a:lnTo>
+                <a:lnTo>
+                  <a:pt x="3379971" y="0"/>
+                </a:lnTo>
+                <a:lnTo>
+                  <a:pt x="3379971" y="1488183"/>
+                </a:lnTo>
+                <a:lnTo>
+                  <a:pt x="0" y="1488183"/>
+                </a:lnTo>
+                <a:close/>
+              </a:path>
+            </a:pathLst>
+          </a:custGeom>
+          <a:solidFill>
+            <a:schemeClr val="accent1"/>
+          </a:solidFill>
+          <a:ln w="50800">
+            <a:solidFill>
+              <a:schemeClr val="tx2"/>
+            </a:solidFill>
+          </a:ln>
+        </p:spPr>
+        <p:style>
+          <a:lnRef idx="2">
+            <a:schemeClr val="accent1">
+              <a:shade val="15000"/>
+            </a:schemeClr>
+          </a:lnRef>
+          <a:fillRef idx="1">
+            <a:schemeClr val="accent1"/>
+          </a:fillRef>
+          <a:effectRef idx="0">
+            <a:schemeClr val="accent1"/>
+          </a:effectRef>
+          <a:fontRef idx="minor">
+            <a:schemeClr val="lt1"/>
+          </a:fontRef>
+        </p:style>
+        <p:txBody>
+          <a:bodyPr rtlCol="0" anchor="ctr"/>
+          <a:lstStyle/>
+          <a:p>
+            <a:pPr algn="ctr"/>
+            <a:br>
+              <a:rPr lang="en-CH" dirty="0"/>
+            </a:br>
+            <a:br>
+              <a:rPr lang="en-CH" dirty="0"/>
+            </a:br>
+            <a:br>
+              <a:rPr lang="en-CH" dirty="0"/>
+            </a:br>
+            <a:br>
+              <a:rPr lang="en-CH" dirty="0"/>
+            </a:br>
+            <a:br>
+              <a:rPr lang="en-CH" dirty="0"/>
+            </a:br>
+            <a:endParaRPr lang="en-CH" dirty="0"/>
+          </a:p>
+          <a:p>
+            <a:pPr algn="ctr"/>
+            <a:r>
+              <a:rPr lang="en-CH" dirty="0">
+                <a:latin typeface="Sora" pitchFamily="2" charset="0"/>
+                <a:cs typeface="Sora" pitchFamily="2" charset="0"/>
+              </a:rPr>
+              <a:t>Deterministic</a:t>
+            </a:r>
+          </a:p>
+        </p:txBody>
+      </p:sp>
+      <p:cxnSp>
+        <p:nvCxnSpPr>
+          <p:cNvPr id="9" name="Straight Connector 8">
+            <a:extLst>
+              <a:ext uri="{FF2B5EF4-FFF2-40B4-BE49-F238E27FC236}">
+                <a16:creationId xmlns:a16="http://schemas.microsoft.com/office/drawing/2014/main" id="{2A744F4B-6B9B-1B6A-43EC-DE7679FA2E68}"/>
+              </a:ext>
+            </a:extLst>
+          </p:cNvPr>
+          <p:cNvCxnSpPr>
+            <a:cxnSpLocks/>
+          </p:cNvCxnSpPr>
+          <p:nvPr/>
+        </p:nvCxnSpPr>
+        <p:spPr>
+          <a:xfrm>
+            <a:off x="8419652" y="1245196"/>
+            <a:ext cx="0" cy="4682268"/>
+          </a:xfrm>
+          <a:prstGeom prst="line">
+            <a:avLst/>
+          </a:prstGeom>
+          <a:ln w="254000">
+            <a:solidFill>
+              <a:schemeClr val="tx2"/>
+            </a:solidFill>
+          </a:ln>
+        </p:spPr>
+        <p:style>
+          <a:lnRef idx="1">
+            <a:schemeClr val="accent1"/>
+          </a:lnRef>
+          <a:fillRef idx="0">
+            <a:schemeClr val="accent1"/>
+          </a:fillRef>
+          <a:effectRef idx="0">
+            <a:schemeClr val="accent1"/>
+          </a:effectRef>
+          <a:fontRef idx="minor">
+            <a:schemeClr val="tx1"/>
+          </a:fontRef>
+        </p:style>
+      </p:cxnSp>
+      <p:sp>
+        <p:nvSpPr>
+          <p:cNvPr id="10" name="TextBox 9">
+            <a:extLst>
+              <a:ext uri="{FF2B5EF4-FFF2-40B4-BE49-F238E27FC236}">
+                <a16:creationId xmlns:a16="http://schemas.microsoft.com/office/drawing/2014/main" id="{D379D0F3-0A75-C1A4-0313-0907C4A263AA}"/>
+              </a:ext>
+            </a:extLst>
+          </p:cNvPr>
+          <p:cNvSpPr txBox="1"/>
+          <p:nvPr/>
+        </p:nvSpPr>
+        <p:spPr>
+          <a:xfrm>
+            <a:off x="5027530" y="5428134"/>
+            <a:ext cx="1192955" cy="369332"/>
+          </a:xfrm>
+          <a:prstGeom prst="rect">
+            <a:avLst/>
+          </a:prstGeom>
+          <a:noFill/>
+        </p:spPr>
+        <p:txBody>
+          <a:bodyPr wrap="none" rtlCol="0">
+            <a:spAutoFit/>
+          </a:bodyPr>
+          <a:lstStyle/>
+          <a:p>
+            <a:r>
+              <a:rPr lang="en-CH" dirty="0">
+                <a:latin typeface="Sora" pitchFamily="2" charset="0"/>
+                <a:cs typeface="Sora" pitchFamily="2" charset="0"/>
+              </a:rPr>
+              <a:t>Solution</a:t>
+            </a:r>
+          </a:p>
+        </p:txBody>
+      </p:sp>
+      <p:sp>
+        <p:nvSpPr>
+          <p:cNvPr id="11" name="TextBox 10">
+            <a:extLst>
+              <a:ext uri="{FF2B5EF4-FFF2-40B4-BE49-F238E27FC236}">
+                <a16:creationId xmlns:a16="http://schemas.microsoft.com/office/drawing/2014/main" id="{B2DFDE80-5E47-33CF-0B19-877F096AB18F}"/>
+              </a:ext>
+            </a:extLst>
+          </p:cNvPr>
+          <p:cNvSpPr txBox="1"/>
+          <p:nvPr/>
+        </p:nvSpPr>
+        <p:spPr>
+          <a:xfrm>
+            <a:off x="8709483" y="5428134"/>
+            <a:ext cx="1540806" cy="369332"/>
+          </a:xfrm>
+          <a:prstGeom prst="rect">
+            <a:avLst/>
+          </a:prstGeom>
+          <a:noFill/>
+        </p:spPr>
+        <p:txBody>
+          <a:bodyPr wrap="none" rtlCol="0">
+            <a:spAutoFit/>
+          </a:bodyPr>
+          <a:lstStyle/>
+          <a:p>
+            <a:r>
+              <a:rPr lang="en-CH" dirty="0">
+                <a:latin typeface="Sora" pitchFamily="2" charset="0"/>
+                <a:cs typeface="Sora" pitchFamily="2" charset="0"/>
+              </a:rPr>
+              <a:t>Foundation</a:t>
+            </a:r>
+          </a:p>
+        </p:txBody>
+      </p:sp>
+      <p:sp>
+        <p:nvSpPr>
+          <p:cNvPr id="2" name="Right Arrow 1">
+            <a:extLst>
+              <a:ext uri="{FF2B5EF4-FFF2-40B4-BE49-F238E27FC236}">
+                <a16:creationId xmlns:a16="http://schemas.microsoft.com/office/drawing/2014/main" id="{283A90C0-275F-89FC-9ABE-708D75487479}"/>
+              </a:ext>
+            </a:extLst>
+          </p:cNvPr>
+          <p:cNvSpPr/>
+          <p:nvPr/>
+        </p:nvSpPr>
+        <p:spPr>
+          <a:xfrm>
+            <a:off x="1369100" y="2695096"/>
+            <a:ext cx="1394906" cy="563878"/>
+          </a:xfrm>
+          <a:prstGeom prst="rightArrow">
+            <a:avLst/>
+          </a:prstGeom>
+          <a:solidFill>
+            <a:schemeClr val="accent1">
+              <a:lumMod val="40000"/>
+              <a:lumOff val="60000"/>
+            </a:schemeClr>
+          </a:solidFill>
+          <a:ln w="25400">
+            <a:solidFill>
+              <a:schemeClr val="tx2"/>
+            </a:solidFill>
+          </a:ln>
+        </p:spPr>
+        <p:style>
+          <a:lnRef idx="2">
+            <a:schemeClr val="accent1">
+              <a:shade val="15000"/>
+            </a:schemeClr>
+          </a:lnRef>
+          <a:fillRef idx="1">
+            <a:schemeClr val="accent1"/>
+          </a:fillRef>
+          <a:effectRef idx="0">
+            <a:schemeClr val="accent1"/>
+          </a:effectRef>
+          <a:fontRef idx="minor">
+            <a:schemeClr val="lt1"/>
+          </a:fontRef>
+        </p:style>
+        <p:txBody>
+          <a:bodyPr rtlCol="0" anchor="ctr"/>
+          <a:lstStyle/>
+          <a:p>
+            <a:pPr algn="ctr"/>
+            <a:r>
+              <a:rPr lang="en-CH" sz="1400" dirty="0">
+                <a:solidFill>
+                  <a:schemeClr val="accent2"/>
+                </a:solidFill>
+                <a:latin typeface="Sora" pitchFamily="2" charset="0"/>
+                <a:cs typeface="Sora" pitchFamily="2" charset="0"/>
+              </a:rPr>
+              <a:t>Input</a:t>
+            </a:r>
+            <a:endParaRPr lang="en-CH" dirty="0">
+              <a:solidFill>
+                <a:schemeClr val="accent2"/>
+              </a:solidFill>
+              <a:latin typeface="Sora" pitchFamily="2" charset="0"/>
+              <a:cs typeface="Sora" pitchFamily="2" charset="0"/>
+            </a:endParaRPr>
+          </a:p>
+        </p:txBody>
+      </p:sp>
+      <p:sp>
+        <p:nvSpPr>
+          <p:cNvPr id="3" name="TextBox 2">
+            <a:extLst>
+              <a:ext uri="{FF2B5EF4-FFF2-40B4-BE49-F238E27FC236}">
+                <a16:creationId xmlns:a16="http://schemas.microsoft.com/office/drawing/2014/main" id="{6DEEAB50-0E5E-F99A-507B-A70C8460DC69}"/>
+              </a:ext>
+            </a:extLst>
+          </p:cNvPr>
+          <p:cNvSpPr txBox="1"/>
+          <p:nvPr/>
+        </p:nvSpPr>
+        <p:spPr>
+          <a:xfrm>
+            <a:off x="1303140" y="3267269"/>
+            <a:ext cx="1534394" cy="369332"/>
+          </a:xfrm>
+          <a:prstGeom prst="rect">
+            <a:avLst/>
+          </a:prstGeom>
+          <a:noFill/>
+        </p:spPr>
+        <p:txBody>
+          <a:bodyPr wrap="none" rtlCol="0">
+            <a:spAutoFit/>
+          </a:bodyPr>
+          <a:lstStyle/>
+          <a:p>
+            <a:r>
+              <a:rPr lang="en-CH" dirty="0">
+                <a:latin typeface="Sora" pitchFamily="2" charset="0"/>
+                <a:cs typeface="Sora" pitchFamily="2" charset="0"/>
+              </a:rPr>
+              <a:t>Consumers</a:t>
+            </a:r>
+          </a:p>
+        </p:txBody>
+      </p:sp>
+      <p:sp>
+        <p:nvSpPr>
+          <p:cNvPr id="8" name="Right Arrow 7">
+            <a:extLst>
+              <a:ext uri="{FF2B5EF4-FFF2-40B4-BE49-F238E27FC236}">
+                <a16:creationId xmlns:a16="http://schemas.microsoft.com/office/drawing/2014/main" id="{B598521A-BCCA-3FFC-5F64-1ADF32C343C6}"/>
+              </a:ext>
+            </a:extLst>
+          </p:cNvPr>
+          <p:cNvSpPr/>
+          <p:nvPr/>
+        </p:nvSpPr>
+        <p:spPr>
+          <a:xfrm>
+            <a:off x="1343113" y="3645649"/>
+            <a:ext cx="1394906" cy="563878"/>
+          </a:xfrm>
+          <a:prstGeom prst="leftArrow">
+            <a:avLst/>
+          </a:prstGeom>
+          <a:solidFill>
+            <a:schemeClr val="accent1">
+              <a:lumMod val="40000"/>
+              <a:lumOff val="60000"/>
+            </a:schemeClr>
+          </a:solidFill>
+          <a:ln w="25400">
+            <a:solidFill>
+              <a:schemeClr val="tx2"/>
+            </a:solidFill>
+          </a:ln>
+        </p:spPr>
+        <p:style>
+          <a:lnRef idx="2">
+            <a:schemeClr val="accent1">
+              <a:shade val="15000"/>
+            </a:schemeClr>
+          </a:lnRef>
+          <a:fillRef idx="1">
+            <a:schemeClr val="accent1"/>
+          </a:fillRef>
+          <a:effectRef idx="0">
+            <a:schemeClr val="accent1"/>
+          </a:effectRef>
+          <a:fontRef idx="minor">
+            <a:schemeClr val="lt1"/>
+          </a:fontRef>
+        </p:style>
+        <p:txBody>
+          <a:bodyPr rtlCol="0" anchor="ctr"/>
+          <a:lstStyle/>
+          <a:p>
+            <a:pPr algn="ctr"/>
+            <a:r>
+              <a:rPr lang="en-CH" sz="1400" dirty="0">
+                <a:solidFill>
+                  <a:schemeClr val="accent2"/>
+                </a:solidFill>
+                <a:latin typeface="Sora" pitchFamily="2" charset="0"/>
+                <a:cs typeface="Sora" pitchFamily="2" charset="0"/>
+              </a:rPr>
+              <a:t>Output</a:t>
+            </a:r>
+            <a:endParaRPr lang="en-CH" dirty="0">
+              <a:solidFill>
+                <a:schemeClr val="accent2"/>
+              </a:solidFill>
+              <a:latin typeface="Sora" pitchFamily="2" charset="0"/>
+              <a:cs typeface="Sora" pitchFamily="2" charset="0"/>
+            </a:endParaRPr>
+          </a:p>
+        </p:txBody>
+      </p:sp>
+      <p:sp>
+        <p:nvSpPr>
+          <p:cNvPr id="22" name="Left-right Arrow 21">
+            <a:extLst>
+              <a:ext uri="{FF2B5EF4-FFF2-40B4-BE49-F238E27FC236}">
+                <a16:creationId xmlns:a16="http://schemas.microsoft.com/office/drawing/2014/main" id="{CD842C6A-169F-6DBF-EACD-514A2D02DE5C}"/>
+              </a:ext>
+            </a:extLst>
+          </p:cNvPr>
+          <p:cNvSpPr/>
+          <p:nvPr/>
+        </p:nvSpPr>
+        <p:spPr>
+          <a:xfrm>
+            <a:off x="5888182" y="1783283"/>
+            <a:ext cx="3385701" cy="860367"/>
+          </a:xfrm>
+          <a:prstGeom prst="leftRightArrow">
+            <a:avLst/>
+          </a:prstGeom>
+          <a:solidFill>
+            <a:schemeClr val="accent1">
+              <a:lumMod val="40000"/>
+              <a:lumOff val="60000"/>
+            </a:schemeClr>
+          </a:solidFill>
+          <a:ln w="25400">
+            <a:solidFill>
+              <a:schemeClr val="accent2"/>
+            </a:solidFill>
+          </a:ln>
+        </p:spPr>
+        <p:style>
+          <a:lnRef idx="2">
+            <a:schemeClr val="accent1">
+              <a:shade val="15000"/>
+            </a:schemeClr>
+          </a:lnRef>
+          <a:fillRef idx="1">
+            <a:schemeClr val="accent1"/>
+          </a:fillRef>
+          <a:effectRef idx="0">
+            <a:schemeClr val="accent1"/>
+          </a:effectRef>
+          <a:fontRef idx="minor">
+            <a:schemeClr val="lt1"/>
+          </a:fontRef>
+        </p:style>
+        <p:txBody>
+          <a:bodyPr rtlCol="0" anchor="ctr"/>
+          <a:lstStyle/>
+          <a:p>
+            <a:pPr algn="ctr"/>
+            <a:endParaRPr lang="en-CH" sz="900" dirty="0">
+              <a:solidFill>
+                <a:schemeClr val="accent2"/>
+              </a:solidFill>
+              <a:latin typeface="Sora" pitchFamily="2" charset="0"/>
+              <a:cs typeface="Sora" pitchFamily="2" charset="0"/>
+            </a:endParaRPr>
+          </a:p>
+        </p:txBody>
+      </p:sp>
+      <p:pic>
+        <p:nvPicPr>
+          <p:cNvPr id="13" name="Picture 12">
+            <a:extLst>
+              <a:ext uri="{FF2B5EF4-FFF2-40B4-BE49-F238E27FC236}">
+                <a16:creationId xmlns:a16="http://schemas.microsoft.com/office/drawing/2014/main" id="{E0772963-5C06-BDD8-72F7-14381E271847}"/>
+              </a:ext>
+            </a:extLst>
+          </p:cNvPr>
+          <p:cNvPicPr>
+            <a:picLocks noChangeAspect="1"/>
+          </p:cNvPicPr>
+          <p:nvPr/>
+        </p:nvPicPr>
+        <p:blipFill>
+          <a:blip r:embed="rId2"/>
+          <a:stretch>
+            <a:fillRect/>
+          </a:stretch>
+        </p:blipFill>
+        <p:spPr>
+          <a:xfrm>
+            <a:off x="6269357" y="2025731"/>
+            <a:ext cx="2480992" cy="361141"/>
+          </a:xfrm>
+          <a:prstGeom prst="rect">
+            <a:avLst/>
+          </a:prstGeom>
+        </p:spPr>
+      </p:pic>
+      <p:sp>
+        <p:nvSpPr>
+          <p:cNvPr id="18" name="Left-right Arrow 17">
+            <a:extLst>
+              <a:ext uri="{FF2B5EF4-FFF2-40B4-BE49-F238E27FC236}">
+                <a16:creationId xmlns:a16="http://schemas.microsoft.com/office/drawing/2014/main" id="{3B721C45-27EE-E6EE-790E-1DB1DEAC24E1}"/>
+              </a:ext>
+            </a:extLst>
+          </p:cNvPr>
+          <p:cNvSpPr/>
+          <p:nvPr/>
+        </p:nvSpPr>
+        <p:spPr>
+          <a:xfrm>
+            <a:off x="5486412" y="2780124"/>
+            <a:ext cx="3787472" cy="860367"/>
+          </a:xfrm>
+          <a:prstGeom prst="leftRightArrow">
+            <a:avLst/>
+          </a:prstGeom>
+          <a:solidFill>
+            <a:srgbClr val="637E3C"/>
+          </a:solidFill>
+          <a:ln w="25400">
+            <a:solidFill>
+              <a:schemeClr val="accent2"/>
+            </a:solidFill>
+          </a:ln>
+        </p:spPr>
+        <p:style>
+          <a:lnRef idx="2">
+            <a:schemeClr val="accent1">
+              <a:shade val="15000"/>
+            </a:schemeClr>
+          </a:lnRef>
+          <a:fillRef idx="1">
+            <a:schemeClr val="accent1"/>
+          </a:fillRef>
+          <a:effectRef idx="0">
+            <a:schemeClr val="accent1"/>
+          </a:effectRef>
+          <a:fontRef idx="minor">
+            <a:schemeClr val="lt1"/>
+          </a:fontRef>
+        </p:style>
+        <p:txBody>
+          <a:bodyPr rtlCol="0" anchor="ctr"/>
+          <a:lstStyle/>
+          <a:p>
+            <a:pPr algn="ctr"/>
+            <a:r>
+              <a:rPr lang="en-CH" sz="1400" dirty="0">
+                <a:solidFill>
+                  <a:schemeClr val="bg1"/>
+                </a:solidFill>
+                <a:latin typeface="Sora" pitchFamily="2" charset="0"/>
+                <a:cs typeface="Sora" pitchFamily="2" charset="0"/>
+              </a:rPr>
+              <a:t>Agent Skills</a:t>
+            </a:r>
+          </a:p>
+        </p:txBody>
+      </p:sp>
+      <p:sp>
+        <p:nvSpPr>
+          <p:cNvPr id="4" name="Left-right Arrow 3">
+            <a:extLst>
+              <a:ext uri="{FF2B5EF4-FFF2-40B4-BE49-F238E27FC236}">
+                <a16:creationId xmlns:a16="http://schemas.microsoft.com/office/drawing/2014/main" id="{7281F9E8-C790-6481-4352-2C43471D5EF5}"/>
+              </a:ext>
+            </a:extLst>
+          </p:cNvPr>
+          <p:cNvSpPr/>
+          <p:nvPr/>
+        </p:nvSpPr>
+        <p:spPr>
+          <a:xfrm>
+            <a:off x="7667233" y="4109470"/>
+            <a:ext cx="1475338" cy="572173"/>
+          </a:xfrm>
+          <a:prstGeom prst="leftRightArrow">
+            <a:avLst/>
+          </a:prstGeom>
+          <a:solidFill>
+            <a:schemeClr val="accent1">
+              <a:lumMod val="40000"/>
+              <a:lumOff val="60000"/>
+            </a:schemeClr>
+          </a:solidFill>
+          <a:ln w="25400">
+            <a:solidFill>
+              <a:schemeClr val="accent2"/>
+            </a:solidFill>
+          </a:ln>
+        </p:spPr>
+        <p:style>
+          <a:lnRef idx="2">
+            <a:schemeClr val="accent1">
+              <a:shade val="15000"/>
+            </a:schemeClr>
+          </a:lnRef>
+          <a:fillRef idx="1">
+            <a:schemeClr val="accent1"/>
+          </a:fillRef>
+          <a:effectRef idx="0">
+            <a:schemeClr val="accent1"/>
+          </a:effectRef>
+          <a:fontRef idx="minor">
+            <a:schemeClr val="lt1"/>
+          </a:fontRef>
+        </p:style>
+        <p:txBody>
+          <a:bodyPr rtlCol="0" anchor="ctr"/>
+          <a:lstStyle/>
+          <a:p>
+            <a:pPr algn="ctr"/>
+            <a:endParaRPr lang="en-CH" sz="1050" dirty="0">
+              <a:latin typeface="Sora" pitchFamily="2" charset="0"/>
+              <a:cs typeface="Sora" pitchFamily="2" charset="0"/>
+            </a:endParaRPr>
+          </a:p>
+        </p:txBody>
+      </p:sp>
+      <p:pic>
+        <p:nvPicPr>
+          <p:cNvPr id="12" name="Picture 11">
+            <a:extLst>
+              <a:ext uri="{FF2B5EF4-FFF2-40B4-BE49-F238E27FC236}">
+                <a16:creationId xmlns:a16="http://schemas.microsoft.com/office/drawing/2014/main" id="{668CA4F1-9DF6-8593-C55C-1454051F9684}"/>
+              </a:ext>
+            </a:extLst>
+          </p:cNvPr>
+          <p:cNvPicPr>
+            <a:picLocks noChangeAspect="1"/>
+          </p:cNvPicPr>
+          <p:nvPr/>
+        </p:nvPicPr>
+        <p:blipFill>
+          <a:blip r:embed="rId3"/>
+          <a:stretch>
+            <a:fillRect/>
+          </a:stretch>
+        </p:blipFill>
+        <p:spPr>
+          <a:xfrm>
+            <a:off x="7811172" y="4082911"/>
+            <a:ext cx="875405" cy="625289"/>
+          </a:xfrm>
+          <a:prstGeom prst="rect">
+            <a:avLst/>
+          </a:prstGeom>
+        </p:spPr>
+      </p:pic>
+      <p:sp>
+        <p:nvSpPr>
+          <p:cNvPr id="14" name="TextBox 13">
+            <a:extLst>
+              <a:ext uri="{FF2B5EF4-FFF2-40B4-BE49-F238E27FC236}">
+                <a16:creationId xmlns:a16="http://schemas.microsoft.com/office/drawing/2014/main" id="{A152DB1A-7111-036F-087B-BFC3D6F5351A}"/>
+              </a:ext>
+            </a:extLst>
+          </p:cNvPr>
+          <p:cNvSpPr txBox="1"/>
+          <p:nvPr/>
+        </p:nvSpPr>
+        <p:spPr>
+          <a:xfrm>
+            <a:off x="8550181" y="4296190"/>
+            <a:ext cx="461986" cy="230832"/>
+          </a:xfrm>
+          <a:prstGeom prst="rect">
+            <a:avLst/>
+          </a:prstGeom>
+          <a:noFill/>
+        </p:spPr>
+        <p:txBody>
+          <a:bodyPr wrap="none" rtlCol="0">
+            <a:spAutoFit/>
+          </a:bodyPr>
+          <a:lstStyle/>
+          <a:p>
+            <a:r>
+              <a:rPr lang="en-CH" sz="900" dirty="0">
+                <a:solidFill>
+                  <a:srgbClr val="424143"/>
+                </a:solidFill>
+                <a:latin typeface="Sora" pitchFamily="2" charset="0"/>
+                <a:cs typeface="Sora" pitchFamily="2" charset="0"/>
+              </a:rPr>
+              <a:t>&amp; Co</a:t>
+            </a:r>
+          </a:p>
+        </p:txBody>
+      </p:sp>
+    </p:spTree>
+    <p:extLst>
+      <p:ext uri="{BB962C8B-B14F-4D97-AF65-F5344CB8AC3E}">
+        <p14:creationId xmlns:p14="http://schemas.microsoft.com/office/powerpoint/2010/main" val="673015261"/>
+      </p:ext>
+    </p:extLst>
+  </p:cSld>
+  <p:clrMapOvr>
+    <a:masterClrMapping/>
+  </p:clrMapOvr>
+</p:sld>
+</file>
+
+<file path=ppt/slides/slide8.xml><?xml version="1.0" encoding="utf-8"?>
+<p:sld xmlns:a="http://schemas.openxmlformats.org/drawingml/2006/main" xmlns:r="http://schemas.openxmlformats.org/officeDocument/2006/relationships" xmlns:p="http://schemas.openxmlformats.org/presentationml/2006/main">
+  <p:cSld>
+    <p:spTree>
+      <p:nvGrpSpPr>
+        <p:cNvPr id="1" name="">
+          <a:extLst>
+            <a:ext uri="{FF2B5EF4-FFF2-40B4-BE49-F238E27FC236}">
+              <a16:creationId xmlns:a16="http://schemas.microsoft.com/office/drawing/2014/main" id="{B0D0E499-4AA2-C894-4B37-ECFFA6B44505}"/>
+            </a:ext>
+          </a:extLst>
+        </p:cNvPr>
+        <p:cNvGrpSpPr/>
+        <p:nvPr/>
+      </p:nvGrpSpPr>
+      <p:grpSpPr>
+        <a:xfrm>
+          <a:off x="0" y="0"/>
+          <a:ext cx="0" cy="0"/>
+          <a:chOff x="0" y="0"/>
+          <a:chExt cx="0" cy="0"/>
+        </a:xfrm>
+      </p:grpSpPr>
+      <p:sp>
+        <p:nvSpPr>
+          <p:cNvPr id="5" name="Rectangle 4">
+            <a:extLst>
+              <a:ext uri="{FF2B5EF4-FFF2-40B4-BE49-F238E27FC236}">
+                <a16:creationId xmlns:a16="http://schemas.microsoft.com/office/drawing/2014/main" id="{CED1046D-CF30-B9DB-6020-C9AFC8D02E37}"/>
+              </a:ext>
+            </a:extLst>
+          </p:cNvPr>
+          <p:cNvSpPr/>
+          <p:nvPr/>
+        </p:nvSpPr>
+        <p:spPr>
+          <a:xfrm>
+            <a:off x="3169920" y="1663549"/>
+            <a:ext cx="1053803" cy="2392084"/>
+          </a:xfrm>
+          <a:prstGeom prst="rect">
+            <a:avLst/>
+          </a:prstGeom>
+          <a:solidFill>
+            <a:schemeClr val="tx2"/>
+          </a:solidFill>
+          <a:ln w="50800">
+            <a:solidFill>
+              <a:schemeClr val="accent1"/>
+            </a:solidFill>
+          </a:ln>
+        </p:spPr>
+        <p:style>
+          <a:lnRef idx="2">
+            <a:schemeClr val="accent1">
+              <a:shade val="15000"/>
+            </a:schemeClr>
+          </a:lnRef>
+          <a:fillRef idx="1">
+            <a:schemeClr val="accent1"/>
+          </a:fillRef>
+          <a:effectRef idx="0">
+            <a:schemeClr val="accent1"/>
+          </a:effectRef>
+          <a:fontRef idx="minor">
+            <a:schemeClr val="lt1"/>
+          </a:fontRef>
+        </p:style>
+        <p:txBody>
+          <a:bodyPr rtlCol="0" anchor="ctr"/>
+          <a:lstStyle/>
+          <a:p>
+            <a:pPr algn="ctr"/>
+            <a:r>
+              <a:rPr lang="en-CH" dirty="0">
+                <a:latin typeface="Sora" pitchFamily="2" charset="0"/>
+                <a:cs typeface="Sora" pitchFamily="2" charset="0"/>
+              </a:rPr>
+              <a:t>GenAI</a:t>
+            </a:r>
+          </a:p>
+        </p:txBody>
+      </p:sp>
+      <p:sp>
+        <p:nvSpPr>
+          <p:cNvPr id="6" name="Rectangle 5">
+            <a:extLst>
+              <a:ext uri="{FF2B5EF4-FFF2-40B4-BE49-F238E27FC236}">
+                <a16:creationId xmlns:a16="http://schemas.microsoft.com/office/drawing/2014/main" id="{605A818C-2068-7764-2CAA-3D7F4B1F8078}"/>
+              </a:ext>
+            </a:extLst>
+          </p:cNvPr>
+          <p:cNvSpPr/>
+          <p:nvPr/>
+        </p:nvSpPr>
+        <p:spPr>
+          <a:xfrm>
+            <a:off x="8753138" y="1663549"/>
+            <a:ext cx="1398488" cy="3530899"/>
+          </a:xfrm>
+          <a:prstGeom prst="rect">
+            <a:avLst/>
+          </a:prstGeom>
+          <a:solidFill>
+            <a:schemeClr val="accent1">
+              <a:lumMod val="40000"/>
+              <a:lumOff val="60000"/>
+            </a:schemeClr>
+          </a:solidFill>
+          <a:ln w="50800">
+            <a:solidFill>
+              <a:schemeClr val="tx2"/>
+            </a:solidFill>
+          </a:ln>
+        </p:spPr>
+        <p:style>
+          <a:lnRef idx="2">
+            <a:schemeClr val="accent1">
+              <a:shade val="15000"/>
+            </a:schemeClr>
+          </a:lnRef>
+          <a:fillRef idx="1">
+            <a:schemeClr val="accent1"/>
+          </a:fillRef>
+          <a:effectRef idx="0">
+            <a:schemeClr val="accent1"/>
+          </a:effectRef>
+          <a:fontRef idx="minor">
+            <a:schemeClr val="lt1"/>
+          </a:fontRef>
+        </p:style>
+        <p:txBody>
+          <a:bodyPr rtlCol="0" anchor="ctr"/>
+          <a:lstStyle/>
+          <a:p>
+            <a:pPr algn="ctr"/>
+            <a:r>
+              <a:rPr lang="en-CH" dirty="0">
+                <a:solidFill>
+                  <a:schemeClr val="accent2"/>
+                </a:solidFill>
+                <a:latin typeface="Sora" pitchFamily="2" charset="0"/>
+                <a:cs typeface="Sora" pitchFamily="2" charset="0"/>
+              </a:rPr>
+              <a:t>      APIs</a:t>
+            </a:r>
+          </a:p>
+          <a:p>
+            <a:pPr algn="ctr"/>
+            <a:r>
+              <a:rPr lang="en-CH" dirty="0">
+                <a:solidFill>
+                  <a:schemeClr val="accent2"/>
+                </a:solidFill>
+                <a:latin typeface="Sora" pitchFamily="2" charset="0"/>
+                <a:cs typeface="Sora" pitchFamily="2" charset="0"/>
+              </a:rPr>
+              <a:t>     &amp;</a:t>
+            </a:r>
+            <a:br>
+              <a:rPr lang="en-CH" dirty="0">
+                <a:solidFill>
+                  <a:schemeClr val="accent2"/>
+                </a:solidFill>
+                <a:latin typeface="Sora" pitchFamily="2" charset="0"/>
+                <a:cs typeface="Sora" pitchFamily="2" charset="0"/>
+              </a:rPr>
+            </a:br>
+            <a:r>
+              <a:rPr lang="en-CH" dirty="0">
+                <a:solidFill>
+                  <a:schemeClr val="accent2"/>
+                </a:solidFill>
+                <a:latin typeface="Sora" pitchFamily="2" charset="0"/>
+                <a:cs typeface="Sora" pitchFamily="2" charset="0"/>
+              </a:rPr>
+              <a:t>     Data</a:t>
+            </a:r>
+          </a:p>
+        </p:txBody>
+      </p:sp>
+      <p:sp>
+        <p:nvSpPr>
+          <p:cNvPr id="7" name="Freeform 6">
+            <a:extLst>
+              <a:ext uri="{FF2B5EF4-FFF2-40B4-BE49-F238E27FC236}">
+                <a16:creationId xmlns:a16="http://schemas.microsoft.com/office/drawing/2014/main" id="{A136A544-FC31-275F-B232-752FB4E95327}"/>
+              </a:ext>
+            </a:extLst>
+          </p:cNvPr>
+          <p:cNvSpPr/>
+          <p:nvPr/>
+        </p:nvSpPr>
+        <p:spPr>
+          <a:xfrm>
+            <a:off x="3169920" y="1663550"/>
             <a:ext cx="4908176" cy="3530899"/>
           </a:xfrm>
           <a:custGeom>
@@ -3594,38 +10367,23 @@
                   <a:pt x="4908176" y="2218764"/>
                 </a:lnTo>
                 <a:lnTo>
-                  <a:pt x="4908176" y="1143000"/>
-                </a:lnTo>
-                <a:lnTo>
                   <a:pt x="4908176" y="0"/>
                 </a:lnTo>
                 <a:lnTo>
-                  <a:pt x="4625788" y="0"/>
+                  <a:pt x="3348726" y="0"/>
                 </a:lnTo>
                 <a:lnTo>
-                  <a:pt x="3348726" y="2287"/>
+                  <a:pt x="3348726" y="889637"/>
                 </a:lnTo>
-                <a:cubicBezTo>
-                  <a:pt x="3348726" y="295699"/>
-                  <a:pt x="3348317" y="596225"/>
-                  <a:pt x="3348317" y="889637"/>
-                </a:cubicBezTo>
                 <a:lnTo>
-                  <a:pt x="2312726" y="888573"/>
+                  <a:pt x="2312726" y="889637"/>
                 </a:lnTo>
-                <a:cubicBezTo>
-                  <a:pt x="2311901" y="1110640"/>
-                  <a:pt x="2311077" y="1340334"/>
-                  <a:pt x="2310252" y="1562401"/>
-                </a:cubicBezTo>
                 <a:lnTo>
-                  <a:pt x="1" y="1564342"/>
+                  <a:pt x="2312726" y="1564342"/>
                 </a:lnTo>
-                <a:cubicBezTo>
-                  <a:pt x="1" y="1784475"/>
-                  <a:pt x="0" y="1998631"/>
-                  <a:pt x="0" y="2218764"/>
-                </a:cubicBezTo>
+                <a:lnTo>
+                  <a:pt x="0" y="1564342"/>
+                </a:lnTo>
                 <a:close/>
               </a:path>
             </a:pathLst>
@@ -3722,7 +10480,7 @@
           <p:cNvPr id="9" name="Straight Connector 8">
             <a:extLst>
               <a:ext uri="{FF2B5EF4-FFF2-40B4-BE49-F238E27FC236}">
-                <a16:creationId xmlns:a16="http://schemas.microsoft.com/office/drawing/2014/main" id="{8888C7D1-B3A9-1099-6C25-0BD32B84F0F0}"/>
+                <a16:creationId xmlns:a16="http://schemas.microsoft.com/office/drawing/2014/main" id="{E3D84169-9C05-41C7-B155-14C758AAB4F7}"/>
               </a:ext>
             </a:extLst>
           </p:cNvPr>
@@ -3733,7 +10491,7 @@
         </p:nvCxnSpPr>
         <p:spPr>
           <a:xfrm>
-            <a:off x="7379746" y="1245196"/>
+            <a:off x="8419652" y="1245196"/>
             <a:ext cx="0" cy="4682268"/>
           </a:xfrm>
           <a:prstGeom prst="line">
@@ -3765,7 +10523,7 @@
           <p:cNvPr id="10" name="TextBox 9">
             <a:extLst>
               <a:ext uri="{FF2B5EF4-FFF2-40B4-BE49-F238E27FC236}">
-                <a16:creationId xmlns:a16="http://schemas.microsoft.com/office/drawing/2014/main" id="{47A62D65-2885-43E9-B5FE-0471D9A3E0B7}"/>
+                <a16:creationId xmlns:a16="http://schemas.microsoft.com/office/drawing/2014/main" id="{1BE80355-82AE-5168-042D-43FF260D90A3}"/>
               </a:ext>
             </a:extLst>
           </p:cNvPr>
@@ -3774,7 +10532,7 @@
         </p:nvSpPr>
         <p:spPr>
           <a:xfrm>
-            <a:off x="3987624" y="5428134"/>
+            <a:off x="5027530" y="5428134"/>
             <a:ext cx="1192955" cy="369332"/>
           </a:xfrm>
           <a:prstGeom prst="rect">
@@ -3803,7 +10561,7 @@
           <p:cNvPr id="11" name="TextBox 10">
             <a:extLst>
               <a:ext uri="{FF2B5EF4-FFF2-40B4-BE49-F238E27FC236}">
-                <a16:creationId xmlns:a16="http://schemas.microsoft.com/office/drawing/2014/main" id="{A07EBE18-2738-7524-8444-64A9242E593A}"/>
+                <a16:creationId xmlns:a16="http://schemas.microsoft.com/office/drawing/2014/main" id="{4AB3D618-2AA8-D0C7-CC3E-D729BA21D2F2}"/>
               </a:ext>
             </a:extLst>
           </p:cNvPr>
@@ -3812,7 +10570,7 @@
         </p:nvSpPr>
         <p:spPr>
           <a:xfrm>
-            <a:off x="7669577" y="5428134"/>
+            <a:off x="8709483" y="5428134"/>
             <a:ext cx="1540806" cy="369332"/>
           </a:xfrm>
           <a:prstGeom prst="rect">
@@ -3841,7 +10599,7 @@
           <p:cNvPr id="24" name="Rectangle 23">
             <a:extLst>
               <a:ext uri="{FF2B5EF4-FFF2-40B4-BE49-F238E27FC236}">
-                <a16:creationId xmlns:a16="http://schemas.microsoft.com/office/drawing/2014/main" id="{A1DD83FF-7606-7A17-B358-0597A762004D}"/>
+                <a16:creationId xmlns:a16="http://schemas.microsoft.com/office/drawing/2014/main" id="{FB00B3A5-2B5C-0977-0FE6-A2C2484B9D3D}"/>
               </a:ext>
             </a:extLst>
           </p:cNvPr>
@@ -3850,7 +10608,7 @@
         </p:nvSpPr>
         <p:spPr>
           <a:xfrm>
-            <a:off x="3287352" y="1663548"/>
+            <a:off x="4327258" y="1663548"/>
             <a:ext cx="1053803" cy="2854663"/>
           </a:xfrm>
           <a:prstGeom prst="rect">
@@ -3901,7 +10659,7 @@
           <p:cNvPr id="26" name="Rectangle 25">
             <a:extLst>
               <a:ext uri="{FF2B5EF4-FFF2-40B4-BE49-F238E27FC236}">
-                <a16:creationId xmlns:a16="http://schemas.microsoft.com/office/drawing/2014/main" id="{15AD2165-8328-67A9-029D-AD7E8154F9ED}"/>
+                <a16:creationId xmlns:a16="http://schemas.microsoft.com/office/drawing/2014/main" id="{B9E672FF-4DFA-023A-9C47-FF100859CC16}"/>
               </a:ext>
             </a:extLst>
           </p:cNvPr>
@@ -3910,7 +10668,7 @@
         </p:nvSpPr>
         <p:spPr>
           <a:xfrm>
-            <a:off x="4444691" y="1663549"/>
+            <a:off x="5484597" y="1663549"/>
             <a:ext cx="938294" cy="609751"/>
           </a:xfrm>
           <a:prstGeom prst="rect">
@@ -3961,7 +10719,7 @@
           <p:cNvPr id="28" name="Rectangle 27">
             <a:extLst>
               <a:ext uri="{FF2B5EF4-FFF2-40B4-BE49-F238E27FC236}">
-                <a16:creationId xmlns:a16="http://schemas.microsoft.com/office/drawing/2014/main" id="{DFA2ED24-B85E-A9A7-0922-9D33126AAED7}"/>
+                <a16:creationId xmlns:a16="http://schemas.microsoft.com/office/drawing/2014/main" id="{B28CA121-37B9-B32B-2852-CF7627658AA4}"/>
               </a:ext>
             </a:extLst>
           </p:cNvPr>
@@ -3970,7 +10728,7 @@
         </p:nvSpPr>
         <p:spPr>
           <a:xfrm>
-            <a:off x="4444691" y="2367284"/>
+            <a:off x="5484597" y="2367284"/>
             <a:ext cx="938294" cy="609751"/>
           </a:xfrm>
           <a:prstGeom prst="rect">
@@ -4016,10 +10774,542 @@
           </a:p>
         </p:txBody>
       </p:sp>
+      <p:sp>
+        <p:nvSpPr>
+          <p:cNvPr id="2" name="Right Arrow 1">
+            <a:extLst>
+              <a:ext uri="{FF2B5EF4-FFF2-40B4-BE49-F238E27FC236}">
+                <a16:creationId xmlns:a16="http://schemas.microsoft.com/office/drawing/2014/main" id="{01999E0B-7D0A-17EB-2E98-101F0ACC4E9D}"/>
+              </a:ext>
+            </a:extLst>
+          </p:cNvPr>
+          <p:cNvSpPr/>
+          <p:nvPr/>
+        </p:nvSpPr>
+        <p:spPr>
+          <a:xfrm>
+            <a:off x="1369100" y="2695096"/>
+            <a:ext cx="1394906" cy="563878"/>
+          </a:xfrm>
+          <a:prstGeom prst="rightArrow">
+            <a:avLst/>
+          </a:prstGeom>
+          <a:solidFill>
+            <a:schemeClr val="accent1">
+              <a:lumMod val="40000"/>
+              <a:lumOff val="60000"/>
+            </a:schemeClr>
+          </a:solidFill>
+          <a:ln w="25400">
+            <a:solidFill>
+              <a:schemeClr val="tx2"/>
+            </a:solidFill>
+          </a:ln>
+        </p:spPr>
+        <p:style>
+          <a:lnRef idx="2">
+            <a:schemeClr val="accent1">
+              <a:shade val="15000"/>
+            </a:schemeClr>
+          </a:lnRef>
+          <a:fillRef idx="1">
+            <a:schemeClr val="accent1"/>
+          </a:fillRef>
+          <a:effectRef idx="0">
+            <a:schemeClr val="accent1"/>
+          </a:effectRef>
+          <a:fontRef idx="minor">
+            <a:schemeClr val="lt1"/>
+          </a:fontRef>
+        </p:style>
+        <p:txBody>
+          <a:bodyPr rtlCol="0" anchor="ctr"/>
+          <a:lstStyle/>
+          <a:p>
+            <a:pPr algn="ctr"/>
+            <a:r>
+              <a:rPr lang="en-CH" sz="1400" dirty="0">
+                <a:solidFill>
+                  <a:schemeClr val="accent2"/>
+                </a:solidFill>
+                <a:latin typeface="Sora" pitchFamily="2" charset="0"/>
+                <a:cs typeface="Sora" pitchFamily="2" charset="0"/>
+              </a:rPr>
+              <a:t>Input</a:t>
+            </a:r>
+            <a:endParaRPr lang="en-CH" dirty="0">
+              <a:solidFill>
+                <a:schemeClr val="accent2"/>
+              </a:solidFill>
+              <a:latin typeface="Sora" pitchFamily="2" charset="0"/>
+              <a:cs typeface="Sora" pitchFamily="2" charset="0"/>
+            </a:endParaRPr>
+          </a:p>
+        </p:txBody>
+      </p:sp>
+      <p:sp>
+        <p:nvSpPr>
+          <p:cNvPr id="3" name="TextBox 2">
+            <a:extLst>
+              <a:ext uri="{FF2B5EF4-FFF2-40B4-BE49-F238E27FC236}">
+                <a16:creationId xmlns:a16="http://schemas.microsoft.com/office/drawing/2014/main" id="{2ADD6934-6CC3-3789-8D95-F0E150CA467A}"/>
+              </a:ext>
+            </a:extLst>
+          </p:cNvPr>
+          <p:cNvSpPr txBox="1"/>
+          <p:nvPr/>
+        </p:nvSpPr>
+        <p:spPr>
+          <a:xfrm>
+            <a:off x="1303140" y="3267269"/>
+            <a:ext cx="1534394" cy="369332"/>
+          </a:xfrm>
+          <a:prstGeom prst="rect">
+            <a:avLst/>
+          </a:prstGeom>
+          <a:noFill/>
+        </p:spPr>
+        <p:txBody>
+          <a:bodyPr wrap="none" rtlCol="0">
+            <a:spAutoFit/>
+          </a:bodyPr>
+          <a:lstStyle/>
+          <a:p>
+            <a:r>
+              <a:rPr lang="en-CH" dirty="0">
+                <a:latin typeface="Sora" pitchFamily="2" charset="0"/>
+                <a:cs typeface="Sora" pitchFamily="2" charset="0"/>
+              </a:rPr>
+              <a:t>Consumers</a:t>
+            </a:r>
+          </a:p>
+        </p:txBody>
+      </p:sp>
+      <p:sp>
+        <p:nvSpPr>
+          <p:cNvPr id="8" name="Right Arrow 7">
+            <a:extLst>
+              <a:ext uri="{FF2B5EF4-FFF2-40B4-BE49-F238E27FC236}">
+                <a16:creationId xmlns:a16="http://schemas.microsoft.com/office/drawing/2014/main" id="{2DC7C6AA-660B-315A-13C6-DB58FE16CE6B}"/>
+              </a:ext>
+            </a:extLst>
+          </p:cNvPr>
+          <p:cNvSpPr/>
+          <p:nvPr/>
+        </p:nvSpPr>
+        <p:spPr>
+          <a:xfrm>
+            <a:off x="1343113" y="3645649"/>
+            <a:ext cx="1394906" cy="563878"/>
+          </a:xfrm>
+          <a:prstGeom prst="leftArrow">
+            <a:avLst/>
+          </a:prstGeom>
+          <a:solidFill>
+            <a:schemeClr val="accent1">
+              <a:lumMod val="40000"/>
+              <a:lumOff val="60000"/>
+            </a:schemeClr>
+          </a:solidFill>
+          <a:ln w="25400">
+            <a:solidFill>
+              <a:schemeClr val="tx2"/>
+            </a:solidFill>
+          </a:ln>
+        </p:spPr>
+        <p:style>
+          <a:lnRef idx="2">
+            <a:schemeClr val="accent1">
+              <a:shade val="15000"/>
+            </a:schemeClr>
+          </a:lnRef>
+          <a:fillRef idx="1">
+            <a:schemeClr val="accent1"/>
+          </a:fillRef>
+          <a:effectRef idx="0">
+            <a:schemeClr val="accent1"/>
+          </a:effectRef>
+          <a:fontRef idx="minor">
+            <a:schemeClr val="lt1"/>
+          </a:fontRef>
+        </p:style>
+        <p:txBody>
+          <a:bodyPr rtlCol="0" anchor="ctr"/>
+          <a:lstStyle/>
+          <a:p>
+            <a:pPr algn="ctr"/>
+            <a:r>
+              <a:rPr lang="en-CH" sz="1400" dirty="0">
+                <a:solidFill>
+                  <a:schemeClr val="accent2"/>
+                </a:solidFill>
+                <a:latin typeface="Sora" pitchFamily="2" charset="0"/>
+                <a:cs typeface="Sora" pitchFamily="2" charset="0"/>
+              </a:rPr>
+              <a:t>Output</a:t>
+            </a:r>
+            <a:endParaRPr lang="en-CH" dirty="0">
+              <a:solidFill>
+                <a:schemeClr val="accent2"/>
+              </a:solidFill>
+              <a:latin typeface="Sora" pitchFamily="2" charset="0"/>
+              <a:cs typeface="Sora" pitchFamily="2" charset="0"/>
+            </a:endParaRPr>
+          </a:p>
+        </p:txBody>
+      </p:sp>
+      <p:sp>
+        <p:nvSpPr>
+          <p:cNvPr id="4" name="Left-right Arrow 3">
+            <a:extLst>
+              <a:ext uri="{FF2B5EF4-FFF2-40B4-BE49-F238E27FC236}">
+                <a16:creationId xmlns:a16="http://schemas.microsoft.com/office/drawing/2014/main" id="{FE868A33-34DF-D274-6DC5-03EA475023C3}"/>
+              </a:ext>
+            </a:extLst>
+          </p:cNvPr>
+          <p:cNvSpPr/>
+          <p:nvPr/>
+        </p:nvSpPr>
+        <p:spPr>
+          <a:xfrm>
+            <a:off x="7667233" y="2773200"/>
+            <a:ext cx="1475338" cy="572173"/>
+          </a:xfrm>
+          <a:prstGeom prst="leftRightArrow">
+            <a:avLst/>
+          </a:prstGeom>
+          <a:solidFill>
+            <a:schemeClr val="accent1">
+              <a:lumMod val="40000"/>
+              <a:lumOff val="60000"/>
+            </a:schemeClr>
+          </a:solidFill>
+          <a:ln w="25400">
+            <a:solidFill>
+              <a:schemeClr val="accent2"/>
+            </a:solidFill>
+          </a:ln>
+        </p:spPr>
+        <p:style>
+          <a:lnRef idx="2">
+            <a:schemeClr val="accent1">
+              <a:shade val="15000"/>
+            </a:schemeClr>
+          </a:lnRef>
+          <a:fillRef idx="1">
+            <a:schemeClr val="accent1"/>
+          </a:fillRef>
+          <a:effectRef idx="0">
+            <a:schemeClr val="accent1"/>
+          </a:effectRef>
+          <a:fontRef idx="minor">
+            <a:schemeClr val="lt1"/>
+          </a:fontRef>
+        </p:style>
+        <p:txBody>
+          <a:bodyPr rtlCol="0" anchor="ctr"/>
+          <a:lstStyle/>
+          <a:p>
+            <a:pPr algn="ctr"/>
+            <a:endParaRPr lang="en-CH"/>
+          </a:p>
+        </p:txBody>
+      </p:sp>
+      <p:sp>
+        <p:nvSpPr>
+          <p:cNvPr id="12" name="Left-right Arrow 11">
+            <a:extLst>
+              <a:ext uri="{FF2B5EF4-FFF2-40B4-BE49-F238E27FC236}">
+                <a16:creationId xmlns:a16="http://schemas.microsoft.com/office/drawing/2014/main" id="{28D28D39-70C2-A915-6C20-9EDB0224088E}"/>
+              </a:ext>
+            </a:extLst>
+          </p:cNvPr>
+          <p:cNvSpPr/>
+          <p:nvPr/>
+        </p:nvSpPr>
+        <p:spPr>
+          <a:xfrm>
+            <a:off x="7672812" y="3603536"/>
+            <a:ext cx="1475339" cy="572173"/>
+          </a:xfrm>
+          <a:prstGeom prst="leftRightArrow">
+            <a:avLst/>
+          </a:prstGeom>
+          <a:solidFill>
+            <a:schemeClr val="accent1">
+              <a:lumMod val="40000"/>
+              <a:lumOff val="60000"/>
+            </a:schemeClr>
+          </a:solidFill>
+          <a:ln w="25400">
+            <a:solidFill>
+              <a:schemeClr val="accent2"/>
+            </a:solidFill>
+          </a:ln>
+        </p:spPr>
+        <p:style>
+          <a:lnRef idx="2">
+            <a:schemeClr val="accent1">
+              <a:shade val="15000"/>
+            </a:schemeClr>
+          </a:lnRef>
+          <a:fillRef idx="1">
+            <a:schemeClr val="accent1"/>
+          </a:fillRef>
+          <a:effectRef idx="0">
+            <a:schemeClr val="accent1"/>
+          </a:effectRef>
+          <a:fontRef idx="minor">
+            <a:schemeClr val="lt1"/>
+          </a:fontRef>
+        </p:style>
+        <p:txBody>
+          <a:bodyPr rtlCol="0" anchor="ctr"/>
+          <a:lstStyle/>
+          <a:p>
+            <a:pPr algn="ctr"/>
+            <a:endParaRPr lang="en-CH"/>
+          </a:p>
+        </p:txBody>
+      </p:sp>
+      <p:sp>
+        <p:nvSpPr>
+          <p:cNvPr id="15" name="Left-right Arrow 14">
+            <a:extLst>
+              <a:ext uri="{FF2B5EF4-FFF2-40B4-BE49-F238E27FC236}">
+                <a16:creationId xmlns:a16="http://schemas.microsoft.com/office/drawing/2014/main" id="{22B64B59-76ED-B9B5-2E08-A1B3CFFE8B04}"/>
+              </a:ext>
+            </a:extLst>
+          </p:cNvPr>
+          <p:cNvSpPr/>
+          <p:nvPr/>
+        </p:nvSpPr>
+        <p:spPr>
+          <a:xfrm>
+            <a:off x="7667233" y="1920454"/>
+            <a:ext cx="1475338" cy="572173"/>
+          </a:xfrm>
+          <a:prstGeom prst="leftRightArrow">
+            <a:avLst/>
+          </a:prstGeom>
+          <a:solidFill>
+            <a:schemeClr val="accent1">
+              <a:lumMod val="40000"/>
+              <a:lumOff val="60000"/>
+            </a:schemeClr>
+          </a:solidFill>
+          <a:ln w="25400">
+            <a:solidFill>
+              <a:schemeClr val="accent2"/>
+            </a:solidFill>
+          </a:ln>
+        </p:spPr>
+        <p:style>
+          <a:lnRef idx="2">
+            <a:schemeClr val="accent1">
+              <a:shade val="15000"/>
+            </a:schemeClr>
+          </a:lnRef>
+          <a:fillRef idx="1">
+            <a:schemeClr val="accent1"/>
+          </a:fillRef>
+          <a:effectRef idx="0">
+            <a:schemeClr val="accent1"/>
+          </a:effectRef>
+          <a:fontRef idx="minor">
+            <a:schemeClr val="lt1"/>
+          </a:fontRef>
+        </p:style>
+        <p:txBody>
+          <a:bodyPr rtlCol="0" anchor="ctr"/>
+          <a:lstStyle/>
+          <a:p>
+            <a:pPr algn="ctr"/>
+            <a:endParaRPr lang="en-CH"/>
+          </a:p>
+        </p:txBody>
+      </p:sp>
+      <p:pic>
+        <p:nvPicPr>
+          <p:cNvPr id="16" name="Picture 15">
+            <a:extLst>
+              <a:ext uri="{FF2B5EF4-FFF2-40B4-BE49-F238E27FC236}">
+                <a16:creationId xmlns:a16="http://schemas.microsoft.com/office/drawing/2014/main" id="{19D90086-4A5C-5184-60C2-23ED4876B92E}"/>
+              </a:ext>
+            </a:extLst>
+          </p:cNvPr>
+          <p:cNvPicPr>
+            <a:picLocks noChangeAspect="1"/>
+          </p:cNvPicPr>
+          <p:nvPr/>
+        </p:nvPicPr>
+        <p:blipFill>
+          <a:blip r:embed="rId2"/>
+          <a:stretch>
+            <a:fillRect/>
+          </a:stretch>
+        </p:blipFill>
+        <p:spPr>
+          <a:xfrm>
+            <a:off x="7967197" y="1889748"/>
+            <a:ext cx="875405" cy="625289"/>
+          </a:xfrm>
+          <a:prstGeom prst="rect">
+            <a:avLst/>
+          </a:prstGeom>
+        </p:spPr>
+      </p:pic>
+      <p:sp>
+        <p:nvSpPr>
+          <p:cNvPr id="17" name="Left-right Arrow 16">
+            <a:extLst>
+              <a:ext uri="{FF2B5EF4-FFF2-40B4-BE49-F238E27FC236}">
+                <a16:creationId xmlns:a16="http://schemas.microsoft.com/office/drawing/2014/main" id="{60321EF2-905A-4220-368F-DE60E7860BEE}"/>
+              </a:ext>
+            </a:extLst>
+          </p:cNvPr>
+          <p:cNvSpPr/>
+          <p:nvPr/>
+        </p:nvSpPr>
+        <p:spPr>
+          <a:xfrm>
+            <a:off x="7667232" y="4365374"/>
+            <a:ext cx="1475339" cy="572173"/>
+          </a:xfrm>
+          <a:prstGeom prst="leftRightArrow">
+            <a:avLst/>
+          </a:prstGeom>
+          <a:solidFill>
+            <a:schemeClr val="accent1">
+              <a:lumMod val="40000"/>
+              <a:lumOff val="60000"/>
+            </a:schemeClr>
+          </a:solidFill>
+          <a:ln w="25400">
+            <a:solidFill>
+              <a:schemeClr val="accent2"/>
+            </a:solidFill>
+          </a:ln>
+        </p:spPr>
+        <p:style>
+          <a:lnRef idx="2">
+            <a:schemeClr val="accent1">
+              <a:shade val="15000"/>
+            </a:schemeClr>
+          </a:lnRef>
+          <a:fillRef idx="1">
+            <a:schemeClr val="accent1"/>
+          </a:fillRef>
+          <a:effectRef idx="0">
+            <a:schemeClr val="accent1"/>
+          </a:effectRef>
+          <a:fontRef idx="minor">
+            <a:schemeClr val="lt1"/>
+          </a:fontRef>
+        </p:style>
+        <p:txBody>
+          <a:bodyPr rtlCol="0" anchor="ctr"/>
+          <a:lstStyle/>
+          <a:p>
+            <a:pPr algn="ctr"/>
+            <a:endParaRPr lang="en-CH"/>
+          </a:p>
+        </p:txBody>
+      </p:sp>
+      <p:pic>
+        <p:nvPicPr>
+          <p:cNvPr id="19" name="Picture 18">
+            <a:extLst>
+              <a:ext uri="{FF2B5EF4-FFF2-40B4-BE49-F238E27FC236}">
+                <a16:creationId xmlns:a16="http://schemas.microsoft.com/office/drawing/2014/main" id="{54ACF20D-77CD-4C7E-B675-EEB921A9305D}"/>
+              </a:ext>
+            </a:extLst>
+          </p:cNvPr>
+          <p:cNvPicPr>
+            <a:picLocks noChangeAspect="1"/>
+          </p:cNvPicPr>
+          <p:nvPr/>
+        </p:nvPicPr>
+        <p:blipFill>
+          <a:blip r:embed="rId3"/>
+          <a:stretch>
+            <a:fillRect/>
+          </a:stretch>
+        </p:blipFill>
+        <p:spPr>
+          <a:xfrm>
+            <a:off x="8048989" y="2989099"/>
+            <a:ext cx="698570" cy="154491"/>
+          </a:xfrm>
+          <a:prstGeom prst="rect">
+            <a:avLst/>
+          </a:prstGeom>
+        </p:spPr>
+      </p:pic>
+      <p:pic>
+        <p:nvPicPr>
+          <p:cNvPr id="20" name="Picture 19">
+            <a:extLst>
+              <a:ext uri="{FF2B5EF4-FFF2-40B4-BE49-F238E27FC236}">
+                <a16:creationId xmlns:a16="http://schemas.microsoft.com/office/drawing/2014/main" id="{0571E11F-FD19-5569-73CE-5F7A90DE15E0}"/>
+              </a:ext>
+            </a:extLst>
+          </p:cNvPr>
+          <p:cNvPicPr>
+            <a:picLocks noChangeAspect="1"/>
+          </p:cNvPicPr>
+          <p:nvPr/>
+        </p:nvPicPr>
+        <p:blipFill>
+          <a:blip r:embed="rId4"/>
+          <a:stretch>
+            <a:fillRect/>
+          </a:stretch>
+        </p:blipFill>
+        <p:spPr>
+          <a:xfrm>
+            <a:off x="8157012" y="4410198"/>
+            <a:ext cx="482523" cy="482523"/>
+          </a:xfrm>
+          <a:prstGeom prst="rect">
+            <a:avLst/>
+          </a:prstGeom>
+        </p:spPr>
+      </p:pic>
+      <p:pic>
+        <p:nvPicPr>
+          <p:cNvPr id="21" name="Picture 20">
+            <a:extLst>
+              <a:ext uri="{FF2B5EF4-FFF2-40B4-BE49-F238E27FC236}">
+                <a16:creationId xmlns:a16="http://schemas.microsoft.com/office/drawing/2014/main" id="{263EE4B6-16A8-6B1F-110A-B0E37FC94ACB}"/>
+              </a:ext>
+            </a:extLst>
+          </p:cNvPr>
+          <p:cNvPicPr>
+            <a:picLocks noChangeAspect="1"/>
+          </p:cNvPicPr>
+          <p:nvPr/>
+        </p:nvPicPr>
+        <p:blipFill>
+          <a:blip r:embed="rId5"/>
+          <a:stretch>
+            <a:fillRect/>
+          </a:stretch>
+        </p:blipFill>
+        <p:spPr>
+          <a:xfrm>
+            <a:off x="8008801" y="3788731"/>
+            <a:ext cx="738758" cy="201847"/>
+          </a:xfrm>
+          <a:prstGeom prst="rect">
+            <a:avLst/>
+          </a:prstGeom>
+        </p:spPr>
+      </p:pic>
     </p:spTree>
     <p:extLst>
       <p:ext uri="{BB962C8B-B14F-4D97-AF65-F5344CB8AC3E}">
-        <p14:creationId xmlns:p14="http://schemas.microsoft.com/office/powerpoint/2010/main" val="1071561068"/>
+        <p14:creationId xmlns:p14="http://schemas.microsoft.com/office/powerpoint/2010/main" val="2745563520"/>
       </p:ext>
     </p:extLst>
   </p:cSld>
@@ -4326,7 +11616,7 @@
 
 <file path=ppt/webextensions/taskpanes.xml><?xml version="1.0" encoding="utf-8"?>
 <wetp:taskpanes xmlns:wetp="http://schemas.microsoft.com/office/webextensions/taskpanes/2010/11">
-  <wetp:taskpane dockstate="right" visibility="0" width="350" row="1">
+  <wetp:taskpane dockstate="right" visibility="1" width="350" row="1">
     <wetp:webextensionref xmlns:r="http://schemas.openxmlformats.org/officeDocument/2006/relationships" r:id="rId1"/>
   </wetp:taskpane>
 </wetp:taskpanes>

--- a/nordic-apis-2026/img/solution-composability.pptx
+++ b/nordic-apis-2026/img/solution-composability.pptx
@@ -10,9 +10,11 @@
     <p:sldId id="267" r:id="rId7"/>
     <p:sldId id="266" r:id="rId8"/>
     <p:sldId id="272" r:id="rId9"/>
-    <p:sldId id="274" r:id="rId10"/>
-    <p:sldId id="277" r:id="rId11"/>
-    <p:sldId id="268" r:id="rId12"/>
+    <p:sldId id="279" r:id="rId10"/>
+    <p:sldId id="274" r:id="rId11"/>
+    <p:sldId id="277" r:id="rId12"/>
+    <p:sldId id="268" r:id="rId13"/>
+    <p:sldId id="283" r:id="rId14"/>
   </p:sldIdLst>
   <p:sldSz cx="12192000" cy="6858000"/>
   <p:notesSz cx="6858000" cy="9144000"/>
@@ -4158,6 +4160,1460 @@
 </p:sld>
 </file>
 
+<file path=ppt/slides/slide10.xml><?xml version="1.0" encoding="utf-8"?>
+<p:sld xmlns:a="http://schemas.openxmlformats.org/drawingml/2006/main" xmlns:r="http://schemas.openxmlformats.org/officeDocument/2006/relationships" xmlns:p="http://schemas.openxmlformats.org/presentationml/2006/main">
+  <p:cSld>
+    <p:spTree>
+      <p:nvGrpSpPr>
+        <p:cNvPr id="1" name="">
+          <a:extLst>
+            <a:ext uri="{FF2B5EF4-FFF2-40B4-BE49-F238E27FC236}">
+              <a16:creationId xmlns:a16="http://schemas.microsoft.com/office/drawing/2014/main" id="{76DC0C7B-3D4C-4A81-88B2-21A67D18B0D1}"/>
+            </a:ext>
+          </a:extLst>
+        </p:cNvPr>
+        <p:cNvGrpSpPr/>
+        <p:nvPr/>
+      </p:nvGrpSpPr>
+      <p:grpSpPr>
+        <a:xfrm>
+          <a:off x="0" y="0"/>
+          <a:ext cx="0" cy="0"/>
+          <a:chOff x="0" y="0"/>
+          <a:chExt cx="0" cy="0"/>
+        </a:xfrm>
+      </p:grpSpPr>
+      <p:sp>
+        <p:nvSpPr>
+          <p:cNvPr id="6" name="Rectangle 5">
+            <a:extLst>
+              <a:ext uri="{FF2B5EF4-FFF2-40B4-BE49-F238E27FC236}">
+                <a16:creationId xmlns:a16="http://schemas.microsoft.com/office/drawing/2014/main" id="{5866FDE8-6D6C-959F-E621-9FEBD5ADA6BA}"/>
+              </a:ext>
+            </a:extLst>
+          </p:cNvPr>
+          <p:cNvSpPr/>
+          <p:nvPr/>
+        </p:nvSpPr>
+        <p:spPr>
+          <a:xfrm>
+            <a:off x="8753138" y="1663549"/>
+            <a:ext cx="1398488" cy="3530899"/>
+          </a:xfrm>
+          <a:prstGeom prst="rect">
+            <a:avLst/>
+          </a:prstGeom>
+          <a:solidFill>
+            <a:schemeClr val="accent1">
+              <a:lumMod val="40000"/>
+              <a:lumOff val="60000"/>
+            </a:schemeClr>
+          </a:solidFill>
+          <a:ln w="50800">
+            <a:solidFill>
+              <a:schemeClr val="tx2"/>
+            </a:solidFill>
+          </a:ln>
+        </p:spPr>
+        <p:style>
+          <a:lnRef idx="2">
+            <a:schemeClr val="accent1">
+              <a:shade val="15000"/>
+            </a:schemeClr>
+          </a:lnRef>
+          <a:fillRef idx="1">
+            <a:schemeClr val="accent1"/>
+          </a:fillRef>
+          <a:effectRef idx="0">
+            <a:schemeClr val="accent1"/>
+          </a:effectRef>
+          <a:fontRef idx="minor">
+            <a:schemeClr val="lt1"/>
+          </a:fontRef>
+        </p:style>
+        <p:txBody>
+          <a:bodyPr rtlCol="0" anchor="ctr"/>
+          <a:lstStyle/>
+          <a:p>
+            <a:pPr algn="ctr"/>
+            <a:r>
+              <a:rPr lang="en-CH" dirty="0">
+                <a:solidFill>
+                  <a:schemeClr val="accent2"/>
+                </a:solidFill>
+                <a:latin typeface="Sora" pitchFamily="2" charset="0"/>
+                <a:cs typeface="Sora" pitchFamily="2" charset="0"/>
+              </a:rPr>
+              <a:t>      APIs</a:t>
+            </a:r>
+          </a:p>
+          <a:p>
+            <a:pPr algn="ctr"/>
+            <a:r>
+              <a:rPr lang="en-CH" dirty="0">
+                <a:solidFill>
+                  <a:schemeClr val="accent2"/>
+                </a:solidFill>
+                <a:latin typeface="Sora" pitchFamily="2" charset="0"/>
+                <a:cs typeface="Sora" pitchFamily="2" charset="0"/>
+              </a:rPr>
+              <a:t>     &amp;</a:t>
+            </a:r>
+            <a:br>
+              <a:rPr lang="en-CH" dirty="0">
+                <a:solidFill>
+                  <a:schemeClr val="accent2"/>
+                </a:solidFill>
+                <a:latin typeface="Sora" pitchFamily="2" charset="0"/>
+                <a:cs typeface="Sora" pitchFamily="2" charset="0"/>
+              </a:rPr>
+            </a:br>
+            <a:r>
+              <a:rPr lang="en-CH" dirty="0">
+                <a:solidFill>
+                  <a:schemeClr val="accent2"/>
+                </a:solidFill>
+                <a:latin typeface="Sora" pitchFamily="2" charset="0"/>
+                <a:cs typeface="Sora" pitchFamily="2" charset="0"/>
+              </a:rPr>
+              <a:t>     Data</a:t>
+            </a:r>
+          </a:p>
+        </p:txBody>
+      </p:sp>
+      <p:sp>
+        <p:nvSpPr>
+          <p:cNvPr id="7" name="Freeform 6">
+            <a:extLst>
+              <a:ext uri="{FF2B5EF4-FFF2-40B4-BE49-F238E27FC236}">
+                <a16:creationId xmlns:a16="http://schemas.microsoft.com/office/drawing/2014/main" id="{3C1CE304-FE95-1502-A2C6-BCD998125FC6}"/>
+              </a:ext>
+            </a:extLst>
+          </p:cNvPr>
+          <p:cNvSpPr/>
+          <p:nvPr/>
+        </p:nvSpPr>
+        <p:spPr>
+          <a:xfrm rot="-240000">
+            <a:off x="3230000" y="3900000"/>
+            <a:ext cx="2950000" cy="1150000"/>
+          </a:xfrm>
+          <a:prstGeom prst="rect">
+            <a:avLst/>
+          </a:prstGeom>
+          <a:solidFill>
+            <a:schemeClr val="accent1"/>
+          </a:solidFill>
+          <a:ln w="50800">
+            <a:solidFill>
+              <a:schemeClr val="tx2"/>
+            </a:solidFill>
+          </a:ln>
+        </p:spPr>
+        <p:style>
+          <a:lnRef idx="2">
+            <a:schemeClr val="accent1">
+              <a:shade val="15000"/>
+            </a:schemeClr>
+          </a:lnRef>
+          <a:fillRef idx="1">
+            <a:schemeClr val="accent1"/>
+          </a:fillRef>
+          <a:effectRef idx="0">
+            <a:schemeClr val="accent1"/>
+          </a:effectRef>
+          <a:fontRef idx="minor">
+            <a:schemeClr val="lt1"/>
+          </a:fontRef>
+        </p:style>
+        <p:txBody>
+          <a:bodyPr rtlCol="0" anchor="ctr"/>
+          <a:lstStyle/>
+          <a:p>
+            <a:pPr algn="ctr"/>
+            <a:r>
+              <a:rPr lang="en-CH" dirty="0">
+                <a:latin typeface="Sora" pitchFamily="2" charset="0"/>
+                <a:cs typeface="Sora" pitchFamily="2" charset="0"/>
+              </a:rPr>
+              <a:t>Deterministic</a:t>
+            </a:r>
+          </a:p>
+        </p:txBody>
+      </p:sp>
+      <p:sp>
+        <p:nvSpPr>
+          <p:cNvPr id="5" name="Rectangle 4">
+            <a:extLst>
+              <a:ext uri="{FF2B5EF4-FFF2-40B4-BE49-F238E27FC236}">
+                <a16:creationId xmlns:a16="http://schemas.microsoft.com/office/drawing/2014/main" id="{FCD42EBA-3A36-C077-A178-30ECC2553D5E}"/>
+              </a:ext>
+            </a:extLst>
+          </p:cNvPr>
+          <p:cNvSpPr/>
+          <p:nvPr/>
+        </p:nvSpPr>
+        <p:spPr>
+          <a:xfrm rot="180000">
+            <a:off x="3260000" y="1750000"/>
+            <a:ext cx="2050000" cy="1650000"/>
+          </a:xfrm>
+          <a:prstGeom prst="rect">
+            <a:avLst/>
+          </a:prstGeom>
+          <a:solidFill>
+            <a:schemeClr val="tx2"/>
+          </a:solidFill>
+          <a:ln w="50800">
+            <a:solidFill>
+              <a:schemeClr val="accent1"/>
+            </a:solidFill>
+          </a:ln>
+        </p:spPr>
+        <p:style>
+          <a:lnRef idx="2">
+            <a:schemeClr val="accent1">
+              <a:shade val="15000"/>
+            </a:schemeClr>
+          </a:lnRef>
+          <a:fillRef idx="1">
+            <a:schemeClr val="accent1"/>
+          </a:fillRef>
+          <a:effectRef idx="0">
+            <a:schemeClr val="accent1"/>
+          </a:effectRef>
+          <a:fontRef idx="minor">
+            <a:schemeClr val="lt1"/>
+          </a:fontRef>
+        </p:style>
+        <p:txBody>
+          <a:bodyPr rtlCol="0" anchor="ctr"/>
+          <a:lstStyle/>
+          <a:p>
+            <a:pPr algn="ctr"/>
+            <a:r>
+              <a:rPr lang="en-CH" dirty="0">
+                <a:latin typeface="Sora" pitchFamily="2" charset="0"/>
+                <a:cs typeface="Sora" pitchFamily="2" charset="0"/>
+              </a:rPr>
+              <a:t>GenAI</a:t>
+            </a:r>
+          </a:p>
+        </p:txBody>
+      </p:sp>
+      <p:sp>
+        <p:nvSpPr>
+          <p:cNvPr id="28" name="ML"/>
+          <p:cNvSpPr/>
+          <p:nvPr/>
+        </p:nvSpPr>
+        <p:spPr>
+          <a:xfrm rot="-540000">
+            <a:off x="5050000" y="2950000"/>
+            <a:ext cx="1250000" cy="850000"/>
+          </a:xfrm>
+          <a:prstGeom prst="rect">
+            <a:avLst/>
+          </a:prstGeom>
+          <a:solidFill>
+            <a:srgbClr val="637E3C"/>
+          </a:solidFill>
+          <a:ln w="50800">
+            <a:solidFill>
+              <a:schemeClr val="accent1"/>
+            </a:solidFill>
+          </a:ln>
+        </p:spPr>
+        <p:style>
+          <a:lnRef idx="2">
+            <a:schemeClr val="accent1">
+              <a:shade val="15000"/>
+            </a:schemeClr>
+          </a:lnRef>
+          <a:fillRef idx="1">
+            <a:schemeClr val="accent1"/>
+          </a:fillRef>
+          <a:effectRef idx="0">
+            <a:schemeClr val="accent1"/>
+          </a:effectRef>
+          <a:fontRef idx="minor">
+            <a:schemeClr val="lt1"/>
+          </a:fontRef>
+        </p:style>
+        <p:txBody>
+          <a:bodyPr rtlCol="0" anchor="ctr"/>
+          <a:lstStyle/>
+          <a:p>
+            <a:pPr algn="ctr"/>
+            <a:r>
+              <a:rPr lang="en-CH" dirty="0">
+                <a:latin typeface="Sora" pitchFamily="2" charset="0"/>
+                <a:cs typeface="Sora" pitchFamily="2" charset="0"/>
+              </a:rPr>
+              <a:t>ML</a:t>
+            </a:r>
+          </a:p>
+        </p:txBody>
+      </p:sp>
+      <p:sp>
+        <p:nvSpPr>
+          <p:cNvPr id="29" name="Prompts"/>
+          <p:cNvSpPr/>
+          <p:nvPr/>
+        </p:nvSpPr>
+        <p:spPr>
+          <a:xfrm rot="-300000">
+            <a:off x="3550000" y="1420000"/>
+            <a:ext cx="1750000" cy="450000"/>
+          </a:xfrm>
+          <a:prstGeom prst="rect">
+            <a:avLst/>
+          </a:prstGeom>
+          <a:solidFill>
+            <a:srgbClr val="637E3C"/>
+          </a:solidFill>
+          <a:ln w="50800">
+            <a:solidFill>
+              <a:schemeClr val="accent1"/>
+            </a:solidFill>
+          </a:ln>
+        </p:spPr>
+        <p:style>
+          <a:lnRef idx="2">
+            <a:schemeClr val="accent1">
+              <a:shade val="15000"/>
+            </a:schemeClr>
+          </a:lnRef>
+          <a:fillRef idx="1">
+            <a:schemeClr val="accent1"/>
+          </a:fillRef>
+          <a:effectRef idx="0">
+            <a:schemeClr val="accent1"/>
+          </a:effectRef>
+          <a:fontRef idx="minor">
+            <a:schemeClr val="lt1"/>
+          </a:fontRef>
+        </p:style>
+        <p:txBody>
+          <a:bodyPr rtlCol="0" anchor="ctr"/>
+          <a:lstStyle/>
+          <a:p>
+            <a:pPr algn="ctr"/>
+            <a:r>
+              <a:rPr lang="en-CH" dirty="0">
+                <a:latin typeface="Sora" pitchFamily="2" charset="0"/>
+                <a:cs typeface="Sora" pitchFamily="2" charset="0"/>
+              </a:rPr>
+              <a:t>Prompts</a:t>
+            </a:r>
+          </a:p>
+        </p:txBody>
+      </p:sp>
+      <p:sp>
+        <p:nvSpPr>
+          <p:cNvPr id="30" name="RLCD"/>
+          <p:cNvSpPr/>
+          <p:nvPr/>
+        </p:nvSpPr>
+        <p:spPr>
+          <a:xfrm rot="-240000">
+            <a:off x="6000000" y="4600000"/>
+            <a:ext cx="1400000" cy="450000"/>
+          </a:xfrm>
+          <a:prstGeom prst="rect">
+            <a:avLst/>
+          </a:prstGeom>
+          <a:solidFill>
+            <a:srgbClr val="637E3C"/>
+          </a:solidFill>
+          <a:ln w="50800">
+            <a:solidFill>
+              <a:schemeClr val="accent1"/>
+            </a:solidFill>
+          </a:ln>
+        </p:spPr>
+        <p:style>
+          <a:lnRef idx="2">
+            <a:schemeClr val="accent1">
+              <a:shade val="15000"/>
+            </a:schemeClr>
+          </a:lnRef>
+          <a:fillRef idx="1">
+            <a:schemeClr val="accent1"/>
+          </a:fillRef>
+          <a:effectRef idx="0">
+            <a:schemeClr val="accent1"/>
+          </a:effectRef>
+          <a:fontRef idx="minor">
+            <a:schemeClr val="lt1"/>
+          </a:fontRef>
+        </p:style>
+        <p:txBody>
+          <a:bodyPr rtlCol="0" anchor="ctr"/>
+          <a:lstStyle/>
+          <a:p>
+            <a:pPr algn="ctr"/>
+            <a:r>
+              <a:rPr lang="en-CH" dirty="0">
+                <a:latin typeface="Sora" pitchFamily="2" charset="0"/>
+                <a:cs typeface="Sora" pitchFamily="2" charset="0"/>
+              </a:rPr>
+              <a:t>RLCD</a:t>
+            </a:r>
+          </a:p>
+        </p:txBody>
+      </p:sp>
+      <p:sp>
+        <p:nvSpPr>
+          <p:cNvPr id="31" name="GenAI small 1"/>
+          <p:cNvSpPr/>
+          <p:nvPr/>
+        </p:nvSpPr>
+        <p:spPr>
+          <a:xfrm rot="-720000">
+            <a:off x="5400000" y="1250000"/>
+            <a:ext cx="940000" cy="520000"/>
+          </a:xfrm>
+          <a:prstGeom prst="rect">
+            <a:avLst/>
+          </a:prstGeom>
+          <a:solidFill>
+            <a:srgbClr val="637E3C"/>
+          </a:solidFill>
+          <a:ln w="50800">
+            <a:solidFill>
+              <a:schemeClr val="accent1"/>
+            </a:solidFill>
+          </a:ln>
+        </p:spPr>
+        <p:style>
+          <a:lnRef idx="2">
+            <a:schemeClr val="accent1">
+              <a:shade val="15000"/>
+            </a:schemeClr>
+          </a:lnRef>
+          <a:fillRef idx="1">
+            <a:schemeClr val="accent1"/>
+          </a:fillRef>
+          <a:effectRef idx="0">
+            <a:schemeClr val="accent1"/>
+          </a:effectRef>
+          <a:fontRef idx="minor">
+            <a:schemeClr val="lt1"/>
+          </a:fontRef>
+        </p:style>
+        <p:txBody>
+          <a:bodyPr rtlCol="0" anchor="ctr"/>
+          <a:lstStyle/>
+          <a:p>
+            <a:pPr algn="ctr"/>
+            <a:r>
+              <a:rPr lang="en-CH" dirty="0">
+                <a:latin typeface="Sora" pitchFamily="2" charset="0"/>
+                <a:cs typeface="Sora" pitchFamily="2" charset="0"/>
+              </a:rPr>
+              <a:t>GenAI</a:t>
+            </a:r>
+          </a:p>
+        </p:txBody>
+      </p:sp>
+      <p:sp>
+        <p:nvSpPr>
+          <p:cNvPr id="32" name="GenAI small 2"/>
+          <p:cNvSpPr/>
+          <p:nvPr/>
+        </p:nvSpPr>
+        <p:spPr>
+          <a:xfrm rot="540000">
+            <a:off x="3300000" y="4750000"/>
+            <a:ext cx="940000" cy="520000"/>
+          </a:xfrm>
+          <a:prstGeom prst="rect">
+            <a:avLst/>
+          </a:prstGeom>
+          <a:solidFill>
+            <a:srgbClr val="637E3C"/>
+          </a:solidFill>
+          <a:ln w="50800">
+            <a:solidFill>
+              <a:schemeClr val="accent1"/>
+            </a:solidFill>
+          </a:ln>
+        </p:spPr>
+        <p:style>
+          <a:lnRef idx="2">
+            <a:schemeClr val="accent1">
+              <a:shade val="15000"/>
+            </a:schemeClr>
+          </a:lnRef>
+          <a:fillRef idx="1">
+            <a:schemeClr val="accent1"/>
+          </a:fillRef>
+          <a:effectRef idx="0">
+            <a:schemeClr val="accent1"/>
+          </a:effectRef>
+          <a:fontRef idx="minor">
+            <a:schemeClr val="lt1"/>
+          </a:fontRef>
+        </p:style>
+        <p:txBody>
+          <a:bodyPr rtlCol="0" anchor="ctr"/>
+          <a:lstStyle/>
+          <a:p>
+            <a:pPr algn="ctr"/>
+            <a:r>
+              <a:rPr lang="en-CH" dirty="0">
+                <a:latin typeface="Sora" pitchFamily="2" charset="0"/>
+                <a:cs typeface="Sora" pitchFamily="2" charset="0"/>
+              </a:rPr>
+              <a:t>GenAI</a:t>
+            </a:r>
+          </a:p>
+        </p:txBody>
+      </p:sp>
+      <p:sp>
+        <p:nvSpPr>
+          <p:cNvPr id="33" name="GenAI small 3"/>
+          <p:cNvSpPr/>
+          <p:nvPr/>
+        </p:nvSpPr>
+        <p:spPr>
+          <a:xfrm rot="-180000">
+            <a:off x="4250000" y="3550000"/>
+            <a:ext cx="940000" cy="520000"/>
+          </a:xfrm>
+          <a:prstGeom prst="rect">
+            <a:avLst/>
+          </a:prstGeom>
+          <a:solidFill>
+            <a:srgbClr val="637E3C"/>
+          </a:solidFill>
+          <a:ln w="50800">
+            <a:solidFill>
+              <a:schemeClr val="accent1"/>
+            </a:solidFill>
+          </a:ln>
+        </p:spPr>
+        <p:style>
+          <a:lnRef idx="2">
+            <a:schemeClr val="accent1">
+              <a:shade val="15000"/>
+            </a:schemeClr>
+          </a:lnRef>
+          <a:fillRef idx="1">
+            <a:schemeClr val="accent1"/>
+          </a:fillRef>
+          <a:effectRef idx="0">
+            <a:schemeClr val="accent1"/>
+          </a:effectRef>
+          <a:fontRef idx="minor">
+            <a:schemeClr val="lt1"/>
+          </a:fontRef>
+        </p:style>
+        <p:txBody>
+          <a:bodyPr rtlCol="0" anchor="ctr"/>
+          <a:lstStyle/>
+          <a:p>
+            <a:pPr algn="ctr"/>
+            <a:r>
+              <a:rPr lang="en-CH" dirty="0">
+                <a:latin typeface="Sora" pitchFamily="2" charset="0"/>
+                <a:cs typeface="Sora" pitchFamily="2" charset="0"/>
+              </a:rPr>
+              <a:t>GenAI</a:t>
+            </a:r>
+          </a:p>
+        </p:txBody>
+      </p:sp>
+      <p:cxnSp>
+        <p:nvCxnSpPr>
+          <p:cNvPr id="9" name="Straight Connector 8">
+            <a:extLst>
+              <a:ext uri="{FF2B5EF4-FFF2-40B4-BE49-F238E27FC236}">
+                <a16:creationId xmlns:a16="http://schemas.microsoft.com/office/drawing/2014/main" id="{5CC1ABF8-3F65-093E-B197-103EDF570F7F}"/>
+              </a:ext>
+            </a:extLst>
+          </p:cNvPr>
+          <p:cNvCxnSpPr>
+            <a:cxnSpLocks/>
+          </p:cNvCxnSpPr>
+          <p:nvPr/>
+        </p:nvCxnSpPr>
+        <p:spPr>
+          <a:xfrm>
+            <a:off x="8419652" y="1245196"/>
+            <a:ext cx="0" cy="4682268"/>
+          </a:xfrm>
+          <a:prstGeom prst="line">
+            <a:avLst/>
+          </a:prstGeom>
+          <a:ln w="254000">
+            <a:solidFill>
+              <a:schemeClr val="tx2"/>
+            </a:solidFill>
+          </a:ln>
+        </p:spPr>
+        <p:style>
+          <a:lnRef idx="1">
+            <a:schemeClr val="accent1"/>
+          </a:lnRef>
+          <a:fillRef idx="0">
+            <a:schemeClr val="accent1"/>
+          </a:fillRef>
+          <a:effectRef idx="0">
+            <a:schemeClr val="accent1"/>
+          </a:effectRef>
+          <a:fontRef idx="minor">
+            <a:schemeClr val="tx1"/>
+          </a:fontRef>
+        </p:style>
+      </p:cxnSp>
+      <p:sp>
+        <p:nvSpPr>
+          <p:cNvPr id="10" name="TextBox 9">
+            <a:extLst>
+              <a:ext uri="{FF2B5EF4-FFF2-40B4-BE49-F238E27FC236}">
+                <a16:creationId xmlns:a16="http://schemas.microsoft.com/office/drawing/2014/main" id="{47403FA8-B9DE-E875-CC73-2B20822F1190}"/>
+              </a:ext>
+            </a:extLst>
+          </p:cNvPr>
+          <p:cNvSpPr txBox="1"/>
+          <p:nvPr/>
+        </p:nvSpPr>
+        <p:spPr>
+          <a:xfrm>
+            <a:off x="5027530" y="5428134"/>
+            <a:ext cx="1192955" cy="369332"/>
+          </a:xfrm>
+          <a:prstGeom prst="rect">
+            <a:avLst/>
+          </a:prstGeom>
+          <a:noFill/>
+        </p:spPr>
+        <p:txBody>
+          <a:bodyPr wrap="none" rtlCol="0">
+            <a:spAutoFit/>
+          </a:bodyPr>
+          <a:lstStyle/>
+          <a:p>
+            <a:r>
+              <a:rPr lang="en-CH" dirty="0">
+                <a:latin typeface="Sora" pitchFamily="2" charset="0"/>
+                <a:cs typeface="Sora" pitchFamily="2" charset="0"/>
+              </a:rPr>
+              <a:t>Solution</a:t>
+            </a:r>
+          </a:p>
+        </p:txBody>
+      </p:sp>
+      <p:sp>
+        <p:nvSpPr>
+          <p:cNvPr id="11" name="TextBox 10">
+            <a:extLst>
+              <a:ext uri="{FF2B5EF4-FFF2-40B4-BE49-F238E27FC236}">
+                <a16:creationId xmlns:a16="http://schemas.microsoft.com/office/drawing/2014/main" id="{536E6235-A8D4-B8D1-8D9E-B5C7A10A43D7}"/>
+              </a:ext>
+            </a:extLst>
+          </p:cNvPr>
+          <p:cNvSpPr txBox="1"/>
+          <p:nvPr/>
+        </p:nvSpPr>
+        <p:spPr>
+          <a:xfrm>
+            <a:off x="8709483" y="5428134"/>
+            <a:ext cx="1540806" cy="369332"/>
+          </a:xfrm>
+          <a:prstGeom prst="rect">
+            <a:avLst/>
+          </a:prstGeom>
+          <a:noFill/>
+        </p:spPr>
+        <p:txBody>
+          <a:bodyPr wrap="none" rtlCol="0">
+            <a:spAutoFit/>
+          </a:bodyPr>
+          <a:lstStyle/>
+          <a:p>
+            <a:r>
+              <a:rPr lang="en-CH" dirty="0">
+                <a:latin typeface="Sora" pitchFamily="2" charset="0"/>
+                <a:cs typeface="Sora" pitchFamily="2" charset="0"/>
+              </a:rPr>
+              <a:t>Foundation</a:t>
+            </a:r>
+          </a:p>
+        </p:txBody>
+      </p:sp>
+      <p:sp>
+        <p:nvSpPr>
+          <p:cNvPr id="2" name="Right Arrow 1">
+            <a:extLst>
+              <a:ext uri="{FF2B5EF4-FFF2-40B4-BE49-F238E27FC236}">
+                <a16:creationId xmlns:a16="http://schemas.microsoft.com/office/drawing/2014/main" id="{B8ED3412-7C0A-F0B3-C996-3914712AB6A1}"/>
+              </a:ext>
+            </a:extLst>
+          </p:cNvPr>
+          <p:cNvSpPr/>
+          <p:nvPr/>
+        </p:nvSpPr>
+        <p:spPr>
+          <a:xfrm>
+            <a:off x="1369100" y="2695096"/>
+            <a:ext cx="1394906" cy="563878"/>
+          </a:xfrm>
+          <a:prstGeom prst="rightArrow">
+            <a:avLst/>
+          </a:prstGeom>
+          <a:solidFill>
+            <a:schemeClr val="accent1">
+              <a:lumMod val="40000"/>
+              <a:lumOff val="60000"/>
+            </a:schemeClr>
+          </a:solidFill>
+          <a:ln w="25400">
+            <a:solidFill>
+              <a:schemeClr val="tx2"/>
+            </a:solidFill>
+          </a:ln>
+        </p:spPr>
+        <p:style>
+          <a:lnRef idx="2">
+            <a:schemeClr val="accent1">
+              <a:shade val="15000"/>
+            </a:schemeClr>
+          </a:lnRef>
+          <a:fillRef idx="1">
+            <a:schemeClr val="accent1"/>
+          </a:fillRef>
+          <a:effectRef idx="0">
+            <a:schemeClr val="accent1"/>
+          </a:effectRef>
+          <a:fontRef idx="minor">
+            <a:schemeClr val="lt1"/>
+          </a:fontRef>
+        </p:style>
+        <p:txBody>
+          <a:bodyPr rtlCol="0" anchor="ctr"/>
+          <a:lstStyle/>
+          <a:p>
+            <a:pPr algn="ctr"/>
+            <a:r>
+              <a:rPr lang="en-CH" sz="1400" dirty="0">
+                <a:solidFill>
+                  <a:schemeClr val="accent2"/>
+                </a:solidFill>
+                <a:latin typeface="Sora" pitchFamily="2" charset="0"/>
+                <a:cs typeface="Sora" pitchFamily="2" charset="0"/>
+              </a:rPr>
+              <a:t>Input</a:t>
+            </a:r>
+            <a:endParaRPr lang="en-CH" dirty="0">
+              <a:solidFill>
+                <a:schemeClr val="accent2"/>
+              </a:solidFill>
+              <a:latin typeface="Sora" pitchFamily="2" charset="0"/>
+              <a:cs typeface="Sora" pitchFamily="2" charset="0"/>
+            </a:endParaRPr>
+          </a:p>
+        </p:txBody>
+      </p:sp>
+      <p:sp>
+        <p:nvSpPr>
+          <p:cNvPr id="3" name="TextBox 2">
+            <a:extLst>
+              <a:ext uri="{FF2B5EF4-FFF2-40B4-BE49-F238E27FC236}">
+                <a16:creationId xmlns:a16="http://schemas.microsoft.com/office/drawing/2014/main" id="{21A5EE44-23E2-65E1-12F1-99311E749AE2}"/>
+              </a:ext>
+            </a:extLst>
+          </p:cNvPr>
+          <p:cNvSpPr txBox="1"/>
+          <p:nvPr/>
+        </p:nvSpPr>
+        <p:spPr>
+          <a:xfrm>
+            <a:off x="1303140" y="3267269"/>
+            <a:ext cx="1534394" cy="369332"/>
+          </a:xfrm>
+          <a:prstGeom prst="rect">
+            <a:avLst/>
+          </a:prstGeom>
+          <a:noFill/>
+        </p:spPr>
+        <p:txBody>
+          <a:bodyPr wrap="none" rtlCol="0">
+            <a:spAutoFit/>
+          </a:bodyPr>
+          <a:lstStyle/>
+          <a:p>
+            <a:r>
+              <a:rPr lang="en-CH" dirty="0">
+                <a:latin typeface="Sora" pitchFamily="2" charset="0"/>
+                <a:cs typeface="Sora" pitchFamily="2" charset="0"/>
+              </a:rPr>
+              <a:t>Consumers</a:t>
+            </a:r>
+          </a:p>
+        </p:txBody>
+      </p:sp>
+      <p:sp>
+        <p:nvSpPr>
+          <p:cNvPr id="8" name="Right Arrow 7">
+            <a:extLst>
+              <a:ext uri="{FF2B5EF4-FFF2-40B4-BE49-F238E27FC236}">
+                <a16:creationId xmlns:a16="http://schemas.microsoft.com/office/drawing/2014/main" id="{23D23993-EDF2-8DE0-FB10-29A4CEEC4BD1}"/>
+              </a:ext>
+            </a:extLst>
+          </p:cNvPr>
+          <p:cNvSpPr/>
+          <p:nvPr/>
+        </p:nvSpPr>
+        <p:spPr>
+          <a:xfrm>
+            <a:off x="1343113" y="3645649"/>
+            <a:ext cx="1394906" cy="563878"/>
+          </a:xfrm>
+          <a:prstGeom prst="leftArrow">
+            <a:avLst/>
+          </a:prstGeom>
+          <a:solidFill>
+            <a:schemeClr val="accent1">
+              <a:lumMod val="40000"/>
+              <a:lumOff val="60000"/>
+            </a:schemeClr>
+          </a:solidFill>
+          <a:ln w="25400">
+            <a:solidFill>
+              <a:schemeClr val="tx2"/>
+            </a:solidFill>
+          </a:ln>
+        </p:spPr>
+        <p:style>
+          <a:lnRef idx="2">
+            <a:schemeClr val="accent1">
+              <a:shade val="15000"/>
+            </a:schemeClr>
+          </a:lnRef>
+          <a:fillRef idx="1">
+            <a:schemeClr val="accent1"/>
+          </a:fillRef>
+          <a:effectRef idx="0">
+            <a:schemeClr val="accent1"/>
+          </a:effectRef>
+          <a:fontRef idx="minor">
+            <a:schemeClr val="lt1"/>
+          </a:fontRef>
+        </p:style>
+        <p:txBody>
+          <a:bodyPr rtlCol="0" anchor="ctr"/>
+          <a:lstStyle/>
+          <a:p>
+            <a:pPr algn="ctr"/>
+            <a:r>
+              <a:rPr lang="en-CH" sz="1400" dirty="0">
+                <a:solidFill>
+                  <a:schemeClr val="accent2"/>
+                </a:solidFill>
+                <a:latin typeface="Sora" pitchFamily="2" charset="0"/>
+                <a:cs typeface="Sora" pitchFamily="2" charset="0"/>
+              </a:rPr>
+              <a:t>Output</a:t>
+            </a:r>
+            <a:endParaRPr lang="en-CH" dirty="0">
+              <a:solidFill>
+                <a:schemeClr val="accent2"/>
+              </a:solidFill>
+              <a:latin typeface="Sora" pitchFamily="2" charset="0"/>
+              <a:cs typeface="Sora" pitchFamily="2" charset="0"/>
+            </a:endParaRPr>
+          </a:p>
+        </p:txBody>
+      </p:sp>
+      <p:sp>
+        <p:nvSpPr>
+          <p:cNvPr id="34" name="Function Calling"/>
+          <p:cNvSpPr/>
+          <p:nvPr/>
+        </p:nvSpPr>
+        <p:spPr>
+          <a:xfrm rot="-1020000">
+            <a:off x="5763732" y="3789503"/>
+            <a:ext cx="1475338" cy="572173"/>
+          </a:xfrm>
+          <a:prstGeom prst="leftRightArrow">
+            <a:avLst/>
+          </a:prstGeom>
+          <a:solidFill>
+            <a:schemeClr val="accent1">
+              <a:lumMod val="40000"/>
+              <a:lumOff val="60000"/>
+            </a:schemeClr>
+          </a:solidFill>
+          <a:ln w="25400">
+            <a:solidFill>
+              <a:schemeClr val="accent2"/>
+            </a:solidFill>
+          </a:ln>
+        </p:spPr>
+        <p:style>
+          <a:lnRef idx="2">
+            <a:schemeClr val="accent1">
+              <a:shade val="15000"/>
+            </a:schemeClr>
+          </a:lnRef>
+          <a:fillRef idx="1">
+            <a:schemeClr val="accent1"/>
+          </a:fillRef>
+          <a:effectRef idx="0">
+            <a:schemeClr val="accent1"/>
+          </a:effectRef>
+          <a:fontRef idx="minor">
+            <a:schemeClr val="lt1"/>
+          </a:fontRef>
+        </p:style>
+        <p:txBody>
+          <a:bodyPr rtlCol="0" anchor="ctr"/>
+          <a:lstStyle/>
+          <a:p>
+            <a:pPr algn="ctr"/>
+            <a:r>
+              <a:rPr lang="en-CH" sz="900" dirty="0">
+                <a:solidFill>
+                  <a:schemeClr val="accent2"/>
+                </a:solidFill>
+                <a:latin typeface="Sora" pitchFamily="2" charset="0"/>
+                <a:cs typeface="Sora" pitchFamily="2" charset="0"/>
+              </a:rPr>
+              <a:t>Function Calling</a:t>
+            </a:r>
+          </a:p>
+        </p:txBody>
+      </p:sp>
+      <p:sp>
+        <p:nvSpPr>
+          <p:cNvPr id="35" name="Agent Skills"/>
+          <p:cNvSpPr/>
+          <p:nvPr/>
+        </p:nvSpPr>
+        <p:spPr>
+          <a:xfrm rot="300000">
+            <a:off x="4666965" y="2322680"/>
+            <a:ext cx="3500000" cy="760000"/>
+          </a:xfrm>
+          <a:prstGeom prst="leftRightArrow">
+            <a:avLst/>
+          </a:prstGeom>
+          <a:solidFill>
+            <a:srgbClr val="637E3C"/>
+          </a:solidFill>
+          <a:ln w="25400">
+            <a:solidFill>
+              <a:schemeClr val="accent2"/>
+            </a:solidFill>
+          </a:ln>
+        </p:spPr>
+        <p:style>
+          <a:lnRef idx="2">
+            <a:schemeClr val="accent1">
+              <a:shade val="15000"/>
+            </a:schemeClr>
+          </a:lnRef>
+          <a:fillRef idx="1">
+            <a:schemeClr val="accent1"/>
+          </a:fillRef>
+          <a:effectRef idx="0">
+            <a:schemeClr val="accent1"/>
+          </a:effectRef>
+          <a:fontRef idx="minor">
+            <a:schemeClr val="lt1"/>
+          </a:fontRef>
+        </p:style>
+        <p:txBody>
+          <a:bodyPr rtlCol="0" anchor="ctr"/>
+          <a:lstStyle/>
+          <a:p>
+            <a:pPr algn="ctr"/>
+            <a:r>
+              <a:rPr lang="en-CH" sz="1400" dirty="0">
+                <a:solidFill>
+                  <a:schemeClr val="bg1"/>
+                </a:solidFill>
+                <a:latin typeface="Sora" pitchFamily="2" charset="0"/>
+                <a:cs typeface="Sora" pitchFamily="2" charset="0"/>
+              </a:rPr>
+              <a:t>Agent Skills</a:t>
+            </a:r>
+          </a:p>
+        </p:txBody>
+      </p:sp>
+      <p:grpSp>
+        <p:nvGrpSpPr>
+          <p:cNvPr id="23" name="MCP group"/>
+          <p:cNvGrpSpPr/>
+          <p:nvPr/>
+        </p:nvGrpSpPr>
+        <p:grpSpPr>
+          <a:xfrm rot="-420000">
+            <a:off x="5638182" y="1583283"/>
+            <a:ext cx="3385701" cy="860367"/>
+            <a:chOff x="5888182" y="1783283"/>
+            <a:chExt cx="3385701" cy="860367"/>
+          </a:xfrm>
+        </p:grpSpPr>
+        <p:sp>
+          <p:nvSpPr>
+            <p:cNvPr id="22" name="Left-right Arrow 21">
+              <a:extLst>
+                <a:ext uri="{FF2B5EF4-FFF2-40B4-BE49-F238E27FC236}">
+                  <a16:creationId xmlns:a16="http://schemas.microsoft.com/office/drawing/2014/main" id="{D1A0B776-4178-644F-42F6-AA312CEB1120}"/>
+                </a:ext>
+              </a:extLst>
+            </p:cNvPr>
+            <p:cNvSpPr/>
+            <p:nvPr/>
+          </p:nvSpPr>
+          <p:spPr>
+            <a:xfrm>
+              <a:off x="5888182" y="1783283"/>
+              <a:ext cx="3385701" cy="860367"/>
+            </a:xfrm>
+            <a:prstGeom prst="leftRightArrow">
+              <a:avLst/>
+            </a:prstGeom>
+            <a:solidFill>
+              <a:schemeClr val="accent1">
+                <a:lumMod val="40000"/>
+                <a:lumOff val="60000"/>
+              </a:schemeClr>
+            </a:solidFill>
+            <a:ln w="25400">
+              <a:solidFill>
+                <a:schemeClr val="accent2"/>
+              </a:solidFill>
+            </a:ln>
+          </p:spPr>
+          <p:style>
+            <a:lnRef idx="2">
+              <a:schemeClr val="accent1">
+                <a:shade val="15000"/>
+              </a:schemeClr>
+            </a:lnRef>
+            <a:fillRef idx="1">
+              <a:schemeClr val="accent1"/>
+            </a:fillRef>
+            <a:effectRef idx="0">
+              <a:schemeClr val="accent1"/>
+            </a:effectRef>
+            <a:fontRef idx="minor">
+              <a:schemeClr val="lt1"/>
+            </a:fontRef>
+          </p:style>
+          <p:txBody>
+            <a:bodyPr rtlCol="0" anchor="ctr"/>
+            <a:lstStyle/>
+            <a:p>
+              <a:pPr algn="ctr"/>
+              <a:endParaRPr lang="en-CH" sz="900" dirty="0">
+                <a:solidFill>
+                  <a:schemeClr val="accent2"/>
+                </a:solidFill>
+                <a:latin typeface="Sora" pitchFamily="2" charset="0"/>
+                <a:cs typeface="Sora" pitchFamily="2" charset="0"/>
+              </a:endParaRPr>
+            </a:p>
+          </p:txBody>
+        </p:sp>
+        <p:pic>
+          <p:nvPicPr>
+            <p:cNvPr id="13" name="Picture 12">
+              <a:extLst>
+                <a:ext uri="{FF2B5EF4-FFF2-40B4-BE49-F238E27FC236}">
+                  <a16:creationId xmlns:a16="http://schemas.microsoft.com/office/drawing/2014/main" id="{413B9BF5-9256-396D-B56D-3F301B8BE01B}"/>
+                </a:ext>
+              </a:extLst>
+            </p:cNvPr>
+            <p:cNvPicPr>
+              <a:picLocks noChangeAspect="1"/>
+            </p:cNvPicPr>
+            <p:nvPr/>
+          </p:nvPicPr>
+          <p:blipFill>
+            <a:blip r:embed="rId2"/>
+            <a:stretch>
+              <a:fillRect/>
+            </a:stretch>
+          </p:blipFill>
+          <p:spPr>
+            <a:xfrm>
+              <a:off x="6269357" y="2025731"/>
+              <a:ext cx="2480992" cy="361141"/>
+            </a:xfrm>
+            <a:prstGeom prst="rect">
+              <a:avLst/>
+            </a:prstGeom>
+          </p:spPr>
+        </p:pic>
+      </p:grpSp>
+      <p:sp>
+        <p:nvSpPr>
+          <p:cNvPr id="14" name="Left-right Arrow 13">
+            <a:extLst>
+              <a:ext uri="{FF2B5EF4-FFF2-40B4-BE49-F238E27FC236}">
+                <a16:creationId xmlns:a16="http://schemas.microsoft.com/office/drawing/2014/main" id="{C89D6BE6-B089-1784-1775-BB5F3AB76FC1}"/>
+              </a:ext>
+            </a:extLst>
+          </p:cNvPr>
+          <p:cNvSpPr/>
+          <p:nvPr/>
+        </p:nvSpPr>
+        <p:spPr>
+          <a:xfrm>
+            <a:off x="7667233" y="3407721"/>
+            <a:ext cx="1475338" cy="486347"/>
+          </a:xfrm>
+          <a:prstGeom prst="leftRightArrow">
+            <a:avLst/>
+          </a:prstGeom>
+          <a:solidFill>
+            <a:schemeClr val="accent1">
+              <a:lumMod val="40000"/>
+              <a:lumOff val="60000"/>
+            </a:schemeClr>
+          </a:solidFill>
+          <a:ln w="25400">
+            <a:solidFill>
+              <a:schemeClr val="accent2"/>
+            </a:solidFill>
+          </a:ln>
+        </p:spPr>
+        <p:style>
+          <a:lnRef idx="2">
+            <a:schemeClr val="accent1">
+              <a:shade val="15000"/>
+            </a:schemeClr>
+          </a:lnRef>
+          <a:fillRef idx="1">
+            <a:schemeClr val="accent1"/>
+          </a:fillRef>
+          <a:effectRef idx="0">
+            <a:schemeClr val="accent1"/>
+          </a:effectRef>
+          <a:fontRef idx="minor">
+            <a:schemeClr val="lt1"/>
+          </a:fontRef>
+        </p:style>
+        <p:txBody>
+          <a:bodyPr rtlCol="0" anchor="ctr"/>
+          <a:lstStyle/>
+          <a:p>
+            <a:pPr algn="ctr"/>
+            <a:endParaRPr lang="en-CH"/>
+          </a:p>
+        </p:txBody>
+      </p:sp>
+      <p:sp>
+        <p:nvSpPr>
+          <p:cNvPr id="18" name="Left-right Arrow 17">
+            <a:extLst>
+              <a:ext uri="{FF2B5EF4-FFF2-40B4-BE49-F238E27FC236}">
+                <a16:creationId xmlns:a16="http://schemas.microsoft.com/office/drawing/2014/main" id="{756D2953-0D88-BC36-731C-3E2FC6820C8E}"/>
+              </a:ext>
+            </a:extLst>
+          </p:cNvPr>
+          <p:cNvSpPr/>
+          <p:nvPr/>
+        </p:nvSpPr>
+        <p:spPr>
+          <a:xfrm>
+            <a:off x="7667233" y="3994831"/>
+            <a:ext cx="1475339" cy="486347"/>
+          </a:xfrm>
+          <a:prstGeom prst="leftRightArrow">
+            <a:avLst/>
+          </a:prstGeom>
+          <a:solidFill>
+            <a:schemeClr val="accent1">
+              <a:lumMod val="40000"/>
+              <a:lumOff val="60000"/>
+            </a:schemeClr>
+          </a:solidFill>
+          <a:ln w="25400">
+            <a:solidFill>
+              <a:schemeClr val="accent2"/>
+            </a:solidFill>
+          </a:ln>
+        </p:spPr>
+        <p:style>
+          <a:lnRef idx="2">
+            <a:schemeClr val="accent1">
+              <a:shade val="15000"/>
+            </a:schemeClr>
+          </a:lnRef>
+          <a:fillRef idx="1">
+            <a:schemeClr val="accent1"/>
+          </a:fillRef>
+          <a:effectRef idx="0">
+            <a:schemeClr val="accent1"/>
+          </a:effectRef>
+          <a:fontRef idx="minor">
+            <a:schemeClr val="lt1"/>
+          </a:fontRef>
+        </p:style>
+        <p:txBody>
+          <a:bodyPr rtlCol="0" anchor="ctr"/>
+          <a:lstStyle/>
+          <a:p>
+            <a:pPr algn="ctr"/>
+            <a:endParaRPr lang="en-CH"/>
+          </a:p>
+        </p:txBody>
+      </p:sp>
+      <p:sp>
+        <p:nvSpPr>
+          <p:cNvPr id="36" name="Left-right Arrow 35">
+            <a:extLst>
+              <a:ext uri="{FF2B5EF4-FFF2-40B4-BE49-F238E27FC236}">
+                <a16:creationId xmlns:a16="http://schemas.microsoft.com/office/drawing/2014/main" id="{0972965A-4B14-AD06-69A3-FDE87A46C928}"/>
+              </a:ext>
+            </a:extLst>
+          </p:cNvPr>
+          <p:cNvSpPr/>
+          <p:nvPr/>
+        </p:nvSpPr>
+        <p:spPr>
+          <a:xfrm>
+            <a:off x="7667233" y="2820612"/>
+            <a:ext cx="1475338" cy="486347"/>
+          </a:xfrm>
+          <a:prstGeom prst="leftRightArrow">
+            <a:avLst/>
+          </a:prstGeom>
+          <a:solidFill>
+            <a:schemeClr val="accent1">
+              <a:lumMod val="40000"/>
+              <a:lumOff val="60000"/>
+            </a:schemeClr>
+          </a:solidFill>
+          <a:ln w="25400">
+            <a:solidFill>
+              <a:schemeClr val="accent2"/>
+            </a:solidFill>
+          </a:ln>
+        </p:spPr>
+        <p:style>
+          <a:lnRef idx="2">
+            <a:schemeClr val="accent1">
+              <a:shade val="15000"/>
+            </a:schemeClr>
+          </a:lnRef>
+          <a:fillRef idx="1">
+            <a:schemeClr val="accent1"/>
+          </a:fillRef>
+          <a:effectRef idx="0">
+            <a:schemeClr val="accent1"/>
+          </a:effectRef>
+          <a:fontRef idx="minor">
+            <a:schemeClr val="lt1"/>
+          </a:fontRef>
+        </p:style>
+        <p:txBody>
+          <a:bodyPr rtlCol="0" anchor="ctr"/>
+          <a:lstStyle/>
+          <a:p>
+            <a:pPr algn="ctr"/>
+            <a:endParaRPr lang="en-CH"/>
+          </a:p>
+        </p:txBody>
+      </p:sp>
+      <p:pic>
+        <p:nvPicPr>
+          <p:cNvPr id="37" name="Picture 36">
+            <a:extLst>
+              <a:ext uri="{FF2B5EF4-FFF2-40B4-BE49-F238E27FC236}">
+                <a16:creationId xmlns:a16="http://schemas.microsoft.com/office/drawing/2014/main" id="{E60AE11E-C974-D05C-25F8-0AB79E8B4AF1}"/>
+              </a:ext>
+            </a:extLst>
+          </p:cNvPr>
+          <p:cNvPicPr>
+            <a:picLocks noChangeAspect="1"/>
+          </p:cNvPicPr>
+          <p:nvPr/>
+        </p:nvPicPr>
+        <p:blipFill>
+          <a:blip r:embed="rId3"/>
+          <a:stretch>
+            <a:fillRect/>
+          </a:stretch>
+        </p:blipFill>
+        <p:spPr>
+          <a:xfrm>
+            <a:off x="7967197" y="2746993"/>
+            <a:ext cx="875405" cy="625289"/>
+          </a:xfrm>
+          <a:prstGeom prst="rect">
+            <a:avLst/>
+          </a:prstGeom>
+        </p:spPr>
+      </p:pic>
+      <p:sp>
+        <p:nvSpPr>
+          <p:cNvPr id="38" name="Left-right Arrow 37">
+            <a:extLst>
+              <a:ext uri="{FF2B5EF4-FFF2-40B4-BE49-F238E27FC236}">
+                <a16:creationId xmlns:a16="http://schemas.microsoft.com/office/drawing/2014/main" id="{19142504-31F1-39A1-9E05-D2D8B369BD8F}"/>
+              </a:ext>
+            </a:extLst>
+          </p:cNvPr>
+          <p:cNvSpPr/>
+          <p:nvPr/>
+        </p:nvSpPr>
+        <p:spPr>
+          <a:xfrm>
+            <a:off x="7667233" y="4581940"/>
+            <a:ext cx="1475339" cy="486347"/>
+          </a:xfrm>
+          <a:prstGeom prst="leftRightArrow">
+            <a:avLst/>
+          </a:prstGeom>
+          <a:solidFill>
+            <a:schemeClr val="accent1">
+              <a:lumMod val="40000"/>
+              <a:lumOff val="60000"/>
+            </a:schemeClr>
+          </a:solidFill>
+          <a:ln w="25400">
+            <a:solidFill>
+              <a:schemeClr val="accent2"/>
+            </a:solidFill>
+          </a:ln>
+        </p:spPr>
+        <p:style>
+          <a:lnRef idx="2">
+            <a:schemeClr val="accent1">
+              <a:shade val="15000"/>
+            </a:schemeClr>
+          </a:lnRef>
+          <a:fillRef idx="1">
+            <a:schemeClr val="accent1"/>
+          </a:fillRef>
+          <a:effectRef idx="0">
+            <a:schemeClr val="accent1"/>
+          </a:effectRef>
+          <a:fontRef idx="minor">
+            <a:schemeClr val="lt1"/>
+          </a:fontRef>
+        </p:style>
+        <p:txBody>
+          <a:bodyPr rtlCol="0" anchor="ctr"/>
+          <a:lstStyle/>
+          <a:p>
+            <a:pPr algn="ctr"/>
+            <a:endParaRPr lang="en-CH"/>
+          </a:p>
+        </p:txBody>
+      </p:sp>
+      <p:pic>
+        <p:nvPicPr>
+          <p:cNvPr id="39" name="Picture 38">
+            <a:extLst>
+              <a:ext uri="{FF2B5EF4-FFF2-40B4-BE49-F238E27FC236}">
+                <a16:creationId xmlns:a16="http://schemas.microsoft.com/office/drawing/2014/main" id="{25ADE6CE-0630-4E75-CCC9-4CDE993AF057}"/>
+              </a:ext>
+            </a:extLst>
+          </p:cNvPr>
+          <p:cNvPicPr>
+            <a:picLocks noChangeAspect="1"/>
+          </p:cNvPicPr>
+          <p:nvPr/>
+        </p:nvPicPr>
+        <p:blipFill>
+          <a:blip r:embed="rId4"/>
+          <a:stretch>
+            <a:fillRect/>
+          </a:stretch>
+        </p:blipFill>
+        <p:spPr>
+          <a:xfrm>
+            <a:off x="8048989" y="3580707"/>
+            <a:ext cx="698570" cy="154491"/>
+          </a:xfrm>
+          <a:prstGeom prst="rect">
+            <a:avLst/>
+          </a:prstGeom>
+        </p:spPr>
+      </p:pic>
+      <p:pic>
+        <p:nvPicPr>
+          <p:cNvPr id="40" name="Picture 39">
+            <a:extLst>
+              <a:ext uri="{FF2B5EF4-FFF2-40B4-BE49-F238E27FC236}">
+                <a16:creationId xmlns:a16="http://schemas.microsoft.com/office/drawing/2014/main" id="{14E31B9D-8C4F-7BCB-0D79-CB1DA10F97B0}"/>
+              </a:ext>
+            </a:extLst>
+          </p:cNvPr>
+          <p:cNvPicPr>
+            <a:picLocks noChangeAspect="1"/>
+          </p:cNvPicPr>
+          <p:nvPr/>
+        </p:nvPicPr>
+        <p:blipFill>
+          <a:blip r:embed="rId5"/>
+          <a:stretch>
+            <a:fillRect/>
+          </a:stretch>
+        </p:blipFill>
+        <p:spPr>
+          <a:xfrm>
+            <a:off x="8157013" y="4583851"/>
+            <a:ext cx="482523" cy="482523"/>
+          </a:xfrm>
+          <a:prstGeom prst="rect">
+            <a:avLst/>
+          </a:prstGeom>
+        </p:spPr>
+      </p:pic>
+      <p:pic>
+        <p:nvPicPr>
+          <p:cNvPr id="41" name="Picture 40">
+            <a:extLst>
+              <a:ext uri="{FF2B5EF4-FFF2-40B4-BE49-F238E27FC236}">
+                <a16:creationId xmlns:a16="http://schemas.microsoft.com/office/drawing/2014/main" id="{7C3E8B83-32AC-1BB3-7A26-02A17B374926}"/>
+              </a:ext>
+            </a:extLst>
+          </p:cNvPr>
+          <p:cNvPicPr>
+            <a:picLocks noChangeAspect="1"/>
+          </p:cNvPicPr>
+          <p:nvPr/>
+        </p:nvPicPr>
+        <p:blipFill>
+          <a:blip r:embed="rId6"/>
+          <a:stretch>
+            <a:fillRect/>
+          </a:stretch>
+        </p:blipFill>
+        <p:spPr>
+          <a:xfrm>
+            <a:off x="8003222" y="4137113"/>
+            <a:ext cx="738758" cy="201847"/>
+          </a:xfrm>
+          <a:prstGeom prst="rect">
+            <a:avLst/>
+          </a:prstGeom>
+        </p:spPr>
+      </p:pic>
+    </p:spTree>
+    <p:extLst>
+      <p:ext uri="{BB962C8B-B14F-4D97-AF65-F5344CB8AC3E}">
+        <p14:creationId xmlns:p14="http://schemas.microsoft.com/office/powerpoint/2010/main" val="1518980462"/>
+      </p:ext>
+    </p:extLst>
+  </p:cSld>
+  <p:clrMapOvr>
+    <a:masterClrMapping/>
+  </p:clrMapOvr>
+</p:sld>
+</file>
+
 <file path=ppt/slides/slide2.xml><?xml version="1.0" encoding="utf-8"?>
 <p:sld xmlns:a="http://schemas.openxmlformats.org/drawingml/2006/main" xmlns:r="http://schemas.openxmlformats.org/officeDocument/2006/relationships" xmlns:p="http://schemas.openxmlformats.org/presentationml/2006/main">
   <p:cSld>
@@ -8030,6 +9486,1265 @@
         <p:cNvPr id="1" name="">
           <a:extLst>
             <a:ext uri="{FF2B5EF4-FFF2-40B4-BE49-F238E27FC236}">
+              <a16:creationId xmlns:a16="http://schemas.microsoft.com/office/drawing/2014/main" id="{F87D8092-6BD1-A5C6-C86B-E15666EBE55F}"/>
+            </a:ext>
+          </a:extLst>
+        </p:cNvPr>
+        <p:cNvGrpSpPr/>
+        <p:nvPr/>
+      </p:nvGrpSpPr>
+      <p:grpSpPr>
+        <a:xfrm>
+          <a:off x="0" y="0"/>
+          <a:ext cx="0" cy="0"/>
+          <a:chOff x="0" y="0"/>
+          <a:chExt cx="0" cy="0"/>
+        </a:xfrm>
+      </p:grpSpPr>
+      <p:sp>
+        <p:nvSpPr>
+          <p:cNvPr id="5" name="Rectangle 4">
+            <a:extLst>
+              <a:ext uri="{FF2B5EF4-FFF2-40B4-BE49-F238E27FC236}">
+                <a16:creationId xmlns:a16="http://schemas.microsoft.com/office/drawing/2014/main" id="{BD7F14C5-FDA1-F239-ABAA-BBD2F9A22723}"/>
+              </a:ext>
+            </a:extLst>
+          </p:cNvPr>
+          <p:cNvSpPr/>
+          <p:nvPr/>
+        </p:nvSpPr>
+        <p:spPr>
+          <a:xfrm>
+            <a:off x="3171019" y="1663549"/>
+            <a:ext cx="2220322" cy="2392084"/>
+          </a:xfrm>
+          <a:prstGeom prst="rect">
+            <a:avLst/>
+          </a:prstGeom>
+          <a:solidFill>
+            <a:schemeClr val="tx2"/>
+          </a:solidFill>
+          <a:ln w="50800">
+            <a:solidFill>
+              <a:schemeClr val="accent1"/>
+            </a:solidFill>
+          </a:ln>
+        </p:spPr>
+        <p:style>
+          <a:lnRef idx="2">
+            <a:schemeClr val="accent1">
+              <a:shade val="15000"/>
+            </a:schemeClr>
+          </a:lnRef>
+          <a:fillRef idx="1">
+            <a:schemeClr val="accent1"/>
+          </a:fillRef>
+          <a:effectRef idx="0">
+            <a:schemeClr val="accent1"/>
+          </a:effectRef>
+          <a:fontRef idx="minor">
+            <a:schemeClr val="lt1"/>
+          </a:fontRef>
+        </p:style>
+        <p:txBody>
+          <a:bodyPr rtlCol="0" anchor="ctr"/>
+          <a:lstStyle/>
+          <a:p>
+            <a:pPr algn="ctr"/>
+            <a:r>
+              <a:rPr lang="en-CH" dirty="0">
+                <a:latin typeface="Sora" pitchFamily="2" charset="0"/>
+                <a:cs typeface="Sora" pitchFamily="2" charset="0"/>
+              </a:rPr>
+              <a:t>GenAI</a:t>
+            </a:r>
+          </a:p>
+        </p:txBody>
+      </p:sp>
+      <p:sp>
+        <p:nvSpPr>
+          <p:cNvPr id="6" name="Rectangle 5">
+            <a:extLst>
+              <a:ext uri="{FF2B5EF4-FFF2-40B4-BE49-F238E27FC236}">
+                <a16:creationId xmlns:a16="http://schemas.microsoft.com/office/drawing/2014/main" id="{A0A2C2C1-C451-C4FC-A80A-8CFCAF1C9F78}"/>
+              </a:ext>
+            </a:extLst>
+          </p:cNvPr>
+          <p:cNvSpPr/>
+          <p:nvPr/>
+        </p:nvSpPr>
+        <p:spPr>
+          <a:xfrm>
+            <a:off x="8753138" y="1663549"/>
+            <a:ext cx="1398488" cy="3530899"/>
+          </a:xfrm>
+          <a:prstGeom prst="rect">
+            <a:avLst/>
+          </a:prstGeom>
+          <a:solidFill>
+            <a:schemeClr val="accent1">
+              <a:lumMod val="40000"/>
+              <a:lumOff val="60000"/>
+            </a:schemeClr>
+          </a:solidFill>
+          <a:ln w="50800">
+            <a:solidFill>
+              <a:schemeClr val="tx2"/>
+            </a:solidFill>
+          </a:ln>
+        </p:spPr>
+        <p:style>
+          <a:lnRef idx="2">
+            <a:schemeClr val="accent1">
+              <a:shade val="15000"/>
+            </a:schemeClr>
+          </a:lnRef>
+          <a:fillRef idx="1">
+            <a:schemeClr val="accent1"/>
+          </a:fillRef>
+          <a:effectRef idx="0">
+            <a:schemeClr val="accent1"/>
+          </a:effectRef>
+          <a:fontRef idx="minor">
+            <a:schemeClr val="lt1"/>
+          </a:fontRef>
+        </p:style>
+        <p:txBody>
+          <a:bodyPr rtlCol="0" anchor="ctr"/>
+          <a:lstStyle/>
+          <a:p>
+            <a:pPr algn="ctr"/>
+            <a:r>
+              <a:rPr lang="en-CH" dirty="0">
+                <a:solidFill>
+                  <a:schemeClr val="accent2"/>
+                </a:solidFill>
+                <a:latin typeface="Sora" pitchFamily="2" charset="0"/>
+                <a:cs typeface="Sora" pitchFamily="2" charset="0"/>
+              </a:rPr>
+              <a:t>      APIs</a:t>
+            </a:r>
+          </a:p>
+          <a:p>
+            <a:pPr algn="ctr"/>
+            <a:r>
+              <a:rPr lang="en-CH" dirty="0">
+                <a:solidFill>
+                  <a:schemeClr val="accent2"/>
+                </a:solidFill>
+                <a:latin typeface="Sora" pitchFamily="2" charset="0"/>
+                <a:cs typeface="Sora" pitchFamily="2" charset="0"/>
+              </a:rPr>
+              <a:t>     &amp;</a:t>
+            </a:r>
+            <a:br>
+              <a:rPr lang="en-CH" dirty="0">
+                <a:solidFill>
+                  <a:schemeClr val="accent2"/>
+                </a:solidFill>
+                <a:latin typeface="Sora" pitchFamily="2" charset="0"/>
+                <a:cs typeface="Sora" pitchFamily="2" charset="0"/>
+              </a:rPr>
+            </a:br>
+            <a:r>
+              <a:rPr lang="en-CH" dirty="0">
+                <a:solidFill>
+                  <a:schemeClr val="accent2"/>
+                </a:solidFill>
+                <a:latin typeface="Sora" pitchFamily="2" charset="0"/>
+                <a:cs typeface="Sora" pitchFamily="2" charset="0"/>
+              </a:rPr>
+              <a:t>     Data</a:t>
+            </a:r>
+          </a:p>
+        </p:txBody>
+      </p:sp>
+      <p:sp>
+        <p:nvSpPr>
+          <p:cNvPr id="7" name="Freeform 6">
+            <a:extLst>
+              <a:ext uri="{FF2B5EF4-FFF2-40B4-BE49-F238E27FC236}">
+                <a16:creationId xmlns:a16="http://schemas.microsoft.com/office/drawing/2014/main" id="{8B4F692F-848B-403D-9641-86D44B1FCA6A}"/>
+              </a:ext>
+            </a:extLst>
+          </p:cNvPr>
+          <p:cNvSpPr/>
+          <p:nvPr/>
+        </p:nvSpPr>
+        <p:spPr>
+          <a:xfrm>
+            <a:off x="3169920" y="1663549"/>
+            <a:ext cx="4908176" cy="3530900"/>
+          </a:xfrm>
+          <a:custGeom>
+            <a:avLst/>
+            <a:gdLst>
+              <a:gd name="csX0" fmla="*/ 0 w 4908176"/>
+              <a:gd name="csY0" fmla="*/ 2218764 h 2218764"/>
+              <a:gd name="csX1" fmla="*/ 4908176 w 4908176"/>
+              <a:gd name="csY1" fmla="*/ 2218764 h 2218764"/>
+              <a:gd name="csX2" fmla="*/ 4908176 w 4908176"/>
+              <a:gd name="csY2" fmla="*/ 0 h 2218764"/>
+              <a:gd name="csX3" fmla="*/ 3348726 w 4908176"/>
+              <a:gd name="csY3" fmla="*/ 0 h 2218764"/>
+              <a:gd name="csX4" fmla="*/ 3348726 w 4908176"/>
+              <a:gd name="csY4" fmla="*/ 889637 h 2218764"/>
+              <a:gd name="csX5" fmla="*/ 3347586 w 4908176"/>
+              <a:gd name="csY5" fmla="*/ 1560572 h 2218764"/>
+              <a:gd name="csX6" fmla="*/ 2312726 w 4908176"/>
+              <a:gd name="csY6" fmla="*/ 1564342 h 2218764"/>
+              <a:gd name="csX7" fmla="*/ 0 w 4908176"/>
+              <a:gd name="csY7" fmla="*/ 1564342 h 2218764"/>
+              <a:gd name="csX8" fmla="*/ 0 w 4908176"/>
+              <a:gd name="csY8" fmla="*/ 2218764 h 2218764"/>
+            </a:gdLst>
+            <a:ahLst/>
+            <a:cxnLst>
+              <a:cxn ang="0">
+                <a:pos x="csX0" y="csY0"/>
+              </a:cxn>
+              <a:cxn ang="0">
+                <a:pos x="csX1" y="csY1"/>
+              </a:cxn>
+              <a:cxn ang="0">
+                <a:pos x="csX2" y="csY2"/>
+              </a:cxn>
+              <a:cxn ang="0">
+                <a:pos x="csX3" y="csY3"/>
+              </a:cxn>
+              <a:cxn ang="0">
+                <a:pos x="csX4" y="csY4"/>
+              </a:cxn>
+              <a:cxn ang="0">
+                <a:pos x="csX5" y="csY5"/>
+              </a:cxn>
+              <a:cxn ang="0">
+                <a:pos x="csX6" y="csY6"/>
+              </a:cxn>
+              <a:cxn ang="0">
+                <a:pos x="csX7" y="csY7"/>
+              </a:cxn>
+              <a:cxn ang="0">
+                <a:pos x="csX8" y="csY8"/>
+              </a:cxn>
+            </a:cxnLst>
+            <a:rect l="l" t="t" r="r" b="b"/>
+            <a:pathLst>
+              <a:path w="4908176" h="3530900">
+                <a:moveTo>
+                  <a:pt x="0" y="3530900"/>
+                </a:moveTo>
+                <a:lnTo>
+                  <a:pt x="4908176" y="3530900"/>
+                </a:lnTo>
+                <a:lnTo>
+                  <a:pt x="4908176" y="0"/>
+                </a:lnTo>
+                <a:lnTo>
+                  <a:pt x="3348726" y="0"/>
+                </a:lnTo>
+                <a:lnTo>
+                  <a:pt x="3348726" y="2487839"/>
+                </a:lnTo>
+                <a:lnTo>
+                  <a:pt x="0" y="2487839"/>
+                </a:lnTo>
+                <a:close/>
+              </a:path>
+            </a:pathLst>
+          </a:custGeom>
+          <a:solidFill>
+            <a:schemeClr val="accent1"/>
+          </a:solidFill>
+          <a:ln w="50800">
+            <a:solidFill>
+              <a:schemeClr val="tx2"/>
+            </a:solidFill>
+          </a:ln>
+        </p:spPr>
+        <p:style>
+          <a:lnRef idx="2">
+            <a:schemeClr val="accent1">
+              <a:shade val="15000"/>
+            </a:schemeClr>
+          </a:lnRef>
+          <a:fillRef idx="1">
+            <a:schemeClr val="accent1"/>
+          </a:fillRef>
+          <a:effectRef idx="0">
+            <a:schemeClr val="accent1"/>
+          </a:effectRef>
+          <a:fontRef idx="minor">
+            <a:schemeClr val="lt1"/>
+          </a:fontRef>
+        </p:style>
+        <p:txBody>
+          <a:bodyPr rtlCol="0" anchor="ctr"/>
+          <a:lstStyle/>
+          <a:p>
+            <a:pPr algn="ctr"/>
+            <a:br>
+              <a:rPr lang="en-CH" dirty="0"/>
+            </a:br>
+            <a:br>
+              <a:rPr lang="en-CH" dirty="0"/>
+            </a:br>
+            <a:br>
+              <a:rPr lang="en-CH" dirty="0"/>
+            </a:br>
+            <a:br>
+              <a:rPr lang="en-CH" dirty="0"/>
+            </a:br>
+            <a:br>
+              <a:rPr lang="en-CH" dirty="0"/>
+            </a:br>
+            <a:endParaRPr lang="en-CH" dirty="0"/>
+          </a:p>
+          <a:p>
+            <a:pPr algn="ctr"/>
+            <a:endParaRPr lang="en-CH" dirty="0">
+              <a:latin typeface="Sora" pitchFamily="2" charset="0"/>
+              <a:cs typeface="Sora" pitchFamily="2" charset="0"/>
+            </a:endParaRPr>
+          </a:p>
+          <a:p>
+            <a:pPr algn="ctr"/>
+            <a:endParaRPr lang="en-CH" dirty="0">
+              <a:latin typeface="Sora" pitchFamily="2" charset="0"/>
+              <a:cs typeface="Sora" pitchFamily="2" charset="0"/>
+            </a:endParaRPr>
+          </a:p>
+          <a:p>
+            <a:pPr algn="ctr"/>
+            <a:endParaRPr lang="en-CH" dirty="0">
+              <a:latin typeface="Sora" pitchFamily="2" charset="0"/>
+              <a:cs typeface="Sora" pitchFamily="2" charset="0"/>
+            </a:endParaRPr>
+          </a:p>
+          <a:p>
+            <a:pPr algn="ctr"/>
+            <a:r>
+              <a:rPr lang="en-CH" dirty="0">
+                <a:latin typeface="Sora" pitchFamily="2" charset="0"/>
+                <a:cs typeface="Sora" pitchFamily="2" charset="0"/>
+              </a:rPr>
+              <a:t>Deterministic</a:t>
+            </a:r>
+          </a:p>
+        </p:txBody>
+      </p:sp>
+      <p:cxnSp>
+        <p:nvCxnSpPr>
+          <p:cNvPr id="9" name="Straight Connector 8">
+            <a:extLst>
+              <a:ext uri="{FF2B5EF4-FFF2-40B4-BE49-F238E27FC236}">
+                <a16:creationId xmlns:a16="http://schemas.microsoft.com/office/drawing/2014/main" id="{2C0B9339-800E-B2FB-7267-B2900A51C869}"/>
+              </a:ext>
+            </a:extLst>
+          </p:cNvPr>
+          <p:cNvCxnSpPr>
+            <a:cxnSpLocks/>
+          </p:cNvCxnSpPr>
+          <p:nvPr/>
+        </p:nvCxnSpPr>
+        <p:spPr>
+          <a:xfrm>
+            <a:off x="8419652" y="1245196"/>
+            <a:ext cx="0" cy="4682268"/>
+          </a:xfrm>
+          <a:prstGeom prst="line">
+            <a:avLst/>
+          </a:prstGeom>
+          <a:ln w="254000">
+            <a:solidFill>
+              <a:schemeClr val="tx2"/>
+            </a:solidFill>
+          </a:ln>
+        </p:spPr>
+        <p:style>
+          <a:lnRef idx="1">
+            <a:schemeClr val="accent1"/>
+          </a:lnRef>
+          <a:fillRef idx="0">
+            <a:schemeClr val="accent1"/>
+          </a:fillRef>
+          <a:effectRef idx="0">
+            <a:schemeClr val="accent1"/>
+          </a:effectRef>
+          <a:fontRef idx="minor">
+            <a:schemeClr val="tx1"/>
+          </a:fontRef>
+        </p:style>
+      </p:cxnSp>
+      <p:sp>
+        <p:nvSpPr>
+          <p:cNvPr id="10" name="TextBox 9">
+            <a:extLst>
+              <a:ext uri="{FF2B5EF4-FFF2-40B4-BE49-F238E27FC236}">
+                <a16:creationId xmlns:a16="http://schemas.microsoft.com/office/drawing/2014/main" id="{A2B4ECF9-9C28-1604-75E4-F76D35A6FBE8}"/>
+              </a:ext>
+            </a:extLst>
+          </p:cNvPr>
+          <p:cNvSpPr txBox="1"/>
+          <p:nvPr/>
+        </p:nvSpPr>
+        <p:spPr>
+          <a:xfrm>
+            <a:off x="5027530" y="5428134"/>
+            <a:ext cx="1192955" cy="369332"/>
+          </a:xfrm>
+          <a:prstGeom prst="rect">
+            <a:avLst/>
+          </a:prstGeom>
+          <a:noFill/>
+        </p:spPr>
+        <p:txBody>
+          <a:bodyPr wrap="none" rtlCol="0">
+            <a:spAutoFit/>
+          </a:bodyPr>
+          <a:lstStyle/>
+          <a:p>
+            <a:r>
+              <a:rPr lang="en-CH" dirty="0">
+                <a:latin typeface="Sora" pitchFamily="2" charset="0"/>
+                <a:cs typeface="Sora" pitchFamily="2" charset="0"/>
+              </a:rPr>
+              <a:t>Solution</a:t>
+            </a:r>
+          </a:p>
+        </p:txBody>
+      </p:sp>
+      <p:sp>
+        <p:nvSpPr>
+          <p:cNvPr id="11" name="TextBox 10">
+            <a:extLst>
+              <a:ext uri="{FF2B5EF4-FFF2-40B4-BE49-F238E27FC236}">
+                <a16:creationId xmlns:a16="http://schemas.microsoft.com/office/drawing/2014/main" id="{D3336511-2269-C4A6-8FE6-07611CE67ED7}"/>
+              </a:ext>
+            </a:extLst>
+          </p:cNvPr>
+          <p:cNvSpPr txBox="1"/>
+          <p:nvPr/>
+        </p:nvSpPr>
+        <p:spPr>
+          <a:xfrm>
+            <a:off x="8709483" y="5428134"/>
+            <a:ext cx="1540806" cy="369332"/>
+          </a:xfrm>
+          <a:prstGeom prst="rect">
+            <a:avLst/>
+          </a:prstGeom>
+          <a:noFill/>
+        </p:spPr>
+        <p:txBody>
+          <a:bodyPr wrap="none" rtlCol="0">
+            <a:spAutoFit/>
+          </a:bodyPr>
+          <a:lstStyle/>
+          <a:p>
+            <a:r>
+              <a:rPr lang="en-CH" dirty="0">
+                <a:latin typeface="Sora" pitchFamily="2" charset="0"/>
+                <a:cs typeface="Sora" pitchFamily="2" charset="0"/>
+              </a:rPr>
+              <a:t>Foundation</a:t>
+            </a:r>
+          </a:p>
+        </p:txBody>
+      </p:sp>
+      <p:sp>
+        <p:nvSpPr>
+          <p:cNvPr id="26" name="Rectangle 25">
+            <a:extLst>
+              <a:ext uri="{FF2B5EF4-FFF2-40B4-BE49-F238E27FC236}">
+                <a16:creationId xmlns:a16="http://schemas.microsoft.com/office/drawing/2014/main" id="{A403EC7F-AAC5-8944-9C7D-B0F4EA3BDF6F}"/>
+              </a:ext>
+            </a:extLst>
+          </p:cNvPr>
+          <p:cNvSpPr/>
+          <p:nvPr/>
+        </p:nvSpPr>
+        <p:spPr>
+          <a:xfrm>
+            <a:off x="5484597" y="1663549"/>
+            <a:ext cx="938294" cy="521821"/>
+          </a:xfrm>
+          <a:prstGeom prst="rect">
+            <a:avLst/>
+          </a:prstGeom>
+          <a:solidFill>
+            <a:srgbClr val="637E3C"/>
+          </a:solidFill>
+          <a:ln w="50800">
+            <a:solidFill>
+              <a:schemeClr val="accent1"/>
+            </a:solidFill>
+          </a:ln>
+        </p:spPr>
+        <p:style>
+          <a:lnRef idx="2">
+            <a:schemeClr val="accent1">
+              <a:shade val="15000"/>
+            </a:schemeClr>
+          </a:lnRef>
+          <a:fillRef idx="1">
+            <a:schemeClr val="accent1"/>
+          </a:fillRef>
+          <a:effectRef idx="0">
+            <a:schemeClr val="accent1"/>
+          </a:effectRef>
+          <a:fontRef idx="minor">
+            <a:schemeClr val="lt1"/>
+          </a:fontRef>
+        </p:style>
+        <p:txBody>
+          <a:bodyPr rtlCol="0" anchor="ctr"/>
+          <a:lstStyle/>
+          <a:p>
+            <a:pPr algn="ctr"/>
+            <a:r>
+              <a:rPr lang="en-CH" dirty="0">
+                <a:latin typeface="Sora" pitchFamily="2" charset="0"/>
+                <a:cs typeface="Sora" pitchFamily="2" charset="0"/>
+              </a:rPr>
+              <a:t>GenAI</a:t>
+            </a:r>
+          </a:p>
+        </p:txBody>
+      </p:sp>
+      <p:sp>
+        <p:nvSpPr>
+          <p:cNvPr id="28" name="Rectangle 27">
+            <a:extLst>
+              <a:ext uri="{FF2B5EF4-FFF2-40B4-BE49-F238E27FC236}">
+                <a16:creationId xmlns:a16="http://schemas.microsoft.com/office/drawing/2014/main" id="{4E5B0074-0C66-1D1B-93E0-BD33B0429D09}"/>
+              </a:ext>
+            </a:extLst>
+          </p:cNvPr>
+          <p:cNvSpPr/>
+          <p:nvPr/>
+        </p:nvSpPr>
+        <p:spPr>
+          <a:xfrm>
+            <a:off x="5484597" y="2286970"/>
+            <a:ext cx="938294" cy="521821"/>
+          </a:xfrm>
+          <a:prstGeom prst="rect">
+            <a:avLst/>
+          </a:prstGeom>
+          <a:solidFill>
+            <a:srgbClr val="637E3C"/>
+          </a:solidFill>
+          <a:ln w="50800">
+            <a:solidFill>
+              <a:schemeClr val="accent1"/>
+            </a:solidFill>
+          </a:ln>
+        </p:spPr>
+        <p:style>
+          <a:lnRef idx="2">
+            <a:schemeClr val="accent1">
+              <a:shade val="15000"/>
+            </a:schemeClr>
+          </a:lnRef>
+          <a:fillRef idx="1">
+            <a:schemeClr val="accent1"/>
+          </a:fillRef>
+          <a:effectRef idx="0">
+            <a:schemeClr val="accent1"/>
+          </a:effectRef>
+          <a:fontRef idx="minor">
+            <a:schemeClr val="lt1"/>
+          </a:fontRef>
+        </p:style>
+        <p:txBody>
+          <a:bodyPr rtlCol="0" anchor="ctr"/>
+          <a:lstStyle/>
+          <a:p>
+            <a:pPr algn="ctr"/>
+            <a:r>
+              <a:rPr lang="en-CH" dirty="0">
+                <a:latin typeface="Sora" pitchFamily="2" charset="0"/>
+                <a:cs typeface="Sora" pitchFamily="2" charset="0"/>
+              </a:rPr>
+              <a:t>GenAI</a:t>
+            </a:r>
+          </a:p>
+        </p:txBody>
+      </p:sp>
+      <p:sp>
+        <p:nvSpPr>
+          <p:cNvPr id="2" name="Right Arrow 1">
+            <a:extLst>
+              <a:ext uri="{FF2B5EF4-FFF2-40B4-BE49-F238E27FC236}">
+                <a16:creationId xmlns:a16="http://schemas.microsoft.com/office/drawing/2014/main" id="{FE47B49E-BBE9-F93C-628C-C1AB7CF7C8F9}"/>
+              </a:ext>
+            </a:extLst>
+          </p:cNvPr>
+          <p:cNvSpPr/>
+          <p:nvPr/>
+        </p:nvSpPr>
+        <p:spPr>
+          <a:xfrm>
+            <a:off x="1369100" y="2695096"/>
+            <a:ext cx="1394906" cy="563878"/>
+          </a:xfrm>
+          <a:prstGeom prst="rightArrow">
+            <a:avLst/>
+          </a:prstGeom>
+          <a:solidFill>
+            <a:schemeClr val="accent1">
+              <a:lumMod val="40000"/>
+              <a:lumOff val="60000"/>
+            </a:schemeClr>
+          </a:solidFill>
+          <a:ln w="25400">
+            <a:solidFill>
+              <a:schemeClr val="tx2"/>
+            </a:solidFill>
+          </a:ln>
+        </p:spPr>
+        <p:style>
+          <a:lnRef idx="2">
+            <a:schemeClr val="accent1">
+              <a:shade val="15000"/>
+            </a:schemeClr>
+          </a:lnRef>
+          <a:fillRef idx="1">
+            <a:schemeClr val="accent1"/>
+          </a:fillRef>
+          <a:effectRef idx="0">
+            <a:schemeClr val="accent1"/>
+          </a:effectRef>
+          <a:fontRef idx="minor">
+            <a:schemeClr val="lt1"/>
+          </a:fontRef>
+        </p:style>
+        <p:txBody>
+          <a:bodyPr rtlCol="0" anchor="ctr"/>
+          <a:lstStyle/>
+          <a:p>
+            <a:pPr algn="ctr"/>
+            <a:r>
+              <a:rPr lang="en-CH" sz="1400" dirty="0">
+                <a:solidFill>
+                  <a:schemeClr val="accent2"/>
+                </a:solidFill>
+                <a:latin typeface="Sora" pitchFamily="2" charset="0"/>
+                <a:cs typeface="Sora" pitchFamily="2" charset="0"/>
+              </a:rPr>
+              <a:t>Input</a:t>
+            </a:r>
+            <a:endParaRPr lang="en-CH" dirty="0">
+              <a:solidFill>
+                <a:schemeClr val="accent2"/>
+              </a:solidFill>
+              <a:latin typeface="Sora" pitchFamily="2" charset="0"/>
+              <a:cs typeface="Sora" pitchFamily="2" charset="0"/>
+            </a:endParaRPr>
+          </a:p>
+        </p:txBody>
+      </p:sp>
+      <p:sp>
+        <p:nvSpPr>
+          <p:cNvPr id="3" name="TextBox 2">
+            <a:extLst>
+              <a:ext uri="{FF2B5EF4-FFF2-40B4-BE49-F238E27FC236}">
+                <a16:creationId xmlns:a16="http://schemas.microsoft.com/office/drawing/2014/main" id="{F7CDEEB3-7B5A-3BC0-08A3-F2674C8701AA}"/>
+              </a:ext>
+            </a:extLst>
+          </p:cNvPr>
+          <p:cNvSpPr txBox="1"/>
+          <p:nvPr/>
+        </p:nvSpPr>
+        <p:spPr>
+          <a:xfrm>
+            <a:off x="1303140" y="3267269"/>
+            <a:ext cx="1534394" cy="369332"/>
+          </a:xfrm>
+          <a:prstGeom prst="rect">
+            <a:avLst/>
+          </a:prstGeom>
+          <a:noFill/>
+        </p:spPr>
+        <p:txBody>
+          <a:bodyPr wrap="none" rtlCol="0">
+            <a:spAutoFit/>
+          </a:bodyPr>
+          <a:lstStyle/>
+          <a:p>
+            <a:r>
+              <a:rPr lang="en-CH" dirty="0">
+                <a:latin typeface="Sora" pitchFamily="2" charset="0"/>
+                <a:cs typeface="Sora" pitchFamily="2" charset="0"/>
+              </a:rPr>
+              <a:t>Consumers</a:t>
+            </a:r>
+          </a:p>
+        </p:txBody>
+      </p:sp>
+      <p:sp>
+        <p:nvSpPr>
+          <p:cNvPr id="8" name="Right Arrow 7">
+            <a:extLst>
+              <a:ext uri="{FF2B5EF4-FFF2-40B4-BE49-F238E27FC236}">
+                <a16:creationId xmlns:a16="http://schemas.microsoft.com/office/drawing/2014/main" id="{ABC3D52B-9628-64F0-BC5D-608C5BFB4FF1}"/>
+              </a:ext>
+            </a:extLst>
+          </p:cNvPr>
+          <p:cNvSpPr/>
+          <p:nvPr/>
+        </p:nvSpPr>
+        <p:spPr>
+          <a:xfrm>
+            <a:off x="1343113" y="3645649"/>
+            <a:ext cx="1394906" cy="563878"/>
+          </a:xfrm>
+          <a:prstGeom prst="leftArrow">
+            <a:avLst/>
+          </a:prstGeom>
+          <a:solidFill>
+            <a:schemeClr val="accent1">
+              <a:lumMod val="40000"/>
+              <a:lumOff val="60000"/>
+            </a:schemeClr>
+          </a:solidFill>
+          <a:ln w="25400">
+            <a:solidFill>
+              <a:schemeClr val="tx2"/>
+            </a:solidFill>
+          </a:ln>
+        </p:spPr>
+        <p:style>
+          <a:lnRef idx="2">
+            <a:schemeClr val="accent1">
+              <a:shade val="15000"/>
+            </a:schemeClr>
+          </a:lnRef>
+          <a:fillRef idx="1">
+            <a:schemeClr val="accent1"/>
+          </a:fillRef>
+          <a:effectRef idx="0">
+            <a:schemeClr val="accent1"/>
+          </a:effectRef>
+          <a:fontRef idx="minor">
+            <a:schemeClr val="lt1"/>
+          </a:fontRef>
+        </p:style>
+        <p:txBody>
+          <a:bodyPr rtlCol="0" anchor="ctr"/>
+          <a:lstStyle/>
+          <a:p>
+            <a:pPr algn="ctr"/>
+            <a:r>
+              <a:rPr lang="en-CH" sz="1400" dirty="0">
+                <a:solidFill>
+                  <a:schemeClr val="accent2"/>
+                </a:solidFill>
+                <a:latin typeface="Sora" pitchFamily="2" charset="0"/>
+                <a:cs typeface="Sora" pitchFamily="2" charset="0"/>
+              </a:rPr>
+              <a:t>Output</a:t>
+            </a:r>
+            <a:endParaRPr lang="en-CH" dirty="0">
+              <a:solidFill>
+                <a:schemeClr val="accent2"/>
+              </a:solidFill>
+              <a:latin typeface="Sora" pitchFamily="2" charset="0"/>
+              <a:cs typeface="Sora" pitchFamily="2" charset="0"/>
+            </a:endParaRPr>
+          </a:p>
+        </p:txBody>
+      </p:sp>
+      <p:sp>
+        <p:nvSpPr>
+          <p:cNvPr id="4" name="Left-right Arrow 3">
+            <a:extLst>
+              <a:ext uri="{FF2B5EF4-FFF2-40B4-BE49-F238E27FC236}">
+                <a16:creationId xmlns:a16="http://schemas.microsoft.com/office/drawing/2014/main" id="{7C05D856-D801-3FBD-15C0-412927062042}"/>
+              </a:ext>
+            </a:extLst>
+          </p:cNvPr>
+          <p:cNvSpPr/>
+          <p:nvPr/>
+        </p:nvSpPr>
+        <p:spPr>
+          <a:xfrm>
+            <a:off x="7667233" y="2773200"/>
+            <a:ext cx="1475338" cy="572173"/>
+          </a:xfrm>
+          <a:prstGeom prst="leftRightArrow">
+            <a:avLst/>
+          </a:prstGeom>
+          <a:solidFill>
+            <a:schemeClr val="accent1">
+              <a:lumMod val="40000"/>
+              <a:lumOff val="60000"/>
+            </a:schemeClr>
+          </a:solidFill>
+          <a:ln w="25400">
+            <a:solidFill>
+              <a:schemeClr val="accent2"/>
+            </a:solidFill>
+          </a:ln>
+        </p:spPr>
+        <p:style>
+          <a:lnRef idx="2">
+            <a:schemeClr val="accent1">
+              <a:shade val="15000"/>
+            </a:schemeClr>
+          </a:lnRef>
+          <a:fillRef idx="1">
+            <a:schemeClr val="accent1"/>
+          </a:fillRef>
+          <a:effectRef idx="0">
+            <a:schemeClr val="accent1"/>
+          </a:effectRef>
+          <a:fontRef idx="minor">
+            <a:schemeClr val="lt1"/>
+          </a:fontRef>
+        </p:style>
+        <p:txBody>
+          <a:bodyPr rtlCol="0" anchor="ctr"/>
+          <a:lstStyle/>
+          <a:p>
+            <a:pPr algn="ctr"/>
+            <a:endParaRPr lang="en-CH"/>
+          </a:p>
+        </p:txBody>
+      </p:sp>
+      <p:sp>
+        <p:nvSpPr>
+          <p:cNvPr id="12" name="Left-right Arrow 11">
+            <a:extLst>
+              <a:ext uri="{FF2B5EF4-FFF2-40B4-BE49-F238E27FC236}">
+                <a16:creationId xmlns:a16="http://schemas.microsoft.com/office/drawing/2014/main" id="{3C12A45D-99DE-22D2-C7C0-CDEE484A8FF9}"/>
+              </a:ext>
+            </a:extLst>
+          </p:cNvPr>
+          <p:cNvSpPr/>
+          <p:nvPr/>
+        </p:nvSpPr>
+        <p:spPr>
+          <a:xfrm>
+            <a:off x="7672812" y="3603536"/>
+            <a:ext cx="1475339" cy="572173"/>
+          </a:xfrm>
+          <a:prstGeom prst="leftRightArrow">
+            <a:avLst/>
+          </a:prstGeom>
+          <a:solidFill>
+            <a:schemeClr val="accent1">
+              <a:lumMod val="40000"/>
+              <a:lumOff val="60000"/>
+            </a:schemeClr>
+          </a:solidFill>
+          <a:ln w="25400">
+            <a:solidFill>
+              <a:schemeClr val="accent2"/>
+            </a:solidFill>
+          </a:ln>
+        </p:spPr>
+        <p:style>
+          <a:lnRef idx="2">
+            <a:schemeClr val="accent1">
+              <a:shade val="15000"/>
+            </a:schemeClr>
+          </a:lnRef>
+          <a:fillRef idx="1">
+            <a:schemeClr val="accent1"/>
+          </a:fillRef>
+          <a:effectRef idx="0">
+            <a:schemeClr val="accent1"/>
+          </a:effectRef>
+          <a:fontRef idx="minor">
+            <a:schemeClr val="lt1"/>
+          </a:fontRef>
+        </p:style>
+        <p:txBody>
+          <a:bodyPr rtlCol="0" anchor="ctr"/>
+          <a:lstStyle/>
+          <a:p>
+            <a:pPr algn="ctr"/>
+            <a:endParaRPr lang="en-CH"/>
+          </a:p>
+        </p:txBody>
+      </p:sp>
+      <p:sp>
+        <p:nvSpPr>
+          <p:cNvPr id="15" name="Left-right Arrow 14">
+            <a:extLst>
+              <a:ext uri="{FF2B5EF4-FFF2-40B4-BE49-F238E27FC236}">
+                <a16:creationId xmlns:a16="http://schemas.microsoft.com/office/drawing/2014/main" id="{553B197B-0477-1B1C-250F-ABDF9A6DCFF3}"/>
+              </a:ext>
+            </a:extLst>
+          </p:cNvPr>
+          <p:cNvSpPr/>
+          <p:nvPr/>
+        </p:nvSpPr>
+        <p:spPr>
+          <a:xfrm>
+            <a:off x="7667233" y="1920454"/>
+            <a:ext cx="1475338" cy="572173"/>
+          </a:xfrm>
+          <a:prstGeom prst="leftRightArrow">
+            <a:avLst/>
+          </a:prstGeom>
+          <a:solidFill>
+            <a:schemeClr val="accent1">
+              <a:lumMod val="40000"/>
+              <a:lumOff val="60000"/>
+            </a:schemeClr>
+          </a:solidFill>
+          <a:ln w="25400">
+            <a:solidFill>
+              <a:schemeClr val="accent2"/>
+            </a:solidFill>
+          </a:ln>
+        </p:spPr>
+        <p:style>
+          <a:lnRef idx="2">
+            <a:schemeClr val="accent1">
+              <a:shade val="15000"/>
+            </a:schemeClr>
+          </a:lnRef>
+          <a:fillRef idx="1">
+            <a:schemeClr val="accent1"/>
+          </a:fillRef>
+          <a:effectRef idx="0">
+            <a:schemeClr val="accent1"/>
+          </a:effectRef>
+          <a:fontRef idx="minor">
+            <a:schemeClr val="lt1"/>
+          </a:fontRef>
+        </p:style>
+        <p:txBody>
+          <a:bodyPr rtlCol="0" anchor="ctr"/>
+          <a:lstStyle/>
+          <a:p>
+            <a:pPr algn="ctr"/>
+            <a:endParaRPr lang="en-CH"/>
+          </a:p>
+        </p:txBody>
+      </p:sp>
+      <p:pic>
+        <p:nvPicPr>
+          <p:cNvPr id="16" name="Picture 15">
+            <a:extLst>
+              <a:ext uri="{FF2B5EF4-FFF2-40B4-BE49-F238E27FC236}">
+                <a16:creationId xmlns:a16="http://schemas.microsoft.com/office/drawing/2014/main" id="{9BCEA0B4-7C12-239C-62DF-3862A800B1F0}"/>
+              </a:ext>
+            </a:extLst>
+          </p:cNvPr>
+          <p:cNvPicPr>
+            <a:picLocks noChangeAspect="1"/>
+          </p:cNvPicPr>
+          <p:nvPr/>
+        </p:nvPicPr>
+        <p:blipFill>
+          <a:blip r:embed="rId2"/>
+          <a:stretch>
+            <a:fillRect/>
+          </a:stretch>
+        </p:blipFill>
+        <p:spPr>
+          <a:xfrm>
+            <a:off x="7967197" y="1889748"/>
+            <a:ext cx="875405" cy="625289"/>
+          </a:xfrm>
+          <a:prstGeom prst="rect">
+            <a:avLst/>
+          </a:prstGeom>
+        </p:spPr>
+      </p:pic>
+      <p:sp>
+        <p:nvSpPr>
+          <p:cNvPr id="17" name="Left-right Arrow 16">
+            <a:extLst>
+              <a:ext uri="{FF2B5EF4-FFF2-40B4-BE49-F238E27FC236}">
+                <a16:creationId xmlns:a16="http://schemas.microsoft.com/office/drawing/2014/main" id="{880B4054-C7C3-AE8A-3B3A-AA761F0CEB17}"/>
+              </a:ext>
+            </a:extLst>
+          </p:cNvPr>
+          <p:cNvSpPr/>
+          <p:nvPr/>
+        </p:nvSpPr>
+        <p:spPr>
+          <a:xfrm>
+            <a:off x="7667232" y="4365374"/>
+            <a:ext cx="1475339" cy="572173"/>
+          </a:xfrm>
+          <a:prstGeom prst="leftRightArrow">
+            <a:avLst/>
+          </a:prstGeom>
+          <a:solidFill>
+            <a:schemeClr val="accent1">
+              <a:lumMod val="40000"/>
+              <a:lumOff val="60000"/>
+            </a:schemeClr>
+          </a:solidFill>
+          <a:ln w="25400">
+            <a:solidFill>
+              <a:schemeClr val="accent2"/>
+            </a:solidFill>
+          </a:ln>
+        </p:spPr>
+        <p:style>
+          <a:lnRef idx="2">
+            <a:schemeClr val="accent1">
+              <a:shade val="15000"/>
+            </a:schemeClr>
+          </a:lnRef>
+          <a:fillRef idx="1">
+            <a:schemeClr val="accent1"/>
+          </a:fillRef>
+          <a:effectRef idx="0">
+            <a:schemeClr val="accent1"/>
+          </a:effectRef>
+          <a:fontRef idx="minor">
+            <a:schemeClr val="lt1"/>
+          </a:fontRef>
+        </p:style>
+        <p:txBody>
+          <a:bodyPr rtlCol="0" anchor="ctr"/>
+          <a:lstStyle/>
+          <a:p>
+            <a:pPr algn="ctr"/>
+            <a:endParaRPr lang="en-CH"/>
+          </a:p>
+        </p:txBody>
+      </p:sp>
+      <p:pic>
+        <p:nvPicPr>
+          <p:cNvPr id="19" name="Picture 18">
+            <a:extLst>
+              <a:ext uri="{FF2B5EF4-FFF2-40B4-BE49-F238E27FC236}">
+                <a16:creationId xmlns:a16="http://schemas.microsoft.com/office/drawing/2014/main" id="{1CE5FF16-D025-398C-FFA9-F3A7ADED6F8F}"/>
+              </a:ext>
+            </a:extLst>
+          </p:cNvPr>
+          <p:cNvPicPr>
+            <a:picLocks noChangeAspect="1"/>
+          </p:cNvPicPr>
+          <p:nvPr/>
+        </p:nvPicPr>
+        <p:blipFill>
+          <a:blip r:embed="rId3"/>
+          <a:stretch>
+            <a:fillRect/>
+          </a:stretch>
+        </p:blipFill>
+        <p:spPr>
+          <a:xfrm>
+            <a:off x="8048989" y="2989099"/>
+            <a:ext cx="698570" cy="154491"/>
+          </a:xfrm>
+          <a:prstGeom prst="rect">
+            <a:avLst/>
+          </a:prstGeom>
+        </p:spPr>
+      </p:pic>
+      <p:pic>
+        <p:nvPicPr>
+          <p:cNvPr id="20" name="Picture 19">
+            <a:extLst>
+              <a:ext uri="{FF2B5EF4-FFF2-40B4-BE49-F238E27FC236}">
+                <a16:creationId xmlns:a16="http://schemas.microsoft.com/office/drawing/2014/main" id="{349283CD-35AA-7446-72C1-B67920869D38}"/>
+              </a:ext>
+            </a:extLst>
+          </p:cNvPr>
+          <p:cNvPicPr>
+            <a:picLocks noChangeAspect="1"/>
+          </p:cNvPicPr>
+          <p:nvPr/>
+        </p:nvPicPr>
+        <p:blipFill>
+          <a:blip r:embed="rId4"/>
+          <a:stretch>
+            <a:fillRect/>
+          </a:stretch>
+        </p:blipFill>
+        <p:spPr>
+          <a:xfrm>
+            <a:off x="8157012" y="4410198"/>
+            <a:ext cx="482523" cy="482523"/>
+          </a:xfrm>
+          <a:prstGeom prst="rect">
+            <a:avLst/>
+          </a:prstGeom>
+        </p:spPr>
+      </p:pic>
+      <p:pic>
+        <p:nvPicPr>
+          <p:cNvPr id="21" name="Picture 20">
+            <a:extLst>
+              <a:ext uri="{FF2B5EF4-FFF2-40B4-BE49-F238E27FC236}">
+                <a16:creationId xmlns:a16="http://schemas.microsoft.com/office/drawing/2014/main" id="{681F5E70-B0DF-361D-4B1F-FFB7AF4AAE46}"/>
+              </a:ext>
+            </a:extLst>
+          </p:cNvPr>
+          <p:cNvPicPr>
+            <a:picLocks noChangeAspect="1"/>
+          </p:cNvPicPr>
+          <p:nvPr/>
+        </p:nvPicPr>
+        <p:blipFill>
+          <a:blip r:embed="rId5"/>
+          <a:stretch>
+            <a:fillRect/>
+          </a:stretch>
+        </p:blipFill>
+        <p:spPr>
+          <a:xfrm>
+            <a:off x="8008801" y="3788731"/>
+            <a:ext cx="738758" cy="201847"/>
+          </a:xfrm>
+          <a:prstGeom prst="rect">
+            <a:avLst/>
+          </a:prstGeom>
+        </p:spPr>
+      </p:pic>
+      <p:sp>
+        <p:nvSpPr>
+          <p:cNvPr id="13" name="Rectangle 12">
+            <a:extLst>
+              <a:ext uri="{FF2B5EF4-FFF2-40B4-BE49-F238E27FC236}">
+                <a16:creationId xmlns:a16="http://schemas.microsoft.com/office/drawing/2014/main" id="{C29B0963-3D12-A2F6-311B-20584F6F6643}"/>
+              </a:ext>
+            </a:extLst>
+          </p:cNvPr>
+          <p:cNvSpPr/>
+          <p:nvPr/>
+        </p:nvSpPr>
+        <p:spPr>
+          <a:xfrm>
+            <a:off x="5484597" y="3533812"/>
+            <a:ext cx="938294" cy="521821"/>
+          </a:xfrm>
+          <a:prstGeom prst="rect">
+            <a:avLst/>
+          </a:prstGeom>
+          <a:solidFill>
+            <a:srgbClr val="637E3C"/>
+          </a:solidFill>
+          <a:ln w="50800">
+            <a:solidFill>
+              <a:schemeClr val="accent1"/>
+            </a:solidFill>
+          </a:ln>
+        </p:spPr>
+        <p:style>
+          <a:lnRef idx="2">
+            <a:schemeClr val="accent1">
+              <a:shade val="15000"/>
+            </a:schemeClr>
+          </a:lnRef>
+          <a:fillRef idx="1">
+            <a:schemeClr val="accent1"/>
+          </a:fillRef>
+          <a:effectRef idx="0">
+            <a:schemeClr val="accent1"/>
+          </a:effectRef>
+          <a:fontRef idx="minor">
+            <a:schemeClr val="lt1"/>
+          </a:fontRef>
+        </p:style>
+        <p:txBody>
+          <a:bodyPr rtlCol="0" anchor="ctr"/>
+          <a:lstStyle/>
+          <a:p>
+            <a:pPr algn="ctr"/>
+            <a:r>
+              <a:rPr lang="en-CH" dirty="0">
+                <a:latin typeface="Sora" pitchFamily="2" charset="0"/>
+                <a:cs typeface="Sora" pitchFamily="2" charset="0"/>
+              </a:rPr>
+              <a:t>GenAI</a:t>
+            </a:r>
+          </a:p>
+        </p:txBody>
+      </p:sp>
+      <p:sp>
+        <p:nvSpPr>
+          <p:cNvPr id="14" name="Rectangle 13">
+            <a:extLst>
+              <a:ext uri="{FF2B5EF4-FFF2-40B4-BE49-F238E27FC236}">
+                <a16:creationId xmlns:a16="http://schemas.microsoft.com/office/drawing/2014/main" id="{0EB1CE09-FD00-4436-536F-A40C13FF7AAD}"/>
+              </a:ext>
+            </a:extLst>
+          </p:cNvPr>
+          <p:cNvSpPr/>
+          <p:nvPr/>
+        </p:nvSpPr>
+        <p:spPr>
+          <a:xfrm>
+            <a:off x="5484597" y="2910391"/>
+            <a:ext cx="938294" cy="521821"/>
+          </a:xfrm>
+          <a:prstGeom prst="rect">
+            <a:avLst/>
+          </a:prstGeom>
+          <a:solidFill>
+            <a:srgbClr val="637E3C"/>
+          </a:solidFill>
+          <a:ln w="50800">
+            <a:solidFill>
+              <a:schemeClr val="accent1"/>
+            </a:solidFill>
+          </a:ln>
+        </p:spPr>
+        <p:style>
+          <a:lnRef idx="2">
+            <a:schemeClr val="accent1">
+              <a:shade val="15000"/>
+            </a:schemeClr>
+          </a:lnRef>
+          <a:fillRef idx="1">
+            <a:schemeClr val="accent1"/>
+          </a:fillRef>
+          <a:effectRef idx="0">
+            <a:schemeClr val="accent1"/>
+          </a:effectRef>
+          <a:fontRef idx="minor">
+            <a:schemeClr val="lt1"/>
+          </a:fontRef>
+        </p:style>
+        <p:txBody>
+          <a:bodyPr rtlCol="0" anchor="ctr"/>
+          <a:lstStyle/>
+          <a:p>
+            <a:pPr algn="ctr"/>
+            <a:r>
+              <a:rPr lang="en-CH" dirty="0">
+                <a:latin typeface="Sora" pitchFamily="2" charset="0"/>
+                <a:cs typeface="Sora" pitchFamily="2" charset="0"/>
+              </a:rPr>
+              <a:t>GenAI</a:t>
+            </a:r>
+          </a:p>
+        </p:txBody>
+      </p:sp>
+    </p:spTree>
+    <p:extLst>
+      <p:ext uri="{BB962C8B-B14F-4D97-AF65-F5344CB8AC3E}">
+        <p14:creationId xmlns:p14="http://schemas.microsoft.com/office/powerpoint/2010/main" val="2289248043"/>
+      </p:ext>
+    </p:extLst>
+  </p:cSld>
+  <p:clrMapOvr>
+    <a:masterClrMapping/>
+  </p:clrMapOvr>
+</p:sld>
+</file>
+
+<file path=ppt/slides/slide7.xml><?xml version="1.0" encoding="utf-8"?>
+<p:sld xmlns:a="http://schemas.openxmlformats.org/drawingml/2006/main" xmlns:r="http://schemas.openxmlformats.org/officeDocument/2006/relationships" xmlns:p="http://schemas.openxmlformats.org/presentationml/2006/main">
+  <p:cSld>
+    <p:spTree>
+      <p:nvGrpSpPr>
+        <p:cNvPr id="1" name="">
+          <a:extLst>
+            <a:ext uri="{FF2B5EF4-FFF2-40B4-BE49-F238E27FC236}">
               <a16:creationId xmlns:a16="http://schemas.microsoft.com/office/drawing/2014/main" id="{76DC0C7B-3D4C-4A81-88B2-21A67D18B0D1}"/>
             </a:ext>
           </a:extLst>
@@ -9103,7 +11818,7 @@
 </p:sld>
 </file>
 
-<file path=ppt/slides/slide7.xml><?xml version="1.0" encoding="utf-8"?>
+<file path=ppt/slides/slide8.xml><?xml version="1.0" encoding="utf-8"?>
 <p:sld xmlns:a="http://schemas.openxmlformats.org/drawingml/2006/main" xmlns:r="http://schemas.openxmlformats.org/officeDocument/2006/relationships" xmlns:p="http://schemas.openxmlformats.org/presentationml/2006/main">
   <p:cSld>
     <p:spTree>
@@ -10097,7 +12812,7 @@
 </p:sld>
 </file>
 
-<file path=ppt/slides/slide8.xml><?xml version="1.0" encoding="utf-8"?>
+<file path=ppt/slides/slide9.xml><?xml version="1.0" encoding="utf-8"?>
 <p:sld xmlns:a="http://schemas.openxmlformats.org/drawingml/2006/main" xmlns:r="http://schemas.openxmlformats.org/officeDocument/2006/relationships" xmlns:p="http://schemas.openxmlformats.org/presentationml/2006/main">
   <p:cSld>
     <p:spTree>

--- a/nordic-apis-2026/img/solution-composability.pptx
+++ b/nordic-apis-2026/img/solution-composability.pptx
@@ -268,7 +268,7 @@
           <a:p>
             <a:fld id="{37A2730A-859E-B540-ADF3-E97069AD1FDB}" type="datetimeFigureOut">
               <a:rPr lang="en-US" smtClean="0"/>
-              <a:t>10/9/26</a:t>
+              <a:t>10/10/26</a:t>
             </a:fld>
             <a:endParaRPr lang="en-US"/>
           </a:p>
@@ -466,7 +466,7 @@
           <a:p>
             <a:fld id="{37A2730A-859E-B540-ADF3-E97069AD1FDB}" type="datetimeFigureOut">
               <a:rPr lang="en-US" smtClean="0"/>
-              <a:t>10/9/26</a:t>
+              <a:t>10/10/26</a:t>
             </a:fld>
             <a:endParaRPr lang="en-US"/>
           </a:p>
@@ -674,7 +674,7 @@
           <a:p>
             <a:fld id="{37A2730A-859E-B540-ADF3-E97069AD1FDB}" type="datetimeFigureOut">
               <a:rPr lang="en-US" smtClean="0"/>
-              <a:t>10/9/26</a:t>
+              <a:t>10/10/26</a:t>
             </a:fld>
             <a:endParaRPr lang="en-US"/>
           </a:p>
@@ -872,7 +872,7 @@
           <a:p>
             <a:fld id="{37A2730A-859E-B540-ADF3-E97069AD1FDB}" type="datetimeFigureOut">
               <a:rPr lang="en-US" smtClean="0"/>
-              <a:t>10/9/26</a:t>
+              <a:t>10/10/26</a:t>
             </a:fld>
             <a:endParaRPr lang="en-US"/>
           </a:p>
@@ -1147,7 +1147,7 @@
           <a:p>
             <a:fld id="{37A2730A-859E-B540-ADF3-E97069AD1FDB}" type="datetimeFigureOut">
               <a:rPr lang="en-US" smtClean="0"/>
-              <a:t>10/9/26</a:t>
+              <a:t>10/10/26</a:t>
             </a:fld>
             <a:endParaRPr lang="en-US"/>
           </a:p>
@@ -1412,7 +1412,7 @@
           <a:p>
             <a:fld id="{37A2730A-859E-B540-ADF3-E97069AD1FDB}" type="datetimeFigureOut">
               <a:rPr lang="en-US" smtClean="0"/>
-              <a:t>10/9/26</a:t>
+              <a:t>10/10/26</a:t>
             </a:fld>
             <a:endParaRPr lang="en-US"/>
           </a:p>
@@ -1824,7 +1824,7 @@
           <a:p>
             <a:fld id="{37A2730A-859E-B540-ADF3-E97069AD1FDB}" type="datetimeFigureOut">
               <a:rPr lang="en-US" smtClean="0"/>
-              <a:t>10/9/26</a:t>
+              <a:t>10/10/26</a:t>
             </a:fld>
             <a:endParaRPr lang="en-US"/>
           </a:p>
@@ -1965,7 +1965,7 @@
           <a:p>
             <a:fld id="{37A2730A-859E-B540-ADF3-E97069AD1FDB}" type="datetimeFigureOut">
               <a:rPr lang="en-US" smtClean="0"/>
-              <a:t>10/9/26</a:t>
+              <a:t>10/10/26</a:t>
             </a:fld>
             <a:endParaRPr lang="en-US"/>
           </a:p>
@@ -2078,7 +2078,7 @@
           <a:p>
             <a:fld id="{37A2730A-859E-B540-ADF3-E97069AD1FDB}" type="datetimeFigureOut">
               <a:rPr lang="en-US" smtClean="0"/>
-              <a:t>10/9/26</a:t>
+              <a:t>10/10/26</a:t>
             </a:fld>
             <a:endParaRPr lang="en-US"/>
           </a:p>
@@ -2389,7 +2389,7 @@
           <a:p>
             <a:fld id="{37A2730A-859E-B540-ADF3-E97069AD1FDB}" type="datetimeFigureOut">
               <a:rPr lang="en-US" smtClean="0"/>
-              <a:t>10/9/26</a:t>
+              <a:t>10/10/26</a:t>
             </a:fld>
             <a:endParaRPr lang="en-US"/>
           </a:p>
@@ -2677,7 +2677,7 @@
           <a:p>
             <a:fld id="{37A2730A-859E-B540-ADF3-E97069AD1FDB}" type="datetimeFigureOut">
               <a:rPr lang="en-US" smtClean="0"/>
-              <a:t>10/9/26</a:t>
+              <a:t>10/10/26</a:t>
             </a:fld>
             <a:endParaRPr lang="en-US"/>
           </a:p>
@@ -2918,7 +2918,7 @@
           <a:p>
             <a:fld id="{37A2730A-859E-B540-ADF3-E97069AD1FDB}" type="datetimeFigureOut">
               <a:rPr lang="en-US" smtClean="0"/>
-              <a:t>10/9/26</a:t>
+              <a:t>10/10/26</a:t>
             </a:fld>
             <a:endParaRPr lang="en-US"/>
           </a:p>
@@ -7470,6 +7470,41 @@
                 <a:cs typeface="Sora" pitchFamily="2" charset="0"/>
               </a:rPr>
               <a:t>GenAI</a:t>
+            </a:r>
+          </a:p>
+        </p:txBody>
+      </p:sp>
+      <p:sp>
+        <p:nvSpPr>
+          <p:cNvPr id="7" name="TextBox 6">
+            <a:extLst>
+              <a:ext uri="{FF2B5EF4-FFF2-40B4-BE49-F238E27FC236}">
+                <a16:creationId xmlns:a16="http://schemas.microsoft.com/office/drawing/2014/main" id="{C533DB0D-BE33-118B-0C60-962E4BC1485C}"/>
+              </a:ext>
+            </a:extLst>
+          </p:cNvPr>
+          <p:cNvSpPr txBox="1"/>
+          <p:nvPr/>
+        </p:nvSpPr>
+        <p:spPr>
+          <a:xfrm>
+            <a:off x="5636631" y="3788731"/>
+            <a:ext cx="2153443" cy="1569660"/>
+          </a:xfrm>
+          <a:prstGeom prst="rect">
+            <a:avLst/>
+          </a:prstGeom>
+          <a:noFill/>
+        </p:spPr>
+        <p:txBody>
+          <a:bodyPr wrap="square">
+            <a:spAutoFit/>
+          </a:bodyPr>
+          <a:lstStyle/>
+          <a:p>
+            <a:r>
+              <a:rPr lang="en-CH" sz="9600" dirty="0"/>
+              <a:t>🦄</a:t>
             </a:r>
           </a:p>
         </p:txBody>
@@ -14351,6 +14386,15 @@
 </file>
 
 <file path=customXml/item1.xml><?xml version="1.0" encoding="utf-8"?>
+<?mso-contentType ?>
+<FormTemplates xmlns="http://schemas.microsoft.com/sharepoint/v3/contenttype/forms">
+  <Display>DocumentLibraryForm</Display>
+  <Edit>DocumentLibraryForm</Edit>
+  <New>DocumentLibraryForm</New>
+</FormTemplates>
+</file>
+
+<file path=customXml/item2.xml><?xml version="1.0" encoding="utf-8"?>
 <ct:contentTypeSchema xmlns:ct="http://schemas.microsoft.com/office/2006/metadata/contentType" xmlns:ma="http://schemas.microsoft.com/office/2006/metadata/properties/metaAttributes" ct:_="" ma:_="" ma:contentTypeName="Document" ma:contentTypeID="0x010100CD401524DC532D42A0E0ED886331A72B" ma:contentTypeVersion="13" ma:contentTypeDescription="Create a new document." ma:contentTypeScope="" ma:versionID="d936d863d335d354da51eb78ca1ae338">
   <xsd:schema xmlns:xsd="http://www.w3.org/2001/XMLSchema" xmlns:xs="http://www.w3.org/2001/XMLSchema" xmlns:p="http://schemas.microsoft.com/office/2006/metadata/properties" xmlns:ns2="f577acbf-5b0b-4b4f-9948-268e97f8d3a4" xmlns:ns3="b1e4d6ee-9f6f-43f8-a618-24f3d84da28f" targetNamespace="http://schemas.microsoft.com/office/2006/metadata/properties" ma:root="true" ma:fieldsID="5fbac08d56b1b04aa33acbc31e882ce9" ns2:_="" ns3:_="">
     <xsd:import namespace="f577acbf-5b0b-4b4f-9948-268e97f8d3a4"/>
@@ -14594,15 +14638,6 @@
 </ct:contentTypeSchema>
 </file>
 
-<file path=customXml/item2.xml><?xml version="1.0" encoding="utf-8"?>
-<?mso-contentType ?>
-<FormTemplates xmlns="http://schemas.microsoft.com/sharepoint/v3/contenttype/forms">
-  <Display>DocumentLibraryForm</Display>
-  <Edit>DocumentLibraryForm</Edit>
-  <New>DocumentLibraryForm</New>
-</FormTemplates>
-</file>
-
 <file path=customXml/item3.xml><?xml version="1.0" encoding="utf-8"?>
 <p:properties xmlns:p="http://schemas.microsoft.com/office/2006/metadata/properties" xmlns:xsi="http://www.w3.org/2001/XMLSchema-instance" xmlns:pc="http://schemas.microsoft.com/office/infopath/2007/PartnerControls">
   <documentManagement>
@@ -14613,6 +14648,14 @@
 </file>
 
 <file path=customXml/itemProps1.xml><?xml version="1.0" encoding="utf-8"?>
+<ds:datastoreItem xmlns:ds="http://schemas.openxmlformats.org/officeDocument/2006/customXml" ds:itemID="{E21AFCC0-734A-4A90-A597-A1CB34860DCD}">
+  <ds:schemaRefs>
+    <ds:schemaRef ds:uri="http://schemas.microsoft.com/sharepoint/v3/contenttype/forms"/>
+  </ds:schemaRefs>
+</ds:datastoreItem>
+</file>
+
+<file path=customXml/itemProps2.xml><?xml version="1.0" encoding="utf-8"?>
 <ds:datastoreItem xmlns:ds="http://schemas.openxmlformats.org/officeDocument/2006/customXml" ds:itemID="{A79EAE08-AAD0-49B9-BF66-164C225CC523}">
   <ds:schemaRefs>
     <ds:schemaRef ds:uri="http://schemas.microsoft.com/office/2006/metadata/contentType"/>
@@ -14627,14 +14670,6 @@
     <ds:schemaRef ds:uri="http://purl.org/dc/elements/1.1/"/>
     <ds:schemaRef ds:uri="http://purl.org/dc/terms/"/>
     <ds:schemaRef ds:uri="http://schemas.microsoft.com/internal/obd"/>
-  </ds:schemaRefs>
-</ds:datastoreItem>
-</file>
-
-<file path=customXml/itemProps2.xml><?xml version="1.0" encoding="utf-8"?>
-<ds:datastoreItem xmlns:ds="http://schemas.openxmlformats.org/officeDocument/2006/customXml" ds:itemID="{E21AFCC0-734A-4A90-A597-A1CB34860DCD}">
-  <ds:schemaRefs>
-    <ds:schemaRef ds:uri="http://schemas.microsoft.com/sharepoint/v3/contenttype/forms"/>
   </ds:schemaRefs>
 </ds:datastoreItem>
 </file>

--- a/nordic-apis-2026/img/solution-composability.pptx
+++ b/nordic-apis-2026/img/solution-composability.pptx
@@ -7476,10 +7476,10 @@
       </p:sp>
       <p:sp>
         <p:nvSpPr>
-          <p:cNvPr id="7" name="TextBox 6">
-            <a:extLst>
-              <a:ext uri="{FF2B5EF4-FFF2-40B4-BE49-F238E27FC236}">
-                <a16:creationId xmlns:a16="http://schemas.microsoft.com/office/drawing/2014/main" id="{C533DB0D-BE33-118B-0C60-962E4BC1485C}"/>
+          <p:cNvPr id="14" name="TextBox 13">
+            <a:extLst>
+              <a:ext uri="{FF2B5EF4-FFF2-40B4-BE49-F238E27FC236}">
+                <a16:creationId xmlns:a16="http://schemas.microsoft.com/office/drawing/2014/main" id="{90BAF0D8-25F1-DF7A-5253-04E404DC8018}"/>
               </a:ext>
             </a:extLst>
           </p:cNvPr>

--- a/nordic-apis-2026/img/solution-composability.pptx
+++ b/nordic-apis-2026/img/solution-composability.pptx
@@ -14,7 +14,8 @@
     <p:sldId id="274" r:id="rId11"/>
     <p:sldId id="277" r:id="rId12"/>
     <p:sldId id="268" r:id="rId13"/>
-    <p:sldId id="283" r:id="rId14"/>
+    <p:sldId id="286" r:id="rId14"/>
+    <p:sldId id="283" r:id="rId15"/>
   </p:sldIdLst>
   <p:sldSz cx="12192000" cy="6858000"/>
   <p:notesSz cx="6858000" cy="9144000"/>
@@ -4168,6 +4169,1308 @@
         <p:cNvPr id="1" name="">
           <a:extLst>
             <a:ext uri="{FF2B5EF4-FFF2-40B4-BE49-F238E27FC236}">
+              <a16:creationId xmlns:a16="http://schemas.microsoft.com/office/drawing/2014/main" id="{705C61C3-D382-58F9-B1D1-0F604F3DB121}"/>
+            </a:ext>
+          </a:extLst>
+        </p:cNvPr>
+        <p:cNvGrpSpPr/>
+        <p:nvPr/>
+      </p:nvGrpSpPr>
+      <p:grpSpPr>
+        <a:xfrm>
+          <a:off x="0" y="0"/>
+          <a:ext cx="0" cy="0"/>
+          <a:chOff x="0" y="0"/>
+          <a:chExt cx="0" cy="0"/>
+        </a:xfrm>
+      </p:grpSpPr>
+      <p:sp>
+        <p:nvSpPr>
+          <p:cNvPr id="5" name="Rectangle 4">
+            <a:extLst>
+              <a:ext uri="{FF2B5EF4-FFF2-40B4-BE49-F238E27FC236}">
+                <a16:creationId xmlns:a16="http://schemas.microsoft.com/office/drawing/2014/main" id="{6526DFA8-4970-4012-8F98-B2EF8CC91FE2}"/>
+              </a:ext>
+            </a:extLst>
+          </p:cNvPr>
+          <p:cNvSpPr/>
+          <p:nvPr/>
+        </p:nvSpPr>
+        <p:spPr>
+          <a:xfrm>
+            <a:off x="3169920" y="1663548"/>
+            <a:ext cx="3252971" cy="2034691"/>
+          </a:xfrm>
+          <a:prstGeom prst="rect">
+            <a:avLst/>
+          </a:prstGeom>
+          <a:solidFill>
+            <a:schemeClr val="tx2"/>
+          </a:solidFill>
+          <a:ln w="50800">
+            <a:solidFill>
+              <a:schemeClr val="accent1"/>
+            </a:solidFill>
+          </a:ln>
+        </p:spPr>
+        <p:style>
+          <a:lnRef idx="2">
+            <a:schemeClr val="accent1">
+              <a:shade val="15000"/>
+            </a:schemeClr>
+          </a:lnRef>
+          <a:fillRef idx="1">
+            <a:schemeClr val="accent1"/>
+          </a:fillRef>
+          <a:effectRef idx="0">
+            <a:schemeClr val="accent1"/>
+          </a:effectRef>
+          <a:fontRef idx="minor">
+            <a:schemeClr val="lt1"/>
+          </a:fontRef>
+        </p:style>
+        <p:txBody>
+          <a:bodyPr rtlCol="0" anchor="ctr"/>
+          <a:lstStyle/>
+          <a:p>
+            <a:pPr algn="ctr"/>
+            <a:r>
+              <a:rPr lang="en-CH" dirty="0">
+                <a:latin typeface="Sora" pitchFamily="2" charset="0"/>
+                <a:cs typeface="Sora" pitchFamily="2" charset="0"/>
+              </a:rPr>
+              <a:t>GenAI</a:t>
+            </a:r>
+          </a:p>
+        </p:txBody>
+      </p:sp>
+      <p:sp>
+        <p:nvSpPr>
+          <p:cNvPr id="6" name="Rectangle 5">
+            <a:extLst>
+              <a:ext uri="{FF2B5EF4-FFF2-40B4-BE49-F238E27FC236}">
+                <a16:creationId xmlns:a16="http://schemas.microsoft.com/office/drawing/2014/main" id="{10758499-1B23-7177-75A6-BA116965F958}"/>
+              </a:ext>
+            </a:extLst>
+          </p:cNvPr>
+          <p:cNvSpPr/>
+          <p:nvPr/>
+        </p:nvSpPr>
+        <p:spPr>
+          <a:xfrm>
+            <a:off x="8753138" y="1663549"/>
+            <a:ext cx="1398488" cy="3530899"/>
+          </a:xfrm>
+          <a:prstGeom prst="rect">
+            <a:avLst/>
+          </a:prstGeom>
+          <a:solidFill>
+            <a:schemeClr val="accent1">
+              <a:lumMod val="40000"/>
+              <a:lumOff val="60000"/>
+            </a:schemeClr>
+          </a:solidFill>
+          <a:ln w="50800">
+            <a:solidFill>
+              <a:schemeClr val="tx2"/>
+            </a:solidFill>
+          </a:ln>
+        </p:spPr>
+        <p:style>
+          <a:lnRef idx="2">
+            <a:schemeClr val="accent1">
+              <a:shade val="15000"/>
+            </a:schemeClr>
+          </a:lnRef>
+          <a:fillRef idx="1">
+            <a:schemeClr val="accent1"/>
+          </a:fillRef>
+          <a:effectRef idx="0">
+            <a:schemeClr val="accent1"/>
+          </a:effectRef>
+          <a:fontRef idx="minor">
+            <a:schemeClr val="lt1"/>
+          </a:fontRef>
+        </p:style>
+        <p:txBody>
+          <a:bodyPr rtlCol="0" anchor="ctr"/>
+          <a:lstStyle/>
+          <a:p>
+            <a:pPr algn="ctr"/>
+            <a:r>
+              <a:rPr lang="en-CH" dirty="0">
+                <a:solidFill>
+                  <a:schemeClr val="accent2"/>
+                </a:solidFill>
+                <a:latin typeface="Sora" pitchFamily="2" charset="0"/>
+                <a:cs typeface="Sora" pitchFamily="2" charset="0"/>
+              </a:rPr>
+              <a:t>      </a:t>
+            </a:r>
+          </a:p>
+          <a:p>
+            <a:pPr algn="ctr"/>
+            <a:endParaRPr lang="en-CH" dirty="0">
+              <a:solidFill>
+                <a:schemeClr val="accent2"/>
+              </a:solidFill>
+              <a:latin typeface="Sora" pitchFamily="2" charset="0"/>
+              <a:cs typeface="Sora" pitchFamily="2" charset="0"/>
+            </a:endParaRPr>
+          </a:p>
+          <a:p>
+            <a:pPr algn="ctr"/>
+            <a:endParaRPr lang="en-CH" dirty="0">
+              <a:solidFill>
+                <a:schemeClr val="accent2"/>
+              </a:solidFill>
+              <a:latin typeface="Sora" pitchFamily="2" charset="0"/>
+              <a:cs typeface="Sora" pitchFamily="2" charset="0"/>
+            </a:endParaRPr>
+          </a:p>
+          <a:p>
+            <a:pPr algn="ctr"/>
+            <a:endParaRPr lang="en-CH" dirty="0">
+              <a:solidFill>
+                <a:schemeClr val="accent2"/>
+              </a:solidFill>
+              <a:latin typeface="Sora" pitchFamily="2" charset="0"/>
+              <a:cs typeface="Sora" pitchFamily="2" charset="0"/>
+            </a:endParaRPr>
+          </a:p>
+          <a:p>
+            <a:pPr algn="ctr"/>
+            <a:endParaRPr lang="en-CH" dirty="0">
+              <a:solidFill>
+                <a:schemeClr val="accent2"/>
+              </a:solidFill>
+              <a:latin typeface="Sora" pitchFamily="2" charset="0"/>
+              <a:cs typeface="Sora" pitchFamily="2" charset="0"/>
+            </a:endParaRPr>
+          </a:p>
+          <a:p>
+            <a:pPr algn="ctr"/>
+            <a:endParaRPr lang="en-CH" dirty="0">
+              <a:solidFill>
+                <a:schemeClr val="accent2"/>
+              </a:solidFill>
+              <a:latin typeface="Sora" pitchFamily="2" charset="0"/>
+              <a:cs typeface="Sora" pitchFamily="2" charset="0"/>
+            </a:endParaRPr>
+          </a:p>
+          <a:p>
+            <a:pPr algn="ctr"/>
+            <a:endParaRPr lang="en-CH" dirty="0">
+              <a:solidFill>
+                <a:schemeClr val="accent2"/>
+              </a:solidFill>
+              <a:latin typeface="Sora" pitchFamily="2" charset="0"/>
+              <a:cs typeface="Sora" pitchFamily="2" charset="0"/>
+            </a:endParaRPr>
+          </a:p>
+          <a:p>
+            <a:pPr algn="ctr"/>
+            <a:r>
+              <a:rPr lang="en-CH" dirty="0">
+                <a:solidFill>
+                  <a:schemeClr val="accent2"/>
+                </a:solidFill>
+                <a:latin typeface="Sora" pitchFamily="2" charset="0"/>
+                <a:cs typeface="Sora" pitchFamily="2" charset="0"/>
+              </a:rPr>
+              <a:t>     APIs</a:t>
+            </a:r>
+          </a:p>
+          <a:p>
+            <a:pPr algn="ctr"/>
+            <a:r>
+              <a:rPr lang="en-CH" dirty="0">
+                <a:solidFill>
+                  <a:schemeClr val="accent2"/>
+                </a:solidFill>
+                <a:latin typeface="Sora" pitchFamily="2" charset="0"/>
+                <a:cs typeface="Sora" pitchFamily="2" charset="0"/>
+              </a:rPr>
+              <a:t>     &amp;</a:t>
+            </a:r>
+          </a:p>
+          <a:p>
+            <a:pPr algn="ctr"/>
+            <a:r>
+              <a:rPr lang="en-CH" dirty="0">
+                <a:solidFill>
+                  <a:schemeClr val="accent2"/>
+                </a:solidFill>
+                <a:latin typeface="Sora" pitchFamily="2" charset="0"/>
+                <a:cs typeface="Sora" pitchFamily="2" charset="0"/>
+              </a:rPr>
+              <a:t>     Data</a:t>
+            </a:r>
+          </a:p>
+        </p:txBody>
+      </p:sp>
+      <p:sp>
+        <p:nvSpPr>
+          <p:cNvPr id="7" name="Freeform 6">
+            <a:extLst>
+              <a:ext uri="{FF2B5EF4-FFF2-40B4-BE49-F238E27FC236}">
+                <a16:creationId xmlns:a16="http://schemas.microsoft.com/office/drawing/2014/main" id="{52144FF2-C5B0-13E1-20B3-F02C8329C724}"/>
+              </a:ext>
+            </a:extLst>
+          </p:cNvPr>
+          <p:cNvSpPr/>
+          <p:nvPr/>
+        </p:nvSpPr>
+        <p:spPr>
+          <a:xfrm>
+            <a:off x="3169920" y="3761921"/>
+            <a:ext cx="4908176" cy="1432529"/>
+          </a:xfrm>
+          <a:custGeom>
+            <a:avLst/>
+            <a:gdLst/>
+            <a:ahLst/>
+            <a:cxnLst/>
+            <a:rect l="l" t="t" r="r" b="b"/>
+            <a:pathLst>
+              <a:path w="4908176" h="1432529">
+                <a:moveTo>
+                  <a:pt x="0" y="1432529"/>
+                </a:moveTo>
+                <a:lnTo>
+                  <a:pt x="4908176" y="1432529"/>
+                </a:lnTo>
+                <a:lnTo>
+                  <a:pt x="4908176" y="411048"/>
+                </a:lnTo>
+                <a:lnTo>
+                  <a:pt x="3252971" y="411048"/>
+                </a:lnTo>
+                <a:lnTo>
+                  <a:pt x="3252971" y="0"/>
+                </a:lnTo>
+                <a:lnTo>
+                  <a:pt x="0" y="0"/>
+                </a:lnTo>
+                <a:close/>
+              </a:path>
+            </a:pathLst>
+          </a:custGeom>
+          <a:solidFill>
+            <a:schemeClr val="accent1"/>
+          </a:solidFill>
+          <a:ln w="50800">
+            <a:solidFill>
+              <a:schemeClr val="tx2"/>
+            </a:solidFill>
+          </a:ln>
+        </p:spPr>
+        <p:style>
+          <a:lnRef idx="2">
+            <a:schemeClr val="accent1">
+              <a:shade val="15000"/>
+            </a:schemeClr>
+          </a:lnRef>
+          <a:fillRef idx="1">
+            <a:schemeClr val="accent1"/>
+          </a:fillRef>
+          <a:effectRef idx="0">
+            <a:schemeClr val="accent1"/>
+          </a:effectRef>
+          <a:fontRef idx="minor">
+            <a:schemeClr val="lt1"/>
+          </a:fontRef>
+        </p:style>
+        <p:txBody>
+          <a:bodyPr rtlCol="0" anchor="ctr"/>
+          <a:lstStyle/>
+          <a:p>
+            <a:pPr algn="ctr"/>
+            <a:r>
+              <a:rPr lang="en-CH" dirty="0">
+                <a:latin typeface="Sora" pitchFamily="2" charset="0"/>
+                <a:cs typeface="Sora" pitchFamily="2" charset="0"/>
+              </a:rPr>
+              <a:t>Deterministic</a:t>
+            </a:r>
+          </a:p>
+        </p:txBody>
+      </p:sp>
+      <p:cxnSp>
+        <p:nvCxnSpPr>
+          <p:cNvPr id="9" name="Straight Connector 8">
+            <a:extLst>
+              <a:ext uri="{FF2B5EF4-FFF2-40B4-BE49-F238E27FC236}">
+                <a16:creationId xmlns:a16="http://schemas.microsoft.com/office/drawing/2014/main" id="{C0B4051A-70E4-60FE-BF82-8EDA0CD9B7CD}"/>
+              </a:ext>
+            </a:extLst>
+          </p:cNvPr>
+          <p:cNvCxnSpPr>
+            <a:cxnSpLocks/>
+          </p:cNvCxnSpPr>
+          <p:nvPr/>
+        </p:nvCxnSpPr>
+        <p:spPr>
+          <a:xfrm>
+            <a:off x="8419652" y="1245196"/>
+            <a:ext cx="0" cy="4682268"/>
+          </a:xfrm>
+          <a:prstGeom prst="line">
+            <a:avLst/>
+          </a:prstGeom>
+          <a:ln w="254000">
+            <a:solidFill>
+              <a:schemeClr val="tx2"/>
+            </a:solidFill>
+          </a:ln>
+        </p:spPr>
+        <p:style>
+          <a:lnRef idx="1">
+            <a:schemeClr val="accent1"/>
+          </a:lnRef>
+          <a:fillRef idx="0">
+            <a:schemeClr val="accent1"/>
+          </a:fillRef>
+          <a:effectRef idx="0">
+            <a:schemeClr val="accent1"/>
+          </a:effectRef>
+          <a:fontRef idx="minor">
+            <a:schemeClr val="tx1"/>
+          </a:fontRef>
+        </p:style>
+      </p:cxnSp>
+      <p:sp>
+        <p:nvSpPr>
+          <p:cNvPr id="10" name="TextBox 9">
+            <a:extLst>
+              <a:ext uri="{FF2B5EF4-FFF2-40B4-BE49-F238E27FC236}">
+                <a16:creationId xmlns:a16="http://schemas.microsoft.com/office/drawing/2014/main" id="{7A2211B5-3CCE-FA76-1E3A-360B222A3E55}"/>
+              </a:ext>
+            </a:extLst>
+          </p:cNvPr>
+          <p:cNvSpPr txBox="1"/>
+          <p:nvPr/>
+        </p:nvSpPr>
+        <p:spPr>
+          <a:xfrm>
+            <a:off x="5027530" y="5428134"/>
+            <a:ext cx="1192955" cy="369332"/>
+          </a:xfrm>
+          <a:prstGeom prst="rect">
+            <a:avLst/>
+          </a:prstGeom>
+          <a:noFill/>
+        </p:spPr>
+        <p:txBody>
+          <a:bodyPr wrap="none" rtlCol="0">
+            <a:spAutoFit/>
+          </a:bodyPr>
+          <a:lstStyle/>
+          <a:p>
+            <a:r>
+              <a:rPr lang="en-CH" dirty="0">
+                <a:latin typeface="Sora" pitchFamily="2" charset="0"/>
+                <a:cs typeface="Sora" pitchFamily="2" charset="0"/>
+              </a:rPr>
+              <a:t>Solution</a:t>
+            </a:r>
+          </a:p>
+        </p:txBody>
+      </p:sp>
+      <p:sp>
+        <p:nvSpPr>
+          <p:cNvPr id="11" name="TextBox 10">
+            <a:extLst>
+              <a:ext uri="{FF2B5EF4-FFF2-40B4-BE49-F238E27FC236}">
+                <a16:creationId xmlns:a16="http://schemas.microsoft.com/office/drawing/2014/main" id="{8F68A366-F139-CA5D-0FAA-960711D5974E}"/>
+              </a:ext>
+            </a:extLst>
+          </p:cNvPr>
+          <p:cNvSpPr txBox="1"/>
+          <p:nvPr/>
+        </p:nvSpPr>
+        <p:spPr>
+          <a:xfrm>
+            <a:off x="8709483" y="5428134"/>
+            <a:ext cx="1540806" cy="369332"/>
+          </a:xfrm>
+          <a:prstGeom prst="rect">
+            <a:avLst/>
+          </a:prstGeom>
+          <a:noFill/>
+        </p:spPr>
+        <p:txBody>
+          <a:bodyPr wrap="none" rtlCol="0">
+            <a:spAutoFit/>
+          </a:bodyPr>
+          <a:lstStyle/>
+          <a:p>
+            <a:r>
+              <a:rPr lang="en-CH" dirty="0">
+                <a:latin typeface="Sora" pitchFamily="2" charset="0"/>
+                <a:cs typeface="Sora" pitchFamily="2" charset="0"/>
+              </a:rPr>
+              <a:t>Foundation</a:t>
+            </a:r>
+          </a:p>
+        </p:txBody>
+      </p:sp>
+      <p:sp>
+        <p:nvSpPr>
+          <p:cNvPr id="2" name="Right Arrow 1">
+            <a:extLst>
+              <a:ext uri="{FF2B5EF4-FFF2-40B4-BE49-F238E27FC236}">
+                <a16:creationId xmlns:a16="http://schemas.microsoft.com/office/drawing/2014/main" id="{7F7655E4-45E8-A6CE-83D9-BC1981EF8663}"/>
+              </a:ext>
+            </a:extLst>
+          </p:cNvPr>
+          <p:cNvSpPr/>
+          <p:nvPr/>
+        </p:nvSpPr>
+        <p:spPr>
+          <a:xfrm>
+            <a:off x="1369100" y="2695096"/>
+            <a:ext cx="1394906" cy="563878"/>
+          </a:xfrm>
+          <a:prstGeom prst="rightArrow">
+            <a:avLst/>
+          </a:prstGeom>
+          <a:solidFill>
+            <a:schemeClr val="accent1">
+              <a:lumMod val="40000"/>
+              <a:lumOff val="60000"/>
+            </a:schemeClr>
+          </a:solidFill>
+          <a:ln w="25400">
+            <a:solidFill>
+              <a:schemeClr val="tx2"/>
+            </a:solidFill>
+          </a:ln>
+        </p:spPr>
+        <p:style>
+          <a:lnRef idx="2">
+            <a:schemeClr val="accent1">
+              <a:shade val="15000"/>
+            </a:schemeClr>
+          </a:lnRef>
+          <a:fillRef idx="1">
+            <a:schemeClr val="accent1"/>
+          </a:fillRef>
+          <a:effectRef idx="0">
+            <a:schemeClr val="accent1"/>
+          </a:effectRef>
+          <a:fontRef idx="minor">
+            <a:schemeClr val="lt1"/>
+          </a:fontRef>
+        </p:style>
+        <p:txBody>
+          <a:bodyPr rtlCol="0" anchor="ctr"/>
+          <a:lstStyle/>
+          <a:p>
+            <a:pPr algn="ctr"/>
+            <a:r>
+              <a:rPr lang="en-CH" sz="1400" dirty="0">
+                <a:solidFill>
+                  <a:schemeClr val="accent2"/>
+                </a:solidFill>
+                <a:latin typeface="Sora" pitchFamily="2" charset="0"/>
+                <a:cs typeface="Sora" pitchFamily="2" charset="0"/>
+              </a:rPr>
+              <a:t>Input</a:t>
+            </a:r>
+            <a:endParaRPr lang="en-CH" dirty="0">
+              <a:solidFill>
+                <a:schemeClr val="accent2"/>
+              </a:solidFill>
+              <a:latin typeface="Sora" pitchFamily="2" charset="0"/>
+              <a:cs typeface="Sora" pitchFamily="2" charset="0"/>
+            </a:endParaRPr>
+          </a:p>
+        </p:txBody>
+      </p:sp>
+      <p:sp>
+        <p:nvSpPr>
+          <p:cNvPr id="3" name="TextBox 2">
+            <a:extLst>
+              <a:ext uri="{FF2B5EF4-FFF2-40B4-BE49-F238E27FC236}">
+                <a16:creationId xmlns:a16="http://schemas.microsoft.com/office/drawing/2014/main" id="{3C09D94E-5D13-7C85-C849-9DF97CB3379D}"/>
+              </a:ext>
+            </a:extLst>
+          </p:cNvPr>
+          <p:cNvSpPr txBox="1"/>
+          <p:nvPr/>
+        </p:nvSpPr>
+        <p:spPr>
+          <a:xfrm>
+            <a:off x="1303140" y="3267269"/>
+            <a:ext cx="1534394" cy="369332"/>
+          </a:xfrm>
+          <a:prstGeom prst="rect">
+            <a:avLst/>
+          </a:prstGeom>
+          <a:noFill/>
+        </p:spPr>
+        <p:txBody>
+          <a:bodyPr wrap="none" rtlCol="0">
+            <a:spAutoFit/>
+          </a:bodyPr>
+          <a:lstStyle/>
+          <a:p>
+            <a:r>
+              <a:rPr lang="en-CH" dirty="0">
+                <a:latin typeface="Sora" pitchFamily="2" charset="0"/>
+                <a:cs typeface="Sora" pitchFamily="2" charset="0"/>
+              </a:rPr>
+              <a:t>Consumers</a:t>
+            </a:r>
+          </a:p>
+        </p:txBody>
+      </p:sp>
+      <p:sp>
+        <p:nvSpPr>
+          <p:cNvPr id="8" name="Right Arrow 7">
+            <a:extLst>
+              <a:ext uri="{FF2B5EF4-FFF2-40B4-BE49-F238E27FC236}">
+                <a16:creationId xmlns:a16="http://schemas.microsoft.com/office/drawing/2014/main" id="{225B5CA8-A686-208D-6721-5B5B31B398F4}"/>
+              </a:ext>
+            </a:extLst>
+          </p:cNvPr>
+          <p:cNvSpPr/>
+          <p:nvPr/>
+        </p:nvSpPr>
+        <p:spPr>
+          <a:xfrm>
+            <a:off x="1343113" y="3645649"/>
+            <a:ext cx="1394906" cy="563878"/>
+          </a:xfrm>
+          <a:prstGeom prst="leftArrow">
+            <a:avLst/>
+          </a:prstGeom>
+          <a:solidFill>
+            <a:schemeClr val="accent1">
+              <a:lumMod val="40000"/>
+              <a:lumOff val="60000"/>
+            </a:schemeClr>
+          </a:solidFill>
+          <a:ln w="25400">
+            <a:solidFill>
+              <a:schemeClr val="tx2"/>
+            </a:solidFill>
+          </a:ln>
+        </p:spPr>
+        <p:style>
+          <a:lnRef idx="2">
+            <a:schemeClr val="accent1">
+              <a:shade val="15000"/>
+            </a:schemeClr>
+          </a:lnRef>
+          <a:fillRef idx="1">
+            <a:schemeClr val="accent1"/>
+          </a:fillRef>
+          <a:effectRef idx="0">
+            <a:schemeClr val="accent1"/>
+          </a:effectRef>
+          <a:fontRef idx="minor">
+            <a:schemeClr val="lt1"/>
+          </a:fontRef>
+        </p:style>
+        <p:txBody>
+          <a:bodyPr rtlCol="0" anchor="ctr"/>
+          <a:lstStyle/>
+          <a:p>
+            <a:pPr algn="ctr"/>
+            <a:r>
+              <a:rPr lang="en-CH" sz="1400" dirty="0">
+                <a:solidFill>
+                  <a:schemeClr val="accent2"/>
+                </a:solidFill>
+                <a:latin typeface="Sora" pitchFamily="2" charset="0"/>
+                <a:cs typeface="Sora" pitchFamily="2" charset="0"/>
+              </a:rPr>
+              <a:t>Output</a:t>
+            </a:r>
+            <a:endParaRPr lang="en-CH" dirty="0">
+              <a:solidFill>
+                <a:schemeClr val="accent2"/>
+              </a:solidFill>
+              <a:latin typeface="Sora" pitchFamily="2" charset="0"/>
+              <a:cs typeface="Sora" pitchFamily="2" charset="0"/>
+            </a:endParaRPr>
+          </a:p>
+        </p:txBody>
+      </p:sp>
+      <p:sp>
+        <p:nvSpPr>
+          <p:cNvPr id="4" name="Left-right Arrow 3">
+            <a:extLst>
+              <a:ext uri="{FF2B5EF4-FFF2-40B4-BE49-F238E27FC236}">
+                <a16:creationId xmlns:a16="http://schemas.microsoft.com/office/drawing/2014/main" id="{F5F164A1-CDDA-FAA4-0BCF-AB849777251D}"/>
+              </a:ext>
+            </a:extLst>
+          </p:cNvPr>
+          <p:cNvSpPr/>
+          <p:nvPr/>
+        </p:nvSpPr>
+        <p:spPr>
+          <a:xfrm>
+            <a:off x="7667233" y="4411222"/>
+            <a:ext cx="1475338" cy="572173"/>
+          </a:xfrm>
+          <a:prstGeom prst="leftRightArrow">
+            <a:avLst/>
+          </a:prstGeom>
+          <a:solidFill>
+            <a:schemeClr val="accent1">
+              <a:lumMod val="40000"/>
+              <a:lumOff val="60000"/>
+            </a:schemeClr>
+          </a:solidFill>
+          <a:ln w="25400">
+            <a:solidFill>
+              <a:schemeClr val="accent2"/>
+            </a:solidFill>
+          </a:ln>
+        </p:spPr>
+        <p:style>
+          <a:lnRef idx="2">
+            <a:schemeClr val="accent1">
+              <a:shade val="15000"/>
+            </a:schemeClr>
+          </a:lnRef>
+          <a:fillRef idx="1">
+            <a:schemeClr val="accent1"/>
+          </a:fillRef>
+          <a:effectRef idx="0">
+            <a:schemeClr val="accent1"/>
+          </a:effectRef>
+          <a:fontRef idx="minor">
+            <a:schemeClr val="lt1"/>
+          </a:fontRef>
+        </p:style>
+        <p:txBody>
+          <a:bodyPr rtlCol="0" anchor="ctr"/>
+          <a:lstStyle/>
+          <a:p>
+            <a:pPr algn="ctr"/>
+            <a:endParaRPr lang="en-CH" sz="1050" dirty="0">
+              <a:latin typeface="Sora" pitchFamily="2" charset="0"/>
+              <a:cs typeface="Sora" pitchFamily="2" charset="0"/>
+            </a:endParaRPr>
+          </a:p>
+        </p:txBody>
+      </p:sp>
+      <p:pic>
+        <p:nvPicPr>
+          <p:cNvPr id="12" name="Picture 11">
+            <a:extLst>
+              <a:ext uri="{FF2B5EF4-FFF2-40B4-BE49-F238E27FC236}">
+                <a16:creationId xmlns:a16="http://schemas.microsoft.com/office/drawing/2014/main" id="{A92E67FC-4C29-FBD8-7543-0CBD9408834B}"/>
+              </a:ext>
+            </a:extLst>
+          </p:cNvPr>
+          <p:cNvPicPr>
+            <a:picLocks noChangeAspect="1"/>
+          </p:cNvPicPr>
+          <p:nvPr/>
+        </p:nvPicPr>
+        <p:blipFill>
+          <a:blip r:embed="rId2"/>
+          <a:stretch>
+            <a:fillRect/>
+          </a:stretch>
+        </p:blipFill>
+        <p:spPr>
+          <a:xfrm>
+            <a:off x="7811172" y="4384663"/>
+            <a:ext cx="875405" cy="625289"/>
+          </a:xfrm>
+          <a:prstGeom prst="rect">
+            <a:avLst/>
+          </a:prstGeom>
+        </p:spPr>
+      </p:pic>
+      <p:sp>
+        <p:nvSpPr>
+          <p:cNvPr id="14" name="TextBox 13">
+            <a:extLst>
+              <a:ext uri="{FF2B5EF4-FFF2-40B4-BE49-F238E27FC236}">
+                <a16:creationId xmlns:a16="http://schemas.microsoft.com/office/drawing/2014/main" id="{12915806-01CB-B976-156A-3F43C15B2C70}"/>
+              </a:ext>
+            </a:extLst>
+          </p:cNvPr>
+          <p:cNvSpPr txBox="1"/>
+          <p:nvPr/>
+        </p:nvSpPr>
+        <p:spPr>
+          <a:xfrm>
+            <a:off x="8550181" y="4597942"/>
+            <a:ext cx="461986" cy="230832"/>
+          </a:xfrm>
+          <a:prstGeom prst="rect">
+            <a:avLst/>
+          </a:prstGeom>
+          <a:noFill/>
+        </p:spPr>
+        <p:txBody>
+          <a:bodyPr wrap="none" rtlCol="0">
+            <a:spAutoFit/>
+          </a:bodyPr>
+          <a:lstStyle/>
+          <a:p>
+            <a:r>
+              <a:rPr lang="en-CH" sz="900" dirty="0">
+                <a:solidFill>
+                  <a:srgbClr val="424143"/>
+                </a:solidFill>
+                <a:latin typeface="Sora" pitchFamily="2" charset="0"/>
+                <a:cs typeface="Sora" pitchFamily="2" charset="0"/>
+              </a:rPr>
+              <a:t>&amp; Co</a:t>
+            </a:r>
+          </a:p>
+        </p:txBody>
+      </p:sp>
+      <p:sp>
+        <p:nvSpPr>
+          <p:cNvPr id="13" name="Rectangle 12">
+            <a:extLst>
+              <a:ext uri="{FF2B5EF4-FFF2-40B4-BE49-F238E27FC236}">
+                <a16:creationId xmlns:a16="http://schemas.microsoft.com/office/drawing/2014/main" id="{61555AAA-EAA9-3DFF-B1FE-F33011064DC0}"/>
+              </a:ext>
+            </a:extLst>
+          </p:cNvPr>
+          <p:cNvSpPr/>
+          <p:nvPr/>
+        </p:nvSpPr>
+        <p:spPr>
+          <a:xfrm>
+            <a:off x="6486391" y="1663548"/>
+            <a:ext cx="1591705" cy="2445921"/>
+          </a:xfrm>
+          <a:prstGeom prst="rect">
+            <a:avLst/>
+          </a:prstGeom>
+          <a:ln w="50800">
+            <a:solidFill>
+              <a:schemeClr val="tx2"/>
+            </a:solidFill>
+          </a:ln>
+        </p:spPr>
+        <p:style>
+          <a:lnRef idx="2">
+            <a:schemeClr val="accent1">
+              <a:shade val="15000"/>
+            </a:schemeClr>
+          </a:lnRef>
+          <a:fillRef idx="1">
+            <a:schemeClr val="accent1"/>
+          </a:fillRef>
+          <a:effectRef idx="0">
+            <a:schemeClr val="accent1"/>
+          </a:effectRef>
+          <a:fontRef idx="minor">
+            <a:schemeClr val="lt1"/>
+          </a:fontRef>
+        </p:style>
+        <p:txBody>
+          <a:bodyPr rtlCol="0" anchor="ctr"/>
+          <a:lstStyle/>
+          <a:p>
+            <a:pPr algn="ctr"/>
+            <a:endParaRPr lang="en-CH" dirty="0">
+              <a:latin typeface="Sora" pitchFamily="2" charset="0"/>
+              <a:cs typeface="Sora" pitchFamily="2" charset="0"/>
+            </a:endParaRPr>
+          </a:p>
+        </p:txBody>
+      </p:sp>
+      <p:sp>
+        <p:nvSpPr>
+          <p:cNvPr id="16" name="Left-right Arrow 15">
+            <a:extLst>
+              <a:ext uri="{FF2B5EF4-FFF2-40B4-BE49-F238E27FC236}">
+                <a16:creationId xmlns:a16="http://schemas.microsoft.com/office/drawing/2014/main" id="{87678275-C4AC-6493-75CD-43156CC573E4}"/>
+              </a:ext>
+            </a:extLst>
+          </p:cNvPr>
+          <p:cNvSpPr/>
+          <p:nvPr/>
+        </p:nvSpPr>
+        <p:spPr>
+          <a:xfrm>
+            <a:off x="5688987" y="1726556"/>
+            <a:ext cx="1344972" cy="572173"/>
+          </a:xfrm>
+          <a:prstGeom prst="leftRightArrow">
+            <a:avLst/>
+          </a:prstGeom>
+          <a:solidFill>
+            <a:schemeClr val="accent1">
+              <a:lumMod val="40000"/>
+              <a:lumOff val="60000"/>
+            </a:schemeClr>
+          </a:solidFill>
+          <a:ln w="25400">
+            <a:solidFill>
+              <a:schemeClr val="accent2"/>
+            </a:solidFill>
+          </a:ln>
+        </p:spPr>
+        <p:style>
+          <a:lnRef idx="2">
+            <a:schemeClr val="accent1">
+              <a:shade val="15000"/>
+            </a:schemeClr>
+          </a:lnRef>
+          <a:fillRef idx="1">
+            <a:schemeClr val="accent1"/>
+          </a:fillRef>
+          <a:effectRef idx="0">
+            <a:schemeClr val="accent1"/>
+          </a:effectRef>
+          <a:fontRef idx="minor">
+            <a:schemeClr val="lt1"/>
+          </a:fontRef>
+        </p:style>
+        <p:txBody>
+          <a:bodyPr rtlCol="0" anchor="ctr"/>
+          <a:lstStyle/>
+          <a:p>
+            <a:pPr algn="ctr"/>
+            <a:r>
+              <a:rPr lang="en-CH" sz="800" dirty="0">
+                <a:solidFill>
+                  <a:schemeClr val="accent2"/>
+                </a:solidFill>
+                <a:latin typeface="Sora" pitchFamily="2" charset="0"/>
+                <a:cs typeface="Sora" pitchFamily="2" charset="0"/>
+              </a:rPr>
+              <a:t>Function Calling</a:t>
+            </a:r>
+          </a:p>
+        </p:txBody>
+      </p:sp>
+      <p:sp>
+        <p:nvSpPr>
+          <p:cNvPr id="17" name="Left-right Arrow 16">
+            <a:extLst>
+              <a:ext uri="{FF2B5EF4-FFF2-40B4-BE49-F238E27FC236}">
+                <a16:creationId xmlns:a16="http://schemas.microsoft.com/office/drawing/2014/main" id="{623D173D-852B-4BFA-719E-11928965D9B7}"/>
+              </a:ext>
+            </a:extLst>
+          </p:cNvPr>
+          <p:cNvSpPr/>
+          <p:nvPr/>
+        </p:nvSpPr>
+        <p:spPr>
+          <a:xfrm>
+            <a:off x="5676614" y="2371775"/>
+            <a:ext cx="1344972" cy="572173"/>
+          </a:xfrm>
+          <a:prstGeom prst="leftRightArrow">
+            <a:avLst/>
+          </a:prstGeom>
+          <a:solidFill>
+            <a:schemeClr val="accent1">
+              <a:lumMod val="40000"/>
+              <a:lumOff val="60000"/>
+            </a:schemeClr>
+          </a:solidFill>
+          <a:ln w="25400">
+            <a:solidFill>
+              <a:schemeClr val="accent2"/>
+            </a:solidFill>
+          </a:ln>
+        </p:spPr>
+        <p:style>
+          <a:lnRef idx="2">
+            <a:schemeClr val="accent1">
+              <a:shade val="15000"/>
+            </a:schemeClr>
+          </a:lnRef>
+          <a:fillRef idx="1">
+            <a:schemeClr val="accent1"/>
+          </a:fillRef>
+          <a:effectRef idx="0">
+            <a:schemeClr val="accent1"/>
+          </a:effectRef>
+          <a:fontRef idx="minor">
+            <a:schemeClr val="lt1"/>
+          </a:fontRef>
+        </p:style>
+        <p:txBody>
+          <a:bodyPr rtlCol="0" anchor="ctr"/>
+          <a:lstStyle/>
+          <a:p>
+            <a:pPr algn="ctr"/>
+            <a:r>
+              <a:rPr lang="en-CH" sz="800" dirty="0">
+                <a:solidFill>
+                  <a:schemeClr val="accent2"/>
+                </a:solidFill>
+                <a:latin typeface="Sora" pitchFamily="2" charset="0"/>
+                <a:cs typeface="Sora" pitchFamily="2" charset="0"/>
+              </a:rPr>
+              <a:t>             MCP</a:t>
+            </a:r>
+          </a:p>
+        </p:txBody>
+      </p:sp>
+      <p:pic>
+        <p:nvPicPr>
+          <p:cNvPr id="15" name="Picture 14">
+            <a:extLst>
+              <a:ext uri="{FF2B5EF4-FFF2-40B4-BE49-F238E27FC236}">
+                <a16:creationId xmlns:a16="http://schemas.microsoft.com/office/drawing/2014/main" id="{7BC44996-69EE-2FC6-A39C-C4E7820A6A6C}"/>
+              </a:ext>
+            </a:extLst>
+          </p:cNvPr>
+          <p:cNvPicPr>
+            <a:picLocks noChangeAspect="1"/>
+          </p:cNvPicPr>
+          <p:nvPr/>
+        </p:nvPicPr>
+        <p:blipFill>
+          <a:blip r:embed="rId3"/>
+          <a:stretch>
+            <a:fillRect/>
+          </a:stretch>
+        </p:blipFill>
+        <p:spPr>
+          <a:xfrm>
+            <a:off x="6111699" y="2550033"/>
+            <a:ext cx="202621" cy="202621"/>
+          </a:xfrm>
+          <a:prstGeom prst="rect">
+            <a:avLst/>
+          </a:prstGeom>
+        </p:spPr>
+      </p:pic>
+      <p:sp>
+        <p:nvSpPr>
+          <p:cNvPr id="20" name="Left-right Arrow 19">
+            <a:extLst>
+              <a:ext uri="{FF2B5EF4-FFF2-40B4-BE49-F238E27FC236}">
+                <a16:creationId xmlns:a16="http://schemas.microsoft.com/office/drawing/2014/main" id="{CD883534-6E9E-15D2-50B8-1EACE2C84E87}"/>
+              </a:ext>
+            </a:extLst>
+          </p:cNvPr>
+          <p:cNvSpPr/>
+          <p:nvPr/>
+        </p:nvSpPr>
+        <p:spPr>
+          <a:xfrm>
+            <a:off x="5682691" y="3016994"/>
+            <a:ext cx="1344972" cy="572173"/>
+          </a:xfrm>
+          <a:prstGeom prst="leftRightArrow">
+            <a:avLst/>
+          </a:prstGeom>
+          <a:solidFill>
+            <a:schemeClr val="accent1">
+              <a:lumMod val="40000"/>
+              <a:lumOff val="60000"/>
+            </a:schemeClr>
+          </a:solidFill>
+          <a:ln w="25400">
+            <a:solidFill>
+              <a:schemeClr val="accent2"/>
+            </a:solidFill>
+          </a:ln>
+        </p:spPr>
+        <p:style>
+          <a:lnRef idx="2">
+            <a:schemeClr val="accent1">
+              <a:shade val="15000"/>
+            </a:schemeClr>
+          </a:lnRef>
+          <a:fillRef idx="1">
+            <a:schemeClr val="accent1"/>
+          </a:fillRef>
+          <a:effectRef idx="0">
+            <a:schemeClr val="accent1"/>
+          </a:effectRef>
+          <a:fontRef idx="minor">
+            <a:schemeClr val="lt1"/>
+          </a:fontRef>
+        </p:style>
+        <p:txBody>
+          <a:bodyPr rtlCol="0" anchor="ctr"/>
+          <a:lstStyle/>
+          <a:p>
+            <a:pPr algn="ctr"/>
+            <a:r>
+              <a:rPr lang="en-CH" sz="800" dirty="0">
+                <a:solidFill>
+                  <a:schemeClr val="accent2"/>
+                </a:solidFill>
+                <a:latin typeface="Sora" pitchFamily="2" charset="0"/>
+                <a:cs typeface="Sora" pitchFamily="2" charset="0"/>
+              </a:rPr>
+              <a:t>Agent Skills</a:t>
+            </a:r>
+          </a:p>
+        </p:txBody>
+      </p:sp>
+      <p:sp>
+        <p:nvSpPr>
+          <p:cNvPr id="21" name="TextBox 20">
+            <a:extLst>
+              <a:ext uri="{FF2B5EF4-FFF2-40B4-BE49-F238E27FC236}">
+                <a16:creationId xmlns:a16="http://schemas.microsoft.com/office/drawing/2014/main" id="{6AA74CE2-DBC1-8630-D1A4-54A6CFFAA6CD}"/>
+              </a:ext>
+            </a:extLst>
+          </p:cNvPr>
+          <p:cNvSpPr txBox="1"/>
+          <p:nvPr/>
+        </p:nvSpPr>
+        <p:spPr>
+          <a:xfrm rot="16200000">
+            <a:off x="6693238" y="2736848"/>
+            <a:ext cx="1329627" cy="369332"/>
+          </a:xfrm>
+          <a:prstGeom prst="rect">
+            <a:avLst/>
+          </a:prstGeom>
+          <a:noFill/>
+        </p:spPr>
+        <p:txBody>
+          <a:bodyPr wrap="square" rtlCol="0">
+            <a:spAutoFit/>
+          </a:bodyPr>
+          <a:lstStyle/>
+          <a:p>
+            <a:endParaRPr lang="en-CH" sz="200" dirty="0">
+              <a:latin typeface="Sora" pitchFamily="2" charset="0"/>
+              <a:cs typeface="Sora" pitchFamily="2" charset="0"/>
+            </a:endParaRPr>
+          </a:p>
+          <a:p>
+            <a:r>
+              <a:rPr lang="en-CH" sz="1600" dirty="0">
+                <a:solidFill>
+                  <a:schemeClr val="lt1"/>
+                </a:solidFill>
+                <a:latin typeface="Sora" pitchFamily="2" charset="0"/>
+                <a:cs typeface="Sora" pitchFamily="2" charset="0"/>
+              </a:rPr>
+              <a:t>Workflows</a:t>
+            </a:r>
+          </a:p>
+        </p:txBody>
+      </p:sp>
+      <p:pic>
+        <p:nvPicPr>
+          <p:cNvPr id="23" name="Picture 22">
+            <a:extLst>
+              <a:ext uri="{FF2B5EF4-FFF2-40B4-BE49-F238E27FC236}">
+                <a16:creationId xmlns:a16="http://schemas.microsoft.com/office/drawing/2014/main" id="{71E1CFF0-2EBF-68E9-9471-266E36C939E8}"/>
+              </a:ext>
+            </a:extLst>
+          </p:cNvPr>
+          <p:cNvPicPr>
+            <a:picLocks noChangeAspect="1"/>
+          </p:cNvPicPr>
+          <p:nvPr/>
+        </p:nvPicPr>
+        <p:blipFill>
+          <a:blip r:embed="rId4"/>
+          <a:stretch>
+            <a:fillRect/>
+          </a:stretch>
+        </p:blipFill>
+        <p:spPr>
+          <a:xfrm>
+            <a:off x="7128681" y="1768581"/>
+            <a:ext cx="493370" cy="488122"/>
+          </a:xfrm>
+          <a:prstGeom prst="rect">
+            <a:avLst/>
+          </a:prstGeom>
+        </p:spPr>
+      </p:pic>
+      <p:pic>
+        <p:nvPicPr>
+          <p:cNvPr id="24" name="Picture 23">
+            <a:extLst>
+              <a:ext uri="{FF2B5EF4-FFF2-40B4-BE49-F238E27FC236}">
+                <a16:creationId xmlns:a16="http://schemas.microsoft.com/office/drawing/2014/main" id="{111E5123-261D-7D56-531A-81ECD9373DD1}"/>
+              </a:ext>
+            </a:extLst>
+          </p:cNvPr>
+          <p:cNvPicPr>
+            <a:picLocks noChangeAspect="1"/>
+          </p:cNvPicPr>
+          <p:nvPr/>
+        </p:nvPicPr>
+        <p:blipFill>
+          <a:blip r:embed="rId5"/>
+          <a:stretch>
+            <a:fillRect/>
+          </a:stretch>
+        </p:blipFill>
+        <p:spPr>
+          <a:xfrm>
+            <a:off x="7173385" y="3636601"/>
+            <a:ext cx="369332" cy="369332"/>
+          </a:xfrm>
+          <a:prstGeom prst="rect">
+            <a:avLst/>
+          </a:prstGeom>
+        </p:spPr>
+      </p:pic>
+      <p:sp>
+        <p:nvSpPr>
+          <p:cNvPr id="25" name="Left-right Arrow 24">
+            <a:extLst>
+              <a:ext uri="{FF2B5EF4-FFF2-40B4-BE49-F238E27FC236}">
+                <a16:creationId xmlns:a16="http://schemas.microsoft.com/office/drawing/2014/main" id="{ED1F880D-F54A-5CB5-55F0-CF119DB38086}"/>
+              </a:ext>
+            </a:extLst>
+          </p:cNvPr>
+          <p:cNvSpPr/>
+          <p:nvPr/>
+        </p:nvSpPr>
+        <p:spPr>
+          <a:xfrm>
+            <a:off x="7650439" y="2587630"/>
+            <a:ext cx="1475338" cy="572173"/>
+          </a:xfrm>
+          <a:prstGeom prst="leftRightArrow">
+            <a:avLst/>
+          </a:prstGeom>
+          <a:solidFill>
+            <a:schemeClr val="accent1">
+              <a:lumMod val="40000"/>
+              <a:lumOff val="60000"/>
+            </a:schemeClr>
+          </a:solidFill>
+          <a:ln w="25400">
+            <a:solidFill>
+              <a:schemeClr val="accent2"/>
+            </a:solidFill>
+          </a:ln>
+        </p:spPr>
+        <p:style>
+          <a:lnRef idx="2">
+            <a:schemeClr val="accent1">
+              <a:shade val="15000"/>
+            </a:schemeClr>
+          </a:lnRef>
+          <a:fillRef idx="1">
+            <a:schemeClr val="accent1"/>
+          </a:fillRef>
+          <a:effectRef idx="0">
+            <a:schemeClr val="accent1"/>
+          </a:effectRef>
+          <a:fontRef idx="minor">
+            <a:schemeClr val="lt1"/>
+          </a:fontRef>
+        </p:style>
+        <p:txBody>
+          <a:bodyPr rtlCol="0" anchor="ctr"/>
+          <a:lstStyle/>
+          <a:p>
+            <a:pPr algn="ctr"/>
+            <a:endParaRPr lang="en-CH" sz="1050" dirty="0">
+              <a:latin typeface="Sora" pitchFamily="2" charset="0"/>
+              <a:cs typeface="Sora" pitchFamily="2" charset="0"/>
+            </a:endParaRPr>
+          </a:p>
+        </p:txBody>
+      </p:sp>
+      <p:pic>
+        <p:nvPicPr>
+          <p:cNvPr id="26" name="Picture 25">
+            <a:extLst>
+              <a:ext uri="{FF2B5EF4-FFF2-40B4-BE49-F238E27FC236}">
+                <a16:creationId xmlns:a16="http://schemas.microsoft.com/office/drawing/2014/main" id="{CCEC855A-7B14-E2C2-EFE1-737E8A13F8CF}"/>
+              </a:ext>
+            </a:extLst>
+          </p:cNvPr>
+          <p:cNvPicPr>
+            <a:picLocks noChangeAspect="1"/>
+          </p:cNvPicPr>
+          <p:nvPr/>
+        </p:nvPicPr>
+        <p:blipFill>
+          <a:blip r:embed="rId2"/>
+          <a:stretch>
+            <a:fillRect/>
+          </a:stretch>
+        </p:blipFill>
+        <p:spPr>
+          <a:xfrm>
+            <a:off x="7794378" y="2561071"/>
+            <a:ext cx="875405" cy="625289"/>
+          </a:xfrm>
+          <a:prstGeom prst="rect">
+            <a:avLst/>
+          </a:prstGeom>
+        </p:spPr>
+      </p:pic>
+      <p:sp>
+        <p:nvSpPr>
+          <p:cNvPr id="27" name="TextBox 26">
+            <a:extLst>
+              <a:ext uri="{FF2B5EF4-FFF2-40B4-BE49-F238E27FC236}">
+                <a16:creationId xmlns:a16="http://schemas.microsoft.com/office/drawing/2014/main" id="{5A18F686-EEDC-8F80-47E4-9D31532984A0}"/>
+              </a:ext>
+            </a:extLst>
+          </p:cNvPr>
+          <p:cNvSpPr txBox="1"/>
+          <p:nvPr/>
+        </p:nvSpPr>
+        <p:spPr>
+          <a:xfrm>
+            <a:off x="8533387" y="2774350"/>
+            <a:ext cx="461986" cy="230832"/>
+          </a:xfrm>
+          <a:prstGeom prst="rect">
+            <a:avLst/>
+          </a:prstGeom>
+          <a:noFill/>
+        </p:spPr>
+        <p:txBody>
+          <a:bodyPr wrap="none" rtlCol="0">
+            <a:spAutoFit/>
+          </a:bodyPr>
+          <a:lstStyle/>
+          <a:p>
+            <a:r>
+              <a:rPr lang="en-CH" sz="900" dirty="0">
+                <a:solidFill>
+                  <a:srgbClr val="424143"/>
+                </a:solidFill>
+                <a:latin typeface="Sora" pitchFamily="2" charset="0"/>
+                <a:cs typeface="Sora" pitchFamily="2" charset="0"/>
+              </a:rPr>
+              <a:t>&amp; Co</a:t>
+            </a:r>
+          </a:p>
+        </p:txBody>
+      </p:sp>
+    </p:spTree>
+    <p:extLst>
+      <p:ext uri="{BB962C8B-B14F-4D97-AF65-F5344CB8AC3E}">
+        <p14:creationId xmlns:p14="http://schemas.microsoft.com/office/powerpoint/2010/main" val="3674448614"/>
+      </p:ext>
+    </p:extLst>
+  </p:cSld>
+  <p:clrMapOvr>
+    <a:masterClrMapping/>
+  </p:clrMapOvr>
+</p:sld>
+</file>
+
+<file path=ppt/slides/slide11.xml><?xml version="1.0" encoding="utf-8"?>
+<p:sld xmlns:a="http://schemas.openxmlformats.org/drawingml/2006/main" xmlns:r="http://schemas.openxmlformats.org/officeDocument/2006/relationships" xmlns:p="http://schemas.openxmlformats.org/presentationml/2006/main">
+  <p:cSld>
+    <p:spTree>
+      <p:nvGrpSpPr>
+        <p:cNvPr id="1" name="">
+          <a:extLst>
+            <a:ext uri="{FF2B5EF4-FFF2-40B4-BE49-F238E27FC236}">
               <a16:creationId xmlns:a16="http://schemas.microsoft.com/office/drawing/2014/main" id="{76DC0C7B-3D4C-4A81-88B2-21A67D18B0D1}"/>
             </a:ext>
           </a:extLst>
@@ -4183,6 +5486,188 @@
           <a:chExt cx="0" cy="0"/>
         </a:xfrm>
       </p:grpSpPr>
+      <p:grpSp>
+        <p:nvGrpSpPr>
+          <p:cNvPr id="19" name="Group 18">
+            <a:extLst>
+              <a:ext uri="{FF2B5EF4-FFF2-40B4-BE49-F238E27FC236}">
+                <a16:creationId xmlns:a16="http://schemas.microsoft.com/office/drawing/2014/main" id="{C16E00A8-064D-4280-1ADB-C212AF603DBC}"/>
+              </a:ext>
+            </a:extLst>
+          </p:cNvPr>
+          <p:cNvGrpSpPr/>
+          <p:nvPr/>
+        </p:nvGrpSpPr>
+        <p:grpSpPr>
+          <a:xfrm rot="6108404">
+            <a:off x="5832063" y="2307678"/>
+            <a:ext cx="1009774" cy="2445921"/>
+            <a:chOff x="759858" y="4218575"/>
+            <a:chExt cx="1009774" cy="2445921"/>
+          </a:xfrm>
+        </p:grpSpPr>
+        <p:sp>
+          <p:nvSpPr>
+            <p:cNvPr id="4" name="Rectangle 3">
+              <a:extLst>
+                <a:ext uri="{FF2B5EF4-FFF2-40B4-BE49-F238E27FC236}">
+                  <a16:creationId xmlns:a16="http://schemas.microsoft.com/office/drawing/2014/main" id="{E46232ED-D535-87EA-F84E-EFFB7F566477}"/>
+                </a:ext>
+              </a:extLst>
+            </p:cNvPr>
+            <p:cNvSpPr/>
+            <p:nvPr/>
+          </p:nvSpPr>
+          <p:spPr>
+            <a:xfrm>
+              <a:off x="759858" y="4218575"/>
+              <a:ext cx="1009774" cy="2445921"/>
+            </a:xfrm>
+            <a:prstGeom prst="rect">
+              <a:avLst/>
+            </a:prstGeom>
+            <a:ln w="50800">
+              <a:solidFill>
+                <a:schemeClr val="tx2"/>
+              </a:solidFill>
+            </a:ln>
+          </p:spPr>
+          <p:style>
+            <a:lnRef idx="2">
+              <a:schemeClr val="accent1">
+                <a:shade val="15000"/>
+              </a:schemeClr>
+            </a:lnRef>
+            <a:fillRef idx="1">
+              <a:schemeClr val="accent1"/>
+            </a:fillRef>
+            <a:effectRef idx="0">
+              <a:schemeClr val="accent1"/>
+            </a:effectRef>
+            <a:fontRef idx="minor">
+              <a:schemeClr val="lt1"/>
+            </a:fontRef>
+          </p:style>
+          <p:txBody>
+            <a:bodyPr rtlCol="0" anchor="ctr"/>
+            <a:lstStyle/>
+            <a:p>
+              <a:pPr algn="ctr"/>
+              <a:endParaRPr lang="en-CH" dirty="0">
+                <a:latin typeface="Sora" pitchFamily="2" charset="0"/>
+                <a:cs typeface="Sora" pitchFamily="2" charset="0"/>
+              </a:endParaRPr>
+            </a:p>
+          </p:txBody>
+        </p:sp>
+        <p:sp>
+          <p:nvSpPr>
+            <p:cNvPr id="12" name="TextBox 11">
+              <a:extLst>
+                <a:ext uri="{FF2B5EF4-FFF2-40B4-BE49-F238E27FC236}">
+                  <a16:creationId xmlns:a16="http://schemas.microsoft.com/office/drawing/2014/main" id="{3474629A-8395-9E7A-2DA2-209A85D1E06C}"/>
+                </a:ext>
+              </a:extLst>
+            </p:cNvPr>
+            <p:cNvSpPr txBox="1"/>
+            <p:nvPr/>
+          </p:nvSpPr>
+          <p:spPr>
+            <a:xfrm rot="16200000">
+              <a:off x="581572" y="5291875"/>
+              <a:ext cx="1329627" cy="369332"/>
+            </a:xfrm>
+            <a:prstGeom prst="rect">
+              <a:avLst/>
+            </a:prstGeom>
+            <a:noFill/>
+          </p:spPr>
+          <p:txBody>
+            <a:bodyPr wrap="square" rtlCol="0">
+              <a:spAutoFit/>
+            </a:bodyPr>
+            <a:lstStyle/>
+            <a:p>
+              <a:endParaRPr lang="en-CH" sz="200" dirty="0">
+                <a:latin typeface="Sora" pitchFamily="2" charset="0"/>
+                <a:cs typeface="Sora" pitchFamily="2" charset="0"/>
+              </a:endParaRPr>
+            </a:p>
+            <a:p>
+              <a:r>
+                <a:rPr lang="en-CH" sz="1600" dirty="0">
+                  <a:solidFill>
+                    <a:schemeClr val="lt1"/>
+                  </a:solidFill>
+                  <a:latin typeface="Sora" pitchFamily="2" charset="0"/>
+                  <a:cs typeface="Sora" pitchFamily="2" charset="0"/>
+                </a:rPr>
+                <a:t>Workflows</a:t>
+              </a:r>
+            </a:p>
+          </p:txBody>
+        </p:sp>
+        <p:pic>
+          <p:nvPicPr>
+            <p:cNvPr id="15" name="Picture 14">
+              <a:extLst>
+                <a:ext uri="{FF2B5EF4-FFF2-40B4-BE49-F238E27FC236}">
+                  <a16:creationId xmlns:a16="http://schemas.microsoft.com/office/drawing/2014/main" id="{6DD91352-AE4A-72C9-E4D5-95EF59AB9FAB}"/>
+                </a:ext>
+              </a:extLst>
+            </p:cNvPr>
+            <p:cNvPicPr>
+              <a:picLocks noChangeAspect="1"/>
+            </p:cNvPicPr>
+            <p:nvPr/>
+          </p:nvPicPr>
+          <p:blipFill>
+            <a:blip r:embed="rId2"/>
+            <a:stretch>
+              <a:fillRect/>
+            </a:stretch>
+          </p:blipFill>
+          <p:spPr>
+            <a:xfrm>
+              <a:off x="1017015" y="4323608"/>
+              <a:ext cx="493370" cy="488122"/>
+            </a:xfrm>
+            <a:prstGeom prst="rect">
+              <a:avLst/>
+            </a:prstGeom>
+          </p:spPr>
+        </p:pic>
+        <p:pic>
+          <p:nvPicPr>
+            <p:cNvPr id="16" name="Picture 15">
+              <a:extLst>
+                <a:ext uri="{FF2B5EF4-FFF2-40B4-BE49-F238E27FC236}">
+                  <a16:creationId xmlns:a16="http://schemas.microsoft.com/office/drawing/2014/main" id="{F80E7ABE-E4BF-5B6B-8CE7-8C9B04E3AF48}"/>
+                </a:ext>
+              </a:extLst>
+            </p:cNvPr>
+            <p:cNvPicPr>
+              <a:picLocks noChangeAspect="1"/>
+            </p:cNvPicPr>
+            <p:nvPr/>
+          </p:nvPicPr>
+          <p:blipFill>
+            <a:blip r:embed="rId3"/>
+            <a:stretch>
+              <a:fillRect/>
+            </a:stretch>
+          </p:blipFill>
+          <p:spPr>
+            <a:xfrm>
+              <a:off x="1061719" y="6191628"/>
+              <a:ext cx="369332" cy="369332"/>
+            </a:xfrm>
+            <a:prstGeom prst="rect">
+              <a:avLst/>
+            </a:prstGeom>
+          </p:spPr>
+        </p:pic>
+      </p:grpSp>
       <p:sp>
         <p:nvSpPr>
           <p:cNvPr id="6" name="Rectangle 5">
@@ -5036,7 +6521,7 @@
         </p:nvSpPr>
         <p:spPr>
           <a:xfrm rot="-1020000">
-            <a:off x="5763732" y="3789503"/>
+            <a:off x="5367691" y="4122570"/>
             <a:ext cx="1475338" cy="572173"/>
           </a:xfrm>
           <a:prstGeom prst="leftRightArrow">
@@ -5237,7 +6722,7 @@
             <p:nvPr/>
           </p:nvPicPr>
           <p:blipFill>
-            <a:blip r:embed="rId2"/>
+            <a:blip r:embed="rId4"/>
             <a:stretch>
               <a:fillRect/>
             </a:stretch>
@@ -5439,7 +6924,7 @@
           <p:nvPr/>
         </p:nvPicPr>
         <p:blipFill>
-          <a:blip r:embed="rId3"/>
+          <a:blip r:embed="rId5"/>
           <a:stretch>
             <a:fillRect/>
           </a:stretch>
@@ -5526,7 +7011,7 @@
           <p:nvPr/>
         </p:nvPicPr>
         <p:blipFill>
-          <a:blip r:embed="rId4"/>
+          <a:blip r:embed="rId6"/>
           <a:stretch>
             <a:fillRect/>
           </a:stretch>
@@ -5556,7 +7041,7 @@
           <p:nvPr/>
         </p:nvPicPr>
         <p:blipFill>
-          <a:blip r:embed="rId5"/>
+          <a:blip r:embed="rId7"/>
           <a:stretch>
             <a:fillRect/>
           </a:stretch>
@@ -5586,7 +7071,7 @@
           <p:nvPr/>
         </p:nvPicPr>
         <p:blipFill>
-          <a:blip r:embed="rId6"/>
+          <a:blip r:embed="rId8"/>
           <a:stretch>
             <a:fillRect/>
           </a:stretch>
@@ -14386,15 +15871,6 @@
 </file>
 
 <file path=customXml/item1.xml><?xml version="1.0" encoding="utf-8"?>
-<?mso-contentType ?>
-<FormTemplates xmlns="http://schemas.microsoft.com/sharepoint/v3/contenttype/forms">
-  <Display>DocumentLibraryForm</Display>
-  <Edit>DocumentLibraryForm</Edit>
-  <New>DocumentLibraryForm</New>
-</FormTemplates>
-</file>
-
-<file path=customXml/item2.xml><?xml version="1.0" encoding="utf-8"?>
 <ct:contentTypeSchema xmlns:ct="http://schemas.microsoft.com/office/2006/metadata/contentType" xmlns:ma="http://schemas.microsoft.com/office/2006/metadata/properties/metaAttributes" ct:_="" ma:_="" ma:contentTypeName="Document" ma:contentTypeID="0x010100CD401524DC532D42A0E0ED886331A72B" ma:contentTypeVersion="13" ma:contentTypeDescription="Create a new document." ma:contentTypeScope="" ma:versionID="d936d863d335d354da51eb78ca1ae338">
   <xsd:schema xmlns:xsd="http://www.w3.org/2001/XMLSchema" xmlns:xs="http://www.w3.org/2001/XMLSchema" xmlns:p="http://schemas.microsoft.com/office/2006/metadata/properties" xmlns:ns2="f577acbf-5b0b-4b4f-9948-268e97f8d3a4" xmlns:ns3="b1e4d6ee-9f6f-43f8-a618-24f3d84da28f" targetNamespace="http://schemas.microsoft.com/office/2006/metadata/properties" ma:root="true" ma:fieldsID="5fbac08d56b1b04aa33acbc31e882ce9" ns2:_="" ns3:_="">
     <xsd:import namespace="f577acbf-5b0b-4b4f-9948-268e97f8d3a4"/>
@@ -14638,6 +16114,15 @@
 </ct:contentTypeSchema>
 </file>
 
+<file path=customXml/item2.xml><?xml version="1.0" encoding="utf-8"?>
+<?mso-contentType ?>
+<FormTemplates xmlns="http://schemas.microsoft.com/sharepoint/v3/contenttype/forms">
+  <Display>DocumentLibraryForm</Display>
+  <Edit>DocumentLibraryForm</Edit>
+  <New>DocumentLibraryForm</New>
+</FormTemplates>
+</file>
+
 <file path=customXml/item3.xml><?xml version="1.0" encoding="utf-8"?>
 <p:properties xmlns:p="http://schemas.microsoft.com/office/2006/metadata/properties" xmlns:xsi="http://www.w3.org/2001/XMLSchema-instance" xmlns:pc="http://schemas.microsoft.com/office/infopath/2007/PartnerControls">
   <documentManagement>
@@ -14648,14 +16133,6 @@
 </file>
 
 <file path=customXml/itemProps1.xml><?xml version="1.0" encoding="utf-8"?>
-<ds:datastoreItem xmlns:ds="http://schemas.openxmlformats.org/officeDocument/2006/customXml" ds:itemID="{E21AFCC0-734A-4A90-A597-A1CB34860DCD}">
-  <ds:schemaRefs>
-    <ds:schemaRef ds:uri="http://schemas.microsoft.com/sharepoint/v3/contenttype/forms"/>
-  </ds:schemaRefs>
-</ds:datastoreItem>
-</file>
-
-<file path=customXml/itemProps2.xml><?xml version="1.0" encoding="utf-8"?>
 <ds:datastoreItem xmlns:ds="http://schemas.openxmlformats.org/officeDocument/2006/customXml" ds:itemID="{A79EAE08-AAD0-49B9-BF66-164C225CC523}">
   <ds:schemaRefs>
     <ds:schemaRef ds:uri="http://schemas.microsoft.com/office/2006/metadata/contentType"/>
@@ -14670,6 +16147,14 @@
     <ds:schemaRef ds:uri="http://purl.org/dc/elements/1.1/"/>
     <ds:schemaRef ds:uri="http://purl.org/dc/terms/"/>
     <ds:schemaRef ds:uri="http://schemas.microsoft.com/internal/obd"/>
+  </ds:schemaRefs>
+</ds:datastoreItem>
+</file>
+
+<file path=customXml/itemProps2.xml><?xml version="1.0" encoding="utf-8"?>
+<ds:datastoreItem xmlns:ds="http://schemas.openxmlformats.org/officeDocument/2006/customXml" ds:itemID="{E21AFCC0-734A-4A90-A597-A1CB34860DCD}">
+  <ds:schemaRefs>
+    <ds:schemaRef ds:uri="http://schemas.microsoft.com/sharepoint/v3/contenttype/forms"/>
   </ds:schemaRefs>
 </ds:datastoreItem>
 </file>

--- a/nordic-apis-2026/img/solution-composability.pptx
+++ b/nordic-apis-2026/img/solution-composability.pptx
@@ -269,7 +269,7 @@
           <a:p>
             <a:fld id="{37A2730A-859E-B540-ADF3-E97069AD1FDB}" type="datetimeFigureOut">
               <a:rPr lang="en-US" smtClean="0"/>
-              <a:t>10/10/26</a:t>
+              <a:t>10/11/26</a:t>
             </a:fld>
             <a:endParaRPr lang="en-US"/>
           </a:p>
@@ -467,7 +467,7 @@
           <a:p>
             <a:fld id="{37A2730A-859E-B540-ADF3-E97069AD1FDB}" type="datetimeFigureOut">
               <a:rPr lang="en-US" smtClean="0"/>
-              <a:t>10/10/26</a:t>
+              <a:t>10/11/26</a:t>
             </a:fld>
             <a:endParaRPr lang="en-US"/>
           </a:p>
@@ -675,7 +675,7 @@
           <a:p>
             <a:fld id="{37A2730A-859E-B540-ADF3-E97069AD1FDB}" type="datetimeFigureOut">
               <a:rPr lang="en-US" smtClean="0"/>
-              <a:t>10/10/26</a:t>
+              <a:t>10/11/26</a:t>
             </a:fld>
             <a:endParaRPr lang="en-US"/>
           </a:p>
@@ -873,7 +873,7 @@
           <a:p>
             <a:fld id="{37A2730A-859E-B540-ADF3-E97069AD1FDB}" type="datetimeFigureOut">
               <a:rPr lang="en-US" smtClean="0"/>
-              <a:t>10/10/26</a:t>
+              <a:t>10/11/26</a:t>
             </a:fld>
             <a:endParaRPr lang="en-US"/>
           </a:p>
@@ -1148,7 +1148,7 @@
           <a:p>
             <a:fld id="{37A2730A-859E-B540-ADF3-E97069AD1FDB}" type="datetimeFigureOut">
               <a:rPr lang="en-US" smtClean="0"/>
-              <a:t>10/10/26</a:t>
+              <a:t>10/11/26</a:t>
             </a:fld>
             <a:endParaRPr lang="en-US"/>
           </a:p>
@@ -1413,7 +1413,7 @@
           <a:p>
             <a:fld id="{37A2730A-859E-B540-ADF3-E97069AD1FDB}" type="datetimeFigureOut">
               <a:rPr lang="en-US" smtClean="0"/>
-              <a:t>10/10/26</a:t>
+              <a:t>10/11/26</a:t>
             </a:fld>
             <a:endParaRPr lang="en-US"/>
           </a:p>
@@ -1825,7 +1825,7 @@
           <a:p>
             <a:fld id="{37A2730A-859E-B540-ADF3-E97069AD1FDB}" type="datetimeFigureOut">
               <a:rPr lang="en-US" smtClean="0"/>
-              <a:t>10/10/26</a:t>
+              <a:t>10/11/26</a:t>
             </a:fld>
             <a:endParaRPr lang="en-US"/>
           </a:p>
@@ -1966,7 +1966,7 @@
           <a:p>
             <a:fld id="{37A2730A-859E-B540-ADF3-E97069AD1FDB}" type="datetimeFigureOut">
               <a:rPr lang="en-US" smtClean="0"/>
-              <a:t>10/10/26</a:t>
+              <a:t>10/11/26</a:t>
             </a:fld>
             <a:endParaRPr lang="en-US"/>
           </a:p>
@@ -2079,7 +2079,7 @@
           <a:p>
             <a:fld id="{37A2730A-859E-B540-ADF3-E97069AD1FDB}" type="datetimeFigureOut">
               <a:rPr lang="en-US" smtClean="0"/>
-              <a:t>10/10/26</a:t>
+              <a:t>10/11/26</a:t>
             </a:fld>
             <a:endParaRPr lang="en-US"/>
           </a:p>
@@ -2390,7 +2390,7 @@
           <a:p>
             <a:fld id="{37A2730A-859E-B540-ADF3-E97069AD1FDB}" type="datetimeFigureOut">
               <a:rPr lang="en-US" smtClean="0"/>
-              <a:t>10/10/26</a:t>
+              <a:t>10/11/26</a:t>
             </a:fld>
             <a:endParaRPr lang="en-US"/>
           </a:p>
@@ -2678,7 +2678,7 @@
           <a:p>
             <a:fld id="{37A2730A-859E-B540-ADF3-E97069AD1FDB}" type="datetimeFigureOut">
               <a:rPr lang="en-US" smtClean="0"/>
-              <a:t>10/10/26</a:t>
+              <a:t>10/11/26</a:t>
             </a:fld>
             <a:endParaRPr lang="en-US"/>
           </a:p>
@@ -2919,7 +2919,7 @@
           <a:p>
             <a:fld id="{37A2730A-859E-B540-ADF3-E97069AD1FDB}" type="datetimeFigureOut">
               <a:rPr lang="en-US" smtClean="0"/>
-              <a:t>10/10/26</a:t>
+              <a:t>10/11/26</a:t>
             </a:fld>
             <a:endParaRPr lang="en-US"/>
           </a:p>
@@ -4320,56 +4320,6 @@
           </a:p>
           <a:p>
             <a:pPr algn="ctr"/>
-            <a:endParaRPr lang="en-CH" dirty="0">
-              <a:solidFill>
-                <a:schemeClr val="accent2"/>
-              </a:solidFill>
-              <a:latin typeface="Sora" pitchFamily="2" charset="0"/>
-              <a:cs typeface="Sora" pitchFamily="2" charset="0"/>
-            </a:endParaRPr>
-          </a:p>
-          <a:p>
-            <a:pPr algn="ctr"/>
-            <a:endParaRPr lang="en-CH" dirty="0">
-              <a:solidFill>
-                <a:schemeClr val="accent2"/>
-              </a:solidFill>
-              <a:latin typeface="Sora" pitchFamily="2" charset="0"/>
-              <a:cs typeface="Sora" pitchFamily="2" charset="0"/>
-            </a:endParaRPr>
-          </a:p>
-          <a:p>
-            <a:pPr algn="ctr"/>
-            <a:endParaRPr lang="en-CH" dirty="0">
-              <a:solidFill>
-                <a:schemeClr val="accent2"/>
-              </a:solidFill>
-              <a:latin typeface="Sora" pitchFamily="2" charset="0"/>
-              <a:cs typeface="Sora" pitchFamily="2" charset="0"/>
-            </a:endParaRPr>
-          </a:p>
-          <a:p>
-            <a:pPr algn="ctr"/>
-            <a:endParaRPr lang="en-CH" dirty="0">
-              <a:solidFill>
-                <a:schemeClr val="accent2"/>
-              </a:solidFill>
-              <a:latin typeface="Sora" pitchFamily="2" charset="0"/>
-              <a:cs typeface="Sora" pitchFamily="2" charset="0"/>
-            </a:endParaRPr>
-          </a:p>
-          <a:p>
-            <a:pPr algn="ctr"/>
-            <a:endParaRPr lang="en-CH" dirty="0">
-              <a:solidFill>
-                <a:schemeClr val="accent2"/>
-              </a:solidFill>
-              <a:latin typeface="Sora" pitchFamily="2" charset="0"/>
-              <a:cs typeface="Sora" pitchFamily="2" charset="0"/>
-            </a:endParaRPr>
-          </a:p>
-          <a:p>
-            <a:pPr algn="ctr"/>
             <a:r>
               <a:rPr lang="en-CH" dirty="0">
                 <a:solidFill>
@@ -4378,7 +4328,7 @@
                 <a:latin typeface="Sora" pitchFamily="2" charset="0"/>
                 <a:cs typeface="Sora" pitchFamily="2" charset="0"/>
               </a:rPr>
-              <a:t>     APIs</a:t>
+              <a:t>    APIs</a:t>
             </a:r>
           </a:p>
           <a:p>
@@ -4391,7 +4341,7 @@
                 <a:latin typeface="Sora" pitchFamily="2" charset="0"/>
                 <a:cs typeface="Sora" pitchFamily="2" charset="0"/>
               </a:rPr>
-              <a:t>     &amp;</a:t>
+              <a:t>    &amp;</a:t>
             </a:r>
           </a:p>
           <a:p>
@@ -4404,7 +4354,7 @@
                 <a:latin typeface="Sora" pitchFamily="2" charset="0"/>
                 <a:cs typeface="Sora" pitchFamily="2" charset="0"/>
               </a:rPr>
-              <a:t>     Data</a:t>
+              <a:t>    Data</a:t>
             </a:r>
           </a:p>
         </p:txBody>
@@ -15871,6 +15821,15 @@
 </file>
 
 <file path=customXml/item1.xml><?xml version="1.0" encoding="utf-8"?>
+<?mso-contentType ?>
+<FormTemplates xmlns="http://schemas.microsoft.com/sharepoint/v3/contenttype/forms">
+  <Display>DocumentLibraryForm</Display>
+  <Edit>DocumentLibraryForm</Edit>
+  <New>DocumentLibraryForm</New>
+</FormTemplates>
+</file>
+
+<file path=customXml/item2.xml><?xml version="1.0" encoding="utf-8"?>
 <ct:contentTypeSchema xmlns:ct="http://schemas.microsoft.com/office/2006/metadata/contentType" xmlns:ma="http://schemas.microsoft.com/office/2006/metadata/properties/metaAttributes" ct:_="" ma:_="" ma:contentTypeName="Document" ma:contentTypeID="0x010100CD401524DC532D42A0E0ED886331A72B" ma:contentTypeVersion="13" ma:contentTypeDescription="Create a new document." ma:contentTypeScope="" ma:versionID="d936d863d335d354da51eb78ca1ae338">
   <xsd:schema xmlns:xsd="http://www.w3.org/2001/XMLSchema" xmlns:xs="http://www.w3.org/2001/XMLSchema" xmlns:p="http://schemas.microsoft.com/office/2006/metadata/properties" xmlns:ns2="f577acbf-5b0b-4b4f-9948-268e97f8d3a4" xmlns:ns3="b1e4d6ee-9f6f-43f8-a618-24f3d84da28f" targetNamespace="http://schemas.microsoft.com/office/2006/metadata/properties" ma:root="true" ma:fieldsID="5fbac08d56b1b04aa33acbc31e882ce9" ns2:_="" ns3:_="">
     <xsd:import namespace="f577acbf-5b0b-4b4f-9948-268e97f8d3a4"/>
@@ -16114,15 +16073,6 @@
 </ct:contentTypeSchema>
 </file>
 
-<file path=customXml/item2.xml><?xml version="1.0" encoding="utf-8"?>
-<?mso-contentType ?>
-<FormTemplates xmlns="http://schemas.microsoft.com/sharepoint/v3/contenttype/forms">
-  <Display>DocumentLibraryForm</Display>
-  <Edit>DocumentLibraryForm</Edit>
-  <New>DocumentLibraryForm</New>
-</FormTemplates>
-</file>
-
 <file path=customXml/item3.xml><?xml version="1.0" encoding="utf-8"?>
 <p:properties xmlns:p="http://schemas.microsoft.com/office/2006/metadata/properties" xmlns:xsi="http://www.w3.org/2001/XMLSchema-instance" xmlns:pc="http://schemas.microsoft.com/office/infopath/2007/PartnerControls">
   <documentManagement>
@@ -16133,6 +16083,14 @@
 </file>
 
 <file path=customXml/itemProps1.xml><?xml version="1.0" encoding="utf-8"?>
+<ds:datastoreItem xmlns:ds="http://schemas.openxmlformats.org/officeDocument/2006/customXml" ds:itemID="{E21AFCC0-734A-4A90-A597-A1CB34860DCD}">
+  <ds:schemaRefs>
+    <ds:schemaRef ds:uri="http://schemas.microsoft.com/sharepoint/v3/contenttype/forms"/>
+  </ds:schemaRefs>
+</ds:datastoreItem>
+</file>
+
+<file path=customXml/itemProps2.xml><?xml version="1.0" encoding="utf-8"?>
 <ds:datastoreItem xmlns:ds="http://schemas.openxmlformats.org/officeDocument/2006/customXml" ds:itemID="{A79EAE08-AAD0-49B9-BF66-164C225CC523}">
   <ds:schemaRefs>
     <ds:schemaRef ds:uri="http://schemas.microsoft.com/office/2006/metadata/contentType"/>
@@ -16147,14 +16105,6 @@
     <ds:schemaRef ds:uri="http://purl.org/dc/elements/1.1/"/>
     <ds:schemaRef ds:uri="http://purl.org/dc/terms/"/>
     <ds:schemaRef ds:uri="http://schemas.microsoft.com/internal/obd"/>
-  </ds:schemaRefs>
-</ds:datastoreItem>
-</file>
-
-<file path=customXml/itemProps2.xml><?xml version="1.0" encoding="utf-8"?>
-<ds:datastoreItem xmlns:ds="http://schemas.openxmlformats.org/officeDocument/2006/customXml" ds:itemID="{E21AFCC0-734A-4A90-A597-A1CB34860DCD}">
-  <ds:schemaRefs>
-    <ds:schemaRef ds:uri="http://schemas.microsoft.com/sharepoint/v3/contenttype/forms"/>
   </ds:schemaRefs>
 </ds:datastoreItem>
 </file>

--- a/nordic-apis-2026/img/solution-composability.pptx
+++ b/nordic-apis-2026/img/solution-composability.pptx
@@ -4932,6 +4932,58 @@
               <a:cs typeface="Sora" pitchFamily="2" charset="0"/>
             </a:endParaRPr>
           </a:p>
+          <a:p>
+            <a:pPr algn="ctr"/>
+            <a:endParaRPr lang="en-CH" dirty="0">
+              <a:latin typeface="Sora" pitchFamily="2" charset="0"/>
+              <a:cs typeface="Sora" pitchFamily="2" charset="0"/>
+            </a:endParaRPr>
+          </a:p>
+          <a:p>
+            <a:pPr algn="ctr"/>
+            <a:endParaRPr lang="en-CH" dirty="0">
+              <a:latin typeface="Sora" pitchFamily="2" charset="0"/>
+              <a:cs typeface="Sora" pitchFamily="2" charset="0"/>
+            </a:endParaRPr>
+          </a:p>
+          <a:p>
+            <a:pPr algn="ctr"/>
+            <a:endParaRPr lang="en-CH" dirty="0">
+              <a:latin typeface="Sora" pitchFamily="2" charset="0"/>
+              <a:cs typeface="Sora" pitchFamily="2" charset="0"/>
+            </a:endParaRPr>
+          </a:p>
+          <a:p>
+            <a:pPr algn="ctr"/>
+            <a:endParaRPr lang="en-CH" dirty="0">
+              <a:latin typeface="Sora" pitchFamily="2" charset="0"/>
+              <a:cs typeface="Sora" pitchFamily="2" charset="0"/>
+            </a:endParaRPr>
+          </a:p>
+          <a:p>
+            <a:pPr algn="ctr"/>
+            <a:endParaRPr lang="en-CH" dirty="0">
+              <a:latin typeface="Sora" pitchFamily="2" charset="0"/>
+              <a:cs typeface="Sora" pitchFamily="2" charset="0"/>
+            </a:endParaRPr>
+          </a:p>
+          <a:p>
+            <a:pPr algn="ctr"/>
+            <a:endParaRPr lang="en-CH" dirty="0">
+              <a:latin typeface="Sora" pitchFamily="2" charset="0"/>
+              <a:cs typeface="Sora" pitchFamily="2" charset="0"/>
+            </a:endParaRPr>
+          </a:p>
+          <a:p>
+            <a:pPr algn="ctr"/>
+            <a:r>
+              <a:rPr lang="en-CH" dirty="0">
+                <a:latin typeface="Sora" pitchFamily="2" charset="0"/>
+                <a:cs typeface="Sora" pitchFamily="2" charset="0"/>
+              </a:rPr>
+              <a:t>Workflows</a:t>
+            </a:r>
+          </a:p>
         </p:txBody>
       </p:sp>
       <p:sp>
@@ -5162,53 +5214,6 @@
           </a:p>
         </p:txBody>
       </p:sp>
-      <p:sp>
-        <p:nvSpPr>
-          <p:cNvPr id="21" name="TextBox 20">
-            <a:extLst>
-              <a:ext uri="{FF2B5EF4-FFF2-40B4-BE49-F238E27FC236}">
-                <a16:creationId xmlns:a16="http://schemas.microsoft.com/office/drawing/2014/main" id="{6AA74CE2-DBC1-8630-D1A4-54A6CFFAA6CD}"/>
-              </a:ext>
-            </a:extLst>
-          </p:cNvPr>
-          <p:cNvSpPr txBox="1"/>
-          <p:nvPr/>
-        </p:nvSpPr>
-        <p:spPr>
-          <a:xfrm rot="16200000">
-            <a:off x="6693238" y="2736848"/>
-            <a:ext cx="1329627" cy="369332"/>
-          </a:xfrm>
-          <a:prstGeom prst="rect">
-            <a:avLst/>
-          </a:prstGeom>
-          <a:noFill/>
-        </p:spPr>
-        <p:txBody>
-          <a:bodyPr wrap="square" rtlCol="0">
-            <a:spAutoFit/>
-          </a:bodyPr>
-          <a:lstStyle/>
-          <a:p>
-            <a:endParaRPr lang="en-CH" sz="200" dirty="0">
-              <a:latin typeface="Sora" pitchFamily="2" charset="0"/>
-              <a:cs typeface="Sora" pitchFamily="2" charset="0"/>
-            </a:endParaRPr>
-          </a:p>
-          <a:p>
-            <a:r>
-              <a:rPr lang="en-CH" sz="1600" dirty="0">
-                <a:solidFill>
-                  <a:schemeClr val="lt1"/>
-                </a:solidFill>
-                <a:latin typeface="Sora" pitchFamily="2" charset="0"/>
-                <a:cs typeface="Sora" pitchFamily="2" charset="0"/>
-              </a:rPr>
-              <a:t>Workflows</a:t>
-            </a:r>
-          </a:p>
-        </p:txBody>
-      </p:sp>
       <p:pic>
         <p:nvPicPr>
           <p:cNvPr id="23" name="Picture 22">
@@ -5231,7 +5236,7 @@
         </p:blipFill>
         <p:spPr>
           <a:xfrm>
-            <a:off x="7128681" y="1768581"/>
+            <a:off x="7104941" y="2061017"/>
             <a:ext cx="493370" cy="488122"/>
           </a:xfrm>
           <a:prstGeom prst="rect">
@@ -5261,7 +5266,7 @@
         </p:blipFill>
         <p:spPr>
           <a:xfrm>
-            <a:off x="7173385" y="3636601"/>
+            <a:off x="7173385" y="2721508"/>
             <a:ext cx="369332" cy="369332"/>
           </a:xfrm>
           <a:prstGeom prst="rect">

--- a/nordic-apis-2026/img/solution-composability.pptx
+++ b/nordic-apis-2026/img/solution-composability.pptx
@@ -5441,6 +5441,267 @@
           <a:chExt cx="0" cy="0"/>
         </a:xfrm>
       </p:grpSpPr>
+      <p:cxnSp>
+        <p:nvCxnSpPr>
+          <p:cNvPr id="9" name="Straight Connector 8">
+            <a:extLst>
+              <a:ext uri="{FF2B5EF4-FFF2-40B4-BE49-F238E27FC236}">
+                <a16:creationId xmlns:a16="http://schemas.microsoft.com/office/drawing/2014/main" id="{5CC1ABF8-3F65-093E-B197-103EDF570F7F}"/>
+              </a:ext>
+            </a:extLst>
+          </p:cNvPr>
+          <p:cNvCxnSpPr>
+            <a:cxnSpLocks/>
+          </p:cNvCxnSpPr>
+          <p:nvPr/>
+        </p:nvCxnSpPr>
+        <p:spPr>
+          <a:xfrm>
+            <a:off x="8419652" y="1245196"/>
+            <a:ext cx="0" cy="4682268"/>
+          </a:xfrm>
+          <a:prstGeom prst="line">
+            <a:avLst/>
+          </a:prstGeom>
+          <a:ln w="254000">
+            <a:solidFill>
+              <a:schemeClr val="tx2"/>
+            </a:solidFill>
+          </a:ln>
+        </p:spPr>
+        <p:style>
+          <a:lnRef idx="1">
+            <a:schemeClr val="accent1"/>
+          </a:lnRef>
+          <a:fillRef idx="0">
+            <a:schemeClr val="accent1"/>
+          </a:fillRef>
+          <a:effectRef idx="0">
+            <a:schemeClr val="accent1"/>
+          </a:effectRef>
+          <a:fontRef idx="minor">
+            <a:schemeClr val="tx1"/>
+          </a:fontRef>
+        </p:style>
+      </p:cxnSp>
+      <p:sp>
+        <p:nvSpPr>
+          <p:cNvPr id="6" name="Rectangle 5">
+            <a:extLst>
+              <a:ext uri="{FF2B5EF4-FFF2-40B4-BE49-F238E27FC236}">
+                <a16:creationId xmlns:a16="http://schemas.microsoft.com/office/drawing/2014/main" id="{5866FDE8-6D6C-959F-E621-9FEBD5ADA6BA}"/>
+              </a:ext>
+            </a:extLst>
+          </p:cNvPr>
+          <p:cNvSpPr/>
+          <p:nvPr/>
+        </p:nvSpPr>
+        <p:spPr>
+          <a:xfrm>
+            <a:off x="8753138" y="1663549"/>
+            <a:ext cx="1398488" cy="3530899"/>
+          </a:xfrm>
+          <a:prstGeom prst="rect">
+            <a:avLst/>
+          </a:prstGeom>
+          <a:solidFill>
+            <a:schemeClr val="accent1">
+              <a:lumMod val="40000"/>
+              <a:lumOff val="60000"/>
+            </a:schemeClr>
+          </a:solidFill>
+          <a:ln w="50800">
+            <a:solidFill>
+              <a:schemeClr val="tx2"/>
+            </a:solidFill>
+          </a:ln>
+        </p:spPr>
+        <p:style>
+          <a:lnRef idx="2">
+            <a:schemeClr val="accent1">
+              <a:shade val="15000"/>
+            </a:schemeClr>
+          </a:lnRef>
+          <a:fillRef idx="1">
+            <a:schemeClr val="accent1"/>
+          </a:fillRef>
+          <a:effectRef idx="0">
+            <a:schemeClr val="accent1"/>
+          </a:effectRef>
+          <a:fontRef idx="minor">
+            <a:schemeClr val="lt1"/>
+          </a:fontRef>
+        </p:style>
+        <p:txBody>
+          <a:bodyPr rtlCol="0" anchor="ctr"/>
+          <a:lstStyle/>
+          <a:p>
+            <a:pPr algn="ctr"/>
+            <a:r>
+              <a:rPr lang="en-CH" dirty="0">
+                <a:solidFill>
+                  <a:schemeClr val="accent2"/>
+                </a:solidFill>
+                <a:latin typeface="Sora" pitchFamily="2" charset="0"/>
+                <a:cs typeface="Sora" pitchFamily="2" charset="0"/>
+              </a:rPr>
+              <a:t>      APIs</a:t>
+            </a:r>
+          </a:p>
+          <a:p>
+            <a:pPr algn="ctr"/>
+            <a:r>
+              <a:rPr lang="en-CH" dirty="0">
+                <a:solidFill>
+                  <a:schemeClr val="accent2"/>
+                </a:solidFill>
+                <a:latin typeface="Sora" pitchFamily="2" charset="0"/>
+                <a:cs typeface="Sora" pitchFamily="2" charset="0"/>
+              </a:rPr>
+              <a:t>     &amp;</a:t>
+            </a:r>
+            <a:br>
+              <a:rPr lang="en-CH" dirty="0">
+                <a:solidFill>
+                  <a:schemeClr val="accent2"/>
+                </a:solidFill>
+                <a:latin typeface="Sora" pitchFamily="2" charset="0"/>
+                <a:cs typeface="Sora" pitchFamily="2" charset="0"/>
+              </a:rPr>
+            </a:br>
+            <a:r>
+              <a:rPr lang="en-CH" dirty="0">
+                <a:solidFill>
+                  <a:schemeClr val="accent2"/>
+                </a:solidFill>
+                <a:latin typeface="Sora" pitchFamily="2" charset="0"/>
+                <a:cs typeface="Sora" pitchFamily="2" charset="0"/>
+              </a:rPr>
+              <a:t>     Data</a:t>
+            </a:r>
+          </a:p>
+        </p:txBody>
+      </p:sp>
+      <p:sp>
+        <p:nvSpPr>
+          <p:cNvPr id="7" name="Freeform 6">
+            <a:extLst>
+              <a:ext uri="{FF2B5EF4-FFF2-40B4-BE49-F238E27FC236}">
+                <a16:creationId xmlns:a16="http://schemas.microsoft.com/office/drawing/2014/main" id="{3C1CE304-FE95-1502-A2C6-BCD998125FC6}"/>
+              </a:ext>
+            </a:extLst>
+          </p:cNvPr>
+          <p:cNvSpPr/>
+          <p:nvPr/>
+        </p:nvSpPr>
+        <p:spPr>
+          <a:xfrm rot="-240000">
+            <a:off x="3230000" y="3900000"/>
+            <a:ext cx="2950000" cy="1150000"/>
+          </a:xfrm>
+          <a:prstGeom prst="rect">
+            <a:avLst/>
+          </a:prstGeom>
+          <a:solidFill>
+            <a:schemeClr val="accent1"/>
+          </a:solidFill>
+          <a:ln w="50800">
+            <a:solidFill>
+              <a:schemeClr val="tx2"/>
+            </a:solidFill>
+          </a:ln>
+        </p:spPr>
+        <p:style>
+          <a:lnRef idx="2">
+            <a:schemeClr val="accent1">
+              <a:shade val="15000"/>
+            </a:schemeClr>
+          </a:lnRef>
+          <a:fillRef idx="1">
+            <a:schemeClr val="accent1"/>
+          </a:fillRef>
+          <a:effectRef idx="0">
+            <a:schemeClr val="accent1"/>
+          </a:effectRef>
+          <a:fontRef idx="minor">
+            <a:schemeClr val="lt1"/>
+          </a:fontRef>
+        </p:style>
+        <p:txBody>
+          <a:bodyPr rtlCol="0" anchor="ctr"/>
+          <a:lstStyle/>
+          <a:p>
+            <a:pPr algn="ctr"/>
+            <a:r>
+              <a:rPr lang="en-CH" dirty="0">
+                <a:latin typeface="Sora" pitchFamily="2" charset="0"/>
+                <a:cs typeface="Sora" pitchFamily="2" charset="0"/>
+              </a:rPr>
+              <a:t>Deterministic</a:t>
+            </a:r>
+          </a:p>
+        </p:txBody>
+      </p:sp>
+      <p:sp>
+        <p:nvSpPr>
+          <p:cNvPr id="5" name="Rectangle 4">
+            <a:extLst>
+              <a:ext uri="{FF2B5EF4-FFF2-40B4-BE49-F238E27FC236}">
+                <a16:creationId xmlns:a16="http://schemas.microsoft.com/office/drawing/2014/main" id="{FCD42EBA-3A36-C077-A178-30ECC2553D5E}"/>
+              </a:ext>
+            </a:extLst>
+          </p:cNvPr>
+          <p:cNvSpPr/>
+          <p:nvPr/>
+        </p:nvSpPr>
+        <p:spPr>
+          <a:xfrm rot="180000">
+            <a:off x="3260000" y="1750000"/>
+            <a:ext cx="2050000" cy="1650000"/>
+          </a:xfrm>
+          <a:prstGeom prst="rect">
+            <a:avLst/>
+          </a:prstGeom>
+          <a:solidFill>
+            <a:schemeClr val="tx2"/>
+          </a:solidFill>
+          <a:ln w="50800">
+            <a:solidFill>
+              <a:schemeClr val="accent1"/>
+            </a:solidFill>
+          </a:ln>
+        </p:spPr>
+        <p:style>
+          <a:lnRef idx="2">
+            <a:schemeClr val="accent1">
+              <a:shade val="15000"/>
+            </a:schemeClr>
+          </a:lnRef>
+          <a:fillRef idx="1">
+            <a:schemeClr val="accent1"/>
+          </a:fillRef>
+          <a:effectRef idx="0">
+            <a:schemeClr val="accent1"/>
+          </a:effectRef>
+          <a:fontRef idx="minor">
+            <a:schemeClr val="lt1"/>
+          </a:fontRef>
+        </p:style>
+        <p:txBody>
+          <a:bodyPr rtlCol="0" anchor="ctr"/>
+          <a:lstStyle/>
+          <a:p>
+            <a:pPr algn="ctr"/>
+            <a:r>
+              <a:rPr lang="en-CH" dirty="0">
+                <a:latin typeface="Sora" pitchFamily="2" charset="0"/>
+                <a:cs typeface="Sora" pitchFamily="2" charset="0"/>
+              </a:rPr>
+              <a:t>GenAI</a:t>
+            </a:r>
+          </a:p>
+        </p:txBody>
+      </p:sp>
       <p:grpSp>
         <p:nvGrpSpPr>
           <p:cNvPr id="19" name="Group 18">
@@ -5454,8 +5715,8 @@
           <p:nvPr/>
         </p:nvGrpSpPr>
         <p:grpSpPr>
-          <a:xfrm rot="6108404">
-            <a:off x="5832063" y="2307678"/>
+          <a:xfrm rot="5724151">
+            <a:off x="8018087" y="3303012"/>
             <a:ext cx="1009774" cy="2445921"/>
             <a:chOff x="759858" y="4218575"/>
             <a:chExt cx="1009774" cy="2445921"/>
@@ -5625,224 +5886,6 @@
       </p:grpSp>
       <p:sp>
         <p:nvSpPr>
-          <p:cNvPr id="6" name="Rectangle 5">
-            <a:extLst>
-              <a:ext uri="{FF2B5EF4-FFF2-40B4-BE49-F238E27FC236}">
-                <a16:creationId xmlns:a16="http://schemas.microsoft.com/office/drawing/2014/main" id="{5866FDE8-6D6C-959F-E621-9FEBD5ADA6BA}"/>
-              </a:ext>
-            </a:extLst>
-          </p:cNvPr>
-          <p:cNvSpPr/>
-          <p:nvPr/>
-        </p:nvSpPr>
-        <p:spPr>
-          <a:xfrm>
-            <a:off x="8753138" y="1663549"/>
-            <a:ext cx="1398488" cy="3530899"/>
-          </a:xfrm>
-          <a:prstGeom prst="rect">
-            <a:avLst/>
-          </a:prstGeom>
-          <a:solidFill>
-            <a:schemeClr val="accent1">
-              <a:lumMod val="40000"/>
-              <a:lumOff val="60000"/>
-            </a:schemeClr>
-          </a:solidFill>
-          <a:ln w="50800">
-            <a:solidFill>
-              <a:schemeClr val="tx2"/>
-            </a:solidFill>
-          </a:ln>
-        </p:spPr>
-        <p:style>
-          <a:lnRef idx="2">
-            <a:schemeClr val="accent1">
-              <a:shade val="15000"/>
-            </a:schemeClr>
-          </a:lnRef>
-          <a:fillRef idx="1">
-            <a:schemeClr val="accent1"/>
-          </a:fillRef>
-          <a:effectRef idx="0">
-            <a:schemeClr val="accent1"/>
-          </a:effectRef>
-          <a:fontRef idx="minor">
-            <a:schemeClr val="lt1"/>
-          </a:fontRef>
-        </p:style>
-        <p:txBody>
-          <a:bodyPr rtlCol="0" anchor="ctr"/>
-          <a:lstStyle/>
-          <a:p>
-            <a:pPr algn="ctr"/>
-            <a:r>
-              <a:rPr lang="en-CH" dirty="0">
-                <a:solidFill>
-                  <a:schemeClr val="accent2"/>
-                </a:solidFill>
-                <a:latin typeface="Sora" pitchFamily="2" charset="0"/>
-                <a:cs typeface="Sora" pitchFamily="2" charset="0"/>
-              </a:rPr>
-              <a:t>      APIs</a:t>
-            </a:r>
-          </a:p>
-          <a:p>
-            <a:pPr algn="ctr"/>
-            <a:r>
-              <a:rPr lang="en-CH" dirty="0">
-                <a:solidFill>
-                  <a:schemeClr val="accent2"/>
-                </a:solidFill>
-                <a:latin typeface="Sora" pitchFamily="2" charset="0"/>
-                <a:cs typeface="Sora" pitchFamily="2" charset="0"/>
-              </a:rPr>
-              <a:t>     &amp;</a:t>
-            </a:r>
-            <a:br>
-              <a:rPr lang="en-CH" dirty="0">
-                <a:solidFill>
-                  <a:schemeClr val="accent2"/>
-                </a:solidFill>
-                <a:latin typeface="Sora" pitchFamily="2" charset="0"/>
-                <a:cs typeface="Sora" pitchFamily="2" charset="0"/>
-              </a:rPr>
-            </a:br>
-            <a:r>
-              <a:rPr lang="en-CH" dirty="0">
-                <a:solidFill>
-                  <a:schemeClr val="accent2"/>
-                </a:solidFill>
-                <a:latin typeface="Sora" pitchFamily="2" charset="0"/>
-                <a:cs typeface="Sora" pitchFamily="2" charset="0"/>
-              </a:rPr>
-              <a:t>     Data</a:t>
-            </a:r>
-          </a:p>
-        </p:txBody>
-      </p:sp>
-      <p:sp>
-        <p:nvSpPr>
-          <p:cNvPr id="7" name="Freeform 6">
-            <a:extLst>
-              <a:ext uri="{FF2B5EF4-FFF2-40B4-BE49-F238E27FC236}">
-                <a16:creationId xmlns:a16="http://schemas.microsoft.com/office/drawing/2014/main" id="{3C1CE304-FE95-1502-A2C6-BCD998125FC6}"/>
-              </a:ext>
-            </a:extLst>
-          </p:cNvPr>
-          <p:cNvSpPr/>
-          <p:nvPr/>
-        </p:nvSpPr>
-        <p:spPr>
-          <a:xfrm rot="-240000">
-            <a:off x="3230000" y="3900000"/>
-            <a:ext cx="2950000" cy="1150000"/>
-          </a:xfrm>
-          <a:prstGeom prst="rect">
-            <a:avLst/>
-          </a:prstGeom>
-          <a:solidFill>
-            <a:schemeClr val="accent1"/>
-          </a:solidFill>
-          <a:ln w="50800">
-            <a:solidFill>
-              <a:schemeClr val="tx2"/>
-            </a:solidFill>
-          </a:ln>
-        </p:spPr>
-        <p:style>
-          <a:lnRef idx="2">
-            <a:schemeClr val="accent1">
-              <a:shade val="15000"/>
-            </a:schemeClr>
-          </a:lnRef>
-          <a:fillRef idx="1">
-            <a:schemeClr val="accent1"/>
-          </a:fillRef>
-          <a:effectRef idx="0">
-            <a:schemeClr val="accent1"/>
-          </a:effectRef>
-          <a:fontRef idx="minor">
-            <a:schemeClr val="lt1"/>
-          </a:fontRef>
-        </p:style>
-        <p:txBody>
-          <a:bodyPr rtlCol="0" anchor="ctr"/>
-          <a:lstStyle/>
-          <a:p>
-            <a:pPr algn="ctr"/>
-            <a:r>
-              <a:rPr lang="en-CH" dirty="0">
-                <a:latin typeface="Sora" pitchFamily="2" charset="0"/>
-                <a:cs typeface="Sora" pitchFamily="2" charset="0"/>
-              </a:rPr>
-              <a:t>Deterministic</a:t>
-            </a:r>
-          </a:p>
-        </p:txBody>
-      </p:sp>
-      <p:sp>
-        <p:nvSpPr>
-          <p:cNvPr id="5" name="Rectangle 4">
-            <a:extLst>
-              <a:ext uri="{FF2B5EF4-FFF2-40B4-BE49-F238E27FC236}">
-                <a16:creationId xmlns:a16="http://schemas.microsoft.com/office/drawing/2014/main" id="{FCD42EBA-3A36-C077-A178-30ECC2553D5E}"/>
-              </a:ext>
-            </a:extLst>
-          </p:cNvPr>
-          <p:cNvSpPr/>
-          <p:nvPr/>
-        </p:nvSpPr>
-        <p:spPr>
-          <a:xfrm rot="180000">
-            <a:off x="3260000" y="1750000"/>
-            <a:ext cx="2050000" cy="1650000"/>
-          </a:xfrm>
-          <a:prstGeom prst="rect">
-            <a:avLst/>
-          </a:prstGeom>
-          <a:solidFill>
-            <a:schemeClr val="tx2"/>
-          </a:solidFill>
-          <a:ln w="50800">
-            <a:solidFill>
-              <a:schemeClr val="accent1"/>
-            </a:solidFill>
-          </a:ln>
-        </p:spPr>
-        <p:style>
-          <a:lnRef idx="2">
-            <a:schemeClr val="accent1">
-              <a:shade val="15000"/>
-            </a:schemeClr>
-          </a:lnRef>
-          <a:fillRef idx="1">
-            <a:schemeClr val="accent1"/>
-          </a:fillRef>
-          <a:effectRef idx="0">
-            <a:schemeClr val="accent1"/>
-          </a:effectRef>
-          <a:fontRef idx="minor">
-            <a:schemeClr val="lt1"/>
-          </a:fontRef>
-        </p:style>
-        <p:txBody>
-          <a:bodyPr rtlCol="0" anchor="ctr"/>
-          <a:lstStyle/>
-          <a:p>
-            <a:pPr algn="ctr"/>
-            <a:r>
-              <a:rPr lang="en-CH" dirty="0">
-                <a:latin typeface="Sora" pitchFamily="2" charset="0"/>
-                <a:cs typeface="Sora" pitchFamily="2" charset="0"/>
-              </a:rPr>
-              <a:t>GenAI</a:t>
-            </a:r>
-          </a:p>
-        </p:txBody>
-      </p:sp>
-      <p:sp>
-        <p:nvSpPr>
           <p:cNvPr id="28" name="ML"/>
           <p:cNvSpPr/>
           <p:nvPr/>
@@ -6165,49 +6208,6 @@
           </a:p>
         </p:txBody>
       </p:sp>
-      <p:cxnSp>
-        <p:nvCxnSpPr>
-          <p:cNvPr id="9" name="Straight Connector 8">
-            <a:extLst>
-              <a:ext uri="{FF2B5EF4-FFF2-40B4-BE49-F238E27FC236}">
-                <a16:creationId xmlns:a16="http://schemas.microsoft.com/office/drawing/2014/main" id="{5CC1ABF8-3F65-093E-B197-103EDF570F7F}"/>
-              </a:ext>
-            </a:extLst>
-          </p:cNvPr>
-          <p:cNvCxnSpPr>
-            <a:cxnSpLocks/>
-          </p:cNvCxnSpPr>
-          <p:nvPr/>
-        </p:nvCxnSpPr>
-        <p:spPr>
-          <a:xfrm>
-            <a:off x="8419652" y="1245196"/>
-            <a:ext cx="0" cy="4682268"/>
-          </a:xfrm>
-          <a:prstGeom prst="line">
-            <a:avLst/>
-          </a:prstGeom>
-          <a:ln w="254000">
-            <a:solidFill>
-              <a:schemeClr val="tx2"/>
-            </a:solidFill>
-          </a:ln>
-        </p:spPr>
-        <p:style>
-          <a:lnRef idx="1">
-            <a:schemeClr val="accent1"/>
-          </a:lnRef>
-          <a:fillRef idx="0">
-            <a:schemeClr val="accent1"/>
-          </a:fillRef>
-          <a:effectRef idx="0">
-            <a:schemeClr val="accent1"/>
-          </a:effectRef>
-          <a:fontRef idx="minor">
-            <a:schemeClr val="tx1"/>
-          </a:fontRef>
-        </p:style>
-      </p:cxnSp>
       <p:sp>
         <p:nvSpPr>
           <p:cNvPr id="10" name="TextBox 9">

--- a/nordic-apis-2026/img/solution-composability.pptx
+++ b/nordic-apis-2026/img/solution-composability.pptx
@@ -269,7 +269,7 @@
           <a:p>
             <a:fld id="{37A2730A-859E-B540-ADF3-E97069AD1FDB}" type="datetimeFigureOut">
               <a:rPr lang="en-US" smtClean="0"/>
-              <a:t>10/11/26</a:t>
+              <a:t>10/13/26</a:t>
             </a:fld>
             <a:endParaRPr lang="en-US"/>
           </a:p>
@@ -467,7 +467,7 @@
           <a:p>
             <a:fld id="{37A2730A-859E-B540-ADF3-E97069AD1FDB}" type="datetimeFigureOut">
               <a:rPr lang="en-US" smtClean="0"/>
-              <a:t>10/11/26</a:t>
+              <a:t>10/13/26</a:t>
             </a:fld>
             <a:endParaRPr lang="en-US"/>
           </a:p>
@@ -675,7 +675,7 @@
           <a:p>
             <a:fld id="{37A2730A-859E-B540-ADF3-E97069AD1FDB}" type="datetimeFigureOut">
               <a:rPr lang="en-US" smtClean="0"/>
-              <a:t>10/11/26</a:t>
+              <a:t>10/13/26</a:t>
             </a:fld>
             <a:endParaRPr lang="en-US"/>
           </a:p>
@@ -873,7 +873,7 @@
           <a:p>
             <a:fld id="{37A2730A-859E-B540-ADF3-E97069AD1FDB}" type="datetimeFigureOut">
               <a:rPr lang="en-US" smtClean="0"/>
-              <a:t>10/11/26</a:t>
+              <a:t>10/13/26</a:t>
             </a:fld>
             <a:endParaRPr lang="en-US"/>
           </a:p>
@@ -1148,7 +1148,7 @@
           <a:p>
             <a:fld id="{37A2730A-859E-B540-ADF3-E97069AD1FDB}" type="datetimeFigureOut">
               <a:rPr lang="en-US" smtClean="0"/>
-              <a:t>10/11/26</a:t>
+              <a:t>10/13/26</a:t>
             </a:fld>
             <a:endParaRPr lang="en-US"/>
           </a:p>
@@ -1413,7 +1413,7 @@
           <a:p>
             <a:fld id="{37A2730A-859E-B540-ADF3-E97069AD1FDB}" type="datetimeFigureOut">
               <a:rPr lang="en-US" smtClean="0"/>
-              <a:t>10/11/26</a:t>
+              <a:t>10/13/26</a:t>
             </a:fld>
             <a:endParaRPr lang="en-US"/>
           </a:p>
@@ -1825,7 +1825,7 @@
           <a:p>
             <a:fld id="{37A2730A-859E-B540-ADF3-E97069AD1FDB}" type="datetimeFigureOut">
               <a:rPr lang="en-US" smtClean="0"/>
-              <a:t>10/11/26</a:t>
+              <a:t>10/13/26</a:t>
             </a:fld>
             <a:endParaRPr lang="en-US"/>
           </a:p>
@@ -1966,7 +1966,7 @@
           <a:p>
             <a:fld id="{37A2730A-859E-B540-ADF3-E97069AD1FDB}" type="datetimeFigureOut">
               <a:rPr lang="en-US" smtClean="0"/>
-              <a:t>10/11/26</a:t>
+              <a:t>10/13/26</a:t>
             </a:fld>
             <a:endParaRPr lang="en-US"/>
           </a:p>
@@ -2079,7 +2079,7 @@
           <a:p>
             <a:fld id="{37A2730A-859E-B540-ADF3-E97069AD1FDB}" type="datetimeFigureOut">
               <a:rPr lang="en-US" smtClean="0"/>
-              <a:t>10/11/26</a:t>
+              <a:t>10/13/26</a:t>
             </a:fld>
             <a:endParaRPr lang="en-US"/>
           </a:p>
@@ -2390,7 +2390,7 @@
           <a:p>
             <a:fld id="{37A2730A-859E-B540-ADF3-E97069AD1FDB}" type="datetimeFigureOut">
               <a:rPr lang="en-US" smtClean="0"/>
-              <a:t>10/11/26</a:t>
+              <a:t>10/13/26</a:t>
             </a:fld>
             <a:endParaRPr lang="en-US"/>
           </a:p>
@@ -2678,7 +2678,7 @@
           <a:p>
             <a:fld id="{37A2730A-859E-B540-ADF3-E97069AD1FDB}" type="datetimeFigureOut">
               <a:rPr lang="en-US" smtClean="0"/>
-              <a:t>10/11/26</a:t>
+              <a:t>10/13/26</a:t>
             </a:fld>
             <a:endParaRPr lang="en-US"/>
           </a:p>
@@ -2919,7 +2919,7 @@
           <a:p>
             <a:fld id="{37A2730A-859E-B540-ADF3-E97069AD1FDB}" type="datetimeFigureOut">
               <a:rPr lang="en-US" smtClean="0"/>
-              <a:t>10/11/26</a:t>
+              <a:t>10/13/26</a:t>
             </a:fld>
             <a:endParaRPr lang="en-US"/>
           </a:p>
@@ -15826,15 +15826,6 @@
 </file>
 
 <file path=customXml/item1.xml><?xml version="1.0" encoding="utf-8"?>
-<?mso-contentType ?>
-<FormTemplates xmlns="http://schemas.microsoft.com/sharepoint/v3/contenttype/forms">
-  <Display>DocumentLibraryForm</Display>
-  <Edit>DocumentLibraryForm</Edit>
-  <New>DocumentLibraryForm</New>
-</FormTemplates>
-</file>
-
-<file path=customXml/item2.xml><?xml version="1.0" encoding="utf-8"?>
 <ct:contentTypeSchema xmlns:ct="http://schemas.microsoft.com/office/2006/metadata/contentType" xmlns:ma="http://schemas.microsoft.com/office/2006/metadata/properties/metaAttributes" ct:_="" ma:_="" ma:contentTypeName="Document" ma:contentTypeID="0x010100CD401524DC532D42A0E0ED886331A72B" ma:contentTypeVersion="13" ma:contentTypeDescription="Create a new document." ma:contentTypeScope="" ma:versionID="d936d863d335d354da51eb78ca1ae338">
   <xsd:schema xmlns:xsd="http://www.w3.org/2001/XMLSchema" xmlns:xs="http://www.w3.org/2001/XMLSchema" xmlns:p="http://schemas.microsoft.com/office/2006/metadata/properties" xmlns:ns2="f577acbf-5b0b-4b4f-9948-268e97f8d3a4" xmlns:ns3="b1e4d6ee-9f6f-43f8-a618-24f3d84da28f" targetNamespace="http://schemas.microsoft.com/office/2006/metadata/properties" ma:root="true" ma:fieldsID="5fbac08d56b1b04aa33acbc31e882ce9" ns2:_="" ns3:_="">
     <xsd:import namespace="f577acbf-5b0b-4b4f-9948-268e97f8d3a4"/>
@@ -16078,6 +16069,15 @@
 </ct:contentTypeSchema>
 </file>
 
+<file path=customXml/item2.xml><?xml version="1.0" encoding="utf-8"?>
+<?mso-contentType ?>
+<FormTemplates xmlns="http://schemas.microsoft.com/sharepoint/v3/contenttype/forms">
+  <Display>DocumentLibraryForm</Display>
+  <Edit>DocumentLibraryForm</Edit>
+  <New>DocumentLibraryForm</New>
+</FormTemplates>
+</file>
+
 <file path=customXml/item3.xml><?xml version="1.0" encoding="utf-8"?>
 <p:properties xmlns:p="http://schemas.microsoft.com/office/2006/metadata/properties" xmlns:xsi="http://www.w3.org/2001/XMLSchema-instance" xmlns:pc="http://schemas.microsoft.com/office/infopath/2007/PartnerControls">
   <documentManagement>
@@ -16088,14 +16088,6 @@
 </file>
 
 <file path=customXml/itemProps1.xml><?xml version="1.0" encoding="utf-8"?>
-<ds:datastoreItem xmlns:ds="http://schemas.openxmlformats.org/officeDocument/2006/customXml" ds:itemID="{E21AFCC0-734A-4A90-A597-A1CB34860DCD}">
-  <ds:schemaRefs>
-    <ds:schemaRef ds:uri="http://schemas.microsoft.com/sharepoint/v3/contenttype/forms"/>
-  </ds:schemaRefs>
-</ds:datastoreItem>
-</file>
-
-<file path=customXml/itemProps2.xml><?xml version="1.0" encoding="utf-8"?>
 <ds:datastoreItem xmlns:ds="http://schemas.openxmlformats.org/officeDocument/2006/customXml" ds:itemID="{A79EAE08-AAD0-49B9-BF66-164C225CC523}">
   <ds:schemaRefs>
     <ds:schemaRef ds:uri="http://schemas.microsoft.com/office/2006/metadata/contentType"/>
@@ -16110,6 +16102,14 @@
     <ds:schemaRef ds:uri="http://purl.org/dc/elements/1.1/"/>
     <ds:schemaRef ds:uri="http://purl.org/dc/terms/"/>
     <ds:schemaRef ds:uri="http://schemas.microsoft.com/internal/obd"/>
+  </ds:schemaRefs>
+</ds:datastoreItem>
+</file>
+
+<file path=customXml/itemProps2.xml><?xml version="1.0" encoding="utf-8"?>
+<ds:datastoreItem xmlns:ds="http://schemas.openxmlformats.org/officeDocument/2006/customXml" ds:itemID="{E21AFCC0-734A-4A90-A597-A1CB34860DCD}">
+  <ds:schemaRefs>
+    <ds:schemaRef ds:uri="http://schemas.microsoft.com/sharepoint/v3/contenttype/forms"/>
   </ds:schemaRefs>
 </ds:datastoreItem>
 </file>
